--- a/docs/plots/carbo/jx_carbo_linsubhr_dosedisc_grade3.pptx
+++ b/docs/plots/carbo/jx_carbo_linsubhr_dosedisc_grade3.pptx
@@ -3132,518 +3132,524 @@
           <p:spPr>
             <a:xfrm>
               <a:off x="1172049" y="1896563"/>
-              <a:ext cx="7090630" cy="3586148"/>
+              <a:ext cx="7090630" cy="3568900"/>
             </a:xfrm>
             <a:custGeom>
               <a:avLst/>
               <a:pathLst>
-                <a:path w="7090630" h="3586148">
+                <a:path w="7090630" h="3568900">
                   <a:moveTo>
-                    <a:pt x="0" y="3018779"/>
+                    <a:pt x="0" y="2883163"/>
                   </a:moveTo>
                   <a:lnTo>
-                    <a:pt x="71622" y="3014054"/>
-                  </a:lnTo>
-                  <a:lnTo>
-                    <a:pt x="143245" y="3009294"/>
-                  </a:lnTo>
-                  <a:lnTo>
-                    <a:pt x="214867" y="3004498"/>
-                  </a:lnTo>
-                  <a:lnTo>
-                    <a:pt x="286490" y="2999666"/>
-                  </a:lnTo>
-                  <a:lnTo>
-                    <a:pt x="358112" y="2994798"/>
-                  </a:lnTo>
-                  <a:lnTo>
-                    <a:pt x="429735" y="2989894"/>
-                  </a:lnTo>
-                  <a:lnTo>
-                    <a:pt x="501357" y="2984954"/>
-                  </a:lnTo>
-                  <a:lnTo>
-                    <a:pt x="572980" y="2979976"/>
-                  </a:lnTo>
-                  <a:lnTo>
-                    <a:pt x="644602" y="2974962"/>
-                  </a:lnTo>
-                  <a:lnTo>
-                    <a:pt x="716225" y="2969910"/>
-                  </a:lnTo>
-                  <a:lnTo>
-                    <a:pt x="787847" y="2964820"/>
-                  </a:lnTo>
-                  <a:lnTo>
-                    <a:pt x="859470" y="2959693"/>
-                  </a:lnTo>
-                  <a:lnTo>
-                    <a:pt x="931092" y="2954527"/>
-                  </a:lnTo>
-                  <a:lnTo>
-                    <a:pt x="1002715" y="2949323"/>
-                  </a:lnTo>
-                  <a:lnTo>
-                    <a:pt x="1074337" y="2944080"/>
-                  </a:lnTo>
-                  <a:lnTo>
-                    <a:pt x="1145960" y="2938797"/>
-                  </a:lnTo>
-                  <a:lnTo>
-                    <a:pt x="1217582" y="2933476"/>
-                  </a:lnTo>
-                  <a:lnTo>
-                    <a:pt x="1289205" y="2928115"/>
-                  </a:lnTo>
-                  <a:lnTo>
-                    <a:pt x="1360827" y="2922714"/>
-                  </a:lnTo>
-                  <a:lnTo>
-                    <a:pt x="1432450" y="2917272"/>
-                  </a:lnTo>
-                  <a:lnTo>
-                    <a:pt x="1504073" y="2911790"/>
-                  </a:lnTo>
-                  <a:lnTo>
-                    <a:pt x="1575695" y="2906268"/>
-                  </a:lnTo>
-                  <a:lnTo>
-                    <a:pt x="1647318" y="2900704"/>
-                  </a:lnTo>
-                  <a:lnTo>
-                    <a:pt x="1718940" y="2895098"/>
-                  </a:lnTo>
-                  <a:lnTo>
-                    <a:pt x="1790563" y="2889451"/>
-                  </a:lnTo>
-                  <a:lnTo>
-                    <a:pt x="1862185" y="2883761"/>
-                  </a:lnTo>
-                  <a:lnTo>
-                    <a:pt x="1933808" y="2878030"/>
-                  </a:lnTo>
-                  <a:lnTo>
-                    <a:pt x="2005430" y="2872255"/>
-                  </a:lnTo>
-                  <a:lnTo>
-                    <a:pt x="2077053" y="2866438"/>
-                  </a:lnTo>
-                  <a:lnTo>
-                    <a:pt x="2148675" y="2860577"/>
-                  </a:lnTo>
-                  <a:lnTo>
-                    <a:pt x="2220298" y="2854672"/>
-                  </a:lnTo>
-                  <a:lnTo>
-                    <a:pt x="2291920" y="2848723"/>
-                  </a:lnTo>
-                  <a:lnTo>
-                    <a:pt x="2363543" y="2842730"/>
-                  </a:lnTo>
-                  <a:lnTo>
-                    <a:pt x="2435165" y="2836693"/>
-                  </a:lnTo>
-                  <a:lnTo>
-                    <a:pt x="2506788" y="2830610"/>
-                  </a:lnTo>
-                  <a:lnTo>
-                    <a:pt x="2578410" y="2824482"/>
-                  </a:lnTo>
-                  <a:lnTo>
-                    <a:pt x="2650033" y="2818308"/>
-                  </a:lnTo>
-                  <a:lnTo>
-                    <a:pt x="2721655" y="2812089"/>
-                  </a:lnTo>
-                  <a:lnTo>
-                    <a:pt x="2793278" y="2805823"/>
-                  </a:lnTo>
-                  <a:lnTo>
-                    <a:pt x="2864901" y="2799510"/>
-                  </a:lnTo>
-                  <a:lnTo>
-                    <a:pt x="2936523" y="2793150"/>
-                  </a:lnTo>
-                  <a:lnTo>
-                    <a:pt x="3008146" y="2786743"/>
-                  </a:lnTo>
-                  <a:lnTo>
-                    <a:pt x="3079768" y="2760954"/>
-                  </a:lnTo>
-                  <a:lnTo>
-                    <a:pt x="3151391" y="2705463"/>
-                  </a:lnTo>
-                  <a:lnTo>
-                    <a:pt x="3223013" y="2646518"/>
-                  </a:lnTo>
-                  <a:lnTo>
-                    <a:pt x="3294636" y="2583905"/>
-                  </a:lnTo>
-                  <a:lnTo>
-                    <a:pt x="3366258" y="2517396"/>
-                  </a:lnTo>
-                  <a:lnTo>
-                    <a:pt x="3437881" y="2446748"/>
-                  </a:lnTo>
-                  <a:lnTo>
-                    <a:pt x="3509503" y="2371703"/>
-                  </a:lnTo>
-                  <a:lnTo>
-                    <a:pt x="3581126" y="2291989"/>
-                  </a:lnTo>
-                  <a:lnTo>
-                    <a:pt x="3652748" y="2207313"/>
-                  </a:lnTo>
-                  <a:lnTo>
-                    <a:pt x="3724371" y="2117368"/>
-                  </a:lnTo>
-                  <a:lnTo>
-                    <a:pt x="3795993" y="2021825"/>
-                  </a:lnTo>
-                  <a:lnTo>
-                    <a:pt x="3867616" y="1920337"/>
-                  </a:lnTo>
-                  <a:lnTo>
-                    <a:pt x="3939238" y="1812533"/>
-                  </a:lnTo>
-                  <a:lnTo>
-                    <a:pt x="4010861" y="1698020"/>
-                  </a:lnTo>
-                  <a:lnTo>
-                    <a:pt x="4082483" y="1576381"/>
-                  </a:lnTo>
-                  <a:lnTo>
-                    <a:pt x="4154106" y="1447172"/>
-                  </a:lnTo>
-                  <a:lnTo>
-                    <a:pt x="4225729" y="1309923"/>
-                  </a:lnTo>
-                  <a:lnTo>
-                    <a:pt x="4297351" y="1164132"/>
-                  </a:lnTo>
-                  <a:lnTo>
-                    <a:pt x="4368974" y="1009268"/>
-                  </a:lnTo>
-                  <a:lnTo>
-                    <a:pt x="4440596" y="844767"/>
-                  </a:lnTo>
-                  <a:lnTo>
-                    <a:pt x="4512219" y="670028"/>
-                  </a:lnTo>
-                  <a:lnTo>
-                    <a:pt x="4583841" y="484416"/>
-                  </a:lnTo>
-                  <a:lnTo>
-                    <a:pt x="4655464" y="287252"/>
-                  </a:lnTo>
-                  <a:lnTo>
-                    <a:pt x="4727086" y="77819"/>
-                  </a:lnTo>
-                  <a:lnTo>
-                    <a:pt x="4752140" y="0"/>
+                    <a:pt x="71622" y="2880948"/>
+                  </a:lnTo>
+                  <a:lnTo>
+                    <a:pt x="143245" y="2878727"/>
+                  </a:lnTo>
+                  <a:lnTo>
+                    <a:pt x="214867" y="2876499"/>
+                  </a:lnTo>
+                  <a:lnTo>
+                    <a:pt x="286490" y="2874265"/>
+                  </a:lnTo>
+                  <a:lnTo>
+                    <a:pt x="358112" y="2872025"/>
+                  </a:lnTo>
+                  <a:lnTo>
+                    <a:pt x="429735" y="2869778"/>
+                  </a:lnTo>
+                  <a:lnTo>
+                    <a:pt x="501357" y="2867524"/>
+                  </a:lnTo>
+                  <a:lnTo>
+                    <a:pt x="572980" y="2865264"/>
+                  </a:lnTo>
+                  <a:lnTo>
+                    <a:pt x="644602" y="2862998"/>
+                  </a:lnTo>
+                  <a:lnTo>
+                    <a:pt x="716225" y="2860725"/>
+                  </a:lnTo>
+                  <a:lnTo>
+                    <a:pt x="787847" y="2858445"/>
+                  </a:lnTo>
+                  <a:lnTo>
+                    <a:pt x="859470" y="2856159"/>
+                  </a:lnTo>
+                  <a:lnTo>
+                    <a:pt x="931092" y="2853867"/>
+                  </a:lnTo>
+                  <a:lnTo>
+                    <a:pt x="1002715" y="2851567"/>
+                  </a:lnTo>
+                  <a:lnTo>
+                    <a:pt x="1074337" y="2849261"/>
+                  </a:lnTo>
+                  <a:lnTo>
+                    <a:pt x="1145960" y="2846949"/>
+                  </a:lnTo>
+                  <a:lnTo>
+                    <a:pt x="1217582" y="2844630"/>
+                  </a:lnTo>
+                  <a:lnTo>
+                    <a:pt x="1289205" y="2842304"/>
+                  </a:lnTo>
+                  <a:lnTo>
+                    <a:pt x="1360827" y="2839971"/>
+                  </a:lnTo>
+                  <a:lnTo>
+                    <a:pt x="1432450" y="2837632"/>
+                  </a:lnTo>
+                  <a:lnTo>
+                    <a:pt x="1504073" y="2835286"/>
+                  </a:lnTo>
+                  <a:lnTo>
+                    <a:pt x="1575695" y="2832933"/>
+                  </a:lnTo>
+                  <a:lnTo>
+                    <a:pt x="1647318" y="2830574"/>
+                  </a:lnTo>
+                  <a:lnTo>
+                    <a:pt x="1718940" y="2828207"/>
+                  </a:lnTo>
+                  <a:lnTo>
+                    <a:pt x="1790563" y="2825834"/>
+                  </a:lnTo>
+                  <a:lnTo>
+                    <a:pt x="1862185" y="2823454"/>
+                  </a:lnTo>
+                  <a:lnTo>
+                    <a:pt x="1933808" y="2821068"/>
+                  </a:lnTo>
+                  <a:lnTo>
+                    <a:pt x="2005430" y="2818674"/>
+                  </a:lnTo>
+                  <a:lnTo>
+                    <a:pt x="2077053" y="2816273"/>
+                  </a:lnTo>
+                  <a:lnTo>
+                    <a:pt x="2148675" y="2813866"/>
+                  </a:lnTo>
+                  <a:lnTo>
+                    <a:pt x="2220298" y="2811451"/>
+                  </a:lnTo>
+                  <a:lnTo>
+                    <a:pt x="2291920" y="2809030"/>
+                  </a:lnTo>
+                  <a:lnTo>
+                    <a:pt x="2363543" y="2806602"/>
+                  </a:lnTo>
+                  <a:lnTo>
+                    <a:pt x="2435165" y="2804166"/>
+                  </a:lnTo>
+                  <a:lnTo>
+                    <a:pt x="2506788" y="2801724"/>
+                  </a:lnTo>
+                  <a:lnTo>
+                    <a:pt x="2578410" y="2799275"/>
+                  </a:lnTo>
+                  <a:lnTo>
+                    <a:pt x="2650033" y="2796818"/>
+                  </a:lnTo>
+                  <a:lnTo>
+                    <a:pt x="2721655" y="2794355"/>
+                  </a:lnTo>
+                  <a:lnTo>
+                    <a:pt x="2793278" y="2791884"/>
+                  </a:lnTo>
+                  <a:lnTo>
+                    <a:pt x="2864901" y="2789407"/>
+                  </a:lnTo>
+                  <a:lnTo>
+                    <a:pt x="2936523" y="2786922"/>
+                  </a:lnTo>
+                  <a:lnTo>
+                    <a:pt x="3008146" y="2784430"/>
+                  </a:lnTo>
+                  <a:lnTo>
+                    <a:pt x="3079768" y="2762951"/>
+                  </a:lnTo>
+                  <a:lnTo>
+                    <a:pt x="3151391" y="2712688"/>
+                  </a:lnTo>
+                  <a:lnTo>
+                    <a:pt x="3223013" y="2659586"/>
+                  </a:lnTo>
+                  <a:lnTo>
+                    <a:pt x="3294636" y="2603484"/>
+                  </a:lnTo>
+                  <a:lnTo>
+                    <a:pt x="3366258" y="2544212"/>
+                  </a:lnTo>
+                  <a:lnTo>
+                    <a:pt x="3437881" y="2481592"/>
+                  </a:lnTo>
+                  <a:lnTo>
+                    <a:pt x="3509503" y="2415434"/>
+                  </a:lnTo>
+                  <a:lnTo>
+                    <a:pt x="3581126" y="2345538"/>
+                  </a:lnTo>
+                  <a:lnTo>
+                    <a:pt x="3652748" y="2271694"/>
+                  </a:lnTo>
+                  <a:lnTo>
+                    <a:pt x="3724371" y="2193678"/>
+                  </a:lnTo>
+                  <a:lnTo>
+                    <a:pt x="3795993" y="2111254"/>
+                  </a:lnTo>
+                  <a:lnTo>
+                    <a:pt x="3867616" y="2024174"/>
+                  </a:lnTo>
+                  <a:lnTo>
+                    <a:pt x="3939238" y="1932175"/>
+                  </a:lnTo>
+                  <a:lnTo>
+                    <a:pt x="4010861" y="1834978"/>
+                  </a:lnTo>
+                  <a:lnTo>
+                    <a:pt x="4082483" y="1732290"/>
+                  </a:lnTo>
+                  <a:lnTo>
+                    <a:pt x="4154106" y="1623800"/>
+                  </a:lnTo>
+                  <a:lnTo>
+                    <a:pt x="4225729" y="1509182"/>
+                  </a:lnTo>
+                  <a:lnTo>
+                    <a:pt x="4297351" y="1388088"/>
+                  </a:lnTo>
+                  <a:lnTo>
+                    <a:pt x="4368974" y="1260153"/>
+                  </a:lnTo>
+                  <a:lnTo>
+                    <a:pt x="4440596" y="1124990"/>
+                  </a:lnTo>
+                  <a:lnTo>
+                    <a:pt x="4512219" y="982192"/>
+                  </a:lnTo>
+                  <a:lnTo>
+                    <a:pt x="4583841" y="831326"/>
+                  </a:lnTo>
+                  <a:lnTo>
+                    <a:pt x="4655464" y="671937"/>
+                  </a:lnTo>
+                  <a:lnTo>
+                    <a:pt x="4727086" y="503544"/>
+                  </a:lnTo>
+                  <a:lnTo>
+                    <a:pt x="4798709" y="325637"/>
+                  </a:lnTo>
+                  <a:lnTo>
+                    <a:pt x="4870331" y="137680"/>
+                  </a:lnTo>
+                  <a:lnTo>
+                    <a:pt x="4919990" y="0"/>
                   </a:lnTo>
                   <a:lnTo>
                     <a:pt x="7090630" y="0"/>
                   </a:lnTo>
                   <a:lnTo>
-                    <a:pt x="7090630" y="2330365"/>
-                  </a:lnTo>
-                  <a:lnTo>
-                    <a:pt x="7019007" y="2340150"/>
-                  </a:lnTo>
-                  <a:lnTo>
-                    <a:pt x="6947385" y="2349861"/>
-                  </a:lnTo>
-                  <a:lnTo>
-                    <a:pt x="6875762" y="2359501"/>
-                  </a:lnTo>
-                  <a:lnTo>
-                    <a:pt x="6804139" y="2369070"/>
-                  </a:lnTo>
-                  <a:lnTo>
-                    <a:pt x="6732517" y="2378568"/>
-                  </a:lnTo>
-                  <a:lnTo>
-                    <a:pt x="6660894" y="2387995"/>
-                  </a:lnTo>
-                  <a:lnTo>
-                    <a:pt x="6589272" y="2397353"/>
-                  </a:lnTo>
-                  <a:lnTo>
-                    <a:pt x="6517649" y="2406642"/>
-                  </a:lnTo>
-                  <a:lnTo>
-                    <a:pt x="6446027" y="2415862"/>
-                  </a:lnTo>
-                  <a:lnTo>
-                    <a:pt x="6374404" y="2425013"/>
-                  </a:lnTo>
-                  <a:lnTo>
-                    <a:pt x="6302782" y="2434097"/>
-                  </a:lnTo>
-                  <a:lnTo>
-                    <a:pt x="6231159" y="2443114"/>
-                  </a:lnTo>
-                  <a:lnTo>
-                    <a:pt x="6159537" y="2452064"/>
-                  </a:lnTo>
-                  <a:lnTo>
-                    <a:pt x="6087914" y="2460947"/>
-                  </a:lnTo>
-                  <a:lnTo>
-                    <a:pt x="6016292" y="2469765"/>
-                  </a:lnTo>
-                  <a:lnTo>
-                    <a:pt x="5944669" y="2478518"/>
-                  </a:lnTo>
-                  <a:lnTo>
-                    <a:pt x="5873047" y="2487206"/>
-                  </a:lnTo>
-                  <a:lnTo>
-                    <a:pt x="5801424" y="2495830"/>
-                  </a:lnTo>
-                  <a:lnTo>
-                    <a:pt x="5729802" y="2504390"/>
-                  </a:lnTo>
-                  <a:lnTo>
-                    <a:pt x="5658179" y="2512886"/>
-                  </a:lnTo>
-                  <a:lnTo>
-                    <a:pt x="5586557" y="2521320"/>
-                  </a:lnTo>
-                  <a:lnTo>
-                    <a:pt x="5514934" y="2529691"/>
-                  </a:lnTo>
-                  <a:lnTo>
-                    <a:pt x="5443311" y="2538000"/>
-                  </a:lnTo>
-                  <a:lnTo>
-                    <a:pt x="5371689" y="2546248"/>
-                  </a:lnTo>
-                  <a:lnTo>
-                    <a:pt x="5300066" y="2554435"/>
-                  </a:lnTo>
-                  <a:lnTo>
-                    <a:pt x="5228444" y="2562561"/>
-                  </a:lnTo>
-                  <a:lnTo>
-                    <a:pt x="5156821" y="2570627"/>
-                  </a:lnTo>
-                  <a:lnTo>
-                    <a:pt x="5085199" y="2578634"/>
-                  </a:lnTo>
-                  <a:lnTo>
-                    <a:pt x="5013576" y="2586581"/>
-                  </a:lnTo>
-                  <a:lnTo>
-                    <a:pt x="4941954" y="2594469"/>
-                  </a:lnTo>
-                  <a:lnTo>
-                    <a:pt x="4870331" y="2602299"/>
-                  </a:lnTo>
-                  <a:lnTo>
-                    <a:pt x="4798709" y="2610071"/>
-                  </a:lnTo>
-                  <a:lnTo>
-                    <a:pt x="4727086" y="2617786"/>
-                  </a:lnTo>
-                  <a:lnTo>
-                    <a:pt x="4655464" y="2625443"/>
-                  </a:lnTo>
-                  <a:lnTo>
-                    <a:pt x="4583841" y="2633044"/>
-                  </a:lnTo>
-                  <a:lnTo>
-                    <a:pt x="4512219" y="2640589"/>
-                  </a:lnTo>
-                  <a:lnTo>
-                    <a:pt x="4440596" y="2648077"/>
-                  </a:lnTo>
-                  <a:lnTo>
-                    <a:pt x="4368974" y="2655511"/>
-                  </a:lnTo>
-                  <a:lnTo>
-                    <a:pt x="4297351" y="2662889"/>
-                  </a:lnTo>
-                  <a:lnTo>
-                    <a:pt x="4225729" y="2670213"/>
-                  </a:lnTo>
-                  <a:lnTo>
-                    <a:pt x="4154106" y="2677482"/>
-                  </a:lnTo>
-                  <a:lnTo>
-                    <a:pt x="4082483" y="2684698"/>
-                  </a:lnTo>
-                  <a:lnTo>
-                    <a:pt x="4010861" y="2691860"/>
-                  </a:lnTo>
-                  <a:lnTo>
-                    <a:pt x="3939238" y="2698970"/>
-                  </a:lnTo>
-                  <a:lnTo>
-                    <a:pt x="3867616" y="2706026"/>
-                  </a:lnTo>
-                  <a:lnTo>
-                    <a:pt x="3795993" y="2713031"/>
-                  </a:lnTo>
-                  <a:lnTo>
-                    <a:pt x="3724371" y="2719984"/>
-                  </a:lnTo>
-                  <a:lnTo>
-                    <a:pt x="3652748" y="2726885"/>
-                  </a:lnTo>
-                  <a:lnTo>
-                    <a:pt x="3581126" y="2733735"/>
-                  </a:lnTo>
-                  <a:lnTo>
-                    <a:pt x="3509503" y="2740535"/>
-                  </a:lnTo>
-                  <a:lnTo>
-                    <a:pt x="3437881" y="2747284"/>
-                  </a:lnTo>
-                  <a:lnTo>
-                    <a:pt x="3366258" y="2753983"/>
-                  </a:lnTo>
-                  <a:lnTo>
-                    <a:pt x="3294636" y="2760633"/>
-                  </a:lnTo>
-                  <a:lnTo>
-                    <a:pt x="3223013" y="2767233"/>
-                  </a:lnTo>
-                  <a:lnTo>
-                    <a:pt x="3151391" y="2773785"/>
-                  </a:lnTo>
-                  <a:lnTo>
-                    <a:pt x="3079768" y="2780288"/>
-                  </a:lnTo>
-                  <a:lnTo>
-                    <a:pt x="3008146" y="2813194"/>
-                  </a:lnTo>
-                  <a:lnTo>
-                    <a:pt x="2936523" y="2862374"/>
-                  </a:lnTo>
-                  <a:lnTo>
-                    <a:pt x="2864901" y="2908672"/>
-                  </a:lnTo>
-                  <a:lnTo>
-                    <a:pt x="2793278" y="2952258"/>
-                  </a:lnTo>
-                  <a:lnTo>
-                    <a:pt x="2721655" y="2993291"/>
-                  </a:lnTo>
-                  <a:lnTo>
-                    <a:pt x="2650033" y="3031919"/>
-                  </a:lnTo>
-                  <a:lnTo>
-                    <a:pt x="2578410" y="3068285"/>
-                  </a:lnTo>
-                  <a:lnTo>
-                    <a:pt x="2506788" y="3102520"/>
-                  </a:lnTo>
-                  <a:lnTo>
-                    <a:pt x="2435165" y="3134749"/>
-                  </a:lnTo>
-                  <a:lnTo>
-                    <a:pt x="2363543" y="3165090"/>
-                  </a:lnTo>
-                  <a:lnTo>
-                    <a:pt x="2291920" y="3193654"/>
-                  </a:lnTo>
-                  <a:lnTo>
-                    <a:pt x="2220298" y="3220544"/>
-                  </a:lnTo>
-                  <a:lnTo>
-                    <a:pt x="2148675" y="3245859"/>
-                  </a:lnTo>
-                  <a:lnTo>
-                    <a:pt x="2077053" y="3269691"/>
-                  </a:lnTo>
-                  <a:lnTo>
-                    <a:pt x="2005430" y="3292126"/>
-                  </a:lnTo>
-                  <a:lnTo>
-                    <a:pt x="1933808" y="3313247"/>
-                  </a:lnTo>
-                  <a:lnTo>
-                    <a:pt x="1862185" y="3333131"/>
-                  </a:lnTo>
-                  <a:lnTo>
-                    <a:pt x="1790563" y="3351850"/>
-                  </a:lnTo>
-                  <a:lnTo>
-                    <a:pt x="1718940" y="3369472"/>
-                  </a:lnTo>
-                  <a:lnTo>
-                    <a:pt x="1647318" y="3386062"/>
-                  </a:lnTo>
-                  <a:lnTo>
-                    <a:pt x="1575695" y="3401680"/>
-                  </a:lnTo>
-                  <a:lnTo>
-                    <a:pt x="1504073" y="3416382"/>
-                  </a:lnTo>
-                  <a:lnTo>
-                    <a:pt x="1432450" y="3430224"/>
-                  </a:lnTo>
-                  <a:lnTo>
-                    <a:pt x="1360827" y="3443254"/>
-                  </a:lnTo>
-                  <a:lnTo>
-                    <a:pt x="1289205" y="3455522"/>
-                  </a:lnTo>
-                  <a:lnTo>
-                    <a:pt x="1217582" y="3467070"/>
-                  </a:lnTo>
-                  <a:lnTo>
-                    <a:pt x="1145960" y="3477942"/>
-                  </a:lnTo>
-                  <a:lnTo>
-                    <a:pt x="1074337" y="3488177"/>
-                  </a:lnTo>
-                  <a:lnTo>
-                    <a:pt x="1002715" y="3497812"/>
-                  </a:lnTo>
-                  <a:lnTo>
-                    <a:pt x="931092" y="3506883"/>
-                  </a:lnTo>
-                  <a:lnTo>
-                    <a:pt x="859470" y="3515423"/>
-                  </a:lnTo>
-                  <a:lnTo>
-                    <a:pt x="787847" y="3523462"/>
-                  </a:lnTo>
-                  <a:lnTo>
-                    <a:pt x="716225" y="3531030"/>
-                  </a:lnTo>
-                  <a:lnTo>
-                    <a:pt x="644602" y="3538155"/>
-                  </a:lnTo>
-                  <a:lnTo>
-                    <a:pt x="572980" y="3544862"/>
-                  </a:lnTo>
-                  <a:lnTo>
-                    <a:pt x="501357" y="3551177"/>
-                  </a:lnTo>
-                  <a:lnTo>
-                    <a:pt x="429735" y="3557121"/>
-                  </a:lnTo>
-                  <a:lnTo>
-                    <a:pt x="358112" y="3562717"/>
-                  </a:lnTo>
-                  <a:lnTo>
-                    <a:pt x="286490" y="3567986"/>
-                  </a:lnTo>
-                  <a:lnTo>
-                    <a:pt x="214867" y="3572945"/>
-                  </a:lnTo>
-                  <a:lnTo>
-                    <a:pt x="143245" y="3577615"/>
-                  </a:lnTo>
-                  <a:lnTo>
-                    <a:pt x="71622" y="3582010"/>
-                  </a:lnTo>
-                  <a:lnTo>
-                    <a:pt x="0" y="3586148"/>
+                    <a:pt x="7090630" y="2629867"/>
+                  </a:lnTo>
+                  <a:lnTo>
+                    <a:pt x="7019007" y="2632803"/>
+                  </a:lnTo>
+                  <a:lnTo>
+                    <a:pt x="6947385" y="2635730"/>
+                  </a:lnTo>
+                  <a:lnTo>
+                    <a:pt x="6875762" y="2638649"/>
+                  </a:lnTo>
+                  <a:lnTo>
+                    <a:pt x="6804139" y="2641559"/>
+                  </a:lnTo>
+                  <a:lnTo>
+                    <a:pt x="6732517" y="2644461"/>
+                  </a:lnTo>
+                  <a:lnTo>
+                    <a:pt x="6660894" y="2647355"/>
+                  </a:lnTo>
+                  <a:lnTo>
+                    <a:pt x="6589272" y="2650240"/>
+                  </a:lnTo>
+                  <a:lnTo>
+                    <a:pt x="6517649" y="2653118"/>
+                  </a:lnTo>
+                  <a:lnTo>
+                    <a:pt x="6446027" y="2655986"/>
+                  </a:lnTo>
+                  <a:lnTo>
+                    <a:pt x="6374404" y="2658847"/>
+                  </a:lnTo>
+                  <a:lnTo>
+                    <a:pt x="6302782" y="2661699"/>
+                  </a:lnTo>
+                  <a:lnTo>
+                    <a:pt x="6231159" y="2664544"/>
+                  </a:lnTo>
+                  <a:lnTo>
+                    <a:pt x="6159537" y="2667380"/>
+                  </a:lnTo>
+                  <a:lnTo>
+                    <a:pt x="6087914" y="2670208"/>
+                  </a:lnTo>
+                  <a:lnTo>
+                    <a:pt x="6016292" y="2673027"/>
+                  </a:lnTo>
+                  <a:lnTo>
+                    <a:pt x="5944669" y="2675839"/>
+                  </a:lnTo>
+                  <a:lnTo>
+                    <a:pt x="5873047" y="2678643"/>
+                  </a:lnTo>
+                  <a:lnTo>
+                    <a:pt x="5801424" y="2681438"/>
+                  </a:lnTo>
+                  <a:lnTo>
+                    <a:pt x="5729802" y="2684226"/>
+                  </a:lnTo>
+                  <a:lnTo>
+                    <a:pt x="5658179" y="2687006"/>
+                  </a:lnTo>
+                  <a:lnTo>
+                    <a:pt x="5586557" y="2689777"/>
+                  </a:lnTo>
+                  <a:lnTo>
+                    <a:pt x="5514934" y="2692541"/>
+                  </a:lnTo>
+                  <a:lnTo>
+                    <a:pt x="5443311" y="2695297"/>
+                  </a:lnTo>
+                  <a:lnTo>
+                    <a:pt x="5371689" y="2698044"/>
+                  </a:lnTo>
+                  <a:lnTo>
+                    <a:pt x="5300066" y="2700784"/>
+                  </a:lnTo>
+                  <a:lnTo>
+                    <a:pt x="5228444" y="2703516"/>
+                  </a:lnTo>
+                  <a:lnTo>
+                    <a:pt x="5156821" y="2706240"/>
+                  </a:lnTo>
+                  <a:lnTo>
+                    <a:pt x="5085199" y="2708957"/>
+                  </a:lnTo>
+                  <a:lnTo>
+                    <a:pt x="5013576" y="2711665"/>
+                  </a:lnTo>
+                  <a:lnTo>
+                    <a:pt x="4941954" y="2714366"/>
+                  </a:lnTo>
+                  <a:lnTo>
+                    <a:pt x="4870331" y="2717059"/>
+                  </a:lnTo>
+                  <a:lnTo>
+                    <a:pt x="4798709" y="2719745"/>
+                  </a:lnTo>
+                  <a:lnTo>
+                    <a:pt x="4727086" y="2722422"/>
+                  </a:lnTo>
+                  <a:lnTo>
+                    <a:pt x="4655464" y="2725092"/>
+                  </a:lnTo>
+                  <a:lnTo>
+                    <a:pt x="4583841" y="2727755"/>
+                  </a:lnTo>
+                  <a:lnTo>
+                    <a:pt x="4512219" y="2730409"/>
+                  </a:lnTo>
+                  <a:lnTo>
+                    <a:pt x="4440596" y="2733056"/>
+                  </a:lnTo>
+                  <a:lnTo>
+                    <a:pt x="4368974" y="2735696"/>
+                  </a:lnTo>
+                  <a:lnTo>
+                    <a:pt x="4297351" y="2738327"/>
+                  </a:lnTo>
+                  <a:lnTo>
+                    <a:pt x="4225729" y="2740952"/>
+                  </a:lnTo>
+                  <a:lnTo>
+                    <a:pt x="4154106" y="2743569"/>
+                  </a:lnTo>
+                  <a:lnTo>
+                    <a:pt x="4082483" y="2746178"/>
+                  </a:lnTo>
+                  <a:lnTo>
+                    <a:pt x="4010861" y="2748780"/>
+                  </a:lnTo>
+                  <a:lnTo>
+                    <a:pt x="3939238" y="2751374"/>
+                  </a:lnTo>
+                  <a:lnTo>
+                    <a:pt x="3867616" y="2753961"/>
+                  </a:lnTo>
+                  <a:lnTo>
+                    <a:pt x="3795993" y="2756540"/>
+                  </a:lnTo>
+                  <a:lnTo>
+                    <a:pt x="3724371" y="2759112"/>
+                  </a:lnTo>
+                  <a:lnTo>
+                    <a:pt x="3652748" y="2761677"/>
+                  </a:lnTo>
+                  <a:lnTo>
+                    <a:pt x="3581126" y="2764234"/>
+                  </a:lnTo>
+                  <a:lnTo>
+                    <a:pt x="3509503" y="2766784"/>
+                  </a:lnTo>
+                  <a:lnTo>
+                    <a:pt x="3437881" y="2769327"/>
+                  </a:lnTo>
+                  <a:lnTo>
+                    <a:pt x="3366258" y="2771862"/>
+                  </a:lnTo>
+                  <a:lnTo>
+                    <a:pt x="3294636" y="2774390"/>
+                  </a:lnTo>
+                  <a:lnTo>
+                    <a:pt x="3223013" y="2776911"/>
+                  </a:lnTo>
+                  <a:lnTo>
+                    <a:pt x="3151391" y="2779424"/>
+                  </a:lnTo>
+                  <a:lnTo>
+                    <a:pt x="3079768" y="2781931"/>
+                  </a:lnTo>
+                  <a:lnTo>
+                    <a:pt x="3008146" y="2810526"/>
+                  </a:lnTo>
+                  <a:lnTo>
+                    <a:pt x="2936523" y="2855557"/>
+                  </a:lnTo>
+                  <a:lnTo>
+                    <a:pt x="2864901" y="2898180"/>
+                  </a:lnTo>
+                  <a:lnTo>
+                    <a:pt x="2793278" y="2938524"/>
+                  </a:lnTo>
+                  <a:lnTo>
+                    <a:pt x="2721655" y="2976710"/>
+                  </a:lnTo>
+                  <a:lnTo>
+                    <a:pt x="2650033" y="3012855"/>
+                  </a:lnTo>
+                  <a:lnTo>
+                    <a:pt x="2578410" y="3047066"/>
+                  </a:lnTo>
+                  <a:lnTo>
+                    <a:pt x="2506788" y="3079449"/>
+                  </a:lnTo>
+                  <a:lnTo>
+                    <a:pt x="2435165" y="3110100"/>
+                  </a:lnTo>
+                  <a:lnTo>
+                    <a:pt x="2363543" y="3139111"/>
+                  </a:lnTo>
+                  <a:lnTo>
+                    <a:pt x="2291920" y="3166572"/>
+                  </a:lnTo>
+                  <a:lnTo>
+                    <a:pt x="2220298" y="3192564"/>
+                  </a:lnTo>
+                  <a:lnTo>
+                    <a:pt x="2148675" y="3217166"/>
+                  </a:lnTo>
+                  <a:lnTo>
+                    <a:pt x="2077053" y="3240452"/>
+                  </a:lnTo>
+                  <a:lnTo>
+                    <a:pt x="2005430" y="3262494"/>
+                  </a:lnTo>
+                  <a:lnTo>
+                    <a:pt x="1933808" y="3283356"/>
+                  </a:lnTo>
+                  <a:lnTo>
+                    <a:pt x="1862185" y="3303103"/>
+                  </a:lnTo>
+                  <a:lnTo>
+                    <a:pt x="1790563" y="3321794"/>
+                  </a:lnTo>
+                  <a:lnTo>
+                    <a:pt x="1718940" y="3339486"/>
+                  </a:lnTo>
+                  <a:lnTo>
+                    <a:pt x="1647318" y="3356232"/>
+                  </a:lnTo>
+                  <a:lnTo>
+                    <a:pt x="1575695" y="3372082"/>
+                  </a:lnTo>
+                  <a:lnTo>
+                    <a:pt x="1504073" y="3387085"/>
+                  </a:lnTo>
+                  <a:lnTo>
+                    <a:pt x="1432450" y="3401285"/>
+                  </a:lnTo>
+                  <a:lnTo>
+                    <a:pt x="1360827" y="3414726"/>
+                  </a:lnTo>
+                  <a:lnTo>
+                    <a:pt x="1289205" y="3427448"/>
+                  </a:lnTo>
+                  <a:lnTo>
+                    <a:pt x="1217582" y="3439490"/>
+                  </a:lnTo>
+                  <a:lnTo>
+                    <a:pt x="1145960" y="3450888"/>
+                  </a:lnTo>
+                  <a:lnTo>
+                    <a:pt x="1074337" y="3461677"/>
+                  </a:lnTo>
+                  <a:lnTo>
+                    <a:pt x="1002715" y="3471888"/>
+                  </a:lnTo>
+                  <a:lnTo>
+                    <a:pt x="931092" y="3481554"/>
+                  </a:lnTo>
+                  <a:lnTo>
+                    <a:pt x="859470" y="3490703"/>
+                  </a:lnTo>
+                  <a:lnTo>
+                    <a:pt x="787847" y="3499362"/>
+                  </a:lnTo>
+                  <a:lnTo>
+                    <a:pt x="716225" y="3507559"/>
+                  </a:lnTo>
+                  <a:lnTo>
+                    <a:pt x="644602" y="3515317"/>
+                  </a:lnTo>
+                  <a:lnTo>
+                    <a:pt x="572980" y="3522660"/>
+                  </a:lnTo>
+                  <a:lnTo>
+                    <a:pt x="501357" y="3529611"/>
+                  </a:lnTo>
+                  <a:lnTo>
+                    <a:pt x="429735" y="3536190"/>
+                  </a:lnTo>
+                  <a:lnTo>
+                    <a:pt x="358112" y="3542417"/>
+                  </a:lnTo>
+                  <a:lnTo>
+                    <a:pt x="286490" y="3548311"/>
+                  </a:lnTo>
+                  <a:lnTo>
+                    <a:pt x="214867" y="3553890"/>
+                  </a:lnTo>
+                  <a:lnTo>
+                    <a:pt x="143245" y="3559171"/>
+                  </a:lnTo>
+                  <a:lnTo>
+                    <a:pt x="71622" y="3564169"/>
+                  </a:lnTo>
+                  <a:lnTo>
+                    <a:pt x="0" y="3568900"/>
                   </a:lnTo>
                   <a:close/>
                 </a:path>
@@ -3670,215 +3676,221 @@
           <p:spPr>
             <a:xfrm>
               <a:off x="1172049" y="1896563"/>
-              <a:ext cx="4752140" cy="3018779"/>
+              <a:ext cx="4919990" cy="2883163"/>
             </a:xfrm>
             <a:custGeom>
               <a:avLst/>
               <a:pathLst>
-                <a:path w="4752140" h="3018779">
+                <a:path w="4919990" h="2883163">
                   <a:moveTo>
-                    <a:pt x="0" y="3018779"/>
+                    <a:pt x="0" y="2883163"/>
                   </a:moveTo>
                   <a:lnTo>
-                    <a:pt x="71622" y="3014054"/>
-                  </a:lnTo>
-                  <a:lnTo>
-                    <a:pt x="143245" y="3009294"/>
-                  </a:lnTo>
-                  <a:lnTo>
-                    <a:pt x="214867" y="3004498"/>
-                  </a:lnTo>
-                  <a:lnTo>
-                    <a:pt x="286490" y="2999666"/>
-                  </a:lnTo>
-                  <a:lnTo>
-                    <a:pt x="358112" y="2994798"/>
-                  </a:lnTo>
-                  <a:lnTo>
-                    <a:pt x="429735" y="2989894"/>
-                  </a:lnTo>
-                  <a:lnTo>
-                    <a:pt x="501357" y="2984954"/>
-                  </a:lnTo>
-                  <a:lnTo>
-                    <a:pt x="572980" y="2979976"/>
-                  </a:lnTo>
-                  <a:lnTo>
-                    <a:pt x="644602" y="2974962"/>
-                  </a:lnTo>
-                  <a:lnTo>
-                    <a:pt x="716225" y="2969910"/>
-                  </a:lnTo>
-                  <a:lnTo>
-                    <a:pt x="787847" y="2964820"/>
-                  </a:lnTo>
-                  <a:lnTo>
-                    <a:pt x="859470" y="2959693"/>
-                  </a:lnTo>
-                  <a:lnTo>
-                    <a:pt x="931092" y="2954527"/>
-                  </a:lnTo>
-                  <a:lnTo>
-                    <a:pt x="1002715" y="2949323"/>
-                  </a:lnTo>
-                  <a:lnTo>
-                    <a:pt x="1074337" y="2944080"/>
-                  </a:lnTo>
-                  <a:lnTo>
-                    <a:pt x="1145960" y="2938797"/>
-                  </a:lnTo>
-                  <a:lnTo>
-                    <a:pt x="1217582" y="2933476"/>
-                  </a:lnTo>
-                  <a:lnTo>
-                    <a:pt x="1289205" y="2928115"/>
-                  </a:lnTo>
-                  <a:lnTo>
-                    <a:pt x="1360827" y="2922714"/>
-                  </a:lnTo>
-                  <a:lnTo>
-                    <a:pt x="1432450" y="2917272"/>
-                  </a:lnTo>
-                  <a:lnTo>
-                    <a:pt x="1504073" y="2911790"/>
-                  </a:lnTo>
-                  <a:lnTo>
-                    <a:pt x="1575695" y="2906268"/>
-                  </a:lnTo>
-                  <a:lnTo>
-                    <a:pt x="1647318" y="2900704"/>
-                  </a:lnTo>
-                  <a:lnTo>
-                    <a:pt x="1718940" y="2895098"/>
-                  </a:lnTo>
-                  <a:lnTo>
-                    <a:pt x="1790563" y="2889451"/>
-                  </a:lnTo>
-                  <a:lnTo>
-                    <a:pt x="1862185" y="2883761"/>
-                  </a:lnTo>
-                  <a:lnTo>
-                    <a:pt x="1933808" y="2878030"/>
-                  </a:lnTo>
-                  <a:lnTo>
-                    <a:pt x="2005430" y="2872255"/>
-                  </a:lnTo>
-                  <a:lnTo>
-                    <a:pt x="2077053" y="2866438"/>
-                  </a:lnTo>
-                  <a:lnTo>
-                    <a:pt x="2148675" y="2860577"/>
-                  </a:lnTo>
-                  <a:lnTo>
-                    <a:pt x="2220298" y="2854672"/>
-                  </a:lnTo>
-                  <a:lnTo>
-                    <a:pt x="2291920" y="2848723"/>
-                  </a:lnTo>
-                  <a:lnTo>
-                    <a:pt x="2363543" y="2842730"/>
-                  </a:lnTo>
-                  <a:lnTo>
-                    <a:pt x="2435165" y="2836693"/>
-                  </a:lnTo>
-                  <a:lnTo>
-                    <a:pt x="2506788" y="2830610"/>
-                  </a:lnTo>
-                  <a:lnTo>
-                    <a:pt x="2578410" y="2824482"/>
-                  </a:lnTo>
-                  <a:lnTo>
-                    <a:pt x="2650033" y="2818308"/>
-                  </a:lnTo>
-                  <a:lnTo>
-                    <a:pt x="2721655" y="2812089"/>
-                  </a:lnTo>
-                  <a:lnTo>
-                    <a:pt x="2793278" y="2805823"/>
-                  </a:lnTo>
-                  <a:lnTo>
-                    <a:pt x="2864901" y="2799510"/>
-                  </a:lnTo>
-                  <a:lnTo>
-                    <a:pt x="2936523" y="2793150"/>
-                  </a:lnTo>
-                  <a:lnTo>
-                    <a:pt x="3008146" y="2786743"/>
-                  </a:lnTo>
-                  <a:lnTo>
-                    <a:pt x="3079768" y="2760954"/>
-                  </a:lnTo>
-                  <a:lnTo>
-                    <a:pt x="3151391" y="2705463"/>
-                  </a:lnTo>
-                  <a:lnTo>
-                    <a:pt x="3223013" y="2646518"/>
-                  </a:lnTo>
-                  <a:lnTo>
-                    <a:pt x="3294636" y="2583905"/>
-                  </a:lnTo>
-                  <a:lnTo>
-                    <a:pt x="3366258" y="2517396"/>
-                  </a:lnTo>
-                  <a:lnTo>
-                    <a:pt x="3437881" y="2446748"/>
-                  </a:lnTo>
-                  <a:lnTo>
-                    <a:pt x="3509503" y="2371703"/>
-                  </a:lnTo>
-                  <a:lnTo>
-                    <a:pt x="3581126" y="2291989"/>
-                  </a:lnTo>
-                  <a:lnTo>
-                    <a:pt x="3652748" y="2207313"/>
-                  </a:lnTo>
-                  <a:lnTo>
-                    <a:pt x="3724371" y="2117368"/>
-                  </a:lnTo>
-                  <a:lnTo>
-                    <a:pt x="3795993" y="2021825"/>
-                  </a:lnTo>
-                  <a:lnTo>
-                    <a:pt x="3867616" y="1920337"/>
-                  </a:lnTo>
-                  <a:lnTo>
-                    <a:pt x="3939238" y="1812533"/>
-                  </a:lnTo>
-                  <a:lnTo>
-                    <a:pt x="4010861" y="1698020"/>
-                  </a:lnTo>
-                  <a:lnTo>
-                    <a:pt x="4082483" y="1576381"/>
-                  </a:lnTo>
-                  <a:lnTo>
-                    <a:pt x="4154106" y="1447172"/>
-                  </a:lnTo>
-                  <a:lnTo>
-                    <a:pt x="4225729" y="1309923"/>
-                  </a:lnTo>
-                  <a:lnTo>
-                    <a:pt x="4297351" y="1164132"/>
-                  </a:lnTo>
-                  <a:lnTo>
-                    <a:pt x="4368974" y="1009268"/>
-                  </a:lnTo>
-                  <a:lnTo>
-                    <a:pt x="4440596" y="844767"/>
-                  </a:lnTo>
-                  <a:lnTo>
-                    <a:pt x="4512219" y="670028"/>
-                  </a:lnTo>
-                  <a:lnTo>
-                    <a:pt x="4583841" y="484416"/>
-                  </a:lnTo>
-                  <a:lnTo>
-                    <a:pt x="4655464" y="287252"/>
-                  </a:lnTo>
-                  <a:lnTo>
-                    <a:pt x="4727086" y="77819"/>
-                  </a:lnTo>
-                  <a:lnTo>
-                    <a:pt x="4752140" y="0"/>
+                    <a:pt x="71622" y="2880948"/>
+                  </a:lnTo>
+                  <a:lnTo>
+                    <a:pt x="143245" y="2878727"/>
+                  </a:lnTo>
+                  <a:lnTo>
+                    <a:pt x="214867" y="2876499"/>
+                  </a:lnTo>
+                  <a:lnTo>
+                    <a:pt x="286490" y="2874265"/>
+                  </a:lnTo>
+                  <a:lnTo>
+                    <a:pt x="358112" y="2872025"/>
+                  </a:lnTo>
+                  <a:lnTo>
+                    <a:pt x="429735" y="2869778"/>
+                  </a:lnTo>
+                  <a:lnTo>
+                    <a:pt x="501357" y="2867524"/>
+                  </a:lnTo>
+                  <a:lnTo>
+                    <a:pt x="572980" y="2865264"/>
+                  </a:lnTo>
+                  <a:lnTo>
+                    <a:pt x="644602" y="2862998"/>
+                  </a:lnTo>
+                  <a:lnTo>
+                    <a:pt x="716225" y="2860725"/>
+                  </a:lnTo>
+                  <a:lnTo>
+                    <a:pt x="787847" y="2858445"/>
+                  </a:lnTo>
+                  <a:lnTo>
+                    <a:pt x="859470" y="2856159"/>
+                  </a:lnTo>
+                  <a:lnTo>
+                    <a:pt x="931092" y="2853867"/>
+                  </a:lnTo>
+                  <a:lnTo>
+                    <a:pt x="1002715" y="2851567"/>
+                  </a:lnTo>
+                  <a:lnTo>
+                    <a:pt x="1074337" y="2849261"/>
+                  </a:lnTo>
+                  <a:lnTo>
+                    <a:pt x="1145960" y="2846949"/>
+                  </a:lnTo>
+                  <a:lnTo>
+                    <a:pt x="1217582" y="2844630"/>
+                  </a:lnTo>
+                  <a:lnTo>
+                    <a:pt x="1289205" y="2842304"/>
+                  </a:lnTo>
+                  <a:lnTo>
+                    <a:pt x="1360827" y="2839971"/>
+                  </a:lnTo>
+                  <a:lnTo>
+                    <a:pt x="1432450" y="2837632"/>
+                  </a:lnTo>
+                  <a:lnTo>
+                    <a:pt x="1504073" y="2835286"/>
+                  </a:lnTo>
+                  <a:lnTo>
+                    <a:pt x="1575695" y="2832933"/>
+                  </a:lnTo>
+                  <a:lnTo>
+                    <a:pt x="1647318" y="2830574"/>
+                  </a:lnTo>
+                  <a:lnTo>
+                    <a:pt x="1718940" y="2828207"/>
+                  </a:lnTo>
+                  <a:lnTo>
+                    <a:pt x="1790563" y="2825834"/>
+                  </a:lnTo>
+                  <a:lnTo>
+                    <a:pt x="1862185" y="2823454"/>
+                  </a:lnTo>
+                  <a:lnTo>
+                    <a:pt x="1933808" y="2821068"/>
+                  </a:lnTo>
+                  <a:lnTo>
+                    <a:pt x="2005430" y="2818674"/>
+                  </a:lnTo>
+                  <a:lnTo>
+                    <a:pt x="2077053" y="2816273"/>
+                  </a:lnTo>
+                  <a:lnTo>
+                    <a:pt x="2148675" y="2813866"/>
+                  </a:lnTo>
+                  <a:lnTo>
+                    <a:pt x="2220298" y="2811451"/>
+                  </a:lnTo>
+                  <a:lnTo>
+                    <a:pt x="2291920" y="2809030"/>
+                  </a:lnTo>
+                  <a:lnTo>
+                    <a:pt x="2363543" y="2806602"/>
+                  </a:lnTo>
+                  <a:lnTo>
+                    <a:pt x="2435165" y="2804166"/>
+                  </a:lnTo>
+                  <a:lnTo>
+                    <a:pt x="2506788" y="2801724"/>
+                  </a:lnTo>
+                  <a:lnTo>
+                    <a:pt x="2578410" y="2799275"/>
+                  </a:lnTo>
+                  <a:lnTo>
+                    <a:pt x="2650033" y="2796818"/>
+                  </a:lnTo>
+                  <a:lnTo>
+                    <a:pt x="2721655" y="2794355"/>
+                  </a:lnTo>
+                  <a:lnTo>
+                    <a:pt x="2793278" y="2791884"/>
+                  </a:lnTo>
+                  <a:lnTo>
+                    <a:pt x="2864901" y="2789407"/>
+                  </a:lnTo>
+                  <a:lnTo>
+                    <a:pt x="2936523" y="2786922"/>
+                  </a:lnTo>
+                  <a:lnTo>
+                    <a:pt x="3008146" y="2784430"/>
+                  </a:lnTo>
+                  <a:lnTo>
+                    <a:pt x="3079768" y="2762951"/>
+                  </a:lnTo>
+                  <a:lnTo>
+                    <a:pt x="3151391" y="2712688"/>
+                  </a:lnTo>
+                  <a:lnTo>
+                    <a:pt x="3223013" y="2659586"/>
+                  </a:lnTo>
+                  <a:lnTo>
+                    <a:pt x="3294636" y="2603484"/>
+                  </a:lnTo>
+                  <a:lnTo>
+                    <a:pt x="3366258" y="2544212"/>
+                  </a:lnTo>
+                  <a:lnTo>
+                    <a:pt x="3437881" y="2481592"/>
+                  </a:lnTo>
+                  <a:lnTo>
+                    <a:pt x="3509503" y="2415434"/>
+                  </a:lnTo>
+                  <a:lnTo>
+                    <a:pt x="3581126" y="2345538"/>
+                  </a:lnTo>
+                  <a:lnTo>
+                    <a:pt x="3652748" y="2271694"/>
+                  </a:lnTo>
+                  <a:lnTo>
+                    <a:pt x="3724371" y="2193678"/>
+                  </a:lnTo>
+                  <a:lnTo>
+                    <a:pt x="3795993" y="2111254"/>
+                  </a:lnTo>
+                  <a:lnTo>
+                    <a:pt x="3867616" y="2024174"/>
+                  </a:lnTo>
+                  <a:lnTo>
+                    <a:pt x="3939238" y="1932175"/>
+                  </a:lnTo>
+                  <a:lnTo>
+                    <a:pt x="4010861" y="1834978"/>
+                  </a:lnTo>
+                  <a:lnTo>
+                    <a:pt x="4082483" y="1732290"/>
+                  </a:lnTo>
+                  <a:lnTo>
+                    <a:pt x="4154106" y="1623800"/>
+                  </a:lnTo>
+                  <a:lnTo>
+                    <a:pt x="4225729" y="1509182"/>
+                  </a:lnTo>
+                  <a:lnTo>
+                    <a:pt x="4297351" y="1388088"/>
+                  </a:lnTo>
+                  <a:lnTo>
+                    <a:pt x="4368974" y="1260153"/>
+                  </a:lnTo>
+                  <a:lnTo>
+                    <a:pt x="4440596" y="1124990"/>
+                  </a:lnTo>
+                  <a:lnTo>
+                    <a:pt x="4512219" y="982192"/>
+                  </a:lnTo>
+                  <a:lnTo>
+                    <a:pt x="4583841" y="831326"/>
+                  </a:lnTo>
+                  <a:lnTo>
+                    <a:pt x="4655464" y="671937"/>
+                  </a:lnTo>
+                  <a:lnTo>
+                    <a:pt x="4727086" y="503544"/>
+                  </a:lnTo>
+                  <a:lnTo>
+                    <a:pt x="4798709" y="325637"/>
+                  </a:lnTo>
+                  <a:lnTo>
+                    <a:pt x="4870331" y="137680"/>
+                  </a:lnTo>
+                  <a:lnTo>
+                    <a:pt x="4919990" y="0"/>
                   </a:lnTo>
                 </a:path>
               </a:pathLst>
@@ -3898,312 +3910,312 @@
           </p:nvSpPr>
           <p:spPr>
             <a:xfrm>
-              <a:off x="1172049" y="4226929"/>
-              <a:ext cx="7090630" cy="1255782"/>
+              <a:off x="1172049" y="4526431"/>
+              <a:ext cx="7090630" cy="939032"/>
             </a:xfrm>
             <a:custGeom>
               <a:avLst/>
               <a:pathLst>
-                <a:path w="7090630" h="1255782">
+                <a:path w="7090630" h="939032">
                   <a:moveTo>
                     <a:pt x="7090630" y="0"/>
                   </a:moveTo>
                   <a:lnTo>
-                    <a:pt x="7019007" y="9784"/>
-                  </a:lnTo>
-                  <a:lnTo>
-                    <a:pt x="6947385" y="19496"/>
-                  </a:lnTo>
-                  <a:lnTo>
-                    <a:pt x="6875762" y="29136"/>
-                  </a:lnTo>
-                  <a:lnTo>
-                    <a:pt x="6804139" y="38704"/>
-                  </a:lnTo>
-                  <a:lnTo>
-                    <a:pt x="6732517" y="48202"/>
-                  </a:lnTo>
-                  <a:lnTo>
-                    <a:pt x="6660894" y="57630"/>
-                  </a:lnTo>
-                  <a:lnTo>
-                    <a:pt x="6589272" y="66987"/>
-                  </a:lnTo>
-                  <a:lnTo>
-                    <a:pt x="6517649" y="76276"/>
-                  </a:lnTo>
-                  <a:lnTo>
-                    <a:pt x="6446027" y="85496"/>
-                  </a:lnTo>
-                  <a:lnTo>
-                    <a:pt x="6374404" y="94647"/>
-                  </a:lnTo>
-                  <a:lnTo>
-                    <a:pt x="6302782" y="103731"/>
-                  </a:lnTo>
-                  <a:lnTo>
-                    <a:pt x="6231159" y="112748"/>
-                  </a:lnTo>
-                  <a:lnTo>
-                    <a:pt x="6159537" y="121698"/>
-                  </a:lnTo>
-                  <a:lnTo>
-                    <a:pt x="6087914" y="130582"/>
-                  </a:lnTo>
-                  <a:lnTo>
-                    <a:pt x="6016292" y="139400"/>
-                  </a:lnTo>
-                  <a:lnTo>
-                    <a:pt x="5944669" y="148152"/>
-                  </a:lnTo>
-                  <a:lnTo>
-                    <a:pt x="5873047" y="156840"/>
-                  </a:lnTo>
-                  <a:lnTo>
-                    <a:pt x="5801424" y="165464"/>
-                  </a:lnTo>
-                  <a:lnTo>
-                    <a:pt x="5729802" y="174024"/>
-                  </a:lnTo>
-                  <a:lnTo>
-                    <a:pt x="5658179" y="182520"/>
-                  </a:lnTo>
-                  <a:lnTo>
-                    <a:pt x="5586557" y="190954"/>
-                  </a:lnTo>
-                  <a:lnTo>
-                    <a:pt x="5514934" y="199325"/>
-                  </a:lnTo>
-                  <a:lnTo>
-                    <a:pt x="5443311" y="207635"/>
-                  </a:lnTo>
-                  <a:lnTo>
-                    <a:pt x="5371689" y="215882"/>
-                  </a:lnTo>
-                  <a:lnTo>
-                    <a:pt x="5300066" y="224069"/>
-                  </a:lnTo>
-                  <a:lnTo>
-                    <a:pt x="5228444" y="232195"/>
-                  </a:lnTo>
-                  <a:lnTo>
-                    <a:pt x="5156821" y="240262"/>
-                  </a:lnTo>
-                  <a:lnTo>
-                    <a:pt x="5085199" y="248268"/>
-                  </a:lnTo>
-                  <a:lnTo>
-                    <a:pt x="5013576" y="256215"/>
-                  </a:lnTo>
-                  <a:lnTo>
-                    <a:pt x="4941954" y="264103"/>
-                  </a:lnTo>
-                  <a:lnTo>
-                    <a:pt x="4870331" y="271933"/>
-                  </a:lnTo>
-                  <a:lnTo>
-                    <a:pt x="4798709" y="279705"/>
-                  </a:lnTo>
-                  <a:lnTo>
-                    <a:pt x="4727086" y="287420"/>
-                  </a:lnTo>
-                  <a:lnTo>
-                    <a:pt x="4655464" y="295077"/>
-                  </a:lnTo>
-                  <a:lnTo>
-                    <a:pt x="4583841" y="302678"/>
-                  </a:lnTo>
-                  <a:lnTo>
-                    <a:pt x="4512219" y="310223"/>
-                  </a:lnTo>
-                  <a:lnTo>
-                    <a:pt x="4440596" y="317712"/>
-                  </a:lnTo>
-                  <a:lnTo>
-                    <a:pt x="4368974" y="325145"/>
-                  </a:lnTo>
-                  <a:lnTo>
-                    <a:pt x="4297351" y="332523"/>
-                  </a:lnTo>
-                  <a:lnTo>
-                    <a:pt x="4225729" y="339847"/>
-                  </a:lnTo>
-                  <a:lnTo>
-                    <a:pt x="4154106" y="347116"/>
-                  </a:lnTo>
-                  <a:lnTo>
-                    <a:pt x="4082483" y="354332"/>
-                  </a:lnTo>
-                  <a:lnTo>
-                    <a:pt x="4010861" y="361494"/>
-                  </a:lnTo>
-                  <a:lnTo>
-                    <a:pt x="3939238" y="368604"/>
-                  </a:lnTo>
-                  <a:lnTo>
-                    <a:pt x="3867616" y="375661"/>
-                  </a:lnTo>
-                  <a:lnTo>
-                    <a:pt x="3795993" y="382665"/>
-                  </a:lnTo>
-                  <a:lnTo>
-                    <a:pt x="3724371" y="389618"/>
-                  </a:lnTo>
-                  <a:lnTo>
-                    <a:pt x="3652748" y="396519"/>
-                  </a:lnTo>
-                  <a:lnTo>
-                    <a:pt x="3581126" y="403369"/>
-                  </a:lnTo>
-                  <a:lnTo>
-                    <a:pt x="3509503" y="410169"/>
-                  </a:lnTo>
-                  <a:lnTo>
-                    <a:pt x="3437881" y="416918"/>
-                  </a:lnTo>
-                  <a:lnTo>
-                    <a:pt x="3366258" y="423617"/>
-                  </a:lnTo>
-                  <a:lnTo>
-                    <a:pt x="3294636" y="430267"/>
-                  </a:lnTo>
-                  <a:lnTo>
-                    <a:pt x="3223013" y="436867"/>
-                  </a:lnTo>
-                  <a:lnTo>
-                    <a:pt x="3151391" y="443419"/>
-                  </a:lnTo>
-                  <a:lnTo>
-                    <a:pt x="3079768" y="449922"/>
-                  </a:lnTo>
-                  <a:lnTo>
-                    <a:pt x="3008146" y="482828"/>
-                  </a:lnTo>
-                  <a:lnTo>
-                    <a:pt x="2936523" y="532008"/>
-                  </a:lnTo>
-                  <a:lnTo>
-                    <a:pt x="2864901" y="578306"/>
-                  </a:lnTo>
-                  <a:lnTo>
-                    <a:pt x="2793278" y="621892"/>
-                  </a:lnTo>
-                  <a:lnTo>
-                    <a:pt x="2721655" y="662925"/>
-                  </a:lnTo>
-                  <a:lnTo>
-                    <a:pt x="2650033" y="701553"/>
-                  </a:lnTo>
-                  <a:lnTo>
-                    <a:pt x="2578410" y="737919"/>
-                  </a:lnTo>
-                  <a:lnTo>
-                    <a:pt x="2506788" y="772154"/>
-                  </a:lnTo>
-                  <a:lnTo>
-                    <a:pt x="2435165" y="804383"/>
-                  </a:lnTo>
-                  <a:lnTo>
-                    <a:pt x="2363543" y="834724"/>
-                  </a:lnTo>
-                  <a:lnTo>
-                    <a:pt x="2291920" y="863288"/>
-                  </a:lnTo>
-                  <a:lnTo>
-                    <a:pt x="2220298" y="890178"/>
-                  </a:lnTo>
-                  <a:lnTo>
-                    <a:pt x="2148675" y="915493"/>
-                  </a:lnTo>
-                  <a:lnTo>
-                    <a:pt x="2077053" y="939325"/>
-                  </a:lnTo>
-                  <a:lnTo>
-                    <a:pt x="2005430" y="961760"/>
-                  </a:lnTo>
-                  <a:lnTo>
-                    <a:pt x="1933808" y="982881"/>
-                  </a:lnTo>
-                  <a:lnTo>
-                    <a:pt x="1862185" y="1002765"/>
-                  </a:lnTo>
-                  <a:lnTo>
-                    <a:pt x="1790563" y="1021484"/>
-                  </a:lnTo>
-                  <a:lnTo>
-                    <a:pt x="1718940" y="1039106"/>
-                  </a:lnTo>
-                  <a:lnTo>
-                    <a:pt x="1647318" y="1055696"/>
-                  </a:lnTo>
-                  <a:lnTo>
-                    <a:pt x="1575695" y="1071314"/>
-                  </a:lnTo>
-                  <a:lnTo>
-                    <a:pt x="1504073" y="1086017"/>
-                  </a:lnTo>
-                  <a:lnTo>
-                    <a:pt x="1432450" y="1099858"/>
-                  </a:lnTo>
-                  <a:lnTo>
-                    <a:pt x="1360827" y="1112889"/>
-                  </a:lnTo>
-                  <a:lnTo>
-                    <a:pt x="1289205" y="1125156"/>
-                  </a:lnTo>
-                  <a:lnTo>
-                    <a:pt x="1217582" y="1136704"/>
-                  </a:lnTo>
-                  <a:lnTo>
-                    <a:pt x="1145960" y="1147576"/>
-                  </a:lnTo>
-                  <a:lnTo>
-                    <a:pt x="1074337" y="1157811"/>
-                  </a:lnTo>
-                  <a:lnTo>
-                    <a:pt x="1002715" y="1167447"/>
-                  </a:lnTo>
-                  <a:lnTo>
-                    <a:pt x="931092" y="1176517"/>
-                  </a:lnTo>
-                  <a:lnTo>
-                    <a:pt x="859470" y="1185057"/>
-                  </a:lnTo>
-                  <a:lnTo>
-                    <a:pt x="787847" y="1193096"/>
-                  </a:lnTo>
-                  <a:lnTo>
-                    <a:pt x="716225" y="1200664"/>
-                  </a:lnTo>
-                  <a:lnTo>
-                    <a:pt x="644602" y="1207789"/>
-                  </a:lnTo>
-                  <a:lnTo>
-                    <a:pt x="572980" y="1214496"/>
-                  </a:lnTo>
-                  <a:lnTo>
-                    <a:pt x="501357" y="1220811"/>
-                  </a:lnTo>
-                  <a:lnTo>
-                    <a:pt x="429735" y="1226755"/>
-                  </a:lnTo>
-                  <a:lnTo>
-                    <a:pt x="358112" y="1232351"/>
-                  </a:lnTo>
-                  <a:lnTo>
-                    <a:pt x="286490" y="1237620"/>
-                  </a:lnTo>
-                  <a:lnTo>
-                    <a:pt x="214867" y="1242580"/>
-                  </a:lnTo>
-                  <a:lnTo>
-                    <a:pt x="143245" y="1247249"/>
-                  </a:lnTo>
-                  <a:lnTo>
-                    <a:pt x="71622" y="1251644"/>
-                  </a:lnTo>
-                  <a:lnTo>
-                    <a:pt x="0" y="1255782"/>
+                    <a:pt x="7019007" y="2935"/>
+                  </a:lnTo>
+                  <a:lnTo>
+                    <a:pt x="6947385" y="5862"/>
+                  </a:lnTo>
+                  <a:lnTo>
+                    <a:pt x="6875762" y="8781"/>
+                  </a:lnTo>
+                  <a:lnTo>
+                    <a:pt x="6804139" y="11691"/>
+                  </a:lnTo>
+                  <a:lnTo>
+                    <a:pt x="6732517" y="14593"/>
+                  </a:lnTo>
+                  <a:lnTo>
+                    <a:pt x="6660894" y="17487"/>
+                  </a:lnTo>
+                  <a:lnTo>
+                    <a:pt x="6589272" y="20373"/>
+                  </a:lnTo>
+                  <a:lnTo>
+                    <a:pt x="6517649" y="23250"/>
+                  </a:lnTo>
+                  <a:lnTo>
+                    <a:pt x="6446027" y="26119"/>
+                  </a:lnTo>
+                  <a:lnTo>
+                    <a:pt x="6374404" y="28979"/>
+                  </a:lnTo>
+                  <a:lnTo>
+                    <a:pt x="6302782" y="31832"/>
+                  </a:lnTo>
+                  <a:lnTo>
+                    <a:pt x="6231159" y="34676"/>
+                  </a:lnTo>
+                  <a:lnTo>
+                    <a:pt x="6159537" y="37512"/>
+                  </a:lnTo>
+                  <a:lnTo>
+                    <a:pt x="6087914" y="40340"/>
+                  </a:lnTo>
+                  <a:lnTo>
+                    <a:pt x="6016292" y="43160"/>
+                  </a:lnTo>
+                  <a:lnTo>
+                    <a:pt x="5944669" y="45971"/>
+                  </a:lnTo>
+                  <a:lnTo>
+                    <a:pt x="5873047" y="48775"/>
+                  </a:lnTo>
+                  <a:lnTo>
+                    <a:pt x="5801424" y="51571"/>
+                  </a:lnTo>
+                  <a:lnTo>
+                    <a:pt x="5729802" y="54358"/>
+                  </a:lnTo>
+                  <a:lnTo>
+                    <a:pt x="5658179" y="57138"/>
+                  </a:lnTo>
+                  <a:lnTo>
+                    <a:pt x="5586557" y="59909"/>
+                  </a:lnTo>
+                  <a:lnTo>
+                    <a:pt x="5514934" y="62673"/>
+                  </a:lnTo>
+                  <a:lnTo>
+                    <a:pt x="5443311" y="65429"/>
+                  </a:lnTo>
+                  <a:lnTo>
+                    <a:pt x="5371689" y="68177"/>
+                  </a:lnTo>
+                  <a:lnTo>
+                    <a:pt x="5300066" y="70916"/>
+                  </a:lnTo>
+                  <a:lnTo>
+                    <a:pt x="5228444" y="73648"/>
+                  </a:lnTo>
+                  <a:lnTo>
+                    <a:pt x="5156821" y="76373"/>
+                  </a:lnTo>
+                  <a:lnTo>
+                    <a:pt x="5085199" y="79089"/>
+                  </a:lnTo>
+                  <a:lnTo>
+                    <a:pt x="5013576" y="81798"/>
+                  </a:lnTo>
+                  <a:lnTo>
+                    <a:pt x="4941954" y="84498"/>
+                  </a:lnTo>
+                  <a:lnTo>
+                    <a:pt x="4870331" y="87192"/>
+                  </a:lnTo>
+                  <a:lnTo>
+                    <a:pt x="4798709" y="89877"/>
+                  </a:lnTo>
+                  <a:lnTo>
+                    <a:pt x="4727086" y="92555"/>
+                  </a:lnTo>
+                  <a:lnTo>
+                    <a:pt x="4655464" y="95224"/>
+                  </a:lnTo>
+                  <a:lnTo>
+                    <a:pt x="4583841" y="97887"/>
+                  </a:lnTo>
+                  <a:lnTo>
+                    <a:pt x="4512219" y="100541"/>
+                  </a:lnTo>
+                  <a:lnTo>
+                    <a:pt x="4440596" y="103188"/>
+                  </a:lnTo>
+                  <a:lnTo>
+                    <a:pt x="4368974" y="105828"/>
+                  </a:lnTo>
+                  <a:lnTo>
+                    <a:pt x="4297351" y="108460"/>
+                  </a:lnTo>
+                  <a:lnTo>
+                    <a:pt x="4225729" y="111084"/>
+                  </a:lnTo>
+                  <a:lnTo>
+                    <a:pt x="4154106" y="113701"/>
+                  </a:lnTo>
+                  <a:lnTo>
+                    <a:pt x="4082483" y="116310"/>
+                  </a:lnTo>
+                  <a:lnTo>
+                    <a:pt x="4010861" y="118912"/>
+                  </a:lnTo>
+                  <a:lnTo>
+                    <a:pt x="3939238" y="121506"/>
+                  </a:lnTo>
+                  <a:lnTo>
+                    <a:pt x="3867616" y="124093"/>
+                  </a:lnTo>
+                  <a:lnTo>
+                    <a:pt x="3795993" y="126672"/>
+                  </a:lnTo>
+                  <a:lnTo>
+                    <a:pt x="3724371" y="129244"/>
+                  </a:lnTo>
+                  <a:lnTo>
+                    <a:pt x="3652748" y="131809"/>
+                  </a:lnTo>
+                  <a:lnTo>
+                    <a:pt x="3581126" y="134366"/>
+                  </a:lnTo>
+                  <a:lnTo>
+                    <a:pt x="3509503" y="136916"/>
+                  </a:lnTo>
+                  <a:lnTo>
+                    <a:pt x="3437881" y="139459"/>
+                  </a:lnTo>
+                  <a:lnTo>
+                    <a:pt x="3366258" y="141994"/>
+                  </a:lnTo>
+                  <a:lnTo>
+                    <a:pt x="3294636" y="144522"/>
+                  </a:lnTo>
+                  <a:lnTo>
+                    <a:pt x="3223013" y="147043"/>
+                  </a:lnTo>
+                  <a:lnTo>
+                    <a:pt x="3151391" y="149556"/>
+                  </a:lnTo>
+                  <a:lnTo>
+                    <a:pt x="3079768" y="152063"/>
+                  </a:lnTo>
+                  <a:lnTo>
+                    <a:pt x="3008146" y="180658"/>
+                  </a:lnTo>
+                  <a:lnTo>
+                    <a:pt x="2936523" y="225689"/>
+                  </a:lnTo>
+                  <a:lnTo>
+                    <a:pt x="2864901" y="268312"/>
+                  </a:lnTo>
+                  <a:lnTo>
+                    <a:pt x="2793278" y="308656"/>
+                  </a:lnTo>
+                  <a:lnTo>
+                    <a:pt x="2721655" y="346842"/>
+                  </a:lnTo>
+                  <a:lnTo>
+                    <a:pt x="2650033" y="382987"/>
+                  </a:lnTo>
+                  <a:lnTo>
+                    <a:pt x="2578410" y="417199"/>
+                  </a:lnTo>
+                  <a:lnTo>
+                    <a:pt x="2506788" y="449581"/>
+                  </a:lnTo>
+                  <a:lnTo>
+                    <a:pt x="2435165" y="480232"/>
+                  </a:lnTo>
+                  <a:lnTo>
+                    <a:pt x="2363543" y="509243"/>
+                  </a:lnTo>
+                  <a:lnTo>
+                    <a:pt x="2291920" y="536704"/>
+                  </a:lnTo>
+                  <a:lnTo>
+                    <a:pt x="2220298" y="562696"/>
+                  </a:lnTo>
+                  <a:lnTo>
+                    <a:pt x="2148675" y="587298"/>
+                  </a:lnTo>
+                  <a:lnTo>
+                    <a:pt x="2077053" y="610584"/>
+                  </a:lnTo>
+                  <a:lnTo>
+                    <a:pt x="2005430" y="632626"/>
+                  </a:lnTo>
+                  <a:lnTo>
+                    <a:pt x="1933808" y="653488"/>
+                  </a:lnTo>
+                  <a:lnTo>
+                    <a:pt x="1862185" y="673236"/>
+                  </a:lnTo>
+                  <a:lnTo>
+                    <a:pt x="1790563" y="691927"/>
+                  </a:lnTo>
+                  <a:lnTo>
+                    <a:pt x="1718940" y="709618"/>
+                  </a:lnTo>
+                  <a:lnTo>
+                    <a:pt x="1647318" y="726364"/>
+                  </a:lnTo>
+                  <a:lnTo>
+                    <a:pt x="1575695" y="742214"/>
+                  </a:lnTo>
+                  <a:lnTo>
+                    <a:pt x="1504073" y="757217"/>
+                  </a:lnTo>
+                  <a:lnTo>
+                    <a:pt x="1432450" y="771417"/>
+                  </a:lnTo>
+                  <a:lnTo>
+                    <a:pt x="1360827" y="784858"/>
+                  </a:lnTo>
+                  <a:lnTo>
+                    <a:pt x="1289205" y="797580"/>
+                  </a:lnTo>
+                  <a:lnTo>
+                    <a:pt x="1217582" y="809622"/>
+                  </a:lnTo>
+                  <a:lnTo>
+                    <a:pt x="1145960" y="821020"/>
+                  </a:lnTo>
+                  <a:lnTo>
+                    <a:pt x="1074337" y="831809"/>
+                  </a:lnTo>
+                  <a:lnTo>
+                    <a:pt x="1002715" y="842021"/>
+                  </a:lnTo>
+                  <a:lnTo>
+                    <a:pt x="931092" y="851686"/>
+                  </a:lnTo>
+                  <a:lnTo>
+                    <a:pt x="859470" y="860835"/>
+                  </a:lnTo>
+                  <a:lnTo>
+                    <a:pt x="787847" y="869495"/>
+                  </a:lnTo>
+                  <a:lnTo>
+                    <a:pt x="716225" y="877691"/>
+                  </a:lnTo>
+                  <a:lnTo>
+                    <a:pt x="644602" y="885449"/>
+                  </a:lnTo>
+                  <a:lnTo>
+                    <a:pt x="572980" y="892792"/>
+                  </a:lnTo>
+                  <a:lnTo>
+                    <a:pt x="501357" y="899743"/>
+                  </a:lnTo>
+                  <a:lnTo>
+                    <a:pt x="429735" y="906322"/>
+                  </a:lnTo>
+                  <a:lnTo>
+                    <a:pt x="358112" y="912549"/>
+                  </a:lnTo>
+                  <a:lnTo>
+                    <a:pt x="286490" y="918443"/>
+                  </a:lnTo>
+                  <a:lnTo>
+                    <a:pt x="214867" y="924022"/>
+                  </a:lnTo>
+                  <a:lnTo>
+                    <a:pt x="143245" y="929303"/>
+                  </a:lnTo>
+                  <a:lnTo>
+                    <a:pt x="71622" y="934301"/>
+                  </a:lnTo>
+                  <a:lnTo>
+                    <a:pt x="0" y="939032"/>
                   </a:lnTo>
                 </a:path>
               </a:pathLst>
@@ -4224,269 +4236,293 @@
           <p:spPr>
             <a:xfrm>
               <a:off x="1172049" y="1896563"/>
-              <a:ext cx="6082059" cy="3447342"/>
+              <a:ext cx="6604604" cy="3398796"/>
             </a:xfrm>
             <a:custGeom>
               <a:avLst/>
               <a:pathLst>
-                <a:path w="6082059" h="3447342">
+                <a:path w="6604604" h="3398796">
                   <a:moveTo>
-                    <a:pt x="0" y="3447342"/>
+                    <a:pt x="0" y="3398796"/>
                   </a:moveTo>
                   <a:lnTo>
-                    <a:pt x="71622" y="3440263"/>
-                  </a:lnTo>
-                  <a:lnTo>
-                    <a:pt x="143245" y="3432940"/>
-                  </a:lnTo>
-                  <a:lnTo>
-                    <a:pt x="214867" y="3425364"/>
-                  </a:lnTo>
-                  <a:lnTo>
-                    <a:pt x="286490" y="3417527"/>
-                  </a:lnTo>
-                  <a:lnTo>
-                    <a:pt x="358112" y="3409420"/>
-                  </a:lnTo>
-                  <a:lnTo>
-                    <a:pt x="429735" y="3401034"/>
-                  </a:lnTo>
-                  <a:lnTo>
-                    <a:pt x="501357" y="3392358"/>
-                  </a:lnTo>
-                  <a:lnTo>
-                    <a:pt x="572980" y="3383384"/>
-                  </a:lnTo>
-                  <a:lnTo>
-                    <a:pt x="644602" y="3374099"/>
-                  </a:lnTo>
-                  <a:lnTo>
-                    <a:pt x="716225" y="3364495"/>
-                  </a:lnTo>
-                  <a:lnTo>
-                    <a:pt x="787847" y="3354559"/>
-                  </a:lnTo>
-                  <a:lnTo>
-                    <a:pt x="859470" y="3344281"/>
-                  </a:lnTo>
-                  <a:lnTo>
-                    <a:pt x="931092" y="3333649"/>
-                  </a:lnTo>
-                  <a:lnTo>
-                    <a:pt x="1002715" y="3322650"/>
-                  </a:lnTo>
-                  <a:lnTo>
-                    <a:pt x="1074337" y="3311271"/>
-                  </a:lnTo>
-                  <a:lnTo>
-                    <a:pt x="1145960" y="3299501"/>
-                  </a:lnTo>
-                  <a:lnTo>
-                    <a:pt x="1217582" y="3287324"/>
-                  </a:lnTo>
-                  <a:lnTo>
-                    <a:pt x="1289205" y="3274728"/>
-                  </a:lnTo>
-                  <a:lnTo>
-                    <a:pt x="1360827" y="3261697"/>
-                  </a:lnTo>
-                  <a:lnTo>
-                    <a:pt x="1432450" y="3248217"/>
-                  </a:lnTo>
-                  <a:lnTo>
-                    <a:pt x="1504073" y="3234272"/>
-                  </a:lnTo>
-                  <a:lnTo>
-                    <a:pt x="1575695" y="3219846"/>
-                  </a:lnTo>
-                  <a:lnTo>
-                    <a:pt x="1647318" y="3204923"/>
-                  </a:lnTo>
-                  <a:lnTo>
-                    <a:pt x="1718940" y="3189486"/>
-                  </a:lnTo>
-                  <a:lnTo>
-                    <a:pt x="1790563" y="3173516"/>
-                  </a:lnTo>
-                  <a:lnTo>
-                    <a:pt x="1862185" y="3156995"/>
-                  </a:lnTo>
-                  <a:lnTo>
-                    <a:pt x="1933808" y="3139905"/>
-                  </a:lnTo>
-                  <a:lnTo>
-                    <a:pt x="2005430" y="3122225"/>
-                  </a:lnTo>
-                  <a:lnTo>
-                    <a:pt x="2077053" y="3103936"/>
-                  </a:lnTo>
-                  <a:lnTo>
-                    <a:pt x="2148675" y="3085016"/>
-                  </a:lnTo>
-                  <a:lnTo>
-                    <a:pt x="2220298" y="3065444"/>
-                  </a:lnTo>
-                  <a:lnTo>
-                    <a:pt x="2291920" y="3045197"/>
-                  </a:lnTo>
-                  <a:lnTo>
-                    <a:pt x="2363543" y="3024252"/>
-                  </a:lnTo>
-                  <a:lnTo>
-                    <a:pt x="2435165" y="3002585"/>
-                  </a:lnTo>
-                  <a:lnTo>
-                    <a:pt x="2506788" y="2980170"/>
-                  </a:lnTo>
-                  <a:lnTo>
-                    <a:pt x="2578410" y="2956983"/>
-                  </a:lnTo>
-                  <a:lnTo>
-                    <a:pt x="2650033" y="2932996"/>
-                  </a:lnTo>
-                  <a:lnTo>
-                    <a:pt x="2721655" y="2908182"/>
-                  </a:lnTo>
-                  <a:lnTo>
-                    <a:pt x="2793278" y="2882513"/>
-                  </a:lnTo>
-                  <a:lnTo>
-                    <a:pt x="2864901" y="2855958"/>
-                  </a:lnTo>
-                  <a:lnTo>
-                    <a:pt x="2936523" y="2828488"/>
-                  </a:lnTo>
-                  <a:lnTo>
-                    <a:pt x="3008146" y="2800071"/>
-                  </a:lnTo>
-                  <a:lnTo>
-                    <a:pt x="3079768" y="2770674"/>
-                  </a:lnTo>
-                  <a:lnTo>
-                    <a:pt x="3151391" y="2740263"/>
-                  </a:lnTo>
-                  <a:lnTo>
-                    <a:pt x="3223013" y="2708803"/>
-                  </a:lnTo>
-                  <a:lnTo>
-                    <a:pt x="3294636" y="2676259"/>
-                  </a:lnTo>
-                  <a:lnTo>
-                    <a:pt x="3366258" y="2642593"/>
-                  </a:lnTo>
-                  <a:lnTo>
-                    <a:pt x="3437881" y="2607766"/>
-                  </a:lnTo>
-                  <a:lnTo>
-                    <a:pt x="3509503" y="2571738"/>
-                  </a:lnTo>
-                  <a:lnTo>
-                    <a:pt x="3581126" y="2534468"/>
-                  </a:lnTo>
-                  <a:lnTo>
-                    <a:pt x="3652748" y="2495912"/>
-                  </a:lnTo>
-                  <a:lnTo>
-                    <a:pt x="3724371" y="2456027"/>
-                  </a:lnTo>
-                  <a:lnTo>
-                    <a:pt x="3795993" y="2414767"/>
-                  </a:lnTo>
-                  <a:lnTo>
-                    <a:pt x="3867616" y="2372085"/>
-                  </a:lnTo>
-                  <a:lnTo>
-                    <a:pt x="3939238" y="2327930"/>
-                  </a:lnTo>
-                  <a:lnTo>
-                    <a:pt x="4010861" y="2282253"/>
-                  </a:lnTo>
-                  <a:lnTo>
-                    <a:pt x="4082483" y="2235002"/>
-                  </a:lnTo>
-                  <a:lnTo>
-                    <a:pt x="4154106" y="2186120"/>
-                  </a:lnTo>
-                  <a:lnTo>
-                    <a:pt x="4225729" y="2135554"/>
-                  </a:lnTo>
-                  <a:lnTo>
-                    <a:pt x="4297351" y="2083244"/>
-                  </a:lnTo>
-                  <a:lnTo>
-                    <a:pt x="4368974" y="2029130"/>
-                  </a:lnTo>
-                  <a:lnTo>
-                    <a:pt x="4440596" y="1973150"/>
-                  </a:lnTo>
-                  <a:lnTo>
-                    <a:pt x="4512219" y="1915240"/>
-                  </a:lnTo>
-                  <a:lnTo>
-                    <a:pt x="4583841" y="1855334"/>
-                  </a:lnTo>
-                  <a:lnTo>
-                    <a:pt x="4655464" y="1793361"/>
-                  </a:lnTo>
-                  <a:lnTo>
-                    <a:pt x="4727086" y="1729252"/>
-                  </a:lnTo>
-                  <a:lnTo>
-                    <a:pt x="4798709" y="1662932"/>
-                  </a:lnTo>
-                  <a:lnTo>
-                    <a:pt x="4870331" y="1594326"/>
-                  </a:lnTo>
-                  <a:lnTo>
-                    <a:pt x="4941954" y="1523354"/>
-                  </a:lnTo>
-                  <a:lnTo>
-                    <a:pt x="5013576" y="1449935"/>
-                  </a:lnTo>
-                  <a:lnTo>
-                    <a:pt x="5085199" y="1373984"/>
-                  </a:lnTo>
-                  <a:lnTo>
-                    <a:pt x="5156821" y="1295415"/>
-                  </a:lnTo>
-                  <a:lnTo>
-                    <a:pt x="5228444" y="1214136"/>
-                  </a:lnTo>
-                  <a:lnTo>
-                    <a:pt x="5300066" y="1130055"/>
-                  </a:lnTo>
-                  <a:lnTo>
-                    <a:pt x="5371689" y="1043074"/>
-                  </a:lnTo>
-                  <a:lnTo>
-                    <a:pt x="5443311" y="953095"/>
-                  </a:lnTo>
-                  <a:lnTo>
-                    <a:pt x="5514934" y="860013"/>
-                  </a:lnTo>
-                  <a:lnTo>
-                    <a:pt x="5586557" y="763721"/>
-                  </a:lnTo>
-                  <a:lnTo>
-                    <a:pt x="5658179" y="664110"/>
-                  </a:lnTo>
-                  <a:lnTo>
-                    <a:pt x="5729802" y="561063"/>
-                  </a:lnTo>
-                  <a:lnTo>
-                    <a:pt x="5801424" y="454464"/>
-                  </a:lnTo>
-                  <a:lnTo>
-                    <a:pt x="5873047" y="344188"/>
-                  </a:lnTo>
-                  <a:lnTo>
-                    <a:pt x="5944669" y="230111"/>
-                  </a:lnTo>
-                  <a:lnTo>
-                    <a:pt x="6016292" y="112100"/>
-                  </a:lnTo>
-                  <a:lnTo>
-                    <a:pt x="6082059" y="0"/>
+                    <a:pt x="71622" y="3391348"/>
+                  </a:lnTo>
+                  <a:lnTo>
+                    <a:pt x="143245" y="3383683"/>
+                  </a:lnTo>
+                  <a:lnTo>
+                    <a:pt x="214867" y="3375792"/>
+                  </a:lnTo>
+                  <a:lnTo>
+                    <a:pt x="286490" y="3367670"/>
+                  </a:lnTo>
+                  <a:lnTo>
+                    <a:pt x="358112" y="3359310"/>
+                  </a:lnTo>
+                  <a:lnTo>
+                    <a:pt x="429735" y="3350704"/>
+                  </a:lnTo>
+                  <a:lnTo>
+                    <a:pt x="501357" y="3341846"/>
+                  </a:lnTo>
+                  <a:lnTo>
+                    <a:pt x="572980" y="3332728"/>
+                  </a:lnTo>
+                  <a:lnTo>
+                    <a:pt x="644602" y="3323342"/>
+                  </a:lnTo>
+                  <a:lnTo>
+                    <a:pt x="716225" y="3313681"/>
+                  </a:lnTo>
+                  <a:lnTo>
+                    <a:pt x="787847" y="3303737"/>
+                  </a:lnTo>
+                  <a:lnTo>
+                    <a:pt x="859470" y="3293501"/>
+                  </a:lnTo>
+                  <a:lnTo>
+                    <a:pt x="931092" y="3282965"/>
+                  </a:lnTo>
+                  <a:lnTo>
+                    <a:pt x="1002715" y="3272119"/>
+                  </a:lnTo>
+                  <a:lnTo>
+                    <a:pt x="1074337" y="3260956"/>
+                  </a:lnTo>
+                  <a:lnTo>
+                    <a:pt x="1145960" y="3249465"/>
+                  </a:lnTo>
+                  <a:lnTo>
+                    <a:pt x="1217582" y="3237637"/>
+                  </a:lnTo>
+                  <a:lnTo>
+                    <a:pt x="1289205" y="3225461"/>
+                  </a:lnTo>
+                  <a:lnTo>
+                    <a:pt x="1360827" y="3212929"/>
+                  </a:lnTo>
+                  <a:lnTo>
+                    <a:pt x="1432450" y="3200029"/>
+                  </a:lnTo>
+                  <a:lnTo>
+                    <a:pt x="1504073" y="3186750"/>
+                  </a:lnTo>
+                  <a:lnTo>
+                    <a:pt x="1575695" y="3173082"/>
+                  </a:lnTo>
+                  <a:lnTo>
+                    <a:pt x="1647318" y="3159013"/>
+                  </a:lnTo>
+                  <a:lnTo>
+                    <a:pt x="1718940" y="3144531"/>
+                  </a:lnTo>
+                  <a:lnTo>
+                    <a:pt x="1790563" y="3129624"/>
+                  </a:lnTo>
+                  <a:lnTo>
+                    <a:pt x="1862185" y="3114280"/>
+                  </a:lnTo>
+                  <a:lnTo>
+                    <a:pt x="1933808" y="3098486"/>
+                  </a:lnTo>
+                  <a:lnTo>
+                    <a:pt x="2005430" y="3082229"/>
+                  </a:lnTo>
+                  <a:lnTo>
+                    <a:pt x="2077053" y="3065494"/>
+                  </a:lnTo>
+                  <a:lnTo>
+                    <a:pt x="2148675" y="3048269"/>
+                  </a:lnTo>
+                  <a:lnTo>
+                    <a:pt x="2220298" y="3030538"/>
+                  </a:lnTo>
+                  <a:lnTo>
+                    <a:pt x="2291920" y="3012287"/>
+                  </a:lnTo>
+                  <a:lnTo>
+                    <a:pt x="2363543" y="2993500"/>
+                  </a:lnTo>
+                  <a:lnTo>
+                    <a:pt x="2435165" y="2974163"/>
+                  </a:lnTo>
+                  <a:lnTo>
+                    <a:pt x="2506788" y="2954258"/>
+                  </a:lnTo>
+                  <a:lnTo>
+                    <a:pt x="2578410" y="2933769"/>
+                  </a:lnTo>
+                  <a:lnTo>
+                    <a:pt x="2650033" y="2912679"/>
+                  </a:lnTo>
+                  <a:lnTo>
+                    <a:pt x="2721655" y="2890970"/>
+                  </a:lnTo>
+                  <a:lnTo>
+                    <a:pt x="2793278" y="2868625"/>
+                  </a:lnTo>
+                  <a:lnTo>
+                    <a:pt x="2864901" y="2845624"/>
+                  </a:lnTo>
+                  <a:lnTo>
+                    <a:pt x="2936523" y="2821948"/>
+                  </a:lnTo>
+                  <a:lnTo>
+                    <a:pt x="3008146" y="2797577"/>
+                  </a:lnTo>
+                  <a:lnTo>
+                    <a:pt x="3079768" y="2772492"/>
+                  </a:lnTo>
+                  <a:lnTo>
+                    <a:pt x="3151391" y="2746670"/>
+                  </a:lnTo>
+                  <a:lnTo>
+                    <a:pt x="3223013" y="2720092"/>
+                  </a:lnTo>
+                  <a:lnTo>
+                    <a:pt x="3294636" y="2692733"/>
+                  </a:lnTo>
+                  <a:lnTo>
+                    <a:pt x="3366258" y="2664572"/>
+                  </a:lnTo>
+                  <a:lnTo>
+                    <a:pt x="3437881" y="2635584"/>
+                  </a:lnTo>
+                  <a:lnTo>
+                    <a:pt x="3509503" y="2605746"/>
+                  </a:lnTo>
+                  <a:lnTo>
+                    <a:pt x="3581126" y="2575033"/>
+                  </a:lnTo>
+                  <a:lnTo>
+                    <a:pt x="3652748" y="2543418"/>
+                  </a:lnTo>
+                  <a:lnTo>
+                    <a:pt x="3724371" y="2510877"/>
+                  </a:lnTo>
+                  <a:lnTo>
+                    <a:pt x="3795993" y="2477380"/>
+                  </a:lnTo>
+                  <a:lnTo>
+                    <a:pt x="3867616" y="2442901"/>
+                  </a:lnTo>
+                  <a:lnTo>
+                    <a:pt x="3939238" y="2407410"/>
+                  </a:lnTo>
+                  <a:lnTo>
+                    <a:pt x="4010861" y="2370878"/>
+                  </a:lnTo>
+                  <a:lnTo>
+                    <a:pt x="4082483" y="2333274"/>
+                  </a:lnTo>
+                  <a:lnTo>
+                    <a:pt x="4154106" y="2294567"/>
+                  </a:lnTo>
+                  <a:lnTo>
+                    <a:pt x="4225729" y="2254725"/>
+                  </a:lnTo>
+                  <a:lnTo>
+                    <a:pt x="4297351" y="2213714"/>
+                  </a:lnTo>
+                  <a:lnTo>
+                    <a:pt x="4368974" y="2171499"/>
+                  </a:lnTo>
+                  <a:lnTo>
+                    <a:pt x="4440596" y="2128046"/>
+                  </a:lnTo>
+                  <a:lnTo>
+                    <a:pt x="4512219" y="2083318"/>
+                  </a:lnTo>
+                  <a:lnTo>
+                    <a:pt x="4583841" y="2037278"/>
+                  </a:lnTo>
+                  <a:lnTo>
+                    <a:pt x="4655464" y="1989887"/>
+                  </a:lnTo>
+                  <a:lnTo>
+                    <a:pt x="4727086" y="1941106"/>
+                  </a:lnTo>
+                  <a:lnTo>
+                    <a:pt x="4798709" y="1890894"/>
+                  </a:lnTo>
+                  <a:lnTo>
+                    <a:pt x="4870331" y="1839209"/>
+                  </a:lnTo>
+                  <a:lnTo>
+                    <a:pt x="4941954" y="1786008"/>
+                  </a:lnTo>
+                  <a:lnTo>
+                    <a:pt x="5013576" y="1731245"/>
+                  </a:lnTo>
+                  <a:lnTo>
+                    <a:pt x="5085199" y="1674876"/>
+                  </a:lnTo>
+                  <a:lnTo>
+                    <a:pt x="5156821" y="1616854"/>
+                  </a:lnTo>
+                  <a:lnTo>
+                    <a:pt x="5228444" y="1557129"/>
+                  </a:lnTo>
+                  <a:lnTo>
+                    <a:pt x="5300066" y="1495652"/>
+                  </a:lnTo>
+                  <a:lnTo>
+                    <a:pt x="5371689" y="1432371"/>
+                  </a:lnTo>
+                  <a:lnTo>
+                    <a:pt x="5443311" y="1367234"/>
+                  </a:lnTo>
+                  <a:lnTo>
+                    <a:pt x="5514934" y="1300186"/>
+                  </a:lnTo>
+                  <a:lnTo>
+                    <a:pt x="5586557" y="1231171"/>
+                  </a:lnTo>
+                  <a:lnTo>
+                    <a:pt x="5658179" y="1160131"/>
+                  </a:lnTo>
+                  <a:lnTo>
+                    <a:pt x="5729802" y="1087007"/>
+                  </a:lnTo>
+                  <a:lnTo>
+                    <a:pt x="5801424" y="1011738"/>
+                  </a:lnTo>
+                  <a:lnTo>
+                    <a:pt x="5873047" y="934260"/>
+                  </a:lnTo>
+                  <a:lnTo>
+                    <a:pt x="5944669" y="854510"/>
+                  </a:lnTo>
+                  <a:lnTo>
+                    <a:pt x="6016292" y="772420"/>
+                  </a:lnTo>
+                  <a:lnTo>
+                    <a:pt x="6087914" y="687921"/>
+                  </a:lnTo>
+                  <a:lnTo>
+                    <a:pt x="6159537" y="600944"/>
+                  </a:lnTo>
+                  <a:lnTo>
+                    <a:pt x="6231159" y="511415"/>
+                  </a:lnTo>
+                  <a:lnTo>
+                    <a:pt x="6302782" y="419259"/>
+                  </a:lnTo>
+                  <a:lnTo>
+                    <a:pt x="6374404" y="324400"/>
+                  </a:lnTo>
+                  <a:lnTo>
+                    <a:pt x="6446027" y="226757"/>
+                  </a:lnTo>
+                  <a:lnTo>
+                    <a:pt x="6517649" y="126251"/>
+                  </a:lnTo>
+                  <a:lnTo>
+                    <a:pt x="6589272" y="22795"/>
+                  </a:lnTo>
+                  <a:lnTo>
+                    <a:pt x="6604604" y="0"/>
                   </a:lnTo>
                 </a:path>
               </a:pathLst>

--- a/docs/plots/carbo/jx_carbo_linsubhr_dosedisc_grade3.pptx
+++ b/docs/plots/carbo/jx_carbo_linsubhr_dosedisc_grade3.pptx
@@ -3132,524 +3132,530 @@
           <p:spPr>
             <a:xfrm>
               <a:off x="1172049" y="1896563"/>
-              <a:ext cx="7090630" cy="3568900"/>
+              <a:ext cx="7090630" cy="3555132"/>
             </a:xfrm>
             <a:custGeom>
               <a:avLst/>
               <a:pathLst>
-                <a:path w="7090630" h="3568900">
+                <a:path w="7090630" h="3555132">
                   <a:moveTo>
-                    <a:pt x="0" y="2883163"/>
+                    <a:pt x="0" y="2961109"/>
                   </a:moveTo>
                   <a:lnTo>
-                    <a:pt x="71622" y="2880948"/>
-                  </a:lnTo>
-                  <a:lnTo>
-                    <a:pt x="143245" y="2878727"/>
-                  </a:lnTo>
-                  <a:lnTo>
-                    <a:pt x="214867" y="2876499"/>
-                  </a:lnTo>
-                  <a:lnTo>
-                    <a:pt x="286490" y="2874265"/>
-                  </a:lnTo>
-                  <a:lnTo>
-                    <a:pt x="358112" y="2872025"/>
-                  </a:lnTo>
-                  <a:lnTo>
-                    <a:pt x="429735" y="2869778"/>
-                  </a:lnTo>
-                  <a:lnTo>
-                    <a:pt x="501357" y="2867524"/>
-                  </a:lnTo>
-                  <a:lnTo>
-                    <a:pt x="572980" y="2865264"/>
-                  </a:lnTo>
-                  <a:lnTo>
-                    <a:pt x="644602" y="2862998"/>
-                  </a:lnTo>
-                  <a:lnTo>
-                    <a:pt x="716225" y="2860725"/>
-                  </a:lnTo>
-                  <a:lnTo>
-                    <a:pt x="787847" y="2858445"/>
-                  </a:lnTo>
-                  <a:lnTo>
-                    <a:pt x="859470" y="2856159"/>
-                  </a:lnTo>
-                  <a:lnTo>
-                    <a:pt x="931092" y="2853867"/>
-                  </a:lnTo>
-                  <a:lnTo>
-                    <a:pt x="1002715" y="2851567"/>
-                  </a:lnTo>
-                  <a:lnTo>
-                    <a:pt x="1074337" y="2849261"/>
-                  </a:lnTo>
-                  <a:lnTo>
-                    <a:pt x="1145960" y="2846949"/>
-                  </a:lnTo>
-                  <a:lnTo>
-                    <a:pt x="1217582" y="2844630"/>
-                  </a:lnTo>
-                  <a:lnTo>
-                    <a:pt x="1289205" y="2842304"/>
-                  </a:lnTo>
-                  <a:lnTo>
-                    <a:pt x="1360827" y="2839971"/>
-                  </a:lnTo>
-                  <a:lnTo>
-                    <a:pt x="1432450" y="2837632"/>
-                  </a:lnTo>
-                  <a:lnTo>
-                    <a:pt x="1504073" y="2835286"/>
-                  </a:lnTo>
-                  <a:lnTo>
-                    <a:pt x="1575695" y="2832933"/>
-                  </a:lnTo>
-                  <a:lnTo>
-                    <a:pt x="1647318" y="2830574"/>
-                  </a:lnTo>
-                  <a:lnTo>
-                    <a:pt x="1718940" y="2828207"/>
-                  </a:lnTo>
-                  <a:lnTo>
-                    <a:pt x="1790563" y="2825834"/>
-                  </a:lnTo>
-                  <a:lnTo>
-                    <a:pt x="1862185" y="2823454"/>
-                  </a:lnTo>
-                  <a:lnTo>
-                    <a:pt x="1933808" y="2821068"/>
-                  </a:lnTo>
-                  <a:lnTo>
-                    <a:pt x="2005430" y="2818674"/>
-                  </a:lnTo>
-                  <a:lnTo>
-                    <a:pt x="2077053" y="2816273"/>
-                  </a:lnTo>
-                  <a:lnTo>
-                    <a:pt x="2148675" y="2813866"/>
-                  </a:lnTo>
-                  <a:lnTo>
-                    <a:pt x="2220298" y="2811451"/>
-                  </a:lnTo>
-                  <a:lnTo>
-                    <a:pt x="2291920" y="2809030"/>
-                  </a:lnTo>
-                  <a:lnTo>
-                    <a:pt x="2363543" y="2806602"/>
-                  </a:lnTo>
-                  <a:lnTo>
-                    <a:pt x="2435165" y="2804166"/>
-                  </a:lnTo>
-                  <a:lnTo>
-                    <a:pt x="2506788" y="2801724"/>
-                  </a:lnTo>
-                  <a:lnTo>
-                    <a:pt x="2578410" y="2799275"/>
-                  </a:lnTo>
-                  <a:lnTo>
-                    <a:pt x="2650033" y="2796818"/>
-                  </a:lnTo>
-                  <a:lnTo>
-                    <a:pt x="2721655" y="2794355"/>
-                  </a:lnTo>
-                  <a:lnTo>
-                    <a:pt x="2793278" y="2791884"/>
-                  </a:lnTo>
-                  <a:lnTo>
-                    <a:pt x="2864901" y="2789407"/>
-                  </a:lnTo>
-                  <a:lnTo>
-                    <a:pt x="2936523" y="2786922"/>
-                  </a:lnTo>
-                  <a:lnTo>
-                    <a:pt x="3008146" y="2784430"/>
-                  </a:lnTo>
-                  <a:lnTo>
-                    <a:pt x="3079768" y="2762951"/>
-                  </a:lnTo>
-                  <a:lnTo>
-                    <a:pt x="3151391" y="2712688"/>
-                  </a:lnTo>
-                  <a:lnTo>
-                    <a:pt x="3223013" y="2659586"/>
-                  </a:lnTo>
-                  <a:lnTo>
-                    <a:pt x="3294636" y="2603484"/>
-                  </a:lnTo>
-                  <a:lnTo>
-                    <a:pt x="3366258" y="2544212"/>
-                  </a:lnTo>
-                  <a:lnTo>
-                    <a:pt x="3437881" y="2481592"/>
-                  </a:lnTo>
-                  <a:lnTo>
-                    <a:pt x="3509503" y="2415434"/>
-                  </a:lnTo>
-                  <a:lnTo>
-                    <a:pt x="3581126" y="2345538"/>
-                  </a:lnTo>
-                  <a:lnTo>
-                    <a:pt x="3652748" y="2271694"/>
-                  </a:lnTo>
-                  <a:lnTo>
-                    <a:pt x="3724371" y="2193678"/>
-                  </a:lnTo>
-                  <a:lnTo>
-                    <a:pt x="3795993" y="2111254"/>
-                  </a:lnTo>
-                  <a:lnTo>
-                    <a:pt x="3867616" y="2024174"/>
-                  </a:lnTo>
-                  <a:lnTo>
-                    <a:pt x="3939238" y="1932175"/>
-                  </a:lnTo>
-                  <a:lnTo>
-                    <a:pt x="4010861" y="1834978"/>
-                  </a:lnTo>
-                  <a:lnTo>
-                    <a:pt x="4082483" y="1732290"/>
-                  </a:lnTo>
-                  <a:lnTo>
-                    <a:pt x="4154106" y="1623800"/>
-                  </a:lnTo>
-                  <a:lnTo>
-                    <a:pt x="4225729" y="1509182"/>
-                  </a:lnTo>
-                  <a:lnTo>
-                    <a:pt x="4297351" y="1388088"/>
-                  </a:lnTo>
-                  <a:lnTo>
-                    <a:pt x="4368974" y="1260153"/>
-                  </a:lnTo>
-                  <a:lnTo>
-                    <a:pt x="4440596" y="1124990"/>
-                  </a:lnTo>
-                  <a:lnTo>
-                    <a:pt x="4512219" y="982192"/>
-                  </a:lnTo>
-                  <a:lnTo>
-                    <a:pt x="4583841" y="831326"/>
-                  </a:lnTo>
-                  <a:lnTo>
-                    <a:pt x="4655464" y="671937"/>
-                  </a:lnTo>
-                  <a:lnTo>
-                    <a:pt x="4727086" y="503544"/>
-                  </a:lnTo>
-                  <a:lnTo>
-                    <a:pt x="4798709" y="325637"/>
-                  </a:lnTo>
-                  <a:lnTo>
-                    <a:pt x="4870331" y="137680"/>
-                  </a:lnTo>
-                  <a:lnTo>
-                    <a:pt x="4919990" y="0"/>
+                    <a:pt x="71622" y="2957377"/>
+                  </a:lnTo>
+                  <a:lnTo>
+                    <a:pt x="143245" y="2953625"/>
+                  </a:lnTo>
+                  <a:lnTo>
+                    <a:pt x="214867" y="2949852"/>
+                  </a:lnTo>
+                  <a:lnTo>
+                    <a:pt x="286490" y="2946060"/>
+                  </a:lnTo>
+                  <a:lnTo>
+                    <a:pt x="358112" y="2942246"/>
+                  </a:lnTo>
+                  <a:lnTo>
+                    <a:pt x="429735" y="2938413"/>
+                  </a:lnTo>
+                  <a:lnTo>
+                    <a:pt x="501357" y="2934558"/>
+                  </a:lnTo>
+                  <a:lnTo>
+                    <a:pt x="572980" y="2930683"/>
+                  </a:lnTo>
+                  <a:lnTo>
+                    <a:pt x="644602" y="2926786"/>
+                  </a:lnTo>
+                  <a:lnTo>
+                    <a:pt x="716225" y="2922869"/>
+                  </a:lnTo>
+                  <a:lnTo>
+                    <a:pt x="787847" y="2918931"/>
+                  </a:lnTo>
+                  <a:lnTo>
+                    <a:pt x="859470" y="2914971"/>
+                  </a:lnTo>
+                  <a:lnTo>
+                    <a:pt x="931092" y="2910990"/>
+                  </a:lnTo>
+                  <a:lnTo>
+                    <a:pt x="1002715" y="2906987"/>
+                  </a:lnTo>
+                  <a:lnTo>
+                    <a:pt x="1074337" y="2902963"/>
+                  </a:lnTo>
+                  <a:lnTo>
+                    <a:pt x="1145960" y="2898917"/>
+                  </a:lnTo>
+                  <a:lnTo>
+                    <a:pt x="1217582" y="2894850"/>
+                  </a:lnTo>
+                  <a:lnTo>
+                    <a:pt x="1289205" y="2890760"/>
+                  </a:lnTo>
+                  <a:lnTo>
+                    <a:pt x="1360827" y="2886648"/>
+                  </a:lnTo>
+                  <a:lnTo>
+                    <a:pt x="1432450" y="2882514"/>
+                  </a:lnTo>
+                  <a:lnTo>
+                    <a:pt x="1504073" y="2878358"/>
+                  </a:lnTo>
+                  <a:lnTo>
+                    <a:pt x="1575695" y="2874179"/>
+                  </a:lnTo>
+                  <a:lnTo>
+                    <a:pt x="1647318" y="2869978"/>
+                  </a:lnTo>
+                  <a:lnTo>
+                    <a:pt x="1718940" y="2865754"/>
+                  </a:lnTo>
+                  <a:lnTo>
+                    <a:pt x="1790563" y="2861508"/>
+                  </a:lnTo>
+                  <a:lnTo>
+                    <a:pt x="1862185" y="2857238"/>
+                  </a:lnTo>
+                  <a:lnTo>
+                    <a:pt x="1933808" y="2852945"/>
+                  </a:lnTo>
+                  <a:lnTo>
+                    <a:pt x="2005430" y="2848630"/>
+                  </a:lnTo>
+                  <a:lnTo>
+                    <a:pt x="2077053" y="2844291"/>
+                  </a:lnTo>
+                  <a:lnTo>
+                    <a:pt x="2148675" y="2839928"/>
+                  </a:lnTo>
+                  <a:lnTo>
+                    <a:pt x="2220298" y="2835542"/>
+                  </a:lnTo>
+                  <a:lnTo>
+                    <a:pt x="2291920" y="2831132"/>
+                  </a:lnTo>
+                  <a:lnTo>
+                    <a:pt x="2363543" y="2826699"/>
+                  </a:lnTo>
+                  <a:lnTo>
+                    <a:pt x="2435165" y="2822241"/>
+                  </a:lnTo>
+                  <a:lnTo>
+                    <a:pt x="2506788" y="2817760"/>
+                  </a:lnTo>
+                  <a:lnTo>
+                    <a:pt x="2578410" y="2813254"/>
+                  </a:lnTo>
+                  <a:lnTo>
+                    <a:pt x="2650033" y="2808724"/>
+                  </a:lnTo>
+                  <a:lnTo>
+                    <a:pt x="2721655" y="2804170"/>
+                  </a:lnTo>
+                  <a:lnTo>
+                    <a:pt x="2793278" y="2799591"/>
+                  </a:lnTo>
+                  <a:lnTo>
+                    <a:pt x="2864901" y="2794987"/>
+                  </a:lnTo>
+                  <a:lnTo>
+                    <a:pt x="2936523" y="2790358"/>
+                  </a:lnTo>
+                  <a:lnTo>
+                    <a:pt x="3008146" y="2785705"/>
+                  </a:lnTo>
+                  <a:lnTo>
+                    <a:pt x="3079768" y="2764267"/>
+                  </a:lnTo>
+                  <a:lnTo>
+                    <a:pt x="3151391" y="2717427"/>
+                  </a:lnTo>
+                  <a:lnTo>
+                    <a:pt x="3223013" y="2668118"/>
+                  </a:lnTo>
+                  <a:lnTo>
+                    <a:pt x="3294636" y="2616208"/>
+                  </a:lnTo>
+                  <a:lnTo>
+                    <a:pt x="3366258" y="2561562"/>
+                  </a:lnTo>
+                  <a:lnTo>
+                    <a:pt x="3437881" y="2504035"/>
+                  </a:lnTo>
+                  <a:lnTo>
+                    <a:pt x="3509503" y="2443475"/>
+                  </a:lnTo>
+                  <a:lnTo>
+                    <a:pt x="3581126" y="2379721"/>
+                  </a:lnTo>
+                  <a:lnTo>
+                    <a:pt x="3652748" y="2312606"/>
+                  </a:lnTo>
+                  <a:lnTo>
+                    <a:pt x="3724371" y="2241953"/>
+                  </a:lnTo>
+                  <a:lnTo>
+                    <a:pt x="3795993" y="2167574"/>
+                  </a:lnTo>
+                  <a:lnTo>
+                    <a:pt x="3867616" y="2089274"/>
+                  </a:lnTo>
+                  <a:lnTo>
+                    <a:pt x="3939238" y="2006845"/>
+                  </a:lnTo>
+                  <a:lnTo>
+                    <a:pt x="4010861" y="1920070"/>
+                  </a:lnTo>
+                  <a:lnTo>
+                    <a:pt x="4082483" y="1828720"/>
+                  </a:lnTo>
+                  <a:lnTo>
+                    <a:pt x="4154106" y="1732554"/>
+                  </a:lnTo>
+                  <a:lnTo>
+                    <a:pt x="4225729" y="1631317"/>
+                  </a:lnTo>
+                  <a:lnTo>
+                    <a:pt x="4297351" y="1524743"/>
+                  </a:lnTo>
+                  <a:lnTo>
+                    <a:pt x="4368974" y="1412549"/>
+                  </a:lnTo>
+                  <a:lnTo>
+                    <a:pt x="4440596" y="1294440"/>
+                  </a:lnTo>
+                  <a:lnTo>
+                    <a:pt x="4512219" y="1170104"/>
+                  </a:lnTo>
+                  <a:lnTo>
+                    <a:pt x="4583841" y="1039212"/>
+                  </a:lnTo>
+                  <a:lnTo>
+                    <a:pt x="4655464" y="901418"/>
+                  </a:lnTo>
+                  <a:lnTo>
+                    <a:pt x="4727086" y="756360"/>
+                  </a:lnTo>
+                  <a:lnTo>
+                    <a:pt x="4798709" y="603653"/>
+                  </a:lnTo>
+                  <a:lnTo>
+                    <a:pt x="4870331" y="442895"/>
+                  </a:lnTo>
+                  <a:lnTo>
+                    <a:pt x="4941954" y="273661"/>
+                  </a:lnTo>
+                  <a:lnTo>
+                    <a:pt x="5013576" y="95504"/>
+                  </a:lnTo>
+                  <a:lnTo>
+                    <a:pt x="5050048" y="0"/>
                   </a:lnTo>
                   <a:lnTo>
                     <a:pt x="7090630" y="0"/>
                   </a:lnTo>
                   <a:lnTo>
-                    <a:pt x="7090630" y="2629867"/>
-                  </a:lnTo>
-                  <a:lnTo>
-                    <a:pt x="7019007" y="2632803"/>
-                  </a:lnTo>
-                  <a:lnTo>
-                    <a:pt x="6947385" y="2635730"/>
-                  </a:lnTo>
-                  <a:lnTo>
-                    <a:pt x="6875762" y="2638649"/>
-                  </a:lnTo>
-                  <a:lnTo>
-                    <a:pt x="6804139" y="2641559"/>
-                  </a:lnTo>
-                  <a:lnTo>
-                    <a:pt x="6732517" y="2644461"/>
-                  </a:lnTo>
-                  <a:lnTo>
-                    <a:pt x="6660894" y="2647355"/>
-                  </a:lnTo>
-                  <a:lnTo>
-                    <a:pt x="6589272" y="2650240"/>
-                  </a:lnTo>
-                  <a:lnTo>
-                    <a:pt x="6517649" y="2653118"/>
-                  </a:lnTo>
-                  <a:lnTo>
-                    <a:pt x="6446027" y="2655986"/>
-                  </a:lnTo>
-                  <a:lnTo>
-                    <a:pt x="6374404" y="2658847"/>
-                  </a:lnTo>
-                  <a:lnTo>
-                    <a:pt x="6302782" y="2661699"/>
-                  </a:lnTo>
-                  <a:lnTo>
-                    <a:pt x="6231159" y="2664544"/>
-                  </a:lnTo>
-                  <a:lnTo>
-                    <a:pt x="6159537" y="2667380"/>
-                  </a:lnTo>
-                  <a:lnTo>
-                    <a:pt x="6087914" y="2670208"/>
-                  </a:lnTo>
-                  <a:lnTo>
-                    <a:pt x="6016292" y="2673027"/>
-                  </a:lnTo>
-                  <a:lnTo>
-                    <a:pt x="5944669" y="2675839"/>
-                  </a:lnTo>
-                  <a:lnTo>
-                    <a:pt x="5873047" y="2678643"/>
-                  </a:lnTo>
-                  <a:lnTo>
-                    <a:pt x="5801424" y="2681438"/>
-                  </a:lnTo>
-                  <a:lnTo>
-                    <a:pt x="5729802" y="2684226"/>
-                  </a:lnTo>
-                  <a:lnTo>
-                    <a:pt x="5658179" y="2687006"/>
-                  </a:lnTo>
-                  <a:lnTo>
-                    <a:pt x="5586557" y="2689777"/>
-                  </a:lnTo>
-                  <a:lnTo>
-                    <a:pt x="5514934" y="2692541"/>
-                  </a:lnTo>
-                  <a:lnTo>
-                    <a:pt x="5443311" y="2695297"/>
-                  </a:lnTo>
-                  <a:lnTo>
-                    <a:pt x="5371689" y="2698044"/>
-                  </a:lnTo>
-                  <a:lnTo>
-                    <a:pt x="5300066" y="2700784"/>
-                  </a:lnTo>
-                  <a:lnTo>
-                    <a:pt x="5228444" y="2703516"/>
-                  </a:lnTo>
-                  <a:lnTo>
-                    <a:pt x="5156821" y="2706240"/>
-                  </a:lnTo>
-                  <a:lnTo>
-                    <a:pt x="5085199" y="2708957"/>
-                  </a:lnTo>
-                  <a:lnTo>
-                    <a:pt x="5013576" y="2711665"/>
-                  </a:lnTo>
-                  <a:lnTo>
-                    <a:pt x="4941954" y="2714366"/>
-                  </a:lnTo>
-                  <a:lnTo>
-                    <a:pt x="4870331" y="2717059"/>
-                  </a:lnTo>
-                  <a:lnTo>
-                    <a:pt x="4798709" y="2719745"/>
-                  </a:lnTo>
-                  <a:lnTo>
-                    <a:pt x="4727086" y="2722422"/>
-                  </a:lnTo>
-                  <a:lnTo>
-                    <a:pt x="4655464" y="2725092"/>
-                  </a:lnTo>
-                  <a:lnTo>
-                    <a:pt x="4583841" y="2727755"/>
-                  </a:lnTo>
-                  <a:lnTo>
-                    <a:pt x="4512219" y="2730409"/>
-                  </a:lnTo>
-                  <a:lnTo>
-                    <a:pt x="4440596" y="2733056"/>
-                  </a:lnTo>
-                  <a:lnTo>
-                    <a:pt x="4368974" y="2735696"/>
-                  </a:lnTo>
-                  <a:lnTo>
-                    <a:pt x="4297351" y="2738327"/>
-                  </a:lnTo>
-                  <a:lnTo>
-                    <a:pt x="4225729" y="2740952"/>
-                  </a:lnTo>
-                  <a:lnTo>
-                    <a:pt x="4154106" y="2743569"/>
-                  </a:lnTo>
-                  <a:lnTo>
-                    <a:pt x="4082483" y="2746178"/>
-                  </a:lnTo>
-                  <a:lnTo>
-                    <a:pt x="4010861" y="2748780"/>
-                  </a:lnTo>
-                  <a:lnTo>
-                    <a:pt x="3939238" y="2751374"/>
-                  </a:lnTo>
-                  <a:lnTo>
-                    <a:pt x="3867616" y="2753961"/>
-                  </a:lnTo>
-                  <a:lnTo>
-                    <a:pt x="3795993" y="2756540"/>
-                  </a:lnTo>
-                  <a:lnTo>
-                    <a:pt x="3724371" y="2759112"/>
-                  </a:lnTo>
-                  <a:lnTo>
-                    <a:pt x="3652748" y="2761677"/>
-                  </a:lnTo>
-                  <a:lnTo>
-                    <a:pt x="3581126" y="2764234"/>
-                  </a:lnTo>
-                  <a:lnTo>
-                    <a:pt x="3509503" y="2766784"/>
-                  </a:lnTo>
-                  <a:lnTo>
-                    <a:pt x="3437881" y="2769327"/>
-                  </a:lnTo>
-                  <a:lnTo>
-                    <a:pt x="3366258" y="2771862"/>
-                  </a:lnTo>
-                  <a:lnTo>
-                    <a:pt x="3294636" y="2774390"/>
-                  </a:lnTo>
-                  <a:lnTo>
-                    <a:pt x="3223013" y="2776911"/>
-                  </a:lnTo>
-                  <a:lnTo>
-                    <a:pt x="3151391" y="2779424"/>
-                  </a:lnTo>
-                  <a:lnTo>
-                    <a:pt x="3079768" y="2781931"/>
-                  </a:lnTo>
-                  <a:lnTo>
-                    <a:pt x="3008146" y="2810526"/>
-                  </a:lnTo>
-                  <a:lnTo>
-                    <a:pt x="2936523" y="2855557"/>
-                  </a:lnTo>
-                  <a:lnTo>
-                    <a:pt x="2864901" y="2898180"/>
-                  </a:lnTo>
-                  <a:lnTo>
-                    <a:pt x="2793278" y="2938524"/>
-                  </a:lnTo>
-                  <a:lnTo>
-                    <a:pt x="2721655" y="2976710"/>
-                  </a:lnTo>
-                  <a:lnTo>
-                    <a:pt x="2650033" y="3012855"/>
-                  </a:lnTo>
-                  <a:lnTo>
-                    <a:pt x="2578410" y="3047066"/>
-                  </a:lnTo>
-                  <a:lnTo>
-                    <a:pt x="2506788" y="3079449"/>
-                  </a:lnTo>
-                  <a:lnTo>
-                    <a:pt x="2435165" y="3110100"/>
-                  </a:lnTo>
-                  <a:lnTo>
-                    <a:pt x="2363543" y="3139111"/>
-                  </a:lnTo>
-                  <a:lnTo>
-                    <a:pt x="2291920" y="3166572"/>
-                  </a:lnTo>
-                  <a:lnTo>
-                    <a:pt x="2220298" y="3192564"/>
-                  </a:lnTo>
-                  <a:lnTo>
-                    <a:pt x="2148675" y="3217166"/>
-                  </a:lnTo>
-                  <a:lnTo>
-                    <a:pt x="2077053" y="3240452"/>
-                  </a:lnTo>
-                  <a:lnTo>
-                    <a:pt x="2005430" y="3262494"/>
-                  </a:lnTo>
-                  <a:lnTo>
-                    <a:pt x="1933808" y="3283356"/>
-                  </a:lnTo>
-                  <a:lnTo>
-                    <a:pt x="1862185" y="3303103"/>
-                  </a:lnTo>
-                  <a:lnTo>
-                    <a:pt x="1790563" y="3321794"/>
-                  </a:lnTo>
-                  <a:lnTo>
-                    <a:pt x="1718940" y="3339486"/>
-                  </a:lnTo>
-                  <a:lnTo>
-                    <a:pt x="1647318" y="3356232"/>
-                  </a:lnTo>
-                  <a:lnTo>
-                    <a:pt x="1575695" y="3372082"/>
-                  </a:lnTo>
-                  <a:lnTo>
-                    <a:pt x="1504073" y="3387085"/>
-                  </a:lnTo>
-                  <a:lnTo>
-                    <a:pt x="1432450" y="3401285"/>
-                  </a:lnTo>
-                  <a:lnTo>
-                    <a:pt x="1360827" y="3414726"/>
-                  </a:lnTo>
-                  <a:lnTo>
-                    <a:pt x="1289205" y="3427448"/>
-                  </a:lnTo>
-                  <a:lnTo>
-                    <a:pt x="1217582" y="3439490"/>
-                  </a:lnTo>
-                  <a:lnTo>
-                    <a:pt x="1145960" y="3450888"/>
-                  </a:lnTo>
-                  <a:lnTo>
-                    <a:pt x="1074337" y="3461677"/>
-                  </a:lnTo>
-                  <a:lnTo>
-                    <a:pt x="1002715" y="3471888"/>
-                  </a:lnTo>
-                  <a:lnTo>
-                    <a:pt x="931092" y="3481554"/>
-                  </a:lnTo>
-                  <a:lnTo>
-                    <a:pt x="859470" y="3490703"/>
-                  </a:lnTo>
-                  <a:lnTo>
-                    <a:pt x="787847" y="3499362"/>
-                  </a:lnTo>
-                  <a:lnTo>
-                    <a:pt x="716225" y="3507559"/>
-                  </a:lnTo>
-                  <a:lnTo>
-                    <a:pt x="644602" y="3515317"/>
-                  </a:lnTo>
-                  <a:lnTo>
-                    <a:pt x="572980" y="3522660"/>
-                  </a:lnTo>
-                  <a:lnTo>
-                    <a:pt x="501357" y="3529611"/>
-                  </a:lnTo>
-                  <a:lnTo>
-                    <a:pt x="429735" y="3536190"/>
-                  </a:lnTo>
-                  <a:lnTo>
-                    <a:pt x="358112" y="3542417"/>
-                  </a:lnTo>
-                  <a:lnTo>
-                    <a:pt x="286490" y="3548311"/>
-                  </a:lnTo>
-                  <a:lnTo>
-                    <a:pt x="214867" y="3553890"/>
-                  </a:lnTo>
-                  <a:lnTo>
-                    <a:pt x="143245" y="3559171"/>
-                  </a:lnTo>
-                  <a:lnTo>
-                    <a:pt x="71622" y="3564169"/>
-                  </a:lnTo>
-                  <a:lnTo>
-                    <a:pt x="0" y="3568900"/>
+                    <a:pt x="7090630" y="2474426"/>
+                  </a:lnTo>
+                  <a:lnTo>
+                    <a:pt x="7019007" y="2480750"/>
+                  </a:lnTo>
+                  <a:lnTo>
+                    <a:pt x="6947385" y="2487041"/>
+                  </a:lnTo>
+                  <a:lnTo>
+                    <a:pt x="6875762" y="2493297"/>
+                  </a:lnTo>
+                  <a:lnTo>
+                    <a:pt x="6804139" y="2499521"/>
+                  </a:lnTo>
+                  <a:lnTo>
+                    <a:pt x="6732517" y="2505710"/>
+                  </a:lnTo>
+                  <a:lnTo>
+                    <a:pt x="6660894" y="2511867"/>
+                  </a:lnTo>
+                  <a:lnTo>
+                    <a:pt x="6589272" y="2517990"/>
+                  </a:lnTo>
+                  <a:lnTo>
+                    <a:pt x="6517649" y="2524081"/>
+                  </a:lnTo>
+                  <a:lnTo>
+                    <a:pt x="6446027" y="2530139"/>
+                  </a:lnTo>
+                  <a:lnTo>
+                    <a:pt x="6374404" y="2536164"/>
+                  </a:lnTo>
+                  <a:lnTo>
+                    <a:pt x="6302782" y="2542157"/>
+                  </a:lnTo>
+                  <a:lnTo>
+                    <a:pt x="6231159" y="2548118"/>
+                  </a:lnTo>
+                  <a:lnTo>
+                    <a:pt x="6159537" y="2554047"/>
+                  </a:lnTo>
+                  <a:lnTo>
+                    <a:pt x="6087914" y="2559944"/>
+                  </a:lnTo>
+                  <a:lnTo>
+                    <a:pt x="6016292" y="2565810"/>
+                  </a:lnTo>
+                  <a:lnTo>
+                    <a:pt x="5944669" y="2571644"/>
+                  </a:lnTo>
+                  <a:lnTo>
+                    <a:pt x="5873047" y="2577446"/>
+                  </a:lnTo>
+                  <a:lnTo>
+                    <a:pt x="5801424" y="2583218"/>
+                  </a:lnTo>
+                  <a:lnTo>
+                    <a:pt x="5729802" y="2588958"/>
+                  </a:lnTo>
+                  <a:lnTo>
+                    <a:pt x="5658179" y="2594668"/>
+                  </a:lnTo>
+                  <a:lnTo>
+                    <a:pt x="5586557" y="2600347"/>
+                  </a:lnTo>
+                  <a:lnTo>
+                    <a:pt x="5514934" y="2605995"/>
+                  </a:lnTo>
+                  <a:lnTo>
+                    <a:pt x="5443311" y="2611614"/>
+                  </a:lnTo>
+                  <a:lnTo>
+                    <a:pt x="5371689" y="2617202"/>
+                  </a:lnTo>
+                  <a:lnTo>
+                    <a:pt x="5300066" y="2622760"/>
+                  </a:lnTo>
+                  <a:lnTo>
+                    <a:pt x="5228444" y="2628288"/>
+                  </a:lnTo>
+                  <a:lnTo>
+                    <a:pt x="5156821" y="2633786"/>
+                  </a:lnTo>
+                  <a:lnTo>
+                    <a:pt x="5085199" y="2639256"/>
+                  </a:lnTo>
+                  <a:lnTo>
+                    <a:pt x="5013576" y="2644695"/>
+                  </a:lnTo>
+                  <a:lnTo>
+                    <a:pt x="4941954" y="2650106"/>
+                  </a:lnTo>
+                  <a:lnTo>
+                    <a:pt x="4870331" y="2655487"/>
+                  </a:lnTo>
+                  <a:lnTo>
+                    <a:pt x="4798709" y="2660840"/>
+                  </a:lnTo>
+                  <a:lnTo>
+                    <a:pt x="4727086" y="2666164"/>
+                  </a:lnTo>
+                  <a:lnTo>
+                    <a:pt x="4655464" y="2671459"/>
+                  </a:lnTo>
+                  <a:lnTo>
+                    <a:pt x="4583841" y="2676726"/>
+                  </a:lnTo>
+                  <a:lnTo>
+                    <a:pt x="4512219" y="2681964"/>
+                  </a:lnTo>
+                  <a:lnTo>
+                    <a:pt x="4440596" y="2687175"/>
+                  </a:lnTo>
+                  <a:lnTo>
+                    <a:pt x="4368974" y="2692357"/>
+                  </a:lnTo>
+                  <a:lnTo>
+                    <a:pt x="4297351" y="2697512"/>
+                  </a:lnTo>
+                  <a:lnTo>
+                    <a:pt x="4225729" y="2702639"/>
+                  </a:lnTo>
+                  <a:lnTo>
+                    <a:pt x="4154106" y="2707738"/>
+                  </a:lnTo>
+                  <a:lnTo>
+                    <a:pt x="4082483" y="2712810"/>
+                  </a:lnTo>
+                  <a:lnTo>
+                    <a:pt x="4010861" y="2717855"/>
+                  </a:lnTo>
+                  <a:lnTo>
+                    <a:pt x="3939238" y="2722873"/>
+                  </a:lnTo>
+                  <a:lnTo>
+                    <a:pt x="3867616" y="2727864"/>
+                  </a:lnTo>
+                  <a:lnTo>
+                    <a:pt x="3795993" y="2732828"/>
+                  </a:lnTo>
+                  <a:lnTo>
+                    <a:pt x="3724371" y="2737765"/>
+                  </a:lnTo>
+                  <a:lnTo>
+                    <a:pt x="3652748" y="2742676"/>
+                  </a:lnTo>
+                  <a:lnTo>
+                    <a:pt x="3581126" y="2747561"/>
+                  </a:lnTo>
+                  <a:lnTo>
+                    <a:pt x="3509503" y="2752419"/>
+                  </a:lnTo>
+                  <a:lnTo>
+                    <a:pt x="3437881" y="2757251"/>
+                  </a:lnTo>
+                  <a:lnTo>
+                    <a:pt x="3366258" y="2762057"/>
+                  </a:lnTo>
+                  <a:lnTo>
+                    <a:pt x="3294636" y="2766838"/>
+                  </a:lnTo>
+                  <a:lnTo>
+                    <a:pt x="3223013" y="2771593"/>
+                  </a:lnTo>
+                  <a:lnTo>
+                    <a:pt x="3151391" y="2776322"/>
+                  </a:lnTo>
+                  <a:lnTo>
+                    <a:pt x="3079768" y="2781026"/>
+                  </a:lnTo>
+                  <a:lnTo>
+                    <a:pt x="3008146" y="2808760"/>
+                  </a:lnTo>
+                  <a:lnTo>
+                    <a:pt x="2936523" y="2851026"/>
+                  </a:lnTo>
+                  <a:lnTo>
+                    <a:pt x="2864901" y="2891174"/>
+                  </a:lnTo>
+                  <a:lnTo>
+                    <a:pt x="2793278" y="2929312"/>
+                  </a:lnTo>
+                  <a:lnTo>
+                    <a:pt x="2721655" y="2965539"/>
+                  </a:lnTo>
+                  <a:lnTo>
+                    <a:pt x="2650033" y="2999952"/>
+                  </a:lnTo>
+                  <a:lnTo>
+                    <a:pt x="2578410" y="3032642"/>
+                  </a:lnTo>
+                  <a:lnTo>
+                    <a:pt x="2506788" y="3063694"/>
+                  </a:lnTo>
+                  <a:lnTo>
+                    <a:pt x="2435165" y="3093192"/>
+                  </a:lnTo>
+                  <a:lnTo>
+                    <a:pt x="2363543" y="3121211"/>
+                  </a:lnTo>
+                  <a:lnTo>
+                    <a:pt x="2291920" y="3147828"/>
+                  </a:lnTo>
+                  <a:lnTo>
+                    <a:pt x="2220298" y="3173111"/>
+                  </a:lnTo>
+                  <a:lnTo>
+                    <a:pt x="2148675" y="3197128"/>
+                  </a:lnTo>
+                  <a:lnTo>
+                    <a:pt x="2077053" y="3219942"/>
+                  </a:lnTo>
+                  <a:lnTo>
+                    <a:pt x="2005430" y="3241614"/>
+                  </a:lnTo>
+                  <a:lnTo>
+                    <a:pt x="1933808" y="3262200"/>
+                  </a:lnTo>
+                  <a:lnTo>
+                    <a:pt x="1862185" y="3281755"/>
+                  </a:lnTo>
+                  <a:lnTo>
+                    <a:pt x="1790563" y="3300331"/>
+                  </a:lnTo>
+                  <a:lnTo>
+                    <a:pt x="1718940" y="3317976"/>
+                  </a:lnTo>
+                  <a:lnTo>
+                    <a:pt x="1647318" y="3334738"/>
+                  </a:lnTo>
+                  <a:lnTo>
+                    <a:pt x="1575695" y="3350660"/>
+                  </a:lnTo>
+                  <a:lnTo>
+                    <a:pt x="1504073" y="3365784"/>
+                  </a:lnTo>
+                  <a:lnTo>
+                    <a:pt x="1432450" y="3380152"/>
+                  </a:lnTo>
+                  <a:lnTo>
+                    <a:pt x="1360827" y="3393799"/>
+                  </a:lnTo>
+                  <a:lnTo>
+                    <a:pt x="1289205" y="3406763"/>
+                  </a:lnTo>
+                  <a:lnTo>
+                    <a:pt x="1217582" y="3419078"/>
+                  </a:lnTo>
+                  <a:lnTo>
+                    <a:pt x="1145960" y="3430776"/>
+                  </a:lnTo>
+                  <a:lnTo>
+                    <a:pt x="1074337" y="3441888"/>
+                  </a:lnTo>
+                  <a:lnTo>
+                    <a:pt x="1002715" y="3452443"/>
+                  </a:lnTo>
+                  <a:lnTo>
+                    <a:pt x="931092" y="3462470"/>
+                  </a:lnTo>
+                  <a:lnTo>
+                    <a:pt x="859470" y="3471995"/>
+                  </a:lnTo>
+                  <a:lnTo>
+                    <a:pt x="787847" y="3481043"/>
+                  </a:lnTo>
+                  <a:lnTo>
+                    <a:pt x="716225" y="3489637"/>
+                  </a:lnTo>
+                  <a:lnTo>
+                    <a:pt x="644602" y="3497801"/>
+                  </a:lnTo>
+                  <a:lnTo>
+                    <a:pt x="572980" y="3505556"/>
+                  </a:lnTo>
+                  <a:lnTo>
+                    <a:pt x="501357" y="3512923"/>
+                  </a:lnTo>
+                  <a:lnTo>
+                    <a:pt x="429735" y="3519921"/>
+                  </a:lnTo>
+                  <a:lnTo>
+                    <a:pt x="358112" y="3526568"/>
+                  </a:lnTo>
+                  <a:lnTo>
+                    <a:pt x="286490" y="3532883"/>
+                  </a:lnTo>
+                  <a:lnTo>
+                    <a:pt x="214867" y="3538881"/>
+                  </a:lnTo>
+                  <a:lnTo>
+                    <a:pt x="143245" y="3544578"/>
+                  </a:lnTo>
+                  <a:lnTo>
+                    <a:pt x="71622" y="3549991"/>
+                  </a:lnTo>
+                  <a:lnTo>
+                    <a:pt x="0" y="3555132"/>
                   </a:lnTo>
                   <a:close/>
                 </a:path>
@@ -3676,221 +3682,227 @@
           <p:spPr>
             <a:xfrm>
               <a:off x="1172049" y="1896563"/>
-              <a:ext cx="4919990" cy="2883163"/>
+              <a:ext cx="5050048" cy="2961109"/>
             </a:xfrm>
             <a:custGeom>
               <a:avLst/>
               <a:pathLst>
-                <a:path w="4919990" h="2883163">
+                <a:path w="5050048" h="2961109">
                   <a:moveTo>
-                    <a:pt x="0" y="2883163"/>
+                    <a:pt x="0" y="2961109"/>
                   </a:moveTo>
                   <a:lnTo>
-                    <a:pt x="71622" y="2880948"/>
-                  </a:lnTo>
-                  <a:lnTo>
-                    <a:pt x="143245" y="2878727"/>
-                  </a:lnTo>
-                  <a:lnTo>
-                    <a:pt x="214867" y="2876499"/>
-                  </a:lnTo>
-                  <a:lnTo>
-                    <a:pt x="286490" y="2874265"/>
-                  </a:lnTo>
-                  <a:lnTo>
-                    <a:pt x="358112" y="2872025"/>
-                  </a:lnTo>
-                  <a:lnTo>
-                    <a:pt x="429735" y="2869778"/>
-                  </a:lnTo>
-                  <a:lnTo>
-                    <a:pt x="501357" y="2867524"/>
-                  </a:lnTo>
-                  <a:lnTo>
-                    <a:pt x="572980" y="2865264"/>
-                  </a:lnTo>
-                  <a:lnTo>
-                    <a:pt x="644602" y="2862998"/>
-                  </a:lnTo>
-                  <a:lnTo>
-                    <a:pt x="716225" y="2860725"/>
-                  </a:lnTo>
-                  <a:lnTo>
-                    <a:pt x="787847" y="2858445"/>
-                  </a:lnTo>
-                  <a:lnTo>
-                    <a:pt x="859470" y="2856159"/>
-                  </a:lnTo>
-                  <a:lnTo>
-                    <a:pt x="931092" y="2853867"/>
-                  </a:lnTo>
-                  <a:lnTo>
-                    <a:pt x="1002715" y="2851567"/>
-                  </a:lnTo>
-                  <a:lnTo>
-                    <a:pt x="1074337" y="2849261"/>
-                  </a:lnTo>
-                  <a:lnTo>
-                    <a:pt x="1145960" y="2846949"/>
-                  </a:lnTo>
-                  <a:lnTo>
-                    <a:pt x="1217582" y="2844630"/>
-                  </a:lnTo>
-                  <a:lnTo>
-                    <a:pt x="1289205" y="2842304"/>
-                  </a:lnTo>
-                  <a:lnTo>
-                    <a:pt x="1360827" y="2839971"/>
-                  </a:lnTo>
-                  <a:lnTo>
-                    <a:pt x="1432450" y="2837632"/>
-                  </a:lnTo>
-                  <a:lnTo>
-                    <a:pt x="1504073" y="2835286"/>
-                  </a:lnTo>
-                  <a:lnTo>
-                    <a:pt x="1575695" y="2832933"/>
-                  </a:lnTo>
-                  <a:lnTo>
-                    <a:pt x="1647318" y="2830574"/>
-                  </a:lnTo>
-                  <a:lnTo>
-                    <a:pt x="1718940" y="2828207"/>
-                  </a:lnTo>
-                  <a:lnTo>
-                    <a:pt x="1790563" y="2825834"/>
-                  </a:lnTo>
-                  <a:lnTo>
-                    <a:pt x="1862185" y="2823454"/>
-                  </a:lnTo>
-                  <a:lnTo>
-                    <a:pt x="1933808" y="2821068"/>
-                  </a:lnTo>
-                  <a:lnTo>
-                    <a:pt x="2005430" y="2818674"/>
-                  </a:lnTo>
-                  <a:lnTo>
-                    <a:pt x="2077053" y="2816273"/>
-                  </a:lnTo>
-                  <a:lnTo>
-                    <a:pt x="2148675" y="2813866"/>
-                  </a:lnTo>
-                  <a:lnTo>
-                    <a:pt x="2220298" y="2811451"/>
-                  </a:lnTo>
-                  <a:lnTo>
-                    <a:pt x="2291920" y="2809030"/>
-                  </a:lnTo>
-                  <a:lnTo>
-                    <a:pt x="2363543" y="2806602"/>
-                  </a:lnTo>
-                  <a:lnTo>
-                    <a:pt x="2435165" y="2804166"/>
-                  </a:lnTo>
-                  <a:lnTo>
-                    <a:pt x="2506788" y="2801724"/>
-                  </a:lnTo>
-                  <a:lnTo>
-                    <a:pt x="2578410" y="2799275"/>
-                  </a:lnTo>
-                  <a:lnTo>
-                    <a:pt x="2650033" y="2796818"/>
-                  </a:lnTo>
-                  <a:lnTo>
-                    <a:pt x="2721655" y="2794355"/>
-                  </a:lnTo>
-                  <a:lnTo>
-                    <a:pt x="2793278" y="2791884"/>
-                  </a:lnTo>
-                  <a:lnTo>
-                    <a:pt x="2864901" y="2789407"/>
-                  </a:lnTo>
-                  <a:lnTo>
-                    <a:pt x="2936523" y="2786922"/>
-                  </a:lnTo>
-                  <a:lnTo>
-                    <a:pt x="3008146" y="2784430"/>
-                  </a:lnTo>
-                  <a:lnTo>
-                    <a:pt x="3079768" y="2762951"/>
-                  </a:lnTo>
-                  <a:lnTo>
-                    <a:pt x="3151391" y="2712688"/>
-                  </a:lnTo>
-                  <a:lnTo>
-                    <a:pt x="3223013" y="2659586"/>
-                  </a:lnTo>
-                  <a:lnTo>
-                    <a:pt x="3294636" y="2603484"/>
-                  </a:lnTo>
-                  <a:lnTo>
-                    <a:pt x="3366258" y="2544212"/>
-                  </a:lnTo>
-                  <a:lnTo>
-                    <a:pt x="3437881" y="2481592"/>
-                  </a:lnTo>
-                  <a:lnTo>
-                    <a:pt x="3509503" y="2415434"/>
-                  </a:lnTo>
-                  <a:lnTo>
-                    <a:pt x="3581126" y="2345538"/>
-                  </a:lnTo>
-                  <a:lnTo>
-                    <a:pt x="3652748" y="2271694"/>
-                  </a:lnTo>
-                  <a:lnTo>
-                    <a:pt x="3724371" y="2193678"/>
-                  </a:lnTo>
-                  <a:lnTo>
-                    <a:pt x="3795993" y="2111254"/>
-                  </a:lnTo>
-                  <a:lnTo>
-                    <a:pt x="3867616" y="2024174"/>
-                  </a:lnTo>
-                  <a:lnTo>
-                    <a:pt x="3939238" y="1932175"/>
-                  </a:lnTo>
-                  <a:lnTo>
-                    <a:pt x="4010861" y="1834978"/>
-                  </a:lnTo>
-                  <a:lnTo>
-                    <a:pt x="4082483" y="1732290"/>
-                  </a:lnTo>
-                  <a:lnTo>
-                    <a:pt x="4154106" y="1623800"/>
-                  </a:lnTo>
-                  <a:lnTo>
-                    <a:pt x="4225729" y="1509182"/>
-                  </a:lnTo>
-                  <a:lnTo>
-                    <a:pt x="4297351" y="1388088"/>
-                  </a:lnTo>
-                  <a:lnTo>
-                    <a:pt x="4368974" y="1260153"/>
-                  </a:lnTo>
-                  <a:lnTo>
-                    <a:pt x="4440596" y="1124990"/>
-                  </a:lnTo>
-                  <a:lnTo>
-                    <a:pt x="4512219" y="982192"/>
-                  </a:lnTo>
-                  <a:lnTo>
-                    <a:pt x="4583841" y="831326"/>
-                  </a:lnTo>
-                  <a:lnTo>
-                    <a:pt x="4655464" y="671937"/>
-                  </a:lnTo>
-                  <a:lnTo>
-                    <a:pt x="4727086" y="503544"/>
-                  </a:lnTo>
-                  <a:lnTo>
-                    <a:pt x="4798709" y="325637"/>
-                  </a:lnTo>
-                  <a:lnTo>
-                    <a:pt x="4870331" y="137680"/>
-                  </a:lnTo>
-                  <a:lnTo>
-                    <a:pt x="4919990" y="0"/>
+                    <a:pt x="71622" y="2957377"/>
+                  </a:lnTo>
+                  <a:lnTo>
+                    <a:pt x="143245" y="2953625"/>
+                  </a:lnTo>
+                  <a:lnTo>
+                    <a:pt x="214867" y="2949852"/>
+                  </a:lnTo>
+                  <a:lnTo>
+                    <a:pt x="286490" y="2946060"/>
+                  </a:lnTo>
+                  <a:lnTo>
+                    <a:pt x="358112" y="2942246"/>
+                  </a:lnTo>
+                  <a:lnTo>
+                    <a:pt x="429735" y="2938413"/>
+                  </a:lnTo>
+                  <a:lnTo>
+                    <a:pt x="501357" y="2934558"/>
+                  </a:lnTo>
+                  <a:lnTo>
+                    <a:pt x="572980" y="2930683"/>
+                  </a:lnTo>
+                  <a:lnTo>
+                    <a:pt x="644602" y="2926786"/>
+                  </a:lnTo>
+                  <a:lnTo>
+                    <a:pt x="716225" y="2922869"/>
+                  </a:lnTo>
+                  <a:lnTo>
+                    <a:pt x="787847" y="2918931"/>
+                  </a:lnTo>
+                  <a:lnTo>
+                    <a:pt x="859470" y="2914971"/>
+                  </a:lnTo>
+                  <a:lnTo>
+                    <a:pt x="931092" y="2910990"/>
+                  </a:lnTo>
+                  <a:lnTo>
+                    <a:pt x="1002715" y="2906987"/>
+                  </a:lnTo>
+                  <a:lnTo>
+                    <a:pt x="1074337" y="2902963"/>
+                  </a:lnTo>
+                  <a:lnTo>
+                    <a:pt x="1145960" y="2898917"/>
+                  </a:lnTo>
+                  <a:lnTo>
+                    <a:pt x="1217582" y="2894850"/>
+                  </a:lnTo>
+                  <a:lnTo>
+                    <a:pt x="1289205" y="2890760"/>
+                  </a:lnTo>
+                  <a:lnTo>
+                    <a:pt x="1360827" y="2886648"/>
+                  </a:lnTo>
+                  <a:lnTo>
+                    <a:pt x="1432450" y="2882514"/>
+                  </a:lnTo>
+                  <a:lnTo>
+                    <a:pt x="1504073" y="2878358"/>
+                  </a:lnTo>
+                  <a:lnTo>
+                    <a:pt x="1575695" y="2874179"/>
+                  </a:lnTo>
+                  <a:lnTo>
+                    <a:pt x="1647318" y="2869978"/>
+                  </a:lnTo>
+                  <a:lnTo>
+                    <a:pt x="1718940" y="2865754"/>
+                  </a:lnTo>
+                  <a:lnTo>
+                    <a:pt x="1790563" y="2861508"/>
+                  </a:lnTo>
+                  <a:lnTo>
+                    <a:pt x="1862185" y="2857238"/>
+                  </a:lnTo>
+                  <a:lnTo>
+                    <a:pt x="1933808" y="2852945"/>
+                  </a:lnTo>
+                  <a:lnTo>
+                    <a:pt x="2005430" y="2848630"/>
+                  </a:lnTo>
+                  <a:lnTo>
+                    <a:pt x="2077053" y="2844291"/>
+                  </a:lnTo>
+                  <a:lnTo>
+                    <a:pt x="2148675" y="2839928"/>
+                  </a:lnTo>
+                  <a:lnTo>
+                    <a:pt x="2220298" y="2835542"/>
+                  </a:lnTo>
+                  <a:lnTo>
+                    <a:pt x="2291920" y="2831132"/>
+                  </a:lnTo>
+                  <a:lnTo>
+                    <a:pt x="2363543" y="2826699"/>
+                  </a:lnTo>
+                  <a:lnTo>
+                    <a:pt x="2435165" y="2822241"/>
+                  </a:lnTo>
+                  <a:lnTo>
+                    <a:pt x="2506788" y="2817760"/>
+                  </a:lnTo>
+                  <a:lnTo>
+                    <a:pt x="2578410" y="2813254"/>
+                  </a:lnTo>
+                  <a:lnTo>
+                    <a:pt x="2650033" y="2808724"/>
+                  </a:lnTo>
+                  <a:lnTo>
+                    <a:pt x="2721655" y="2804170"/>
+                  </a:lnTo>
+                  <a:lnTo>
+                    <a:pt x="2793278" y="2799591"/>
+                  </a:lnTo>
+                  <a:lnTo>
+                    <a:pt x="2864901" y="2794987"/>
+                  </a:lnTo>
+                  <a:lnTo>
+                    <a:pt x="2936523" y="2790358"/>
+                  </a:lnTo>
+                  <a:lnTo>
+                    <a:pt x="3008146" y="2785705"/>
+                  </a:lnTo>
+                  <a:lnTo>
+                    <a:pt x="3079768" y="2764267"/>
+                  </a:lnTo>
+                  <a:lnTo>
+                    <a:pt x="3151391" y="2717427"/>
+                  </a:lnTo>
+                  <a:lnTo>
+                    <a:pt x="3223013" y="2668118"/>
+                  </a:lnTo>
+                  <a:lnTo>
+                    <a:pt x="3294636" y="2616208"/>
+                  </a:lnTo>
+                  <a:lnTo>
+                    <a:pt x="3366258" y="2561562"/>
+                  </a:lnTo>
+                  <a:lnTo>
+                    <a:pt x="3437881" y="2504035"/>
+                  </a:lnTo>
+                  <a:lnTo>
+                    <a:pt x="3509503" y="2443475"/>
+                  </a:lnTo>
+                  <a:lnTo>
+                    <a:pt x="3581126" y="2379721"/>
+                  </a:lnTo>
+                  <a:lnTo>
+                    <a:pt x="3652748" y="2312606"/>
+                  </a:lnTo>
+                  <a:lnTo>
+                    <a:pt x="3724371" y="2241953"/>
+                  </a:lnTo>
+                  <a:lnTo>
+                    <a:pt x="3795993" y="2167574"/>
+                  </a:lnTo>
+                  <a:lnTo>
+                    <a:pt x="3867616" y="2089274"/>
+                  </a:lnTo>
+                  <a:lnTo>
+                    <a:pt x="3939238" y="2006845"/>
+                  </a:lnTo>
+                  <a:lnTo>
+                    <a:pt x="4010861" y="1920070"/>
+                  </a:lnTo>
+                  <a:lnTo>
+                    <a:pt x="4082483" y="1828720"/>
+                  </a:lnTo>
+                  <a:lnTo>
+                    <a:pt x="4154106" y="1732554"/>
+                  </a:lnTo>
+                  <a:lnTo>
+                    <a:pt x="4225729" y="1631317"/>
+                  </a:lnTo>
+                  <a:lnTo>
+                    <a:pt x="4297351" y="1524743"/>
+                  </a:lnTo>
+                  <a:lnTo>
+                    <a:pt x="4368974" y="1412549"/>
+                  </a:lnTo>
+                  <a:lnTo>
+                    <a:pt x="4440596" y="1294440"/>
+                  </a:lnTo>
+                  <a:lnTo>
+                    <a:pt x="4512219" y="1170104"/>
+                  </a:lnTo>
+                  <a:lnTo>
+                    <a:pt x="4583841" y="1039212"/>
+                  </a:lnTo>
+                  <a:lnTo>
+                    <a:pt x="4655464" y="901418"/>
+                  </a:lnTo>
+                  <a:lnTo>
+                    <a:pt x="4727086" y="756360"/>
+                  </a:lnTo>
+                  <a:lnTo>
+                    <a:pt x="4798709" y="603653"/>
+                  </a:lnTo>
+                  <a:lnTo>
+                    <a:pt x="4870331" y="442895"/>
+                  </a:lnTo>
+                  <a:lnTo>
+                    <a:pt x="4941954" y="273661"/>
+                  </a:lnTo>
+                  <a:lnTo>
+                    <a:pt x="5013576" y="95504"/>
+                  </a:lnTo>
+                  <a:lnTo>
+                    <a:pt x="5050048" y="0"/>
                   </a:lnTo>
                 </a:path>
               </a:pathLst>
@@ -3910,312 +3922,312 @@
           </p:nvSpPr>
           <p:spPr>
             <a:xfrm>
-              <a:off x="1172049" y="4526431"/>
-              <a:ext cx="7090630" cy="939032"/>
+              <a:off x="1172049" y="4370989"/>
+              <a:ext cx="7090630" cy="1080706"/>
             </a:xfrm>
             <a:custGeom>
               <a:avLst/>
               <a:pathLst>
-                <a:path w="7090630" h="939032">
+                <a:path w="7090630" h="1080706">
                   <a:moveTo>
                     <a:pt x="7090630" y="0"/>
                   </a:moveTo>
                   <a:lnTo>
-                    <a:pt x="7019007" y="2935"/>
-                  </a:lnTo>
-                  <a:lnTo>
-                    <a:pt x="6947385" y="5862"/>
-                  </a:lnTo>
-                  <a:lnTo>
-                    <a:pt x="6875762" y="8781"/>
-                  </a:lnTo>
-                  <a:lnTo>
-                    <a:pt x="6804139" y="11691"/>
-                  </a:lnTo>
-                  <a:lnTo>
-                    <a:pt x="6732517" y="14593"/>
-                  </a:lnTo>
-                  <a:lnTo>
-                    <a:pt x="6660894" y="17487"/>
-                  </a:lnTo>
-                  <a:lnTo>
-                    <a:pt x="6589272" y="20373"/>
-                  </a:lnTo>
-                  <a:lnTo>
-                    <a:pt x="6517649" y="23250"/>
-                  </a:lnTo>
-                  <a:lnTo>
-                    <a:pt x="6446027" y="26119"/>
-                  </a:lnTo>
-                  <a:lnTo>
-                    <a:pt x="6374404" y="28979"/>
-                  </a:lnTo>
-                  <a:lnTo>
-                    <a:pt x="6302782" y="31832"/>
-                  </a:lnTo>
-                  <a:lnTo>
-                    <a:pt x="6231159" y="34676"/>
-                  </a:lnTo>
-                  <a:lnTo>
-                    <a:pt x="6159537" y="37512"/>
-                  </a:lnTo>
-                  <a:lnTo>
-                    <a:pt x="6087914" y="40340"/>
-                  </a:lnTo>
-                  <a:lnTo>
-                    <a:pt x="6016292" y="43160"/>
-                  </a:lnTo>
-                  <a:lnTo>
-                    <a:pt x="5944669" y="45971"/>
-                  </a:lnTo>
-                  <a:lnTo>
-                    <a:pt x="5873047" y="48775"/>
-                  </a:lnTo>
-                  <a:lnTo>
-                    <a:pt x="5801424" y="51571"/>
-                  </a:lnTo>
-                  <a:lnTo>
-                    <a:pt x="5729802" y="54358"/>
-                  </a:lnTo>
-                  <a:lnTo>
-                    <a:pt x="5658179" y="57138"/>
-                  </a:lnTo>
-                  <a:lnTo>
-                    <a:pt x="5586557" y="59909"/>
-                  </a:lnTo>
-                  <a:lnTo>
-                    <a:pt x="5514934" y="62673"/>
-                  </a:lnTo>
-                  <a:lnTo>
-                    <a:pt x="5443311" y="65429"/>
-                  </a:lnTo>
-                  <a:lnTo>
-                    <a:pt x="5371689" y="68177"/>
-                  </a:lnTo>
-                  <a:lnTo>
-                    <a:pt x="5300066" y="70916"/>
-                  </a:lnTo>
-                  <a:lnTo>
-                    <a:pt x="5228444" y="73648"/>
-                  </a:lnTo>
-                  <a:lnTo>
-                    <a:pt x="5156821" y="76373"/>
-                  </a:lnTo>
-                  <a:lnTo>
-                    <a:pt x="5085199" y="79089"/>
-                  </a:lnTo>
-                  <a:lnTo>
-                    <a:pt x="5013576" y="81798"/>
-                  </a:lnTo>
-                  <a:lnTo>
-                    <a:pt x="4941954" y="84498"/>
-                  </a:lnTo>
-                  <a:lnTo>
-                    <a:pt x="4870331" y="87192"/>
-                  </a:lnTo>
-                  <a:lnTo>
-                    <a:pt x="4798709" y="89877"/>
-                  </a:lnTo>
-                  <a:lnTo>
-                    <a:pt x="4727086" y="92555"/>
-                  </a:lnTo>
-                  <a:lnTo>
-                    <a:pt x="4655464" y="95224"/>
-                  </a:lnTo>
-                  <a:lnTo>
-                    <a:pt x="4583841" y="97887"/>
-                  </a:lnTo>
-                  <a:lnTo>
-                    <a:pt x="4512219" y="100541"/>
-                  </a:lnTo>
-                  <a:lnTo>
-                    <a:pt x="4440596" y="103188"/>
-                  </a:lnTo>
-                  <a:lnTo>
-                    <a:pt x="4368974" y="105828"/>
-                  </a:lnTo>
-                  <a:lnTo>
-                    <a:pt x="4297351" y="108460"/>
-                  </a:lnTo>
-                  <a:lnTo>
-                    <a:pt x="4225729" y="111084"/>
-                  </a:lnTo>
-                  <a:lnTo>
-                    <a:pt x="4154106" y="113701"/>
-                  </a:lnTo>
-                  <a:lnTo>
-                    <a:pt x="4082483" y="116310"/>
-                  </a:lnTo>
-                  <a:lnTo>
-                    <a:pt x="4010861" y="118912"/>
-                  </a:lnTo>
-                  <a:lnTo>
-                    <a:pt x="3939238" y="121506"/>
-                  </a:lnTo>
-                  <a:lnTo>
-                    <a:pt x="3867616" y="124093"/>
-                  </a:lnTo>
-                  <a:lnTo>
-                    <a:pt x="3795993" y="126672"/>
-                  </a:lnTo>
-                  <a:lnTo>
-                    <a:pt x="3724371" y="129244"/>
-                  </a:lnTo>
-                  <a:lnTo>
-                    <a:pt x="3652748" y="131809"/>
-                  </a:lnTo>
-                  <a:lnTo>
-                    <a:pt x="3581126" y="134366"/>
-                  </a:lnTo>
-                  <a:lnTo>
-                    <a:pt x="3509503" y="136916"/>
-                  </a:lnTo>
-                  <a:lnTo>
-                    <a:pt x="3437881" y="139459"/>
-                  </a:lnTo>
-                  <a:lnTo>
-                    <a:pt x="3366258" y="141994"/>
-                  </a:lnTo>
-                  <a:lnTo>
-                    <a:pt x="3294636" y="144522"/>
-                  </a:lnTo>
-                  <a:lnTo>
-                    <a:pt x="3223013" y="147043"/>
-                  </a:lnTo>
-                  <a:lnTo>
-                    <a:pt x="3151391" y="149556"/>
-                  </a:lnTo>
-                  <a:lnTo>
-                    <a:pt x="3079768" y="152063"/>
-                  </a:lnTo>
-                  <a:lnTo>
-                    <a:pt x="3008146" y="180658"/>
-                  </a:lnTo>
-                  <a:lnTo>
-                    <a:pt x="2936523" y="225689"/>
-                  </a:lnTo>
-                  <a:lnTo>
-                    <a:pt x="2864901" y="268312"/>
-                  </a:lnTo>
-                  <a:lnTo>
-                    <a:pt x="2793278" y="308656"/>
-                  </a:lnTo>
-                  <a:lnTo>
-                    <a:pt x="2721655" y="346842"/>
-                  </a:lnTo>
-                  <a:lnTo>
-                    <a:pt x="2650033" y="382987"/>
-                  </a:lnTo>
-                  <a:lnTo>
-                    <a:pt x="2578410" y="417199"/>
-                  </a:lnTo>
-                  <a:lnTo>
-                    <a:pt x="2506788" y="449581"/>
-                  </a:lnTo>
-                  <a:lnTo>
-                    <a:pt x="2435165" y="480232"/>
-                  </a:lnTo>
-                  <a:lnTo>
-                    <a:pt x="2363543" y="509243"/>
-                  </a:lnTo>
-                  <a:lnTo>
-                    <a:pt x="2291920" y="536704"/>
-                  </a:lnTo>
-                  <a:lnTo>
-                    <a:pt x="2220298" y="562696"/>
-                  </a:lnTo>
-                  <a:lnTo>
-                    <a:pt x="2148675" y="587298"/>
-                  </a:lnTo>
-                  <a:lnTo>
-                    <a:pt x="2077053" y="610584"/>
-                  </a:lnTo>
-                  <a:lnTo>
-                    <a:pt x="2005430" y="632626"/>
-                  </a:lnTo>
-                  <a:lnTo>
-                    <a:pt x="1933808" y="653488"/>
-                  </a:lnTo>
-                  <a:lnTo>
-                    <a:pt x="1862185" y="673236"/>
-                  </a:lnTo>
-                  <a:lnTo>
-                    <a:pt x="1790563" y="691927"/>
-                  </a:lnTo>
-                  <a:lnTo>
-                    <a:pt x="1718940" y="709618"/>
-                  </a:lnTo>
-                  <a:lnTo>
-                    <a:pt x="1647318" y="726364"/>
-                  </a:lnTo>
-                  <a:lnTo>
-                    <a:pt x="1575695" y="742214"/>
-                  </a:lnTo>
-                  <a:lnTo>
-                    <a:pt x="1504073" y="757217"/>
-                  </a:lnTo>
-                  <a:lnTo>
-                    <a:pt x="1432450" y="771417"/>
-                  </a:lnTo>
-                  <a:lnTo>
-                    <a:pt x="1360827" y="784858"/>
-                  </a:lnTo>
-                  <a:lnTo>
-                    <a:pt x="1289205" y="797580"/>
-                  </a:lnTo>
-                  <a:lnTo>
-                    <a:pt x="1217582" y="809622"/>
-                  </a:lnTo>
-                  <a:lnTo>
-                    <a:pt x="1145960" y="821020"/>
-                  </a:lnTo>
-                  <a:lnTo>
-                    <a:pt x="1074337" y="831809"/>
-                  </a:lnTo>
-                  <a:lnTo>
-                    <a:pt x="1002715" y="842021"/>
-                  </a:lnTo>
-                  <a:lnTo>
-                    <a:pt x="931092" y="851686"/>
-                  </a:lnTo>
-                  <a:lnTo>
-                    <a:pt x="859470" y="860835"/>
-                  </a:lnTo>
-                  <a:lnTo>
-                    <a:pt x="787847" y="869495"/>
-                  </a:lnTo>
-                  <a:lnTo>
-                    <a:pt x="716225" y="877691"/>
-                  </a:lnTo>
-                  <a:lnTo>
-                    <a:pt x="644602" y="885449"/>
-                  </a:lnTo>
-                  <a:lnTo>
-                    <a:pt x="572980" y="892792"/>
-                  </a:lnTo>
-                  <a:lnTo>
-                    <a:pt x="501357" y="899743"/>
-                  </a:lnTo>
-                  <a:lnTo>
-                    <a:pt x="429735" y="906322"/>
-                  </a:lnTo>
-                  <a:lnTo>
-                    <a:pt x="358112" y="912549"/>
-                  </a:lnTo>
-                  <a:lnTo>
-                    <a:pt x="286490" y="918443"/>
-                  </a:lnTo>
-                  <a:lnTo>
-                    <a:pt x="214867" y="924022"/>
-                  </a:lnTo>
-                  <a:lnTo>
-                    <a:pt x="143245" y="929303"/>
-                  </a:lnTo>
-                  <a:lnTo>
-                    <a:pt x="71622" y="934301"/>
-                  </a:lnTo>
-                  <a:lnTo>
-                    <a:pt x="0" y="939032"/>
+                    <a:pt x="7019007" y="6324"/>
+                  </a:lnTo>
+                  <a:lnTo>
+                    <a:pt x="6947385" y="12614"/>
+                  </a:lnTo>
+                  <a:lnTo>
+                    <a:pt x="6875762" y="18871"/>
+                  </a:lnTo>
+                  <a:lnTo>
+                    <a:pt x="6804139" y="25094"/>
+                  </a:lnTo>
+                  <a:lnTo>
+                    <a:pt x="6732517" y="31284"/>
+                  </a:lnTo>
+                  <a:lnTo>
+                    <a:pt x="6660894" y="37441"/>
+                  </a:lnTo>
+                  <a:lnTo>
+                    <a:pt x="6589272" y="43564"/>
+                  </a:lnTo>
+                  <a:lnTo>
+                    <a:pt x="6517649" y="49655"/>
+                  </a:lnTo>
+                  <a:lnTo>
+                    <a:pt x="6446027" y="55713"/>
+                  </a:lnTo>
+                  <a:lnTo>
+                    <a:pt x="6374404" y="61738"/>
+                  </a:lnTo>
+                  <a:lnTo>
+                    <a:pt x="6302782" y="67731"/>
+                  </a:lnTo>
+                  <a:lnTo>
+                    <a:pt x="6231159" y="73692"/>
+                  </a:lnTo>
+                  <a:lnTo>
+                    <a:pt x="6159537" y="79621"/>
+                  </a:lnTo>
+                  <a:lnTo>
+                    <a:pt x="6087914" y="85518"/>
+                  </a:lnTo>
+                  <a:lnTo>
+                    <a:pt x="6016292" y="91383"/>
+                  </a:lnTo>
+                  <a:lnTo>
+                    <a:pt x="5944669" y="97217"/>
+                  </a:lnTo>
+                  <a:lnTo>
+                    <a:pt x="5873047" y="103020"/>
+                  </a:lnTo>
+                  <a:lnTo>
+                    <a:pt x="5801424" y="108791"/>
+                  </a:lnTo>
+                  <a:lnTo>
+                    <a:pt x="5729802" y="114532"/>
+                  </a:lnTo>
+                  <a:lnTo>
+                    <a:pt x="5658179" y="120242"/>
+                  </a:lnTo>
+                  <a:lnTo>
+                    <a:pt x="5586557" y="125921"/>
+                  </a:lnTo>
+                  <a:lnTo>
+                    <a:pt x="5514934" y="131569"/>
+                  </a:lnTo>
+                  <a:lnTo>
+                    <a:pt x="5443311" y="137187"/>
+                  </a:lnTo>
+                  <a:lnTo>
+                    <a:pt x="5371689" y="142775"/>
+                  </a:lnTo>
+                  <a:lnTo>
+                    <a:pt x="5300066" y="148333"/>
+                  </a:lnTo>
+                  <a:lnTo>
+                    <a:pt x="5228444" y="153862"/>
+                  </a:lnTo>
+                  <a:lnTo>
+                    <a:pt x="5156821" y="159360"/>
+                  </a:lnTo>
+                  <a:lnTo>
+                    <a:pt x="5085199" y="164829"/>
+                  </a:lnTo>
+                  <a:lnTo>
+                    <a:pt x="5013576" y="170269"/>
+                  </a:lnTo>
+                  <a:lnTo>
+                    <a:pt x="4941954" y="175679"/>
+                  </a:lnTo>
+                  <a:lnTo>
+                    <a:pt x="4870331" y="181061"/>
+                  </a:lnTo>
+                  <a:lnTo>
+                    <a:pt x="4798709" y="186413"/>
+                  </a:lnTo>
+                  <a:lnTo>
+                    <a:pt x="4727086" y="191737"/>
+                  </a:lnTo>
+                  <a:lnTo>
+                    <a:pt x="4655464" y="197033"/>
+                  </a:lnTo>
+                  <a:lnTo>
+                    <a:pt x="4583841" y="202299"/>
+                  </a:lnTo>
+                  <a:lnTo>
+                    <a:pt x="4512219" y="207538"/>
+                  </a:lnTo>
+                  <a:lnTo>
+                    <a:pt x="4440596" y="212748"/>
+                  </a:lnTo>
+                  <a:lnTo>
+                    <a:pt x="4368974" y="217931"/>
+                  </a:lnTo>
+                  <a:lnTo>
+                    <a:pt x="4297351" y="223085"/>
+                  </a:lnTo>
+                  <a:lnTo>
+                    <a:pt x="4225729" y="228212"/>
+                  </a:lnTo>
+                  <a:lnTo>
+                    <a:pt x="4154106" y="233312"/>
+                  </a:lnTo>
+                  <a:lnTo>
+                    <a:pt x="4082483" y="238384"/>
+                  </a:lnTo>
+                  <a:lnTo>
+                    <a:pt x="4010861" y="243429"/>
+                  </a:lnTo>
+                  <a:lnTo>
+                    <a:pt x="3939238" y="248447"/>
+                  </a:lnTo>
+                  <a:lnTo>
+                    <a:pt x="3867616" y="253437"/>
+                  </a:lnTo>
+                  <a:lnTo>
+                    <a:pt x="3795993" y="258401"/>
+                  </a:lnTo>
+                  <a:lnTo>
+                    <a:pt x="3724371" y="263339"/>
+                  </a:lnTo>
+                  <a:lnTo>
+                    <a:pt x="3652748" y="268250"/>
+                  </a:lnTo>
+                  <a:lnTo>
+                    <a:pt x="3581126" y="273134"/>
+                  </a:lnTo>
+                  <a:lnTo>
+                    <a:pt x="3509503" y="277993"/>
+                  </a:lnTo>
+                  <a:lnTo>
+                    <a:pt x="3437881" y="282825"/>
+                  </a:lnTo>
+                  <a:lnTo>
+                    <a:pt x="3366258" y="287631"/>
+                  </a:lnTo>
+                  <a:lnTo>
+                    <a:pt x="3294636" y="292412"/>
+                  </a:lnTo>
+                  <a:lnTo>
+                    <a:pt x="3223013" y="297167"/>
+                  </a:lnTo>
+                  <a:lnTo>
+                    <a:pt x="3151391" y="301896"/>
+                  </a:lnTo>
+                  <a:lnTo>
+                    <a:pt x="3079768" y="306600"/>
+                  </a:lnTo>
+                  <a:lnTo>
+                    <a:pt x="3008146" y="334334"/>
+                  </a:lnTo>
+                  <a:lnTo>
+                    <a:pt x="2936523" y="376599"/>
+                  </a:lnTo>
+                  <a:lnTo>
+                    <a:pt x="2864901" y="416748"/>
+                  </a:lnTo>
+                  <a:lnTo>
+                    <a:pt x="2793278" y="454886"/>
+                  </a:lnTo>
+                  <a:lnTo>
+                    <a:pt x="2721655" y="491113"/>
+                  </a:lnTo>
+                  <a:lnTo>
+                    <a:pt x="2650033" y="525526"/>
+                  </a:lnTo>
+                  <a:lnTo>
+                    <a:pt x="2578410" y="558216"/>
+                  </a:lnTo>
+                  <a:lnTo>
+                    <a:pt x="2506788" y="589268"/>
+                  </a:lnTo>
+                  <a:lnTo>
+                    <a:pt x="2435165" y="618765"/>
+                  </a:lnTo>
+                  <a:lnTo>
+                    <a:pt x="2363543" y="646785"/>
+                  </a:lnTo>
+                  <a:lnTo>
+                    <a:pt x="2291920" y="673401"/>
+                  </a:lnTo>
+                  <a:lnTo>
+                    <a:pt x="2220298" y="698685"/>
+                  </a:lnTo>
+                  <a:lnTo>
+                    <a:pt x="2148675" y="722702"/>
+                  </a:lnTo>
+                  <a:lnTo>
+                    <a:pt x="2077053" y="745516"/>
+                  </a:lnTo>
+                  <a:lnTo>
+                    <a:pt x="2005430" y="767188"/>
+                  </a:lnTo>
+                  <a:lnTo>
+                    <a:pt x="1933808" y="787774"/>
+                  </a:lnTo>
+                  <a:lnTo>
+                    <a:pt x="1862185" y="807329"/>
+                  </a:lnTo>
+                  <a:lnTo>
+                    <a:pt x="1790563" y="825905"/>
+                  </a:lnTo>
+                  <a:lnTo>
+                    <a:pt x="1718940" y="843550"/>
+                  </a:lnTo>
+                  <a:lnTo>
+                    <a:pt x="1647318" y="860311"/>
+                  </a:lnTo>
+                  <a:lnTo>
+                    <a:pt x="1575695" y="876234"/>
+                  </a:lnTo>
+                  <a:lnTo>
+                    <a:pt x="1504073" y="891358"/>
+                  </a:lnTo>
+                  <a:lnTo>
+                    <a:pt x="1432450" y="905725"/>
+                  </a:lnTo>
+                  <a:lnTo>
+                    <a:pt x="1360827" y="919373"/>
+                  </a:lnTo>
+                  <a:lnTo>
+                    <a:pt x="1289205" y="932337"/>
+                  </a:lnTo>
+                  <a:lnTo>
+                    <a:pt x="1217582" y="944652"/>
+                  </a:lnTo>
+                  <a:lnTo>
+                    <a:pt x="1145960" y="956350"/>
+                  </a:lnTo>
+                  <a:lnTo>
+                    <a:pt x="1074337" y="967462"/>
+                  </a:lnTo>
+                  <a:lnTo>
+                    <a:pt x="1002715" y="978017"/>
+                  </a:lnTo>
+                  <a:lnTo>
+                    <a:pt x="931092" y="988044"/>
+                  </a:lnTo>
+                  <a:lnTo>
+                    <a:pt x="859470" y="997569"/>
+                  </a:lnTo>
+                  <a:lnTo>
+                    <a:pt x="787847" y="1006616"/>
+                  </a:lnTo>
+                  <a:lnTo>
+                    <a:pt x="716225" y="1015211"/>
+                  </a:lnTo>
+                  <a:lnTo>
+                    <a:pt x="644602" y="1023375"/>
+                  </a:lnTo>
+                  <a:lnTo>
+                    <a:pt x="572980" y="1031130"/>
+                  </a:lnTo>
+                  <a:lnTo>
+                    <a:pt x="501357" y="1038497"/>
+                  </a:lnTo>
+                  <a:lnTo>
+                    <a:pt x="429735" y="1045495"/>
+                  </a:lnTo>
+                  <a:lnTo>
+                    <a:pt x="358112" y="1052142"/>
+                  </a:lnTo>
+                  <a:lnTo>
+                    <a:pt x="286490" y="1058456"/>
+                  </a:lnTo>
+                  <a:lnTo>
+                    <a:pt x="214867" y="1064455"/>
+                  </a:lnTo>
+                  <a:lnTo>
+                    <a:pt x="143245" y="1070152"/>
+                  </a:lnTo>
+                  <a:lnTo>
+                    <a:pt x="71622" y="1075565"/>
+                  </a:lnTo>
+                  <a:lnTo>
+                    <a:pt x="0" y="1080706"/>
                   </a:lnTo>
                 </a:path>
               </a:pathLst>
@@ -4236,293 +4248,296 @@
           <p:spPr>
             <a:xfrm>
               <a:off x="1172049" y="1896563"/>
-              <a:ext cx="6604604" cy="3398796"/>
+              <a:ext cx="6671427" cy="3392966"/>
             </a:xfrm>
             <a:custGeom>
               <a:avLst/>
               <a:pathLst>
-                <a:path w="6604604" h="3398796">
+                <a:path w="6671427" h="3392966">
                   <a:moveTo>
-                    <a:pt x="0" y="3398796"/>
+                    <a:pt x="0" y="3392966"/>
                   </a:moveTo>
                   <a:lnTo>
-                    <a:pt x="71622" y="3391348"/>
-                  </a:lnTo>
-                  <a:lnTo>
-                    <a:pt x="143245" y="3383683"/>
-                  </a:lnTo>
-                  <a:lnTo>
-                    <a:pt x="214867" y="3375792"/>
-                  </a:lnTo>
-                  <a:lnTo>
-                    <a:pt x="286490" y="3367670"/>
-                  </a:lnTo>
-                  <a:lnTo>
-                    <a:pt x="358112" y="3359310"/>
-                  </a:lnTo>
-                  <a:lnTo>
-                    <a:pt x="429735" y="3350704"/>
-                  </a:lnTo>
-                  <a:lnTo>
-                    <a:pt x="501357" y="3341846"/>
-                  </a:lnTo>
-                  <a:lnTo>
-                    <a:pt x="572980" y="3332728"/>
-                  </a:lnTo>
-                  <a:lnTo>
-                    <a:pt x="644602" y="3323342"/>
-                  </a:lnTo>
-                  <a:lnTo>
-                    <a:pt x="716225" y="3313681"/>
-                  </a:lnTo>
-                  <a:lnTo>
-                    <a:pt x="787847" y="3303737"/>
-                  </a:lnTo>
-                  <a:lnTo>
-                    <a:pt x="859470" y="3293501"/>
-                  </a:lnTo>
-                  <a:lnTo>
-                    <a:pt x="931092" y="3282965"/>
-                  </a:lnTo>
-                  <a:lnTo>
-                    <a:pt x="1002715" y="3272119"/>
-                  </a:lnTo>
-                  <a:lnTo>
-                    <a:pt x="1074337" y="3260956"/>
-                  </a:lnTo>
-                  <a:lnTo>
-                    <a:pt x="1145960" y="3249465"/>
-                  </a:lnTo>
-                  <a:lnTo>
-                    <a:pt x="1217582" y="3237637"/>
-                  </a:lnTo>
-                  <a:lnTo>
-                    <a:pt x="1289205" y="3225461"/>
-                  </a:lnTo>
-                  <a:lnTo>
-                    <a:pt x="1360827" y="3212929"/>
-                  </a:lnTo>
-                  <a:lnTo>
-                    <a:pt x="1432450" y="3200029"/>
-                  </a:lnTo>
-                  <a:lnTo>
-                    <a:pt x="1504073" y="3186750"/>
-                  </a:lnTo>
-                  <a:lnTo>
-                    <a:pt x="1575695" y="3173082"/>
-                  </a:lnTo>
-                  <a:lnTo>
-                    <a:pt x="1647318" y="3159013"/>
-                  </a:lnTo>
-                  <a:lnTo>
-                    <a:pt x="1718940" y="3144531"/>
-                  </a:lnTo>
-                  <a:lnTo>
-                    <a:pt x="1790563" y="3129624"/>
-                  </a:lnTo>
-                  <a:lnTo>
-                    <a:pt x="1862185" y="3114280"/>
-                  </a:lnTo>
-                  <a:lnTo>
-                    <a:pt x="1933808" y="3098486"/>
-                  </a:lnTo>
-                  <a:lnTo>
-                    <a:pt x="2005430" y="3082229"/>
-                  </a:lnTo>
-                  <a:lnTo>
-                    <a:pt x="2077053" y="3065494"/>
-                  </a:lnTo>
-                  <a:lnTo>
-                    <a:pt x="2148675" y="3048269"/>
-                  </a:lnTo>
-                  <a:lnTo>
-                    <a:pt x="2220298" y="3030538"/>
-                  </a:lnTo>
-                  <a:lnTo>
-                    <a:pt x="2291920" y="3012287"/>
-                  </a:lnTo>
-                  <a:lnTo>
-                    <a:pt x="2363543" y="2993500"/>
-                  </a:lnTo>
-                  <a:lnTo>
-                    <a:pt x="2435165" y="2974163"/>
-                  </a:lnTo>
-                  <a:lnTo>
-                    <a:pt x="2506788" y="2954258"/>
-                  </a:lnTo>
-                  <a:lnTo>
-                    <a:pt x="2578410" y="2933769"/>
-                  </a:lnTo>
-                  <a:lnTo>
-                    <a:pt x="2650033" y="2912679"/>
-                  </a:lnTo>
-                  <a:lnTo>
-                    <a:pt x="2721655" y="2890970"/>
-                  </a:lnTo>
-                  <a:lnTo>
-                    <a:pt x="2793278" y="2868625"/>
-                  </a:lnTo>
-                  <a:lnTo>
-                    <a:pt x="2864901" y="2845624"/>
-                  </a:lnTo>
-                  <a:lnTo>
-                    <a:pt x="2936523" y="2821948"/>
-                  </a:lnTo>
-                  <a:lnTo>
-                    <a:pt x="3008146" y="2797577"/>
-                  </a:lnTo>
-                  <a:lnTo>
-                    <a:pt x="3079768" y="2772492"/>
-                  </a:lnTo>
-                  <a:lnTo>
-                    <a:pt x="3151391" y="2746670"/>
-                  </a:lnTo>
-                  <a:lnTo>
-                    <a:pt x="3223013" y="2720092"/>
-                  </a:lnTo>
-                  <a:lnTo>
-                    <a:pt x="3294636" y="2692733"/>
-                  </a:lnTo>
-                  <a:lnTo>
-                    <a:pt x="3366258" y="2664572"/>
-                  </a:lnTo>
-                  <a:lnTo>
-                    <a:pt x="3437881" y="2635584"/>
-                  </a:lnTo>
-                  <a:lnTo>
-                    <a:pt x="3509503" y="2605746"/>
-                  </a:lnTo>
-                  <a:lnTo>
-                    <a:pt x="3581126" y="2575033"/>
-                  </a:lnTo>
-                  <a:lnTo>
-                    <a:pt x="3652748" y="2543418"/>
-                  </a:lnTo>
-                  <a:lnTo>
-                    <a:pt x="3724371" y="2510877"/>
-                  </a:lnTo>
-                  <a:lnTo>
-                    <a:pt x="3795993" y="2477380"/>
-                  </a:lnTo>
-                  <a:lnTo>
-                    <a:pt x="3867616" y="2442901"/>
-                  </a:lnTo>
-                  <a:lnTo>
-                    <a:pt x="3939238" y="2407410"/>
-                  </a:lnTo>
-                  <a:lnTo>
-                    <a:pt x="4010861" y="2370878"/>
-                  </a:lnTo>
-                  <a:lnTo>
-                    <a:pt x="4082483" y="2333274"/>
-                  </a:lnTo>
-                  <a:lnTo>
-                    <a:pt x="4154106" y="2294567"/>
-                  </a:lnTo>
-                  <a:lnTo>
-                    <a:pt x="4225729" y="2254725"/>
-                  </a:lnTo>
-                  <a:lnTo>
-                    <a:pt x="4297351" y="2213714"/>
-                  </a:lnTo>
-                  <a:lnTo>
-                    <a:pt x="4368974" y="2171499"/>
-                  </a:lnTo>
-                  <a:lnTo>
-                    <a:pt x="4440596" y="2128046"/>
-                  </a:lnTo>
-                  <a:lnTo>
-                    <a:pt x="4512219" y="2083318"/>
-                  </a:lnTo>
-                  <a:lnTo>
-                    <a:pt x="4583841" y="2037278"/>
-                  </a:lnTo>
-                  <a:lnTo>
-                    <a:pt x="4655464" y="1989887"/>
-                  </a:lnTo>
-                  <a:lnTo>
-                    <a:pt x="4727086" y="1941106"/>
-                  </a:lnTo>
-                  <a:lnTo>
-                    <a:pt x="4798709" y="1890894"/>
-                  </a:lnTo>
-                  <a:lnTo>
-                    <a:pt x="4870331" y="1839209"/>
-                  </a:lnTo>
-                  <a:lnTo>
-                    <a:pt x="4941954" y="1786008"/>
-                  </a:lnTo>
-                  <a:lnTo>
-                    <a:pt x="5013576" y="1731245"/>
-                  </a:lnTo>
-                  <a:lnTo>
-                    <a:pt x="5085199" y="1674876"/>
-                  </a:lnTo>
-                  <a:lnTo>
-                    <a:pt x="5156821" y="1616854"/>
-                  </a:lnTo>
-                  <a:lnTo>
-                    <a:pt x="5228444" y="1557129"/>
-                  </a:lnTo>
-                  <a:lnTo>
-                    <a:pt x="5300066" y="1495652"/>
-                  </a:lnTo>
-                  <a:lnTo>
-                    <a:pt x="5371689" y="1432371"/>
-                  </a:lnTo>
-                  <a:lnTo>
-                    <a:pt x="5443311" y="1367234"/>
-                  </a:lnTo>
-                  <a:lnTo>
-                    <a:pt x="5514934" y="1300186"/>
-                  </a:lnTo>
-                  <a:lnTo>
-                    <a:pt x="5586557" y="1231171"/>
-                  </a:lnTo>
-                  <a:lnTo>
-                    <a:pt x="5658179" y="1160131"/>
-                  </a:lnTo>
-                  <a:lnTo>
-                    <a:pt x="5729802" y="1087007"/>
-                  </a:lnTo>
-                  <a:lnTo>
-                    <a:pt x="5801424" y="1011738"/>
-                  </a:lnTo>
-                  <a:lnTo>
-                    <a:pt x="5873047" y="934260"/>
-                  </a:lnTo>
-                  <a:lnTo>
-                    <a:pt x="5944669" y="854510"/>
-                  </a:lnTo>
-                  <a:lnTo>
-                    <a:pt x="6016292" y="772420"/>
-                  </a:lnTo>
-                  <a:lnTo>
-                    <a:pt x="6087914" y="687921"/>
-                  </a:lnTo>
-                  <a:lnTo>
-                    <a:pt x="6159537" y="600944"/>
-                  </a:lnTo>
-                  <a:lnTo>
-                    <a:pt x="6231159" y="511415"/>
-                  </a:lnTo>
-                  <a:lnTo>
-                    <a:pt x="6302782" y="419259"/>
-                  </a:lnTo>
-                  <a:lnTo>
-                    <a:pt x="6374404" y="324400"/>
-                  </a:lnTo>
-                  <a:lnTo>
-                    <a:pt x="6446027" y="226757"/>
-                  </a:lnTo>
-                  <a:lnTo>
-                    <a:pt x="6517649" y="126251"/>
-                  </a:lnTo>
-                  <a:lnTo>
-                    <a:pt x="6589272" y="22795"/>
-                  </a:lnTo>
-                  <a:lnTo>
-                    <a:pt x="6604604" y="0"/>
+                    <a:pt x="71622" y="3385490"/>
+                  </a:lnTo>
+                  <a:lnTo>
+                    <a:pt x="143245" y="3377799"/>
+                  </a:lnTo>
+                  <a:lnTo>
+                    <a:pt x="214867" y="3369887"/>
+                  </a:lnTo>
+                  <a:lnTo>
+                    <a:pt x="286490" y="3361747"/>
+                  </a:lnTo>
+                  <a:lnTo>
+                    <a:pt x="358112" y="3353372"/>
+                  </a:lnTo>
+                  <a:lnTo>
+                    <a:pt x="429735" y="3344756"/>
+                  </a:lnTo>
+                  <a:lnTo>
+                    <a:pt x="501357" y="3335893"/>
+                  </a:lnTo>
+                  <a:lnTo>
+                    <a:pt x="572980" y="3326774"/>
+                  </a:lnTo>
+                  <a:lnTo>
+                    <a:pt x="644602" y="3317392"/>
+                  </a:lnTo>
+                  <a:lnTo>
+                    <a:pt x="716225" y="3307741"/>
+                  </a:lnTo>
+                  <a:lnTo>
+                    <a:pt x="787847" y="3297812"/>
+                  </a:lnTo>
+                  <a:lnTo>
+                    <a:pt x="859470" y="3287596"/>
+                  </a:lnTo>
+                  <a:lnTo>
+                    <a:pt x="931092" y="3277087"/>
+                  </a:lnTo>
+                  <a:lnTo>
+                    <a:pt x="1002715" y="3266275"/>
+                  </a:lnTo>
+                  <a:lnTo>
+                    <a:pt x="1074337" y="3255152"/>
+                  </a:lnTo>
+                  <a:lnTo>
+                    <a:pt x="1145960" y="3243709"/>
+                  </a:lnTo>
+                  <a:lnTo>
+                    <a:pt x="1217582" y="3231936"/>
+                  </a:lnTo>
+                  <a:lnTo>
+                    <a:pt x="1289205" y="3219825"/>
+                  </a:lnTo>
+                  <a:lnTo>
+                    <a:pt x="1360827" y="3207364"/>
+                  </a:lnTo>
+                  <a:lnTo>
+                    <a:pt x="1432450" y="3194545"/>
+                  </a:lnTo>
+                  <a:lnTo>
+                    <a:pt x="1504073" y="3181357"/>
+                  </a:lnTo>
+                  <a:lnTo>
+                    <a:pt x="1575695" y="3167789"/>
+                  </a:lnTo>
+                  <a:lnTo>
+                    <a:pt x="1647318" y="3153831"/>
+                  </a:lnTo>
+                  <a:lnTo>
+                    <a:pt x="1718940" y="3139471"/>
+                  </a:lnTo>
+                  <a:lnTo>
+                    <a:pt x="1790563" y="3124697"/>
+                  </a:lnTo>
+                  <a:lnTo>
+                    <a:pt x="1862185" y="3109498"/>
+                  </a:lnTo>
+                  <a:lnTo>
+                    <a:pt x="1933808" y="3093862"/>
+                  </a:lnTo>
+                  <a:lnTo>
+                    <a:pt x="2005430" y="3077775"/>
+                  </a:lnTo>
+                  <a:lnTo>
+                    <a:pt x="2077053" y="3061225"/>
+                  </a:lnTo>
+                  <a:lnTo>
+                    <a:pt x="2148675" y="3044199"/>
+                  </a:lnTo>
+                  <a:lnTo>
+                    <a:pt x="2220298" y="3026683"/>
+                  </a:lnTo>
+                  <a:lnTo>
+                    <a:pt x="2291920" y="3008662"/>
+                  </a:lnTo>
+                  <a:lnTo>
+                    <a:pt x="2363543" y="2990123"/>
+                  </a:lnTo>
+                  <a:lnTo>
+                    <a:pt x="2435165" y="2971050"/>
+                  </a:lnTo>
+                  <a:lnTo>
+                    <a:pt x="2506788" y="2951427"/>
+                  </a:lnTo>
+                  <a:lnTo>
+                    <a:pt x="2578410" y="2931240"/>
+                  </a:lnTo>
+                  <a:lnTo>
+                    <a:pt x="2650033" y="2910472"/>
+                  </a:lnTo>
+                  <a:lnTo>
+                    <a:pt x="2721655" y="2889106"/>
+                  </a:lnTo>
+                  <a:lnTo>
+                    <a:pt x="2793278" y="2867124"/>
+                  </a:lnTo>
+                  <a:lnTo>
+                    <a:pt x="2864901" y="2844510"/>
+                  </a:lnTo>
+                  <a:lnTo>
+                    <a:pt x="2936523" y="2821245"/>
+                  </a:lnTo>
+                  <a:lnTo>
+                    <a:pt x="3008146" y="2797310"/>
+                  </a:lnTo>
+                  <a:lnTo>
+                    <a:pt x="3079768" y="2772686"/>
+                  </a:lnTo>
+                  <a:lnTo>
+                    <a:pt x="3151391" y="2747353"/>
+                  </a:lnTo>
+                  <a:lnTo>
+                    <a:pt x="3223013" y="2721291"/>
+                  </a:lnTo>
+                  <a:lnTo>
+                    <a:pt x="3294636" y="2694479"/>
+                  </a:lnTo>
+                  <a:lnTo>
+                    <a:pt x="3366258" y="2666894"/>
+                  </a:lnTo>
+                  <a:lnTo>
+                    <a:pt x="3437881" y="2638516"/>
+                  </a:lnTo>
+                  <a:lnTo>
+                    <a:pt x="3509503" y="2609320"/>
+                  </a:lnTo>
+                  <a:lnTo>
+                    <a:pt x="3581126" y="2579284"/>
+                  </a:lnTo>
+                  <a:lnTo>
+                    <a:pt x="3652748" y="2548383"/>
+                  </a:lnTo>
+                  <a:lnTo>
+                    <a:pt x="3724371" y="2516593"/>
+                  </a:lnTo>
+                  <a:lnTo>
+                    <a:pt x="3795993" y="2483888"/>
+                  </a:lnTo>
+                  <a:lnTo>
+                    <a:pt x="3867616" y="2450241"/>
+                  </a:lnTo>
+                  <a:lnTo>
+                    <a:pt x="3939238" y="2415625"/>
+                  </a:lnTo>
+                  <a:lnTo>
+                    <a:pt x="4010861" y="2380013"/>
+                  </a:lnTo>
+                  <a:lnTo>
+                    <a:pt x="4082483" y="2343375"/>
+                  </a:lnTo>
+                  <a:lnTo>
+                    <a:pt x="4154106" y="2305683"/>
+                  </a:lnTo>
+                  <a:lnTo>
+                    <a:pt x="4225729" y="2266906"/>
+                  </a:lnTo>
+                  <a:lnTo>
+                    <a:pt x="4297351" y="2227012"/>
+                  </a:lnTo>
+                  <a:lnTo>
+                    <a:pt x="4368974" y="2185970"/>
+                  </a:lnTo>
+                  <a:lnTo>
+                    <a:pt x="4440596" y="2143746"/>
+                  </a:lnTo>
+                  <a:lnTo>
+                    <a:pt x="4512219" y="2100307"/>
+                  </a:lnTo>
+                  <a:lnTo>
+                    <a:pt x="4583841" y="2055617"/>
+                  </a:lnTo>
+                  <a:lnTo>
+                    <a:pt x="4655464" y="2009640"/>
+                  </a:lnTo>
+                  <a:lnTo>
+                    <a:pt x="4727086" y="1962340"/>
+                  </a:lnTo>
+                  <a:lnTo>
+                    <a:pt x="4798709" y="1913678"/>
+                  </a:lnTo>
+                  <a:lnTo>
+                    <a:pt x="4870331" y="1863616"/>
+                  </a:lnTo>
+                  <a:lnTo>
+                    <a:pt x="4941954" y="1812112"/>
+                  </a:lnTo>
+                  <a:lnTo>
+                    <a:pt x="5013576" y="1759125"/>
+                  </a:lnTo>
+                  <a:lnTo>
+                    <a:pt x="5085199" y="1704613"/>
+                  </a:lnTo>
+                  <a:lnTo>
+                    <a:pt x="5156821" y="1648532"/>
+                  </a:lnTo>
+                  <a:lnTo>
+                    <a:pt x="5228444" y="1590836"/>
+                  </a:lnTo>
+                  <a:lnTo>
+                    <a:pt x="5300066" y="1531479"/>
+                  </a:lnTo>
+                  <a:lnTo>
+                    <a:pt x="5371689" y="1470413"/>
+                  </a:lnTo>
+                  <a:lnTo>
+                    <a:pt x="5443311" y="1407589"/>
+                  </a:lnTo>
+                  <a:lnTo>
+                    <a:pt x="5514934" y="1342957"/>
+                  </a:lnTo>
+                  <a:lnTo>
+                    <a:pt x="5586557" y="1276464"/>
+                  </a:lnTo>
+                  <a:lnTo>
+                    <a:pt x="5658179" y="1208056"/>
+                  </a:lnTo>
+                  <a:lnTo>
+                    <a:pt x="5729802" y="1137680"/>
+                  </a:lnTo>
+                  <a:lnTo>
+                    <a:pt x="5801424" y="1065277"/>
+                  </a:lnTo>
+                  <a:lnTo>
+                    <a:pt x="5873047" y="990790"/>
+                  </a:lnTo>
+                  <a:lnTo>
+                    <a:pt x="5944669" y="914158"/>
+                  </a:lnTo>
+                  <a:lnTo>
+                    <a:pt x="6016292" y="835321"/>
+                  </a:lnTo>
+                  <a:lnTo>
+                    <a:pt x="6087914" y="754213"/>
+                  </a:lnTo>
+                  <a:lnTo>
+                    <a:pt x="6159537" y="670771"/>
+                  </a:lnTo>
+                  <a:lnTo>
+                    <a:pt x="6231159" y="584926"/>
+                  </a:lnTo>
+                  <a:lnTo>
+                    <a:pt x="6302782" y="496611"/>
+                  </a:lnTo>
+                  <a:lnTo>
+                    <a:pt x="6374404" y="405752"/>
+                  </a:lnTo>
+                  <a:lnTo>
+                    <a:pt x="6446027" y="312278"/>
+                  </a:lnTo>
+                  <a:lnTo>
+                    <a:pt x="6517649" y="216113"/>
+                  </a:lnTo>
+                  <a:lnTo>
+                    <a:pt x="6589272" y="117180"/>
+                  </a:lnTo>
+                  <a:lnTo>
+                    <a:pt x="6660894" y="15398"/>
+                  </a:lnTo>
+                  <a:lnTo>
+                    <a:pt x="6671427" y="0"/>
                   </a:lnTo>
                 </a:path>
               </a:pathLst>

--- a/docs/plots/carbo/jx_carbo_linsubhr_dosedisc_grade3.pptx
+++ b/docs/plots/carbo/jx_carbo_linsubhr_dosedisc_grade3.pptx
@@ -3132,530 +3132,524 @@
           <p:spPr>
             <a:xfrm>
               <a:off x="1172049" y="1896563"/>
-              <a:ext cx="7090630" cy="3555132"/>
+              <a:ext cx="7090630" cy="3568900"/>
             </a:xfrm>
             <a:custGeom>
               <a:avLst/>
               <a:pathLst>
-                <a:path w="7090630" h="3555132">
+                <a:path w="7090630" h="3568900">
                   <a:moveTo>
-                    <a:pt x="0" y="2961109"/>
+                    <a:pt x="0" y="2883163"/>
                   </a:moveTo>
                   <a:lnTo>
-                    <a:pt x="71622" y="2957377"/>
-                  </a:lnTo>
-                  <a:lnTo>
-                    <a:pt x="143245" y="2953625"/>
-                  </a:lnTo>
-                  <a:lnTo>
-                    <a:pt x="214867" y="2949852"/>
-                  </a:lnTo>
-                  <a:lnTo>
-                    <a:pt x="286490" y="2946060"/>
-                  </a:lnTo>
-                  <a:lnTo>
-                    <a:pt x="358112" y="2942246"/>
-                  </a:lnTo>
-                  <a:lnTo>
-                    <a:pt x="429735" y="2938413"/>
-                  </a:lnTo>
-                  <a:lnTo>
-                    <a:pt x="501357" y="2934558"/>
-                  </a:lnTo>
-                  <a:lnTo>
-                    <a:pt x="572980" y="2930683"/>
-                  </a:lnTo>
-                  <a:lnTo>
-                    <a:pt x="644602" y="2926786"/>
-                  </a:lnTo>
-                  <a:lnTo>
-                    <a:pt x="716225" y="2922869"/>
-                  </a:lnTo>
-                  <a:lnTo>
-                    <a:pt x="787847" y="2918931"/>
-                  </a:lnTo>
-                  <a:lnTo>
-                    <a:pt x="859470" y="2914971"/>
-                  </a:lnTo>
-                  <a:lnTo>
-                    <a:pt x="931092" y="2910990"/>
-                  </a:lnTo>
-                  <a:lnTo>
-                    <a:pt x="1002715" y="2906987"/>
-                  </a:lnTo>
-                  <a:lnTo>
-                    <a:pt x="1074337" y="2902963"/>
-                  </a:lnTo>
-                  <a:lnTo>
-                    <a:pt x="1145960" y="2898917"/>
-                  </a:lnTo>
-                  <a:lnTo>
-                    <a:pt x="1217582" y="2894850"/>
-                  </a:lnTo>
-                  <a:lnTo>
-                    <a:pt x="1289205" y="2890760"/>
-                  </a:lnTo>
-                  <a:lnTo>
-                    <a:pt x="1360827" y="2886648"/>
-                  </a:lnTo>
-                  <a:lnTo>
-                    <a:pt x="1432450" y="2882514"/>
-                  </a:lnTo>
-                  <a:lnTo>
-                    <a:pt x="1504073" y="2878358"/>
-                  </a:lnTo>
-                  <a:lnTo>
-                    <a:pt x="1575695" y="2874179"/>
-                  </a:lnTo>
-                  <a:lnTo>
-                    <a:pt x="1647318" y="2869978"/>
-                  </a:lnTo>
-                  <a:lnTo>
-                    <a:pt x="1718940" y="2865754"/>
-                  </a:lnTo>
-                  <a:lnTo>
-                    <a:pt x="1790563" y="2861508"/>
-                  </a:lnTo>
-                  <a:lnTo>
-                    <a:pt x="1862185" y="2857238"/>
-                  </a:lnTo>
-                  <a:lnTo>
-                    <a:pt x="1933808" y="2852945"/>
-                  </a:lnTo>
-                  <a:lnTo>
-                    <a:pt x="2005430" y="2848630"/>
-                  </a:lnTo>
-                  <a:lnTo>
-                    <a:pt x="2077053" y="2844291"/>
-                  </a:lnTo>
-                  <a:lnTo>
-                    <a:pt x="2148675" y="2839928"/>
-                  </a:lnTo>
-                  <a:lnTo>
-                    <a:pt x="2220298" y="2835542"/>
-                  </a:lnTo>
-                  <a:lnTo>
-                    <a:pt x="2291920" y="2831132"/>
-                  </a:lnTo>
-                  <a:lnTo>
-                    <a:pt x="2363543" y="2826699"/>
-                  </a:lnTo>
-                  <a:lnTo>
-                    <a:pt x="2435165" y="2822241"/>
-                  </a:lnTo>
-                  <a:lnTo>
-                    <a:pt x="2506788" y="2817760"/>
-                  </a:lnTo>
-                  <a:lnTo>
-                    <a:pt x="2578410" y="2813254"/>
-                  </a:lnTo>
-                  <a:lnTo>
-                    <a:pt x="2650033" y="2808724"/>
-                  </a:lnTo>
-                  <a:lnTo>
-                    <a:pt x="2721655" y="2804170"/>
-                  </a:lnTo>
-                  <a:lnTo>
-                    <a:pt x="2793278" y="2799591"/>
-                  </a:lnTo>
-                  <a:lnTo>
-                    <a:pt x="2864901" y="2794987"/>
-                  </a:lnTo>
-                  <a:lnTo>
-                    <a:pt x="2936523" y="2790358"/>
-                  </a:lnTo>
-                  <a:lnTo>
-                    <a:pt x="3008146" y="2785705"/>
-                  </a:lnTo>
-                  <a:lnTo>
-                    <a:pt x="3079768" y="2764267"/>
-                  </a:lnTo>
-                  <a:lnTo>
-                    <a:pt x="3151391" y="2717427"/>
-                  </a:lnTo>
-                  <a:lnTo>
-                    <a:pt x="3223013" y="2668118"/>
-                  </a:lnTo>
-                  <a:lnTo>
-                    <a:pt x="3294636" y="2616208"/>
-                  </a:lnTo>
-                  <a:lnTo>
-                    <a:pt x="3366258" y="2561562"/>
-                  </a:lnTo>
-                  <a:lnTo>
-                    <a:pt x="3437881" y="2504035"/>
-                  </a:lnTo>
-                  <a:lnTo>
-                    <a:pt x="3509503" y="2443475"/>
-                  </a:lnTo>
-                  <a:lnTo>
-                    <a:pt x="3581126" y="2379721"/>
-                  </a:lnTo>
-                  <a:lnTo>
-                    <a:pt x="3652748" y="2312606"/>
-                  </a:lnTo>
-                  <a:lnTo>
-                    <a:pt x="3724371" y="2241953"/>
-                  </a:lnTo>
-                  <a:lnTo>
-                    <a:pt x="3795993" y="2167574"/>
-                  </a:lnTo>
-                  <a:lnTo>
-                    <a:pt x="3867616" y="2089274"/>
-                  </a:lnTo>
-                  <a:lnTo>
-                    <a:pt x="3939238" y="2006845"/>
-                  </a:lnTo>
-                  <a:lnTo>
-                    <a:pt x="4010861" y="1920070"/>
-                  </a:lnTo>
-                  <a:lnTo>
-                    <a:pt x="4082483" y="1828720"/>
-                  </a:lnTo>
-                  <a:lnTo>
-                    <a:pt x="4154106" y="1732554"/>
-                  </a:lnTo>
-                  <a:lnTo>
-                    <a:pt x="4225729" y="1631317"/>
-                  </a:lnTo>
-                  <a:lnTo>
-                    <a:pt x="4297351" y="1524743"/>
-                  </a:lnTo>
-                  <a:lnTo>
-                    <a:pt x="4368974" y="1412549"/>
-                  </a:lnTo>
-                  <a:lnTo>
-                    <a:pt x="4440596" y="1294440"/>
-                  </a:lnTo>
-                  <a:lnTo>
-                    <a:pt x="4512219" y="1170104"/>
-                  </a:lnTo>
-                  <a:lnTo>
-                    <a:pt x="4583841" y="1039212"/>
-                  </a:lnTo>
-                  <a:lnTo>
-                    <a:pt x="4655464" y="901418"/>
-                  </a:lnTo>
-                  <a:lnTo>
-                    <a:pt x="4727086" y="756360"/>
-                  </a:lnTo>
-                  <a:lnTo>
-                    <a:pt x="4798709" y="603653"/>
-                  </a:lnTo>
-                  <a:lnTo>
-                    <a:pt x="4870331" y="442895"/>
-                  </a:lnTo>
-                  <a:lnTo>
-                    <a:pt x="4941954" y="273661"/>
-                  </a:lnTo>
-                  <a:lnTo>
-                    <a:pt x="5013576" y="95504"/>
-                  </a:lnTo>
-                  <a:lnTo>
-                    <a:pt x="5050048" y="0"/>
+                    <a:pt x="71622" y="2880948"/>
+                  </a:lnTo>
+                  <a:lnTo>
+                    <a:pt x="143245" y="2878727"/>
+                  </a:lnTo>
+                  <a:lnTo>
+                    <a:pt x="214867" y="2876499"/>
+                  </a:lnTo>
+                  <a:lnTo>
+                    <a:pt x="286490" y="2874265"/>
+                  </a:lnTo>
+                  <a:lnTo>
+                    <a:pt x="358112" y="2872025"/>
+                  </a:lnTo>
+                  <a:lnTo>
+                    <a:pt x="429735" y="2869778"/>
+                  </a:lnTo>
+                  <a:lnTo>
+                    <a:pt x="501357" y="2867524"/>
+                  </a:lnTo>
+                  <a:lnTo>
+                    <a:pt x="572980" y="2865264"/>
+                  </a:lnTo>
+                  <a:lnTo>
+                    <a:pt x="644602" y="2862998"/>
+                  </a:lnTo>
+                  <a:lnTo>
+                    <a:pt x="716225" y="2860725"/>
+                  </a:lnTo>
+                  <a:lnTo>
+                    <a:pt x="787847" y="2858445"/>
+                  </a:lnTo>
+                  <a:lnTo>
+                    <a:pt x="859470" y="2856159"/>
+                  </a:lnTo>
+                  <a:lnTo>
+                    <a:pt x="931092" y="2853867"/>
+                  </a:lnTo>
+                  <a:lnTo>
+                    <a:pt x="1002715" y="2851567"/>
+                  </a:lnTo>
+                  <a:lnTo>
+                    <a:pt x="1074337" y="2849261"/>
+                  </a:lnTo>
+                  <a:lnTo>
+                    <a:pt x="1145960" y="2846949"/>
+                  </a:lnTo>
+                  <a:lnTo>
+                    <a:pt x="1217582" y="2844630"/>
+                  </a:lnTo>
+                  <a:lnTo>
+                    <a:pt x="1289205" y="2842304"/>
+                  </a:lnTo>
+                  <a:lnTo>
+                    <a:pt x="1360827" y="2839971"/>
+                  </a:lnTo>
+                  <a:lnTo>
+                    <a:pt x="1432450" y="2837632"/>
+                  </a:lnTo>
+                  <a:lnTo>
+                    <a:pt x="1504073" y="2835286"/>
+                  </a:lnTo>
+                  <a:lnTo>
+                    <a:pt x="1575695" y="2832933"/>
+                  </a:lnTo>
+                  <a:lnTo>
+                    <a:pt x="1647318" y="2830574"/>
+                  </a:lnTo>
+                  <a:lnTo>
+                    <a:pt x="1718940" y="2828207"/>
+                  </a:lnTo>
+                  <a:lnTo>
+                    <a:pt x="1790563" y="2825834"/>
+                  </a:lnTo>
+                  <a:lnTo>
+                    <a:pt x="1862185" y="2823454"/>
+                  </a:lnTo>
+                  <a:lnTo>
+                    <a:pt x="1933808" y="2821068"/>
+                  </a:lnTo>
+                  <a:lnTo>
+                    <a:pt x="2005430" y="2818674"/>
+                  </a:lnTo>
+                  <a:lnTo>
+                    <a:pt x="2077053" y="2816273"/>
+                  </a:lnTo>
+                  <a:lnTo>
+                    <a:pt x="2148675" y="2813866"/>
+                  </a:lnTo>
+                  <a:lnTo>
+                    <a:pt x="2220298" y="2811451"/>
+                  </a:lnTo>
+                  <a:lnTo>
+                    <a:pt x="2291920" y="2809030"/>
+                  </a:lnTo>
+                  <a:lnTo>
+                    <a:pt x="2363543" y="2806602"/>
+                  </a:lnTo>
+                  <a:lnTo>
+                    <a:pt x="2435165" y="2804166"/>
+                  </a:lnTo>
+                  <a:lnTo>
+                    <a:pt x="2506788" y="2801724"/>
+                  </a:lnTo>
+                  <a:lnTo>
+                    <a:pt x="2578410" y="2799275"/>
+                  </a:lnTo>
+                  <a:lnTo>
+                    <a:pt x="2650033" y="2796818"/>
+                  </a:lnTo>
+                  <a:lnTo>
+                    <a:pt x="2721655" y="2794355"/>
+                  </a:lnTo>
+                  <a:lnTo>
+                    <a:pt x="2793278" y="2791884"/>
+                  </a:lnTo>
+                  <a:lnTo>
+                    <a:pt x="2864901" y="2789407"/>
+                  </a:lnTo>
+                  <a:lnTo>
+                    <a:pt x="2936523" y="2786922"/>
+                  </a:lnTo>
+                  <a:lnTo>
+                    <a:pt x="3008146" y="2784430"/>
+                  </a:lnTo>
+                  <a:lnTo>
+                    <a:pt x="3079768" y="2762951"/>
+                  </a:lnTo>
+                  <a:lnTo>
+                    <a:pt x="3151391" y="2712688"/>
+                  </a:lnTo>
+                  <a:lnTo>
+                    <a:pt x="3223013" y="2659586"/>
+                  </a:lnTo>
+                  <a:lnTo>
+                    <a:pt x="3294636" y="2603484"/>
+                  </a:lnTo>
+                  <a:lnTo>
+                    <a:pt x="3366258" y="2544212"/>
+                  </a:lnTo>
+                  <a:lnTo>
+                    <a:pt x="3437881" y="2481592"/>
+                  </a:lnTo>
+                  <a:lnTo>
+                    <a:pt x="3509503" y="2415434"/>
+                  </a:lnTo>
+                  <a:lnTo>
+                    <a:pt x="3581126" y="2345538"/>
+                  </a:lnTo>
+                  <a:lnTo>
+                    <a:pt x="3652748" y="2271694"/>
+                  </a:lnTo>
+                  <a:lnTo>
+                    <a:pt x="3724371" y="2193678"/>
+                  </a:lnTo>
+                  <a:lnTo>
+                    <a:pt x="3795993" y="2111254"/>
+                  </a:lnTo>
+                  <a:lnTo>
+                    <a:pt x="3867616" y="2024174"/>
+                  </a:lnTo>
+                  <a:lnTo>
+                    <a:pt x="3939238" y="1932175"/>
+                  </a:lnTo>
+                  <a:lnTo>
+                    <a:pt x="4010861" y="1834978"/>
+                  </a:lnTo>
+                  <a:lnTo>
+                    <a:pt x="4082483" y="1732290"/>
+                  </a:lnTo>
+                  <a:lnTo>
+                    <a:pt x="4154106" y="1623800"/>
+                  </a:lnTo>
+                  <a:lnTo>
+                    <a:pt x="4225729" y="1509182"/>
+                  </a:lnTo>
+                  <a:lnTo>
+                    <a:pt x="4297351" y="1388088"/>
+                  </a:lnTo>
+                  <a:lnTo>
+                    <a:pt x="4368974" y="1260153"/>
+                  </a:lnTo>
+                  <a:lnTo>
+                    <a:pt x="4440596" y="1124990"/>
+                  </a:lnTo>
+                  <a:lnTo>
+                    <a:pt x="4512219" y="982192"/>
+                  </a:lnTo>
+                  <a:lnTo>
+                    <a:pt x="4583841" y="831326"/>
+                  </a:lnTo>
+                  <a:lnTo>
+                    <a:pt x="4655464" y="671937"/>
+                  </a:lnTo>
+                  <a:lnTo>
+                    <a:pt x="4727086" y="503544"/>
+                  </a:lnTo>
+                  <a:lnTo>
+                    <a:pt x="4798709" y="325637"/>
+                  </a:lnTo>
+                  <a:lnTo>
+                    <a:pt x="4870331" y="137680"/>
+                  </a:lnTo>
+                  <a:lnTo>
+                    <a:pt x="4919990" y="0"/>
                   </a:lnTo>
                   <a:lnTo>
                     <a:pt x="7090630" y="0"/>
                   </a:lnTo>
                   <a:lnTo>
-                    <a:pt x="7090630" y="2474426"/>
-                  </a:lnTo>
-                  <a:lnTo>
-                    <a:pt x="7019007" y="2480750"/>
-                  </a:lnTo>
-                  <a:lnTo>
-                    <a:pt x="6947385" y="2487041"/>
-                  </a:lnTo>
-                  <a:lnTo>
-                    <a:pt x="6875762" y="2493297"/>
-                  </a:lnTo>
-                  <a:lnTo>
-                    <a:pt x="6804139" y="2499521"/>
-                  </a:lnTo>
-                  <a:lnTo>
-                    <a:pt x="6732517" y="2505710"/>
-                  </a:lnTo>
-                  <a:lnTo>
-                    <a:pt x="6660894" y="2511867"/>
-                  </a:lnTo>
-                  <a:lnTo>
-                    <a:pt x="6589272" y="2517990"/>
-                  </a:lnTo>
-                  <a:lnTo>
-                    <a:pt x="6517649" y="2524081"/>
-                  </a:lnTo>
-                  <a:lnTo>
-                    <a:pt x="6446027" y="2530139"/>
-                  </a:lnTo>
-                  <a:lnTo>
-                    <a:pt x="6374404" y="2536164"/>
-                  </a:lnTo>
-                  <a:lnTo>
-                    <a:pt x="6302782" y="2542157"/>
-                  </a:lnTo>
-                  <a:lnTo>
-                    <a:pt x="6231159" y="2548118"/>
-                  </a:lnTo>
-                  <a:lnTo>
-                    <a:pt x="6159537" y="2554047"/>
-                  </a:lnTo>
-                  <a:lnTo>
-                    <a:pt x="6087914" y="2559944"/>
-                  </a:lnTo>
-                  <a:lnTo>
-                    <a:pt x="6016292" y="2565810"/>
-                  </a:lnTo>
-                  <a:lnTo>
-                    <a:pt x="5944669" y="2571644"/>
-                  </a:lnTo>
-                  <a:lnTo>
-                    <a:pt x="5873047" y="2577446"/>
-                  </a:lnTo>
-                  <a:lnTo>
-                    <a:pt x="5801424" y="2583218"/>
-                  </a:lnTo>
-                  <a:lnTo>
-                    <a:pt x="5729802" y="2588958"/>
-                  </a:lnTo>
-                  <a:lnTo>
-                    <a:pt x="5658179" y="2594668"/>
-                  </a:lnTo>
-                  <a:lnTo>
-                    <a:pt x="5586557" y="2600347"/>
-                  </a:lnTo>
-                  <a:lnTo>
-                    <a:pt x="5514934" y="2605995"/>
-                  </a:lnTo>
-                  <a:lnTo>
-                    <a:pt x="5443311" y="2611614"/>
-                  </a:lnTo>
-                  <a:lnTo>
-                    <a:pt x="5371689" y="2617202"/>
-                  </a:lnTo>
-                  <a:lnTo>
-                    <a:pt x="5300066" y="2622760"/>
-                  </a:lnTo>
-                  <a:lnTo>
-                    <a:pt x="5228444" y="2628288"/>
-                  </a:lnTo>
-                  <a:lnTo>
-                    <a:pt x="5156821" y="2633786"/>
-                  </a:lnTo>
-                  <a:lnTo>
-                    <a:pt x="5085199" y="2639256"/>
-                  </a:lnTo>
-                  <a:lnTo>
-                    <a:pt x="5013576" y="2644695"/>
-                  </a:lnTo>
-                  <a:lnTo>
-                    <a:pt x="4941954" y="2650106"/>
-                  </a:lnTo>
-                  <a:lnTo>
-                    <a:pt x="4870331" y="2655487"/>
-                  </a:lnTo>
-                  <a:lnTo>
-                    <a:pt x="4798709" y="2660840"/>
-                  </a:lnTo>
-                  <a:lnTo>
-                    <a:pt x="4727086" y="2666164"/>
-                  </a:lnTo>
-                  <a:lnTo>
-                    <a:pt x="4655464" y="2671459"/>
-                  </a:lnTo>
-                  <a:lnTo>
-                    <a:pt x="4583841" y="2676726"/>
-                  </a:lnTo>
-                  <a:lnTo>
-                    <a:pt x="4512219" y="2681964"/>
-                  </a:lnTo>
-                  <a:lnTo>
-                    <a:pt x="4440596" y="2687175"/>
-                  </a:lnTo>
-                  <a:lnTo>
-                    <a:pt x="4368974" y="2692357"/>
-                  </a:lnTo>
-                  <a:lnTo>
-                    <a:pt x="4297351" y="2697512"/>
-                  </a:lnTo>
-                  <a:lnTo>
-                    <a:pt x="4225729" y="2702639"/>
-                  </a:lnTo>
-                  <a:lnTo>
-                    <a:pt x="4154106" y="2707738"/>
-                  </a:lnTo>
-                  <a:lnTo>
-                    <a:pt x="4082483" y="2712810"/>
-                  </a:lnTo>
-                  <a:lnTo>
-                    <a:pt x="4010861" y="2717855"/>
-                  </a:lnTo>
-                  <a:lnTo>
-                    <a:pt x="3939238" y="2722873"/>
-                  </a:lnTo>
-                  <a:lnTo>
-                    <a:pt x="3867616" y="2727864"/>
-                  </a:lnTo>
-                  <a:lnTo>
-                    <a:pt x="3795993" y="2732828"/>
-                  </a:lnTo>
-                  <a:lnTo>
-                    <a:pt x="3724371" y="2737765"/>
-                  </a:lnTo>
-                  <a:lnTo>
-                    <a:pt x="3652748" y="2742676"/>
-                  </a:lnTo>
-                  <a:lnTo>
-                    <a:pt x="3581126" y="2747561"/>
-                  </a:lnTo>
-                  <a:lnTo>
-                    <a:pt x="3509503" y="2752419"/>
-                  </a:lnTo>
-                  <a:lnTo>
-                    <a:pt x="3437881" y="2757251"/>
-                  </a:lnTo>
-                  <a:lnTo>
-                    <a:pt x="3366258" y="2762057"/>
-                  </a:lnTo>
-                  <a:lnTo>
-                    <a:pt x="3294636" y="2766838"/>
-                  </a:lnTo>
-                  <a:lnTo>
-                    <a:pt x="3223013" y="2771593"/>
-                  </a:lnTo>
-                  <a:lnTo>
-                    <a:pt x="3151391" y="2776322"/>
-                  </a:lnTo>
-                  <a:lnTo>
-                    <a:pt x="3079768" y="2781026"/>
-                  </a:lnTo>
-                  <a:lnTo>
-                    <a:pt x="3008146" y="2808760"/>
-                  </a:lnTo>
-                  <a:lnTo>
-                    <a:pt x="2936523" y="2851026"/>
-                  </a:lnTo>
-                  <a:lnTo>
-                    <a:pt x="2864901" y="2891174"/>
-                  </a:lnTo>
-                  <a:lnTo>
-                    <a:pt x="2793278" y="2929312"/>
-                  </a:lnTo>
-                  <a:lnTo>
-                    <a:pt x="2721655" y="2965539"/>
-                  </a:lnTo>
-                  <a:lnTo>
-                    <a:pt x="2650033" y="2999952"/>
-                  </a:lnTo>
-                  <a:lnTo>
-                    <a:pt x="2578410" y="3032642"/>
-                  </a:lnTo>
-                  <a:lnTo>
-                    <a:pt x="2506788" y="3063694"/>
-                  </a:lnTo>
-                  <a:lnTo>
-                    <a:pt x="2435165" y="3093192"/>
-                  </a:lnTo>
-                  <a:lnTo>
-                    <a:pt x="2363543" y="3121211"/>
-                  </a:lnTo>
-                  <a:lnTo>
-                    <a:pt x="2291920" y="3147828"/>
-                  </a:lnTo>
-                  <a:lnTo>
-                    <a:pt x="2220298" y="3173111"/>
-                  </a:lnTo>
-                  <a:lnTo>
-                    <a:pt x="2148675" y="3197128"/>
-                  </a:lnTo>
-                  <a:lnTo>
-                    <a:pt x="2077053" y="3219942"/>
-                  </a:lnTo>
-                  <a:lnTo>
-                    <a:pt x="2005430" y="3241614"/>
-                  </a:lnTo>
-                  <a:lnTo>
-                    <a:pt x="1933808" y="3262200"/>
-                  </a:lnTo>
-                  <a:lnTo>
-                    <a:pt x="1862185" y="3281755"/>
-                  </a:lnTo>
-                  <a:lnTo>
-                    <a:pt x="1790563" y="3300331"/>
-                  </a:lnTo>
-                  <a:lnTo>
-                    <a:pt x="1718940" y="3317976"/>
-                  </a:lnTo>
-                  <a:lnTo>
-                    <a:pt x="1647318" y="3334738"/>
-                  </a:lnTo>
-                  <a:lnTo>
-                    <a:pt x="1575695" y="3350660"/>
-                  </a:lnTo>
-                  <a:lnTo>
-                    <a:pt x="1504073" y="3365784"/>
-                  </a:lnTo>
-                  <a:lnTo>
-                    <a:pt x="1432450" y="3380152"/>
-                  </a:lnTo>
-                  <a:lnTo>
-                    <a:pt x="1360827" y="3393799"/>
-                  </a:lnTo>
-                  <a:lnTo>
-                    <a:pt x="1289205" y="3406763"/>
-                  </a:lnTo>
-                  <a:lnTo>
-                    <a:pt x="1217582" y="3419078"/>
-                  </a:lnTo>
-                  <a:lnTo>
-                    <a:pt x="1145960" y="3430776"/>
-                  </a:lnTo>
-                  <a:lnTo>
-                    <a:pt x="1074337" y="3441888"/>
-                  </a:lnTo>
-                  <a:lnTo>
-                    <a:pt x="1002715" y="3452443"/>
-                  </a:lnTo>
-                  <a:lnTo>
-                    <a:pt x="931092" y="3462470"/>
-                  </a:lnTo>
-                  <a:lnTo>
-                    <a:pt x="859470" y="3471995"/>
-                  </a:lnTo>
-                  <a:lnTo>
-                    <a:pt x="787847" y="3481043"/>
-                  </a:lnTo>
-                  <a:lnTo>
-                    <a:pt x="716225" y="3489637"/>
-                  </a:lnTo>
-                  <a:lnTo>
-                    <a:pt x="644602" y="3497801"/>
-                  </a:lnTo>
-                  <a:lnTo>
-                    <a:pt x="572980" y="3505556"/>
-                  </a:lnTo>
-                  <a:lnTo>
-                    <a:pt x="501357" y="3512923"/>
-                  </a:lnTo>
-                  <a:lnTo>
-                    <a:pt x="429735" y="3519921"/>
-                  </a:lnTo>
-                  <a:lnTo>
-                    <a:pt x="358112" y="3526568"/>
-                  </a:lnTo>
-                  <a:lnTo>
-                    <a:pt x="286490" y="3532883"/>
-                  </a:lnTo>
-                  <a:lnTo>
-                    <a:pt x="214867" y="3538881"/>
-                  </a:lnTo>
-                  <a:lnTo>
-                    <a:pt x="143245" y="3544578"/>
-                  </a:lnTo>
-                  <a:lnTo>
-                    <a:pt x="71622" y="3549991"/>
-                  </a:lnTo>
-                  <a:lnTo>
-                    <a:pt x="0" y="3555132"/>
+                    <a:pt x="7090630" y="2629867"/>
+                  </a:lnTo>
+                  <a:lnTo>
+                    <a:pt x="7019007" y="2632803"/>
+                  </a:lnTo>
+                  <a:lnTo>
+                    <a:pt x="6947385" y="2635730"/>
+                  </a:lnTo>
+                  <a:lnTo>
+                    <a:pt x="6875762" y="2638649"/>
+                  </a:lnTo>
+                  <a:lnTo>
+                    <a:pt x="6804139" y="2641559"/>
+                  </a:lnTo>
+                  <a:lnTo>
+                    <a:pt x="6732517" y="2644461"/>
+                  </a:lnTo>
+                  <a:lnTo>
+                    <a:pt x="6660894" y="2647355"/>
+                  </a:lnTo>
+                  <a:lnTo>
+                    <a:pt x="6589272" y="2650240"/>
+                  </a:lnTo>
+                  <a:lnTo>
+                    <a:pt x="6517649" y="2653118"/>
+                  </a:lnTo>
+                  <a:lnTo>
+                    <a:pt x="6446027" y="2655986"/>
+                  </a:lnTo>
+                  <a:lnTo>
+                    <a:pt x="6374404" y="2658847"/>
+                  </a:lnTo>
+                  <a:lnTo>
+                    <a:pt x="6302782" y="2661699"/>
+                  </a:lnTo>
+                  <a:lnTo>
+                    <a:pt x="6231159" y="2664544"/>
+                  </a:lnTo>
+                  <a:lnTo>
+                    <a:pt x="6159537" y="2667380"/>
+                  </a:lnTo>
+                  <a:lnTo>
+                    <a:pt x="6087914" y="2670208"/>
+                  </a:lnTo>
+                  <a:lnTo>
+                    <a:pt x="6016292" y="2673027"/>
+                  </a:lnTo>
+                  <a:lnTo>
+                    <a:pt x="5944669" y="2675839"/>
+                  </a:lnTo>
+                  <a:lnTo>
+                    <a:pt x="5873047" y="2678643"/>
+                  </a:lnTo>
+                  <a:lnTo>
+                    <a:pt x="5801424" y="2681438"/>
+                  </a:lnTo>
+                  <a:lnTo>
+                    <a:pt x="5729802" y="2684226"/>
+                  </a:lnTo>
+                  <a:lnTo>
+                    <a:pt x="5658179" y="2687006"/>
+                  </a:lnTo>
+                  <a:lnTo>
+                    <a:pt x="5586557" y="2689777"/>
+                  </a:lnTo>
+                  <a:lnTo>
+                    <a:pt x="5514934" y="2692541"/>
+                  </a:lnTo>
+                  <a:lnTo>
+                    <a:pt x="5443311" y="2695297"/>
+                  </a:lnTo>
+                  <a:lnTo>
+                    <a:pt x="5371689" y="2698044"/>
+                  </a:lnTo>
+                  <a:lnTo>
+                    <a:pt x="5300066" y="2700784"/>
+                  </a:lnTo>
+                  <a:lnTo>
+                    <a:pt x="5228444" y="2703516"/>
+                  </a:lnTo>
+                  <a:lnTo>
+                    <a:pt x="5156821" y="2706240"/>
+                  </a:lnTo>
+                  <a:lnTo>
+                    <a:pt x="5085199" y="2708957"/>
+                  </a:lnTo>
+                  <a:lnTo>
+                    <a:pt x="5013576" y="2711665"/>
+                  </a:lnTo>
+                  <a:lnTo>
+                    <a:pt x="4941954" y="2714366"/>
+                  </a:lnTo>
+                  <a:lnTo>
+                    <a:pt x="4870331" y="2717059"/>
+                  </a:lnTo>
+                  <a:lnTo>
+                    <a:pt x="4798709" y="2719745"/>
+                  </a:lnTo>
+                  <a:lnTo>
+                    <a:pt x="4727086" y="2722422"/>
+                  </a:lnTo>
+                  <a:lnTo>
+                    <a:pt x="4655464" y="2725092"/>
+                  </a:lnTo>
+                  <a:lnTo>
+                    <a:pt x="4583841" y="2727755"/>
+                  </a:lnTo>
+                  <a:lnTo>
+                    <a:pt x="4512219" y="2730409"/>
+                  </a:lnTo>
+                  <a:lnTo>
+                    <a:pt x="4440596" y="2733056"/>
+                  </a:lnTo>
+                  <a:lnTo>
+                    <a:pt x="4368974" y="2735696"/>
+                  </a:lnTo>
+                  <a:lnTo>
+                    <a:pt x="4297351" y="2738327"/>
+                  </a:lnTo>
+                  <a:lnTo>
+                    <a:pt x="4225729" y="2740952"/>
+                  </a:lnTo>
+                  <a:lnTo>
+                    <a:pt x="4154106" y="2743569"/>
+                  </a:lnTo>
+                  <a:lnTo>
+                    <a:pt x="4082483" y="2746178"/>
+                  </a:lnTo>
+                  <a:lnTo>
+                    <a:pt x="4010861" y="2748780"/>
+                  </a:lnTo>
+                  <a:lnTo>
+                    <a:pt x="3939238" y="2751374"/>
+                  </a:lnTo>
+                  <a:lnTo>
+                    <a:pt x="3867616" y="2753961"/>
+                  </a:lnTo>
+                  <a:lnTo>
+                    <a:pt x="3795993" y="2756540"/>
+                  </a:lnTo>
+                  <a:lnTo>
+                    <a:pt x="3724371" y="2759112"/>
+                  </a:lnTo>
+                  <a:lnTo>
+                    <a:pt x="3652748" y="2761677"/>
+                  </a:lnTo>
+                  <a:lnTo>
+                    <a:pt x="3581126" y="2764234"/>
+                  </a:lnTo>
+                  <a:lnTo>
+                    <a:pt x="3509503" y="2766784"/>
+                  </a:lnTo>
+                  <a:lnTo>
+                    <a:pt x="3437881" y="2769327"/>
+                  </a:lnTo>
+                  <a:lnTo>
+                    <a:pt x="3366258" y="2771862"/>
+                  </a:lnTo>
+                  <a:lnTo>
+                    <a:pt x="3294636" y="2774390"/>
+                  </a:lnTo>
+                  <a:lnTo>
+                    <a:pt x="3223013" y="2776911"/>
+                  </a:lnTo>
+                  <a:lnTo>
+                    <a:pt x="3151391" y="2779424"/>
+                  </a:lnTo>
+                  <a:lnTo>
+                    <a:pt x="3079768" y="2781931"/>
+                  </a:lnTo>
+                  <a:lnTo>
+                    <a:pt x="3008146" y="2810526"/>
+                  </a:lnTo>
+                  <a:lnTo>
+                    <a:pt x="2936523" y="2855557"/>
+                  </a:lnTo>
+                  <a:lnTo>
+                    <a:pt x="2864901" y="2898180"/>
+                  </a:lnTo>
+                  <a:lnTo>
+                    <a:pt x="2793278" y="2938524"/>
+                  </a:lnTo>
+                  <a:lnTo>
+                    <a:pt x="2721655" y="2976710"/>
+                  </a:lnTo>
+                  <a:lnTo>
+                    <a:pt x="2650033" y="3012855"/>
+                  </a:lnTo>
+                  <a:lnTo>
+                    <a:pt x="2578410" y="3047066"/>
+                  </a:lnTo>
+                  <a:lnTo>
+                    <a:pt x="2506788" y="3079449"/>
+                  </a:lnTo>
+                  <a:lnTo>
+                    <a:pt x="2435165" y="3110100"/>
+                  </a:lnTo>
+                  <a:lnTo>
+                    <a:pt x="2363543" y="3139111"/>
+                  </a:lnTo>
+                  <a:lnTo>
+                    <a:pt x="2291920" y="3166572"/>
+                  </a:lnTo>
+                  <a:lnTo>
+                    <a:pt x="2220298" y="3192564"/>
+                  </a:lnTo>
+                  <a:lnTo>
+                    <a:pt x="2148675" y="3217166"/>
+                  </a:lnTo>
+                  <a:lnTo>
+                    <a:pt x="2077053" y="3240452"/>
+                  </a:lnTo>
+                  <a:lnTo>
+                    <a:pt x="2005430" y="3262494"/>
+                  </a:lnTo>
+                  <a:lnTo>
+                    <a:pt x="1933808" y="3283356"/>
+                  </a:lnTo>
+                  <a:lnTo>
+                    <a:pt x="1862185" y="3303103"/>
+                  </a:lnTo>
+                  <a:lnTo>
+                    <a:pt x="1790563" y="3321794"/>
+                  </a:lnTo>
+                  <a:lnTo>
+                    <a:pt x="1718940" y="3339486"/>
+                  </a:lnTo>
+                  <a:lnTo>
+                    <a:pt x="1647318" y="3356232"/>
+                  </a:lnTo>
+                  <a:lnTo>
+                    <a:pt x="1575695" y="3372082"/>
+                  </a:lnTo>
+                  <a:lnTo>
+                    <a:pt x="1504073" y="3387085"/>
+                  </a:lnTo>
+                  <a:lnTo>
+                    <a:pt x="1432450" y="3401285"/>
+                  </a:lnTo>
+                  <a:lnTo>
+                    <a:pt x="1360827" y="3414726"/>
+                  </a:lnTo>
+                  <a:lnTo>
+                    <a:pt x="1289205" y="3427448"/>
+                  </a:lnTo>
+                  <a:lnTo>
+                    <a:pt x="1217582" y="3439490"/>
+                  </a:lnTo>
+                  <a:lnTo>
+                    <a:pt x="1145960" y="3450888"/>
+                  </a:lnTo>
+                  <a:lnTo>
+                    <a:pt x="1074337" y="3461677"/>
+                  </a:lnTo>
+                  <a:lnTo>
+                    <a:pt x="1002715" y="3471888"/>
+                  </a:lnTo>
+                  <a:lnTo>
+                    <a:pt x="931092" y="3481554"/>
+                  </a:lnTo>
+                  <a:lnTo>
+                    <a:pt x="859470" y="3490703"/>
+                  </a:lnTo>
+                  <a:lnTo>
+                    <a:pt x="787847" y="3499362"/>
+                  </a:lnTo>
+                  <a:lnTo>
+                    <a:pt x="716225" y="3507559"/>
+                  </a:lnTo>
+                  <a:lnTo>
+                    <a:pt x="644602" y="3515317"/>
+                  </a:lnTo>
+                  <a:lnTo>
+                    <a:pt x="572980" y="3522660"/>
+                  </a:lnTo>
+                  <a:lnTo>
+                    <a:pt x="501357" y="3529611"/>
+                  </a:lnTo>
+                  <a:lnTo>
+                    <a:pt x="429735" y="3536190"/>
+                  </a:lnTo>
+                  <a:lnTo>
+                    <a:pt x="358112" y="3542417"/>
+                  </a:lnTo>
+                  <a:lnTo>
+                    <a:pt x="286490" y="3548311"/>
+                  </a:lnTo>
+                  <a:lnTo>
+                    <a:pt x="214867" y="3553890"/>
+                  </a:lnTo>
+                  <a:lnTo>
+                    <a:pt x="143245" y="3559171"/>
+                  </a:lnTo>
+                  <a:lnTo>
+                    <a:pt x="71622" y="3564169"/>
+                  </a:lnTo>
+                  <a:lnTo>
+                    <a:pt x="0" y="3568900"/>
                   </a:lnTo>
                   <a:close/>
                 </a:path>
@@ -3682,227 +3676,221 @@
           <p:spPr>
             <a:xfrm>
               <a:off x="1172049" y="1896563"/>
-              <a:ext cx="5050048" cy="2961109"/>
+              <a:ext cx="4919990" cy="2883163"/>
             </a:xfrm>
             <a:custGeom>
               <a:avLst/>
               <a:pathLst>
-                <a:path w="5050048" h="2961109">
+                <a:path w="4919990" h="2883163">
                   <a:moveTo>
-                    <a:pt x="0" y="2961109"/>
+                    <a:pt x="0" y="2883163"/>
                   </a:moveTo>
                   <a:lnTo>
-                    <a:pt x="71622" y="2957377"/>
-                  </a:lnTo>
-                  <a:lnTo>
-                    <a:pt x="143245" y="2953625"/>
-                  </a:lnTo>
-                  <a:lnTo>
-                    <a:pt x="214867" y="2949852"/>
-                  </a:lnTo>
-                  <a:lnTo>
-                    <a:pt x="286490" y="2946060"/>
-                  </a:lnTo>
-                  <a:lnTo>
-                    <a:pt x="358112" y="2942246"/>
-                  </a:lnTo>
-                  <a:lnTo>
-                    <a:pt x="429735" y="2938413"/>
-                  </a:lnTo>
-                  <a:lnTo>
-                    <a:pt x="501357" y="2934558"/>
-                  </a:lnTo>
-                  <a:lnTo>
-                    <a:pt x="572980" y="2930683"/>
-                  </a:lnTo>
-                  <a:lnTo>
-                    <a:pt x="644602" y="2926786"/>
-                  </a:lnTo>
-                  <a:lnTo>
-                    <a:pt x="716225" y="2922869"/>
-                  </a:lnTo>
-                  <a:lnTo>
-                    <a:pt x="787847" y="2918931"/>
-                  </a:lnTo>
-                  <a:lnTo>
-                    <a:pt x="859470" y="2914971"/>
-                  </a:lnTo>
-                  <a:lnTo>
-                    <a:pt x="931092" y="2910990"/>
-                  </a:lnTo>
-                  <a:lnTo>
-                    <a:pt x="1002715" y="2906987"/>
-                  </a:lnTo>
-                  <a:lnTo>
-                    <a:pt x="1074337" y="2902963"/>
-                  </a:lnTo>
-                  <a:lnTo>
-                    <a:pt x="1145960" y="2898917"/>
-                  </a:lnTo>
-                  <a:lnTo>
-                    <a:pt x="1217582" y="2894850"/>
-                  </a:lnTo>
-                  <a:lnTo>
-                    <a:pt x="1289205" y="2890760"/>
-                  </a:lnTo>
-                  <a:lnTo>
-                    <a:pt x="1360827" y="2886648"/>
-                  </a:lnTo>
-                  <a:lnTo>
-                    <a:pt x="1432450" y="2882514"/>
-                  </a:lnTo>
-                  <a:lnTo>
-                    <a:pt x="1504073" y="2878358"/>
-                  </a:lnTo>
-                  <a:lnTo>
-                    <a:pt x="1575695" y="2874179"/>
-                  </a:lnTo>
-                  <a:lnTo>
-                    <a:pt x="1647318" y="2869978"/>
-                  </a:lnTo>
-                  <a:lnTo>
-                    <a:pt x="1718940" y="2865754"/>
-                  </a:lnTo>
-                  <a:lnTo>
-                    <a:pt x="1790563" y="2861508"/>
-                  </a:lnTo>
-                  <a:lnTo>
-                    <a:pt x="1862185" y="2857238"/>
-                  </a:lnTo>
-                  <a:lnTo>
-                    <a:pt x="1933808" y="2852945"/>
-                  </a:lnTo>
-                  <a:lnTo>
-                    <a:pt x="2005430" y="2848630"/>
-                  </a:lnTo>
-                  <a:lnTo>
-                    <a:pt x="2077053" y="2844291"/>
-                  </a:lnTo>
-                  <a:lnTo>
-                    <a:pt x="2148675" y="2839928"/>
-                  </a:lnTo>
-                  <a:lnTo>
-                    <a:pt x="2220298" y="2835542"/>
-                  </a:lnTo>
-                  <a:lnTo>
-                    <a:pt x="2291920" y="2831132"/>
-                  </a:lnTo>
-                  <a:lnTo>
-                    <a:pt x="2363543" y="2826699"/>
-                  </a:lnTo>
-                  <a:lnTo>
-                    <a:pt x="2435165" y="2822241"/>
-                  </a:lnTo>
-                  <a:lnTo>
-                    <a:pt x="2506788" y="2817760"/>
-                  </a:lnTo>
-                  <a:lnTo>
-                    <a:pt x="2578410" y="2813254"/>
-                  </a:lnTo>
-                  <a:lnTo>
-                    <a:pt x="2650033" y="2808724"/>
-                  </a:lnTo>
-                  <a:lnTo>
-                    <a:pt x="2721655" y="2804170"/>
-                  </a:lnTo>
-                  <a:lnTo>
-                    <a:pt x="2793278" y="2799591"/>
-                  </a:lnTo>
-                  <a:lnTo>
-                    <a:pt x="2864901" y="2794987"/>
-                  </a:lnTo>
-                  <a:lnTo>
-                    <a:pt x="2936523" y="2790358"/>
-                  </a:lnTo>
-                  <a:lnTo>
-                    <a:pt x="3008146" y="2785705"/>
-                  </a:lnTo>
-                  <a:lnTo>
-                    <a:pt x="3079768" y="2764267"/>
-                  </a:lnTo>
-                  <a:lnTo>
-                    <a:pt x="3151391" y="2717427"/>
-                  </a:lnTo>
-                  <a:lnTo>
-                    <a:pt x="3223013" y="2668118"/>
-                  </a:lnTo>
-                  <a:lnTo>
-                    <a:pt x="3294636" y="2616208"/>
-                  </a:lnTo>
-                  <a:lnTo>
-                    <a:pt x="3366258" y="2561562"/>
-                  </a:lnTo>
-                  <a:lnTo>
-                    <a:pt x="3437881" y="2504035"/>
-                  </a:lnTo>
-                  <a:lnTo>
-                    <a:pt x="3509503" y="2443475"/>
-                  </a:lnTo>
-                  <a:lnTo>
-                    <a:pt x="3581126" y="2379721"/>
-                  </a:lnTo>
-                  <a:lnTo>
-                    <a:pt x="3652748" y="2312606"/>
-                  </a:lnTo>
-                  <a:lnTo>
-                    <a:pt x="3724371" y="2241953"/>
-                  </a:lnTo>
-                  <a:lnTo>
-                    <a:pt x="3795993" y="2167574"/>
-                  </a:lnTo>
-                  <a:lnTo>
-                    <a:pt x="3867616" y="2089274"/>
-                  </a:lnTo>
-                  <a:lnTo>
-                    <a:pt x="3939238" y="2006845"/>
-                  </a:lnTo>
-                  <a:lnTo>
-                    <a:pt x="4010861" y="1920070"/>
-                  </a:lnTo>
-                  <a:lnTo>
-                    <a:pt x="4082483" y="1828720"/>
-                  </a:lnTo>
-                  <a:lnTo>
-                    <a:pt x="4154106" y="1732554"/>
-                  </a:lnTo>
-                  <a:lnTo>
-                    <a:pt x="4225729" y="1631317"/>
-                  </a:lnTo>
-                  <a:lnTo>
-                    <a:pt x="4297351" y="1524743"/>
-                  </a:lnTo>
-                  <a:lnTo>
-                    <a:pt x="4368974" y="1412549"/>
-                  </a:lnTo>
-                  <a:lnTo>
-                    <a:pt x="4440596" y="1294440"/>
-                  </a:lnTo>
-                  <a:lnTo>
-                    <a:pt x="4512219" y="1170104"/>
-                  </a:lnTo>
-                  <a:lnTo>
-                    <a:pt x="4583841" y="1039212"/>
-                  </a:lnTo>
-                  <a:lnTo>
-                    <a:pt x="4655464" y="901418"/>
-                  </a:lnTo>
-                  <a:lnTo>
-                    <a:pt x="4727086" y="756360"/>
-                  </a:lnTo>
-                  <a:lnTo>
-                    <a:pt x="4798709" y="603653"/>
-                  </a:lnTo>
-                  <a:lnTo>
-                    <a:pt x="4870331" y="442895"/>
-                  </a:lnTo>
-                  <a:lnTo>
-                    <a:pt x="4941954" y="273661"/>
-                  </a:lnTo>
-                  <a:lnTo>
-                    <a:pt x="5013576" y="95504"/>
-                  </a:lnTo>
-                  <a:lnTo>
-                    <a:pt x="5050048" y="0"/>
+                    <a:pt x="71622" y="2880948"/>
+                  </a:lnTo>
+                  <a:lnTo>
+                    <a:pt x="143245" y="2878727"/>
+                  </a:lnTo>
+                  <a:lnTo>
+                    <a:pt x="214867" y="2876499"/>
+                  </a:lnTo>
+                  <a:lnTo>
+                    <a:pt x="286490" y="2874265"/>
+                  </a:lnTo>
+                  <a:lnTo>
+                    <a:pt x="358112" y="2872025"/>
+                  </a:lnTo>
+                  <a:lnTo>
+                    <a:pt x="429735" y="2869778"/>
+                  </a:lnTo>
+                  <a:lnTo>
+                    <a:pt x="501357" y="2867524"/>
+                  </a:lnTo>
+                  <a:lnTo>
+                    <a:pt x="572980" y="2865264"/>
+                  </a:lnTo>
+                  <a:lnTo>
+                    <a:pt x="644602" y="2862998"/>
+                  </a:lnTo>
+                  <a:lnTo>
+                    <a:pt x="716225" y="2860725"/>
+                  </a:lnTo>
+                  <a:lnTo>
+                    <a:pt x="787847" y="2858445"/>
+                  </a:lnTo>
+                  <a:lnTo>
+                    <a:pt x="859470" y="2856159"/>
+                  </a:lnTo>
+                  <a:lnTo>
+                    <a:pt x="931092" y="2853867"/>
+                  </a:lnTo>
+                  <a:lnTo>
+                    <a:pt x="1002715" y="2851567"/>
+                  </a:lnTo>
+                  <a:lnTo>
+                    <a:pt x="1074337" y="2849261"/>
+                  </a:lnTo>
+                  <a:lnTo>
+                    <a:pt x="1145960" y="2846949"/>
+                  </a:lnTo>
+                  <a:lnTo>
+                    <a:pt x="1217582" y="2844630"/>
+                  </a:lnTo>
+                  <a:lnTo>
+                    <a:pt x="1289205" y="2842304"/>
+                  </a:lnTo>
+                  <a:lnTo>
+                    <a:pt x="1360827" y="2839971"/>
+                  </a:lnTo>
+                  <a:lnTo>
+                    <a:pt x="1432450" y="2837632"/>
+                  </a:lnTo>
+                  <a:lnTo>
+                    <a:pt x="1504073" y="2835286"/>
+                  </a:lnTo>
+                  <a:lnTo>
+                    <a:pt x="1575695" y="2832933"/>
+                  </a:lnTo>
+                  <a:lnTo>
+                    <a:pt x="1647318" y="2830574"/>
+                  </a:lnTo>
+                  <a:lnTo>
+                    <a:pt x="1718940" y="2828207"/>
+                  </a:lnTo>
+                  <a:lnTo>
+                    <a:pt x="1790563" y="2825834"/>
+                  </a:lnTo>
+                  <a:lnTo>
+                    <a:pt x="1862185" y="2823454"/>
+                  </a:lnTo>
+                  <a:lnTo>
+                    <a:pt x="1933808" y="2821068"/>
+                  </a:lnTo>
+                  <a:lnTo>
+                    <a:pt x="2005430" y="2818674"/>
+                  </a:lnTo>
+                  <a:lnTo>
+                    <a:pt x="2077053" y="2816273"/>
+                  </a:lnTo>
+                  <a:lnTo>
+                    <a:pt x="2148675" y="2813866"/>
+                  </a:lnTo>
+                  <a:lnTo>
+                    <a:pt x="2220298" y="2811451"/>
+                  </a:lnTo>
+                  <a:lnTo>
+                    <a:pt x="2291920" y="2809030"/>
+                  </a:lnTo>
+                  <a:lnTo>
+                    <a:pt x="2363543" y="2806602"/>
+                  </a:lnTo>
+                  <a:lnTo>
+                    <a:pt x="2435165" y="2804166"/>
+                  </a:lnTo>
+                  <a:lnTo>
+                    <a:pt x="2506788" y="2801724"/>
+                  </a:lnTo>
+                  <a:lnTo>
+                    <a:pt x="2578410" y="2799275"/>
+                  </a:lnTo>
+                  <a:lnTo>
+                    <a:pt x="2650033" y="2796818"/>
+                  </a:lnTo>
+                  <a:lnTo>
+                    <a:pt x="2721655" y="2794355"/>
+                  </a:lnTo>
+                  <a:lnTo>
+                    <a:pt x="2793278" y="2791884"/>
+                  </a:lnTo>
+                  <a:lnTo>
+                    <a:pt x="2864901" y="2789407"/>
+                  </a:lnTo>
+                  <a:lnTo>
+                    <a:pt x="2936523" y="2786922"/>
+                  </a:lnTo>
+                  <a:lnTo>
+                    <a:pt x="3008146" y="2784430"/>
+                  </a:lnTo>
+                  <a:lnTo>
+                    <a:pt x="3079768" y="2762951"/>
+                  </a:lnTo>
+                  <a:lnTo>
+                    <a:pt x="3151391" y="2712688"/>
+                  </a:lnTo>
+                  <a:lnTo>
+                    <a:pt x="3223013" y="2659586"/>
+                  </a:lnTo>
+                  <a:lnTo>
+                    <a:pt x="3294636" y="2603484"/>
+                  </a:lnTo>
+                  <a:lnTo>
+                    <a:pt x="3366258" y="2544212"/>
+                  </a:lnTo>
+                  <a:lnTo>
+                    <a:pt x="3437881" y="2481592"/>
+                  </a:lnTo>
+                  <a:lnTo>
+                    <a:pt x="3509503" y="2415434"/>
+                  </a:lnTo>
+                  <a:lnTo>
+                    <a:pt x="3581126" y="2345538"/>
+                  </a:lnTo>
+                  <a:lnTo>
+                    <a:pt x="3652748" y="2271694"/>
+                  </a:lnTo>
+                  <a:lnTo>
+                    <a:pt x="3724371" y="2193678"/>
+                  </a:lnTo>
+                  <a:lnTo>
+                    <a:pt x="3795993" y="2111254"/>
+                  </a:lnTo>
+                  <a:lnTo>
+                    <a:pt x="3867616" y="2024174"/>
+                  </a:lnTo>
+                  <a:lnTo>
+                    <a:pt x="3939238" y="1932175"/>
+                  </a:lnTo>
+                  <a:lnTo>
+                    <a:pt x="4010861" y="1834978"/>
+                  </a:lnTo>
+                  <a:lnTo>
+                    <a:pt x="4082483" y="1732290"/>
+                  </a:lnTo>
+                  <a:lnTo>
+                    <a:pt x="4154106" y="1623800"/>
+                  </a:lnTo>
+                  <a:lnTo>
+                    <a:pt x="4225729" y="1509182"/>
+                  </a:lnTo>
+                  <a:lnTo>
+                    <a:pt x="4297351" y="1388088"/>
+                  </a:lnTo>
+                  <a:lnTo>
+                    <a:pt x="4368974" y="1260153"/>
+                  </a:lnTo>
+                  <a:lnTo>
+                    <a:pt x="4440596" y="1124990"/>
+                  </a:lnTo>
+                  <a:lnTo>
+                    <a:pt x="4512219" y="982192"/>
+                  </a:lnTo>
+                  <a:lnTo>
+                    <a:pt x="4583841" y="831326"/>
+                  </a:lnTo>
+                  <a:lnTo>
+                    <a:pt x="4655464" y="671937"/>
+                  </a:lnTo>
+                  <a:lnTo>
+                    <a:pt x="4727086" y="503544"/>
+                  </a:lnTo>
+                  <a:lnTo>
+                    <a:pt x="4798709" y="325637"/>
+                  </a:lnTo>
+                  <a:lnTo>
+                    <a:pt x="4870331" y="137680"/>
+                  </a:lnTo>
+                  <a:lnTo>
+                    <a:pt x="4919990" y="0"/>
                   </a:lnTo>
                 </a:path>
               </a:pathLst>
@@ -3922,312 +3910,312 @@
           </p:nvSpPr>
           <p:spPr>
             <a:xfrm>
-              <a:off x="1172049" y="4370989"/>
-              <a:ext cx="7090630" cy="1080706"/>
+              <a:off x="1172049" y="4526431"/>
+              <a:ext cx="7090630" cy="939032"/>
             </a:xfrm>
             <a:custGeom>
               <a:avLst/>
               <a:pathLst>
-                <a:path w="7090630" h="1080706">
+                <a:path w="7090630" h="939032">
                   <a:moveTo>
                     <a:pt x="7090630" y="0"/>
                   </a:moveTo>
                   <a:lnTo>
-                    <a:pt x="7019007" y="6324"/>
-                  </a:lnTo>
-                  <a:lnTo>
-                    <a:pt x="6947385" y="12614"/>
-                  </a:lnTo>
-                  <a:lnTo>
-                    <a:pt x="6875762" y="18871"/>
-                  </a:lnTo>
-                  <a:lnTo>
-                    <a:pt x="6804139" y="25094"/>
-                  </a:lnTo>
-                  <a:lnTo>
-                    <a:pt x="6732517" y="31284"/>
-                  </a:lnTo>
-                  <a:lnTo>
-                    <a:pt x="6660894" y="37441"/>
-                  </a:lnTo>
-                  <a:lnTo>
-                    <a:pt x="6589272" y="43564"/>
-                  </a:lnTo>
-                  <a:lnTo>
-                    <a:pt x="6517649" y="49655"/>
-                  </a:lnTo>
-                  <a:lnTo>
-                    <a:pt x="6446027" y="55713"/>
-                  </a:lnTo>
-                  <a:lnTo>
-                    <a:pt x="6374404" y="61738"/>
-                  </a:lnTo>
-                  <a:lnTo>
-                    <a:pt x="6302782" y="67731"/>
-                  </a:lnTo>
-                  <a:lnTo>
-                    <a:pt x="6231159" y="73692"/>
-                  </a:lnTo>
-                  <a:lnTo>
-                    <a:pt x="6159537" y="79621"/>
-                  </a:lnTo>
-                  <a:lnTo>
-                    <a:pt x="6087914" y="85518"/>
-                  </a:lnTo>
-                  <a:lnTo>
-                    <a:pt x="6016292" y="91383"/>
-                  </a:lnTo>
-                  <a:lnTo>
-                    <a:pt x="5944669" y="97217"/>
-                  </a:lnTo>
-                  <a:lnTo>
-                    <a:pt x="5873047" y="103020"/>
-                  </a:lnTo>
-                  <a:lnTo>
-                    <a:pt x="5801424" y="108791"/>
-                  </a:lnTo>
-                  <a:lnTo>
-                    <a:pt x="5729802" y="114532"/>
-                  </a:lnTo>
-                  <a:lnTo>
-                    <a:pt x="5658179" y="120242"/>
-                  </a:lnTo>
-                  <a:lnTo>
-                    <a:pt x="5586557" y="125921"/>
-                  </a:lnTo>
-                  <a:lnTo>
-                    <a:pt x="5514934" y="131569"/>
-                  </a:lnTo>
-                  <a:lnTo>
-                    <a:pt x="5443311" y="137187"/>
-                  </a:lnTo>
-                  <a:lnTo>
-                    <a:pt x="5371689" y="142775"/>
-                  </a:lnTo>
-                  <a:lnTo>
-                    <a:pt x="5300066" y="148333"/>
-                  </a:lnTo>
-                  <a:lnTo>
-                    <a:pt x="5228444" y="153862"/>
-                  </a:lnTo>
-                  <a:lnTo>
-                    <a:pt x="5156821" y="159360"/>
-                  </a:lnTo>
-                  <a:lnTo>
-                    <a:pt x="5085199" y="164829"/>
-                  </a:lnTo>
-                  <a:lnTo>
-                    <a:pt x="5013576" y="170269"/>
-                  </a:lnTo>
-                  <a:lnTo>
-                    <a:pt x="4941954" y="175679"/>
-                  </a:lnTo>
-                  <a:lnTo>
-                    <a:pt x="4870331" y="181061"/>
-                  </a:lnTo>
-                  <a:lnTo>
-                    <a:pt x="4798709" y="186413"/>
-                  </a:lnTo>
-                  <a:lnTo>
-                    <a:pt x="4727086" y="191737"/>
-                  </a:lnTo>
-                  <a:lnTo>
-                    <a:pt x="4655464" y="197033"/>
-                  </a:lnTo>
-                  <a:lnTo>
-                    <a:pt x="4583841" y="202299"/>
-                  </a:lnTo>
-                  <a:lnTo>
-                    <a:pt x="4512219" y="207538"/>
-                  </a:lnTo>
-                  <a:lnTo>
-                    <a:pt x="4440596" y="212748"/>
-                  </a:lnTo>
-                  <a:lnTo>
-                    <a:pt x="4368974" y="217931"/>
-                  </a:lnTo>
-                  <a:lnTo>
-                    <a:pt x="4297351" y="223085"/>
-                  </a:lnTo>
-                  <a:lnTo>
-                    <a:pt x="4225729" y="228212"/>
-                  </a:lnTo>
-                  <a:lnTo>
-                    <a:pt x="4154106" y="233312"/>
-                  </a:lnTo>
-                  <a:lnTo>
-                    <a:pt x="4082483" y="238384"/>
-                  </a:lnTo>
-                  <a:lnTo>
-                    <a:pt x="4010861" y="243429"/>
-                  </a:lnTo>
-                  <a:lnTo>
-                    <a:pt x="3939238" y="248447"/>
-                  </a:lnTo>
-                  <a:lnTo>
-                    <a:pt x="3867616" y="253437"/>
-                  </a:lnTo>
-                  <a:lnTo>
-                    <a:pt x="3795993" y="258401"/>
-                  </a:lnTo>
-                  <a:lnTo>
-                    <a:pt x="3724371" y="263339"/>
-                  </a:lnTo>
-                  <a:lnTo>
-                    <a:pt x="3652748" y="268250"/>
-                  </a:lnTo>
-                  <a:lnTo>
-                    <a:pt x="3581126" y="273134"/>
-                  </a:lnTo>
-                  <a:lnTo>
-                    <a:pt x="3509503" y="277993"/>
-                  </a:lnTo>
-                  <a:lnTo>
-                    <a:pt x="3437881" y="282825"/>
-                  </a:lnTo>
-                  <a:lnTo>
-                    <a:pt x="3366258" y="287631"/>
-                  </a:lnTo>
-                  <a:lnTo>
-                    <a:pt x="3294636" y="292412"/>
-                  </a:lnTo>
-                  <a:lnTo>
-                    <a:pt x="3223013" y="297167"/>
-                  </a:lnTo>
-                  <a:lnTo>
-                    <a:pt x="3151391" y="301896"/>
-                  </a:lnTo>
-                  <a:lnTo>
-                    <a:pt x="3079768" y="306600"/>
-                  </a:lnTo>
-                  <a:lnTo>
-                    <a:pt x="3008146" y="334334"/>
-                  </a:lnTo>
-                  <a:lnTo>
-                    <a:pt x="2936523" y="376599"/>
-                  </a:lnTo>
-                  <a:lnTo>
-                    <a:pt x="2864901" y="416748"/>
-                  </a:lnTo>
-                  <a:lnTo>
-                    <a:pt x="2793278" y="454886"/>
-                  </a:lnTo>
-                  <a:lnTo>
-                    <a:pt x="2721655" y="491113"/>
-                  </a:lnTo>
-                  <a:lnTo>
-                    <a:pt x="2650033" y="525526"/>
-                  </a:lnTo>
-                  <a:lnTo>
-                    <a:pt x="2578410" y="558216"/>
-                  </a:lnTo>
-                  <a:lnTo>
-                    <a:pt x="2506788" y="589268"/>
-                  </a:lnTo>
-                  <a:lnTo>
-                    <a:pt x="2435165" y="618765"/>
-                  </a:lnTo>
-                  <a:lnTo>
-                    <a:pt x="2363543" y="646785"/>
-                  </a:lnTo>
-                  <a:lnTo>
-                    <a:pt x="2291920" y="673401"/>
-                  </a:lnTo>
-                  <a:lnTo>
-                    <a:pt x="2220298" y="698685"/>
-                  </a:lnTo>
-                  <a:lnTo>
-                    <a:pt x="2148675" y="722702"/>
-                  </a:lnTo>
-                  <a:lnTo>
-                    <a:pt x="2077053" y="745516"/>
-                  </a:lnTo>
-                  <a:lnTo>
-                    <a:pt x="2005430" y="767188"/>
-                  </a:lnTo>
-                  <a:lnTo>
-                    <a:pt x="1933808" y="787774"/>
-                  </a:lnTo>
-                  <a:lnTo>
-                    <a:pt x="1862185" y="807329"/>
-                  </a:lnTo>
-                  <a:lnTo>
-                    <a:pt x="1790563" y="825905"/>
-                  </a:lnTo>
-                  <a:lnTo>
-                    <a:pt x="1718940" y="843550"/>
-                  </a:lnTo>
-                  <a:lnTo>
-                    <a:pt x="1647318" y="860311"/>
-                  </a:lnTo>
-                  <a:lnTo>
-                    <a:pt x="1575695" y="876234"/>
-                  </a:lnTo>
-                  <a:lnTo>
-                    <a:pt x="1504073" y="891358"/>
-                  </a:lnTo>
-                  <a:lnTo>
-                    <a:pt x="1432450" y="905725"/>
-                  </a:lnTo>
-                  <a:lnTo>
-                    <a:pt x="1360827" y="919373"/>
-                  </a:lnTo>
-                  <a:lnTo>
-                    <a:pt x="1289205" y="932337"/>
-                  </a:lnTo>
-                  <a:lnTo>
-                    <a:pt x="1217582" y="944652"/>
-                  </a:lnTo>
-                  <a:lnTo>
-                    <a:pt x="1145960" y="956350"/>
-                  </a:lnTo>
-                  <a:lnTo>
-                    <a:pt x="1074337" y="967462"/>
-                  </a:lnTo>
-                  <a:lnTo>
-                    <a:pt x="1002715" y="978017"/>
-                  </a:lnTo>
-                  <a:lnTo>
-                    <a:pt x="931092" y="988044"/>
-                  </a:lnTo>
-                  <a:lnTo>
-                    <a:pt x="859470" y="997569"/>
-                  </a:lnTo>
-                  <a:lnTo>
-                    <a:pt x="787847" y="1006616"/>
-                  </a:lnTo>
-                  <a:lnTo>
-                    <a:pt x="716225" y="1015211"/>
-                  </a:lnTo>
-                  <a:lnTo>
-                    <a:pt x="644602" y="1023375"/>
-                  </a:lnTo>
-                  <a:lnTo>
-                    <a:pt x="572980" y="1031130"/>
-                  </a:lnTo>
-                  <a:lnTo>
-                    <a:pt x="501357" y="1038497"/>
-                  </a:lnTo>
-                  <a:lnTo>
-                    <a:pt x="429735" y="1045495"/>
-                  </a:lnTo>
-                  <a:lnTo>
-                    <a:pt x="358112" y="1052142"/>
-                  </a:lnTo>
-                  <a:lnTo>
-                    <a:pt x="286490" y="1058456"/>
-                  </a:lnTo>
-                  <a:lnTo>
-                    <a:pt x="214867" y="1064455"/>
-                  </a:lnTo>
-                  <a:lnTo>
-                    <a:pt x="143245" y="1070152"/>
-                  </a:lnTo>
-                  <a:lnTo>
-                    <a:pt x="71622" y="1075565"/>
-                  </a:lnTo>
-                  <a:lnTo>
-                    <a:pt x="0" y="1080706"/>
+                    <a:pt x="7019007" y="2935"/>
+                  </a:lnTo>
+                  <a:lnTo>
+                    <a:pt x="6947385" y="5862"/>
+                  </a:lnTo>
+                  <a:lnTo>
+                    <a:pt x="6875762" y="8781"/>
+                  </a:lnTo>
+                  <a:lnTo>
+                    <a:pt x="6804139" y="11691"/>
+                  </a:lnTo>
+                  <a:lnTo>
+                    <a:pt x="6732517" y="14593"/>
+                  </a:lnTo>
+                  <a:lnTo>
+                    <a:pt x="6660894" y="17487"/>
+                  </a:lnTo>
+                  <a:lnTo>
+                    <a:pt x="6589272" y="20373"/>
+                  </a:lnTo>
+                  <a:lnTo>
+                    <a:pt x="6517649" y="23250"/>
+                  </a:lnTo>
+                  <a:lnTo>
+                    <a:pt x="6446027" y="26119"/>
+                  </a:lnTo>
+                  <a:lnTo>
+                    <a:pt x="6374404" y="28979"/>
+                  </a:lnTo>
+                  <a:lnTo>
+                    <a:pt x="6302782" y="31832"/>
+                  </a:lnTo>
+                  <a:lnTo>
+                    <a:pt x="6231159" y="34676"/>
+                  </a:lnTo>
+                  <a:lnTo>
+                    <a:pt x="6159537" y="37512"/>
+                  </a:lnTo>
+                  <a:lnTo>
+                    <a:pt x="6087914" y="40340"/>
+                  </a:lnTo>
+                  <a:lnTo>
+                    <a:pt x="6016292" y="43160"/>
+                  </a:lnTo>
+                  <a:lnTo>
+                    <a:pt x="5944669" y="45971"/>
+                  </a:lnTo>
+                  <a:lnTo>
+                    <a:pt x="5873047" y="48775"/>
+                  </a:lnTo>
+                  <a:lnTo>
+                    <a:pt x="5801424" y="51571"/>
+                  </a:lnTo>
+                  <a:lnTo>
+                    <a:pt x="5729802" y="54358"/>
+                  </a:lnTo>
+                  <a:lnTo>
+                    <a:pt x="5658179" y="57138"/>
+                  </a:lnTo>
+                  <a:lnTo>
+                    <a:pt x="5586557" y="59909"/>
+                  </a:lnTo>
+                  <a:lnTo>
+                    <a:pt x="5514934" y="62673"/>
+                  </a:lnTo>
+                  <a:lnTo>
+                    <a:pt x="5443311" y="65429"/>
+                  </a:lnTo>
+                  <a:lnTo>
+                    <a:pt x="5371689" y="68177"/>
+                  </a:lnTo>
+                  <a:lnTo>
+                    <a:pt x="5300066" y="70916"/>
+                  </a:lnTo>
+                  <a:lnTo>
+                    <a:pt x="5228444" y="73648"/>
+                  </a:lnTo>
+                  <a:lnTo>
+                    <a:pt x="5156821" y="76373"/>
+                  </a:lnTo>
+                  <a:lnTo>
+                    <a:pt x="5085199" y="79089"/>
+                  </a:lnTo>
+                  <a:lnTo>
+                    <a:pt x="5013576" y="81798"/>
+                  </a:lnTo>
+                  <a:lnTo>
+                    <a:pt x="4941954" y="84498"/>
+                  </a:lnTo>
+                  <a:lnTo>
+                    <a:pt x="4870331" y="87192"/>
+                  </a:lnTo>
+                  <a:lnTo>
+                    <a:pt x="4798709" y="89877"/>
+                  </a:lnTo>
+                  <a:lnTo>
+                    <a:pt x="4727086" y="92555"/>
+                  </a:lnTo>
+                  <a:lnTo>
+                    <a:pt x="4655464" y="95224"/>
+                  </a:lnTo>
+                  <a:lnTo>
+                    <a:pt x="4583841" y="97887"/>
+                  </a:lnTo>
+                  <a:lnTo>
+                    <a:pt x="4512219" y="100541"/>
+                  </a:lnTo>
+                  <a:lnTo>
+                    <a:pt x="4440596" y="103188"/>
+                  </a:lnTo>
+                  <a:lnTo>
+                    <a:pt x="4368974" y="105828"/>
+                  </a:lnTo>
+                  <a:lnTo>
+                    <a:pt x="4297351" y="108460"/>
+                  </a:lnTo>
+                  <a:lnTo>
+                    <a:pt x="4225729" y="111084"/>
+                  </a:lnTo>
+                  <a:lnTo>
+                    <a:pt x="4154106" y="113701"/>
+                  </a:lnTo>
+                  <a:lnTo>
+                    <a:pt x="4082483" y="116310"/>
+                  </a:lnTo>
+                  <a:lnTo>
+                    <a:pt x="4010861" y="118912"/>
+                  </a:lnTo>
+                  <a:lnTo>
+                    <a:pt x="3939238" y="121506"/>
+                  </a:lnTo>
+                  <a:lnTo>
+                    <a:pt x="3867616" y="124093"/>
+                  </a:lnTo>
+                  <a:lnTo>
+                    <a:pt x="3795993" y="126672"/>
+                  </a:lnTo>
+                  <a:lnTo>
+                    <a:pt x="3724371" y="129244"/>
+                  </a:lnTo>
+                  <a:lnTo>
+                    <a:pt x="3652748" y="131809"/>
+                  </a:lnTo>
+                  <a:lnTo>
+                    <a:pt x="3581126" y="134366"/>
+                  </a:lnTo>
+                  <a:lnTo>
+                    <a:pt x="3509503" y="136916"/>
+                  </a:lnTo>
+                  <a:lnTo>
+                    <a:pt x="3437881" y="139459"/>
+                  </a:lnTo>
+                  <a:lnTo>
+                    <a:pt x="3366258" y="141994"/>
+                  </a:lnTo>
+                  <a:lnTo>
+                    <a:pt x="3294636" y="144522"/>
+                  </a:lnTo>
+                  <a:lnTo>
+                    <a:pt x="3223013" y="147043"/>
+                  </a:lnTo>
+                  <a:lnTo>
+                    <a:pt x="3151391" y="149556"/>
+                  </a:lnTo>
+                  <a:lnTo>
+                    <a:pt x="3079768" y="152063"/>
+                  </a:lnTo>
+                  <a:lnTo>
+                    <a:pt x="3008146" y="180658"/>
+                  </a:lnTo>
+                  <a:lnTo>
+                    <a:pt x="2936523" y="225689"/>
+                  </a:lnTo>
+                  <a:lnTo>
+                    <a:pt x="2864901" y="268312"/>
+                  </a:lnTo>
+                  <a:lnTo>
+                    <a:pt x="2793278" y="308656"/>
+                  </a:lnTo>
+                  <a:lnTo>
+                    <a:pt x="2721655" y="346842"/>
+                  </a:lnTo>
+                  <a:lnTo>
+                    <a:pt x="2650033" y="382987"/>
+                  </a:lnTo>
+                  <a:lnTo>
+                    <a:pt x="2578410" y="417199"/>
+                  </a:lnTo>
+                  <a:lnTo>
+                    <a:pt x="2506788" y="449581"/>
+                  </a:lnTo>
+                  <a:lnTo>
+                    <a:pt x="2435165" y="480232"/>
+                  </a:lnTo>
+                  <a:lnTo>
+                    <a:pt x="2363543" y="509243"/>
+                  </a:lnTo>
+                  <a:lnTo>
+                    <a:pt x="2291920" y="536704"/>
+                  </a:lnTo>
+                  <a:lnTo>
+                    <a:pt x="2220298" y="562696"/>
+                  </a:lnTo>
+                  <a:lnTo>
+                    <a:pt x="2148675" y="587298"/>
+                  </a:lnTo>
+                  <a:lnTo>
+                    <a:pt x="2077053" y="610584"/>
+                  </a:lnTo>
+                  <a:lnTo>
+                    <a:pt x="2005430" y="632626"/>
+                  </a:lnTo>
+                  <a:lnTo>
+                    <a:pt x="1933808" y="653488"/>
+                  </a:lnTo>
+                  <a:lnTo>
+                    <a:pt x="1862185" y="673236"/>
+                  </a:lnTo>
+                  <a:lnTo>
+                    <a:pt x="1790563" y="691927"/>
+                  </a:lnTo>
+                  <a:lnTo>
+                    <a:pt x="1718940" y="709618"/>
+                  </a:lnTo>
+                  <a:lnTo>
+                    <a:pt x="1647318" y="726364"/>
+                  </a:lnTo>
+                  <a:lnTo>
+                    <a:pt x="1575695" y="742214"/>
+                  </a:lnTo>
+                  <a:lnTo>
+                    <a:pt x="1504073" y="757217"/>
+                  </a:lnTo>
+                  <a:lnTo>
+                    <a:pt x="1432450" y="771417"/>
+                  </a:lnTo>
+                  <a:lnTo>
+                    <a:pt x="1360827" y="784858"/>
+                  </a:lnTo>
+                  <a:lnTo>
+                    <a:pt x="1289205" y="797580"/>
+                  </a:lnTo>
+                  <a:lnTo>
+                    <a:pt x="1217582" y="809622"/>
+                  </a:lnTo>
+                  <a:lnTo>
+                    <a:pt x="1145960" y="821020"/>
+                  </a:lnTo>
+                  <a:lnTo>
+                    <a:pt x="1074337" y="831809"/>
+                  </a:lnTo>
+                  <a:lnTo>
+                    <a:pt x="1002715" y="842021"/>
+                  </a:lnTo>
+                  <a:lnTo>
+                    <a:pt x="931092" y="851686"/>
+                  </a:lnTo>
+                  <a:lnTo>
+                    <a:pt x="859470" y="860835"/>
+                  </a:lnTo>
+                  <a:lnTo>
+                    <a:pt x="787847" y="869495"/>
+                  </a:lnTo>
+                  <a:lnTo>
+                    <a:pt x="716225" y="877691"/>
+                  </a:lnTo>
+                  <a:lnTo>
+                    <a:pt x="644602" y="885449"/>
+                  </a:lnTo>
+                  <a:lnTo>
+                    <a:pt x="572980" y="892792"/>
+                  </a:lnTo>
+                  <a:lnTo>
+                    <a:pt x="501357" y="899743"/>
+                  </a:lnTo>
+                  <a:lnTo>
+                    <a:pt x="429735" y="906322"/>
+                  </a:lnTo>
+                  <a:lnTo>
+                    <a:pt x="358112" y="912549"/>
+                  </a:lnTo>
+                  <a:lnTo>
+                    <a:pt x="286490" y="918443"/>
+                  </a:lnTo>
+                  <a:lnTo>
+                    <a:pt x="214867" y="924022"/>
+                  </a:lnTo>
+                  <a:lnTo>
+                    <a:pt x="143245" y="929303"/>
+                  </a:lnTo>
+                  <a:lnTo>
+                    <a:pt x="71622" y="934301"/>
+                  </a:lnTo>
+                  <a:lnTo>
+                    <a:pt x="0" y="939032"/>
                   </a:lnTo>
                 </a:path>
               </a:pathLst>
@@ -4248,296 +4236,293 @@
           <p:spPr>
             <a:xfrm>
               <a:off x="1172049" y="1896563"/>
-              <a:ext cx="6671427" cy="3392966"/>
+              <a:ext cx="6604604" cy="3398796"/>
             </a:xfrm>
             <a:custGeom>
               <a:avLst/>
               <a:pathLst>
-                <a:path w="6671427" h="3392966">
+                <a:path w="6604604" h="3398796">
                   <a:moveTo>
-                    <a:pt x="0" y="3392966"/>
+                    <a:pt x="0" y="3398796"/>
                   </a:moveTo>
                   <a:lnTo>
-                    <a:pt x="71622" y="3385490"/>
-                  </a:lnTo>
-                  <a:lnTo>
-                    <a:pt x="143245" y="3377799"/>
-                  </a:lnTo>
-                  <a:lnTo>
-                    <a:pt x="214867" y="3369887"/>
-                  </a:lnTo>
-                  <a:lnTo>
-                    <a:pt x="286490" y="3361747"/>
-                  </a:lnTo>
-                  <a:lnTo>
-                    <a:pt x="358112" y="3353372"/>
-                  </a:lnTo>
-                  <a:lnTo>
-                    <a:pt x="429735" y="3344756"/>
-                  </a:lnTo>
-                  <a:lnTo>
-                    <a:pt x="501357" y="3335893"/>
-                  </a:lnTo>
-                  <a:lnTo>
-                    <a:pt x="572980" y="3326774"/>
-                  </a:lnTo>
-                  <a:lnTo>
-                    <a:pt x="644602" y="3317392"/>
-                  </a:lnTo>
-                  <a:lnTo>
-                    <a:pt x="716225" y="3307741"/>
-                  </a:lnTo>
-                  <a:lnTo>
-                    <a:pt x="787847" y="3297812"/>
-                  </a:lnTo>
-                  <a:lnTo>
-                    <a:pt x="859470" y="3287596"/>
-                  </a:lnTo>
-                  <a:lnTo>
-                    <a:pt x="931092" y="3277087"/>
-                  </a:lnTo>
-                  <a:lnTo>
-                    <a:pt x="1002715" y="3266275"/>
-                  </a:lnTo>
-                  <a:lnTo>
-                    <a:pt x="1074337" y="3255152"/>
-                  </a:lnTo>
-                  <a:lnTo>
-                    <a:pt x="1145960" y="3243709"/>
-                  </a:lnTo>
-                  <a:lnTo>
-                    <a:pt x="1217582" y="3231936"/>
-                  </a:lnTo>
-                  <a:lnTo>
-                    <a:pt x="1289205" y="3219825"/>
-                  </a:lnTo>
-                  <a:lnTo>
-                    <a:pt x="1360827" y="3207364"/>
-                  </a:lnTo>
-                  <a:lnTo>
-                    <a:pt x="1432450" y="3194545"/>
-                  </a:lnTo>
-                  <a:lnTo>
-                    <a:pt x="1504073" y="3181357"/>
-                  </a:lnTo>
-                  <a:lnTo>
-                    <a:pt x="1575695" y="3167789"/>
-                  </a:lnTo>
-                  <a:lnTo>
-                    <a:pt x="1647318" y="3153831"/>
-                  </a:lnTo>
-                  <a:lnTo>
-                    <a:pt x="1718940" y="3139471"/>
-                  </a:lnTo>
-                  <a:lnTo>
-                    <a:pt x="1790563" y="3124697"/>
-                  </a:lnTo>
-                  <a:lnTo>
-                    <a:pt x="1862185" y="3109498"/>
-                  </a:lnTo>
-                  <a:lnTo>
-                    <a:pt x="1933808" y="3093862"/>
-                  </a:lnTo>
-                  <a:lnTo>
-                    <a:pt x="2005430" y="3077775"/>
-                  </a:lnTo>
-                  <a:lnTo>
-                    <a:pt x="2077053" y="3061225"/>
-                  </a:lnTo>
-                  <a:lnTo>
-                    <a:pt x="2148675" y="3044199"/>
-                  </a:lnTo>
-                  <a:lnTo>
-                    <a:pt x="2220298" y="3026683"/>
-                  </a:lnTo>
-                  <a:lnTo>
-                    <a:pt x="2291920" y="3008662"/>
-                  </a:lnTo>
-                  <a:lnTo>
-                    <a:pt x="2363543" y="2990123"/>
-                  </a:lnTo>
-                  <a:lnTo>
-                    <a:pt x="2435165" y="2971050"/>
-                  </a:lnTo>
-                  <a:lnTo>
-                    <a:pt x="2506788" y="2951427"/>
-                  </a:lnTo>
-                  <a:lnTo>
-                    <a:pt x="2578410" y="2931240"/>
-                  </a:lnTo>
-                  <a:lnTo>
-                    <a:pt x="2650033" y="2910472"/>
-                  </a:lnTo>
-                  <a:lnTo>
-                    <a:pt x="2721655" y="2889106"/>
-                  </a:lnTo>
-                  <a:lnTo>
-                    <a:pt x="2793278" y="2867124"/>
-                  </a:lnTo>
-                  <a:lnTo>
-                    <a:pt x="2864901" y="2844510"/>
-                  </a:lnTo>
-                  <a:lnTo>
-                    <a:pt x="2936523" y="2821245"/>
-                  </a:lnTo>
-                  <a:lnTo>
-                    <a:pt x="3008146" y="2797310"/>
-                  </a:lnTo>
-                  <a:lnTo>
-                    <a:pt x="3079768" y="2772686"/>
-                  </a:lnTo>
-                  <a:lnTo>
-                    <a:pt x="3151391" y="2747353"/>
-                  </a:lnTo>
-                  <a:lnTo>
-                    <a:pt x="3223013" y="2721291"/>
-                  </a:lnTo>
-                  <a:lnTo>
-                    <a:pt x="3294636" y="2694479"/>
-                  </a:lnTo>
-                  <a:lnTo>
-                    <a:pt x="3366258" y="2666894"/>
-                  </a:lnTo>
-                  <a:lnTo>
-                    <a:pt x="3437881" y="2638516"/>
-                  </a:lnTo>
-                  <a:lnTo>
-                    <a:pt x="3509503" y="2609320"/>
-                  </a:lnTo>
-                  <a:lnTo>
-                    <a:pt x="3581126" y="2579284"/>
-                  </a:lnTo>
-                  <a:lnTo>
-                    <a:pt x="3652748" y="2548383"/>
-                  </a:lnTo>
-                  <a:lnTo>
-                    <a:pt x="3724371" y="2516593"/>
-                  </a:lnTo>
-                  <a:lnTo>
-                    <a:pt x="3795993" y="2483888"/>
-                  </a:lnTo>
-                  <a:lnTo>
-                    <a:pt x="3867616" y="2450241"/>
-                  </a:lnTo>
-                  <a:lnTo>
-                    <a:pt x="3939238" y="2415625"/>
-                  </a:lnTo>
-                  <a:lnTo>
-                    <a:pt x="4010861" y="2380013"/>
-                  </a:lnTo>
-                  <a:lnTo>
-                    <a:pt x="4082483" y="2343375"/>
-                  </a:lnTo>
-                  <a:lnTo>
-                    <a:pt x="4154106" y="2305683"/>
-                  </a:lnTo>
-                  <a:lnTo>
-                    <a:pt x="4225729" y="2266906"/>
-                  </a:lnTo>
-                  <a:lnTo>
-                    <a:pt x="4297351" y="2227012"/>
-                  </a:lnTo>
-                  <a:lnTo>
-                    <a:pt x="4368974" y="2185970"/>
-                  </a:lnTo>
-                  <a:lnTo>
-                    <a:pt x="4440596" y="2143746"/>
-                  </a:lnTo>
-                  <a:lnTo>
-                    <a:pt x="4512219" y="2100307"/>
-                  </a:lnTo>
-                  <a:lnTo>
-                    <a:pt x="4583841" y="2055617"/>
-                  </a:lnTo>
-                  <a:lnTo>
-                    <a:pt x="4655464" y="2009640"/>
-                  </a:lnTo>
-                  <a:lnTo>
-                    <a:pt x="4727086" y="1962340"/>
-                  </a:lnTo>
-                  <a:lnTo>
-                    <a:pt x="4798709" y="1913678"/>
-                  </a:lnTo>
-                  <a:lnTo>
-                    <a:pt x="4870331" y="1863616"/>
-                  </a:lnTo>
-                  <a:lnTo>
-                    <a:pt x="4941954" y="1812112"/>
-                  </a:lnTo>
-                  <a:lnTo>
-                    <a:pt x="5013576" y="1759125"/>
-                  </a:lnTo>
-                  <a:lnTo>
-                    <a:pt x="5085199" y="1704613"/>
-                  </a:lnTo>
-                  <a:lnTo>
-                    <a:pt x="5156821" y="1648532"/>
-                  </a:lnTo>
-                  <a:lnTo>
-                    <a:pt x="5228444" y="1590836"/>
-                  </a:lnTo>
-                  <a:lnTo>
-                    <a:pt x="5300066" y="1531479"/>
-                  </a:lnTo>
-                  <a:lnTo>
-                    <a:pt x="5371689" y="1470413"/>
-                  </a:lnTo>
-                  <a:lnTo>
-                    <a:pt x="5443311" y="1407589"/>
-                  </a:lnTo>
-                  <a:lnTo>
-                    <a:pt x="5514934" y="1342957"/>
-                  </a:lnTo>
-                  <a:lnTo>
-                    <a:pt x="5586557" y="1276464"/>
-                  </a:lnTo>
-                  <a:lnTo>
-                    <a:pt x="5658179" y="1208056"/>
-                  </a:lnTo>
-                  <a:lnTo>
-                    <a:pt x="5729802" y="1137680"/>
-                  </a:lnTo>
-                  <a:lnTo>
-                    <a:pt x="5801424" y="1065277"/>
-                  </a:lnTo>
-                  <a:lnTo>
-                    <a:pt x="5873047" y="990790"/>
-                  </a:lnTo>
-                  <a:lnTo>
-                    <a:pt x="5944669" y="914158"/>
-                  </a:lnTo>
-                  <a:lnTo>
-                    <a:pt x="6016292" y="835321"/>
-                  </a:lnTo>
-                  <a:lnTo>
-                    <a:pt x="6087914" y="754213"/>
-                  </a:lnTo>
-                  <a:lnTo>
-                    <a:pt x="6159537" y="670771"/>
-                  </a:lnTo>
-                  <a:lnTo>
-                    <a:pt x="6231159" y="584926"/>
-                  </a:lnTo>
-                  <a:lnTo>
-                    <a:pt x="6302782" y="496611"/>
-                  </a:lnTo>
-                  <a:lnTo>
-                    <a:pt x="6374404" y="405752"/>
-                  </a:lnTo>
-                  <a:lnTo>
-                    <a:pt x="6446027" y="312278"/>
-                  </a:lnTo>
-                  <a:lnTo>
-                    <a:pt x="6517649" y="216113"/>
-                  </a:lnTo>
-                  <a:lnTo>
-                    <a:pt x="6589272" y="117180"/>
-                  </a:lnTo>
-                  <a:lnTo>
-                    <a:pt x="6660894" y="15398"/>
-                  </a:lnTo>
-                  <a:lnTo>
-                    <a:pt x="6671427" y="0"/>
+                    <a:pt x="71622" y="3391348"/>
+                  </a:lnTo>
+                  <a:lnTo>
+                    <a:pt x="143245" y="3383683"/>
+                  </a:lnTo>
+                  <a:lnTo>
+                    <a:pt x="214867" y="3375792"/>
+                  </a:lnTo>
+                  <a:lnTo>
+                    <a:pt x="286490" y="3367670"/>
+                  </a:lnTo>
+                  <a:lnTo>
+                    <a:pt x="358112" y="3359310"/>
+                  </a:lnTo>
+                  <a:lnTo>
+                    <a:pt x="429735" y="3350704"/>
+                  </a:lnTo>
+                  <a:lnTo>
+                    <a:pt x="501357" y="3341846"/>
+                  </a:lnTo>
+                  <a:lnTo>
+                    <a:pt x="572980" y="3332728"/>
+                  </a:lnTo>
+                  <a:lnTo>
+                    <a:pt x="644602" y="3323342"/>
+                  </a:lnTo>
+                  <a:lnTo>
+                    <a:pt x="716225" y="3313681"/>
+                  </a:lnTo>
+                  <a:lnTo>
+                    <a:pt x="787847" y="3303737"/>
+                  </a:lnTo>
+                  <a:lnTo>
+                    <a:pt x="859470" y="3293501"/>
+                  </a:lnTo>
+                  <a:lnTo>
+                    <a:pt x="931092" y="3282965"/>
+                  </a:lnTo>
+                  <a:lnTo>
+                    <a:pt x="1002715" y="3272119"/>
+                  </a:lnTo>
+                  <a:lnTo>
+                    <a:pt x="1074337" y="3260956"/>
+                  </a:lnTo>
+                  <a:lnTo>
+                    <a:pt x="1145960" y="3249465"/>
+                  </a:lnTo>
+                  <a:lnTo>
+                    <a:pt x="1217582" y="3237637"/>
+                  </a:lnTo>
+                  <a:lnTo>
+                    <a:pt x="1289205" y="3225461"/>
+                  </a:lnTo>
+                  <a:lnTo>
+                    <a:pt x="1360827" y="3212929"/>
+                  </a:lnTo>
+                  <a:lnTo>
+                    <a:pt x="1432450" y="3200029"/>
+                  </a:lnTo>
+                  <a:lnTo>
+                    <a:pt x="1504073" y="3186750"/>
+                  </a:lnTo>
+                  <a:lnTo>
+                    <a:pt x="1575695" y="3173082"/>
+                  </a:lnTo>
+                  <a:lnTo>
+                    <a:pt x="1647318" y="3159013"/>
+                  </a:lnTo>
+                  <a:lnTo>
+                    <a:pt x="1718940" y="3144531"/>
+                  </a:lnTo>
+                  <a:lnTo>
+                    <a:pt x="1790563" y="3129624"/>
+                  </a:lnTo>
+                  <a:lnTo>
+                    <a:pt x="1862185" y="3114280"/>
+                  </a:lnTo>
+                  <a:lnTo>
+                    <a:pt x="1933808" y="3098486"/>
+                  </a:lnTo>
+                  <a:lnTo>
+                    <a:pt x="2005430" y="3082229"/>
+                  </a:lnTo>
+                  <a:lnTo>
+                    <a:pt x="2077053" y="3065494"/>
+                  </a:lnTo>
+                  <a:lnTo>
+                    <a:pt x="2148675" y="3048269"/>
+                  </a:lnTo>
+                  <a:lnTo>
+                    <a:pt x="2220298" y="3030538"/>
+                  </a:lnTo>
+                  <a:lnTo>
+                    <a:pt x="2291920" y="3012287"/>
+                  </a:lnTo>
+                  <a:lnTo>
+                    <a:pt x="2363543" y="2993500"/>
+                  </a:lnTo>
+                  <a:lnTo>
+                    <a:pt x="2435165" y="2974163"/>
+                  </a:lnTo>
+                  <a:lnTo>
+                    <a:pt x="2506788" y="2954258"/>
+                  </a:lnTo>
+                  <a:lnTo>
+                    <a:pt x="2578410" y="2933769"/>
+                  </a:lnTo>
+                  <a:lnTo>
+                    <a:pt x="2650033" y="2912679"/>
+                  </a:lnTo>
+                  <a:lnTo>
+                    <a:pt x="2721655" y="2890970"/>
+                  </a:lnTo>
+                  <a:lnTo>
+                    <a:pt x="2793278" y="2868625"/>
+                  </a:lnTo>
+                  <a:lnTo>
+                    <a:pt x="2864901" y="2845624"/>
+                  </a:lnTo>
+                  <a:lnTo>
+                    <a:pt x="2936523" y="2821948"/>
+                  </a:lnTo>
+                  <a:lnTo>
+                    <a:pt x="3008146" y="2797577"/>
+                  </a:lnTo>
+                  <a:lnTo>
+                    <a:pt x="3079768" y="2772492"/>
+                  </a:lnTo>
+                  <a:lnTo>
+                    <a:pt x="3151391" y="2746670"/>
+                  </a:lnTo>
+                  <a:lnTo>
+                    <a:pt x="3223013" y="2720092"/>
+                  </a:lnTo>
+                  <a:lnTo>
+                    <a:pt x="3294636" y="2692733"/>
+                  </a:lnTo>
+                  <a:lnTo>
+                    <a:pt x="3366258" y="2664572"/>
+                  </a:lnTo>
+                  <a:lnTo>
+                    <a:pt x="3437881" y="2635584"/>
+                  </a:lnTo>
+                  <a:lnTo>
+                    <a:pt x="3509503" y="2605746"/>
+                  </a:lnTo>
+                  <a:lnTo>
+                    <a:pt x="3581126" y="2575033"/>
+                  </a:lnTo>
+                  <a:lnTo>
+                    <a:pt x="3652748" y="2543418"/>
+                  </a:lnTo>
+                  <a:lnTo>
+                    <a:pt x="3724371" y="2510877"/>
+                  </a:lnTo>
+                  <a:lnTo>
+                    <a:pt x="3795993" y="2477380"/>
+                  </a:lnTo>
+                  <a:lnTo>
+                    <a:pt x="3867616" y="2442901"/>
+                  </a:lnTo>
+                  <a:lnTo>
+                    <a:pt x="3939238" y="2407410"/>
+                  </a:lnTo>
+                  <a:lnTo>
+                    <a:pt x="4010861" y="2370878"/>
+                  </a:lnTo>
+                  <a:lnTo>
+                    <a:pt x="4082483" y="2333274"/>
+                  </a:lnTo>
+                  <a:lnTo>
+                    <a:pt x="4154106" y="2294567"/>
+                  </a:lnTo>
+                  <a:lnTo>
+                    <a:pt x="4225729" y="2254725"/>
+                  </a:lnTo>
+                  <a:lnTo>
+                    <a:pt x="4297351" y="2213714"/>
+                  </a:lnTo>
+                  <a:lnTo>
+                    <a:pt x="4368974" y="2171499"/>
+                  </a:lnTo>
+                  <a:lnTo>
+                    <a:pt x="4440596" y="2128046"/>
+                  </a:lnTo>
+                  <a:lnTo>
+                    <a:pt x="4512219" y="2083318"/>
+                  </a:lnTo>
+                  <a:lnTo>
+                    <a:pt x="4583841" y="2037278"/>
+                  </a:lnTo>
+                  <a:lnTo>
+                    <a:pt x="4655464" y="1989887"/>
+                  </a:lnTo>
+                  <a:lnTo>
+                    <a:pt x="4727086" y="1941106"/>
+                  </a:lnTo>
+                  <a:lnTo>
+                    <a:pt x="4798709" y="1890894"/>
+                  </a:lnTo>
+                  <a:lnTo>
+                    <a:pt x="4870331" y="1839209"/>
+                  </a:lnTo>
+                  <a:lnTo>
+                    <a:pt x="4941954" y="1786008"/>
+                  </a:lnTo>
+                  <a:lnTo>
+                    <a:pt x="5013576" y="1731245"/>
+                  </a:lnTo>
+                  <a:lnTo>
+                    <a:pt x="5085199" y="1674876"/>
+                  </a:lnTo>
+                  <a:lnTo>
+                    <a:pt x="5156821" y="1616854"/>
+                  </a:lnTo>
+                  <a:lnTo>
+                    <a:pt x="5228444" y="1557129"/>
+                  </a:lnTo>
+                  <a:lnTo>
+                    <a:pt x="5300066" y="1495652"/>
+                  </a:lnTo>
+                  <a:lnTo>
+                    <a:pt x="5371689" y="1432371"/>
+                  </a:lnTo>
+                  <a:lnTo>
+                    <a:pt x="5443311" y="1367234"/>
+                  </a:lnTo>
+                  <a:lnTo>
+                    <a:pt x="5514934" y="1300186"/>
+                  </a:lnTo>
+                  <a:lnTo>
+                    <a:pt x="5586557" y="1231171"/>
+                  </a:lnTo>
+                  <a:lnTo>
+                    <a:pt x="5658179" y="1160131"/>
+                  </a:lnTo>
+                  <a:lnTo>
+                    <a:pt x="5729802" y="1087007"/>
+                  </a:lnTo>
+                  <a:lnTo>
+                    <a:pt x="5801424" y="1011738"/>
+                  </a:lnTo>
+                  <a:lnTo>
+                    <a:pt x="5873047" y="934260"/>
+                  </a:lnTo>
+                  <a:lnTo>
+                    <a:pt x="5944669" y="854510"/>
+                  </a:lnTo>
+                  <a:lnTo>
+                    <a:pt x="6016292" y="772420"/>
+                  </a:lnTo>
+                  <a:lnTo>
+                    <a:pt x="6087914" y="687921"/>
+                  </a:lnTo>
+                  <a:lnTo>
+                    <a:pt x="6159537" y="600944"/>
+                  </a:lnTo>
+                  <a:lnTo>
+                    <a:pt x="6231159" y="511415"/>
+                  </a:lnTo>
+                  <a:lnTo>
+                    <a:pt x="6302782" y="419259"/>
+                  </a:lnTo>
+                  <a:lnTo>
+                    <a:pt x="6374404" y="324400"/>
+                  </a:lnTo>
+                  <a:lnTo>
+                    <a:pt x="6446027" y="226757"/>
+                  </a:lnTo>
+                  <a:lnTo>
+                    <a:pt x="6517649" y="126251"/>
+                  </a:lnTo>
+                  <a:lnTo>
+                    <a:pt x="6589272" y="22795"/>
+                  </a:lnTo>
+                  <a:lnTo>
+                    <a:pt x="6604604" y="0"/>
                   </a:lnTo>
                 </a:path>
               </a:pathLst>

--- a/docs/plots/carbo/jx_carbo_linsubhr_dosedisc_grade3.pptx
+++ b/docs/plots/carbo/jx_carbo_linsubhr_dosedisc_grade3.pptx
@@ -3139,19 +3139,19 @@
               <a:pathLst>
                 <a:path w="7090630" h="3568900">
                   <a:moveTo>
-                    <a:pt x="0" y="2883163"/>
+                    <a:pt x="0" y="2883164"/>
                   </a:moveTo>
                   <a:lnTo>
-                    <a:pt x="71622" y="2880948"/>
+                    <a:pt x="71622" y="2880949"/>
                   </a:lnTo>
                   <a:lnTo>
                     <a:pt x="143245" y="2878727"/>
                   </a:lnTo>
                   <a:lnTo>
-                    <a:pt x="214867" y="2876499"/>
-                  </a:lnTo>
-                  <a:lnTo>
-                    <a:pt x="286490" y="2874265"/>
+                    <a:pt x="214867" y="2876500"/>
+                  </a:lnTo>
+                  <a:lnTo>
+                    <a:pt x="286490" y="2874266"/>
                   </a:lnTo>
                   <a:lnTo>
                     <a:pt x="358112" y="2872025"/>
@@ -3160,10 +3160,10 @@
                     <a:pt x="429735" y="2869778"/>
                   </a:lnTo>
                   <a:lnTo>
-                    <a:pt x="501357" y="2867524"/>
-                  </a:lnTo>
-                  <a:lnTo>
-                    <a:pt x="572980" y="2865264"/>
+                    <a:pt x="501357" y="2867525"/>
+                  </a:lnTo>
+                  <a:lnTo>
+                    <a:pt x="572980" y="2865265"/>
                   </a:lnTo>
                   <a:lnTo>
                     <a:pt x="644602" y="2862998"/>
@@ -3172,7 +3172,7 @@
                     <a:pt x="716225" y="2860725"/>
                   </a:lnTo>
                   <a:lnTo>
-                    <a:pt x="787847" y="2858445"/>
+                    <a:pt x="787847" y="2858446"/>
                   </a:lnTo>
                   <a:lnTo>
                     <a:pt x="859470" y="2856159"/>
@@ -3181,10 +3181,10 @@
                     <a:pt x="931092" y="2853867"/>
                   </a:lnTo>
                   <a:lnTo>
-                    <a:pt x="1002715" y="2851567"/>
-                  </a:lnTo>
-                  <a:lnTo>
-                    <a:pt x="1074337" y="2849261"/>
+                    <a:pt x="1002715" y="2851568"/>
+                  </a:lnTo>
+                  <a:lnTo>
+                    <a:pt x="1074337" y="2849262"/>
                   </a:lnTo>
                   <a:lnTo>
                     <a:pt x="1145960" y="2846949"/>
@@ -3211,7 +3211,7 @@
                     <a:pt x="1647318" y="2830574"/>
                   </a:lnTo>
                   <a:lnTo>
-                    <a:pt x="1718940" y="2828207"/>
+                    <a:pt x="1718940" y="2828208"/>
                   </a:lnTo>
                   <a:lnTo>
                     <a:pt x="1790563" y="2825834"/>
@@ -3277,16 +3277,16 @@
                     <a:pt x="3223013" y="2659586"/>
                   </a:lnTo>
                   <a:lnTo>
-                    <a:pt x="3294636" y="2603484"/>
+                    <a:pt x="3294636" y="2603483"/>
                   </a:lnTo>
                   <a:lnTo>
                     <a:pt x="3366258" y="2544212"/>
                   </a:lnTo>
                   <a:lnTo>
-                    <a:pt x="3437881" y="2481592"/>
-                  </a:lnTo>
-                  <a:lnTo>
-                    <a:pt x="3509503" y="2415434"/>
+                    <a:pt x="3437881" y="2481591"/>
+                  </a:lnTo>
+                  <a:lnTo>
+                    <a:pt x="3509503" y="2415433"/>
                   </a:lnTo>
                   <a:lnTo>
                     <a:pt x="3581126" y="2345538"/>
@@ -3295,7 +3295,7 @@
                     <a:pt x="3652748" y="2271694"/>
                   </a:lnTo>
                   <a:lnTo>
-                    <a:pt x="3724371" y="2193678"/>
+                    <a:pt x="3724371" y="2193677"/>
                   </a:lnTo>
                   <a:lnTo>
                     <a:pt x="3795993" y="2111254"/>
@@ -3304,49 +3304,49 @@
                     <a:pt x="3867616" y="2024174"/>
                   </a:lnTo>
                   <a:lnTo>
-                    <a:pt x="3939238" y="1932175"/>
-                  </a:lnTo>
-                  <a:lnTo>
-                    <a:pt x="4010861" y="1834978"/>
-                  </a:lnTo>
-                  <a:lnTo>
-                    <a:pt x="4082483" y="1732290"/>
-                  </a:lnTo>
-                  <a:lnTo>
-                    <a:pt x="4154106" y="1623800"/>
-                  </a:lnTo>
-                  <a:lnTo>
-                    <a:pt x="4225729" y="1509182"/>
-                  </a:lnTo>
-                  <a:lnTo>
-                    <a:pt x="4297351" y="1388088"/>
-                  </a:lnTo>
-                  <a:lnTo>
-                    <a:pt x="4368974" y="1260153"/>
-                  </a:lnTo>
-                  <a:lnTo>
-                    <a:pt x="4440596" y="1124990"/>
-                  </a:lnTo>
-                  <a:lnTo>
-                    <a:pt x="4512219" y="982192"/>
-                  </a:lnTo>
-                  <a:lnTo>
-                    <a:pt x="4583841" y="831326"/>
-                  </a:lnTo>
-                  <a:lnTo>
-                    <a:pt x="4655464" y="671937"/>
-                  </a:lnTo>
-                  <a:lnTo>
-                    <a:pt x="4727086" y="503544"/>
-                  </a:lnTo>
-                  <a:lnTo>
-                    <a:pt x="4798709" y="325637"/>
-                  </a:lnTo>
-                  <a:lnTo>
-                    <a:pt x="4870331" y="137680"/>
-                  </a:lnTo>
-                  <a:lnTo>
-                    <a:pt x="4919990" y="0"/>
+                    <a:pt x="3939238" y="1932174"/>
+                  </a:lnTo>
+                  <a:lnTo>
+                    <a:pt x="4010861" y="1834977"/>
+                  </a:lnTo>
+                  <a:lnTo>
+                    <a:pt x="4082483" y="1732289"/>
+                  </a:lnTo>
+                  <a:lnTo>
+                    <a:pt x="4154106" y="1623799"/>
+                  </a:lnTo>
+                  <a:lnTo>
+                    <a:pt x="4225729" y="1509181"/>
+                  </a:lnTo>
+                  <a:lnTo>
+                    <a:pt x="4297351" y="1388087"/>
+                  </a:lnTo>
+                  <a:lnTo>
+                    <a:pt x="4368974" y="1260152"/>
+                  </a:lnTo>
+                  <a:lnTo>
+                    <a:pt x="4440596" y="1124989"/>
+                  </a:lnTo>
+                  <a:lnTo>
+                    <a:pt x="4512219" y="982191"/>
+                  </a:lnTo>
+                  <a:lnTo>
+                    <a:pt x="4583841" y="831325"/>
+                  </a:lnTo>
+                  <a:lnTo>
+                    <a:pt x="4655464" y="671936"/>
+                  </a:lnTo>
+                  <a:lnTo>
+                    <a:pt x="4727086" y="503542"/>
+                  </a:lnTo>
+                  <a:lnTo>
+                    <a:pt x="4798709" y="325635"/>
+                  </a:lnTo>
+                  <a:lnTo>
+                    <a:pt x="4870331" y="137678"/>
+                  </a:lnTo>
+                  <a:lnTo>
+                    <a:pt x="4919989" y="0"/>
                   </a:lnTo>
                   <a:lnTo>
                     <a:pt x="7090630" y="0"/>
@@ -3355,13 +3355,13 @@
                     <a:pt x="7090630" y="2629867"/>
                   </a:lnTo>
                   <a:lnTo>
-                    <a:pt x="7019007" y="2632803"/>
-                  </a:lnTo>
-                  <a:lnTo>
-                    <a:pt x="6947385" y="2635730"/>
-                  </a:lnTo>
-                  <a:lnTo>
-                    <a:pt x="6875762" y="2638649"/>
+                    <a:pt x="7019007" y="2632802"/>
+                  </a:lnTo>
+                  <a:lnTo>
+                    <a:pt x="6947385" y="2635729"/>
+                  </a:lnTo>
+                  <a:lnTo>
+                    <a:pt x="6875762" y="2638648"/>
                   </a:lnTo>
                   <a:lnTo>
                     <a:pt x="6804139" y="2641559"/>
@@ -3370,13 +3370,13 @@
                     <a:pt x="6732517" y="2644461"/>
                   </a:lnTo>
                   <a:lnTo>
-                    <a:pt x="6660894" y="2647355"/>
+                    <a:pt x="6660894" y="2647354"/>
                   </a:lnTo>
                   <a:lnTo>
                     <a:pt x="6589272" y="2650240"/>
                   </a:lnTo>
                   <a:lnTo>
-                    <a:pt x="6517649" y="2653118"/>
+                    <a:pt x="6517649" y="2653117"/>
                   </a:lnTo>
                   <a:lnTo>
                     <a:pt x="6446027" y="2655986"/>
@@ -3388,13 +3388,13 @@
                     <a:pt x="6302782" y="2661699"/>
                   </a:lnTo>
                   <a:lnTo>
-                    <a:pt x="6231159" y="2664544"/>
-                  </a:lnTo>
-                  <a:lnTo>
-                    <a:pt x="6159537" y="2667380"/>
-                  </a:lnTo>
-                  <a:lnTo>
-                    <a:pt x="6087914" y="2670208"/>
+                    <a:pt x="6231159" y="2664543"/>
+                  </a:lnTo>
+                  <a:lnTo>
+                    <a:pt x="6159537" y="2667379"/>
+                  </a:lnTo>
+                  <a:lnTo>
+                    <a:pt x="6087914" y="2670207"/>
                   </a:lnTo>
                   <a:lnTo>
                     <a:pt x="6016292" y="2673027"/>
@@ -3403,7 +3403,7 @@
                     <a:pt x="5944669" y="2675839"/>
                   </a:lnTo>
                   <a:lnTo>
-                    <a:pt x="5873047" y="2678643"/>
+                    <a:pt x="5873047" y="2678642"/>
                   </a:lnTo>
                   <a:lnTo>
                     <a:pt x="5801424" y="2681438"/>
@@ -3412,16 +3412,16 @@
                     <a:pt x="5729802" y="2684226"/>
                   </a:lnTo>
                   <a:lnTo>
-                    <a:pt x="5658179" y="2687006"/>
+                    <a:pt x="5658179" y="2687005"/>
                   </a:lnTo>
                   <a:lnTo>
                     <a:pt x="5586557" y="2689777"/>
                   </a:lnTo>
                   <a:lnTo>
-                    <a:pt x="5514934" y="2692541"/>
-                  </a:lnTo>
-                  <a:lnTo>
-                    <a:pt x="5443311" y="2695297"/>
+                    <a:pt x="5514934" y="2692540"/>
+                  </a:lnTo>
+                  <a:lnTo>
+                    <a:pt x="5443311" y="2695296"/>
                   </a:lnTo>
                   <a:lnTo>
                     <a:pt x="5371689" y="2698044"/>
@@ -3448,7 +3448,7 @@
                     <a:pt x="4870331" y="2717059"/>
                   </a:lnTo>
                   <a:lnTo>
-                    <a:pt x="4798709" y="2719745"/>
+                    <a:pt x="4798709" y="2719744"/>
                   </a:lnTo>
                   <a:lnTo>
                     <a:pt x="4727086" y="2722422"/>
@@ -3457,7 +3457,7 @@
                     <a:pt x="4655464" y="2725092"/>
                   </a:lnTo>
                   <a:lnTo>
-                    <a:pt x="4583841" y="2727755"/>
+                    <a:pt x="4583841" y="2727754"/>
                   </a:lnTo>
                   <a:lnTo>
                     <a:pt x="4512219" y="2730409"/>
@@ -3466,7 +3466,7 @@
                     <a:pt x="4440596" y="2733056"/>
                   </a:lnTo>
                   <a:lnTo>
-                    <a:pt x="4368974" y="2735696"/>
+                    <a:pt x="4368974" y="2735695"/>
                   </a:lnTo>
                   <a:lnTo>
                     <a:pt x="4297351" y="2738327"/>
@@ -3475,13 +3475,13 @@
                     <a:pt x="4225729" y="2740952"/>
                   </a:lnTo>
                   <a:lnTo>
-                    <a:pt x="4154106" y="2743569"/>
+                    <a:pt x="4154106" y="2743568"/>
                   </a:lnTo>
                   <a:lnTo>
                     <a:pt x="4082483" y="2746178"/>
                   </a:lnTo>
                   <a:lnTo>
-                    <a:pt x="4010861" y="2748780"/>
+                    <a:pt x="4010861" y="2748779"/>
                   </a:lnTo>
                   <a:lnTo>
                     <a:pt x="3939238" y="2751374"/>
@@ -3541,7 +3541,7 @@
                     <a:pt x="2650033" y="3012855"/>
                   </a:lnTo>
                   <a:lnTo>
-                    <a:pt x="2578410" y="3047066"/>
+                    <a:pt x="2578410" y="3047067"/>
                   </a:lnTo>
                   <a:lnTo>
                     <a:pt x="2506788" y="3079449"/>
@@ -3574,7 +3574,7 @@
                     <a:pt x="1862185" y="3303103"/>
                   </a:lnTo>
                   <a:lnTo>
-                    <a:pt x="1790563" y="3321794"/>
+                    <a:pt x="1790563" y="3321795"/>
                   </a:lnTo>
                   <a:lnTo>
                     <a:pt x="1718940" y="3339486"/>
@@ -3607,7 +3607,7 @@
                     <a:pt x="1074337" y="3461677"/>
                   </a:lnTo>
                   <a:lnTo>
-                    <a:pt x="1002715" y="3471888"/>
+                    <a:pt x="1002715" y="3471889"/>
                   </a:lnTo>
                   <a:lnTo>
                     <a:pt x="931092" y="3481554"/>
@@ -3676,26 +3676,26 @@
           <p:spPr>
             <a:xfrm>
               <a:off x="1172049" y="1896563"/>
-              <a:ext cx="4919990" cy="2883163"/>
+              <a:ext cx="4919989" cy="2883164"/>
             </a:xfrm>
             <a:custGeom>
               <a:avLst/>
               <a:pathLst>
-                <a:path w="4919990" h="2883163">
+                <a:path w="4919989" h="2883164">
                   <a:moveTo>
-                    <a:pt x="0" y="2883163"/>
+                    <a:pt x="0" y="2883164"/>
                   </a:moveTo>
                   <a:lnTo>
-                    <a:pt x="71622" y="2880948"/>
+                    <a:pt x="71622" y="2880949"/>
                   </a:lnTo>
                   <a:lnTo>
                     <a:pt x="143245" y="2878727"/>
                   </a:lnTo>
                   <a:lnTo>
-                    <a:pt x="214867" y="2876499"/>
-                  </a:lnTo>
-                  <a:lnTo>
-                    <a:pt x="286490" y="2874265"/>
+                    <a:pt x="214867" y="2876500"/>
+                  </a:lnTo>
+                  <a:lnTo>
+                    <a:pt x="286490" y="2874266"/>
                   </a:lnTo>
                   <a:lnTo>
                     <a:pt x="358112" y="2872025"/>
@@ -3704,10 +3704,10 @@
                     <a:pt x="429735" y="2869778"/>
                   </a:lnTo>
                   <a:lnTo>
-                    <a:pt x="501357" y="2867524"/>
-                  </a:lnTo>
-                  <a:lnTo>
-                    <a:pt x="572980" y="2865264"/>
+                    <a:pt x="501357" y="2867525"/>
+                  </a:lnTo>
+                  <a:lnTo>
+                    <a:pt x="572980" y="2865265"/>
                   </a:lnTo>
                   <a:lnTo>
                     <a:pt x="644602" y="2862998"/>
@@ -3716,7 +3716,7 @@
                     <a:pt x="716225" y="2860725"/>
                   </a:lnTo>
                   <a:lnTo>
-                    <a:pt x="787847" y="2858445"/>
+                    <a:pt x="787847" y="2858446"/>
                   </a:lnTo>
                   <a:lnTo>
                     <a:pt x="859470" y="2856159"/>
@@ -3725,10 +3725,10 @@
                     <a:pt x="931092" y="2853867"/>
                   </a:lnTo>
                   <a:lnTo>
-                    <a:pt x="1002715" y="2851567"/>
-                  </a:lnTo>
-                  <a:lnTo>
-                    <a:pt x="1074337" y="2849261"/>
+                    <a:pt x="1002715" y="2851568"/>
+                  </a:lnTo>
+                  <a:lnTo>
+                    <a:pt x="1074337" y="2849262"/>
                   </a:lnTo>
                   <a:lnTo>
                     <a:pt x="1145960" y="2846949"/>
@@ -3755,7 +3755,7 @@
                     <a:pt x="1647318" y="2830574"/>
                   </a:lnTo>
                   <a:lnTo>
-                    <a:pt x="1718940" y="2828207"/>
+                    <a:pt x="1718940" y="2828208"/>
                   </a:lnTo>
                   <a:lnTo>
                     <a:pt x="1790563" y="2825834"/>
@@ -3821,16 +3821,16 @@
                     <a:pt x="3223013" y="2659586"/>
                   </a:lnTo>
                   <a:lnTo>
-                    <a:pt x="3294636" y="2603484"/>
+                    <a:pt x="3294636" y="2603483"/>
                   </a:lnTo>
                   <a:lnTo>
                     <a:pt x="3366258" y="2544212"/>
                   </a:lnTo>
                   <a:lnTo>
-                    <a:pt x="3437881" y="2481592"/>
-                  </a:lnTo>
-                  <a:lnTo>
-                    <a:pt x="3509503" y="2415434"/>
+                    <a:pt x="3437881" y="2481591"/>
+                  </a:lnTo>
+                  <a:lnTo>
+                    <a:pt x="3509503" y="2415433"/>
                   </a:lnTo>
                   <a:lnTo>
                     <a:pt x="3581126" y="2345538"/>
@@ -3839,7 +3839,7 @@
                     <a:pt x="3652748" y="2271694"/>
                   </a:lnTo>
                   <a:lnTo>
-                    <a:pt x="3724371" y="2193678"/>
+                    <a:pt x="3724371" y="2193677"/>
                   </a:lnTo>
                   <a:lnTo>
                     <a:pt x="3795993" y="2111254"/>
@@ -3848,49 +3848,49 @@
                     <a:pt x="3867616" y="2024174"/>
                   </a:lnTo>
                   <a:lnTo>
-                    <a:pt x="3939238" y="1932175"/>
-                  </a:lnTo>
-                  <a:lnTo>
-                    <a:pt x="4010861" y="1834978"/>
-                  </a:lnTo>
-                  <a:lnTo>
-                    <a:pt x="4082483" y="1732290"/>
-                  </a:lnTo>
-                  <a:lnTo>
-                    <a:pt x="4154106" y="1623800"/>
-                  </a:lnTo>
-                  <a:lnTo>
-                    <a:pt x="4225729" y="1509182"/>
-                  </a:lnTo>
-                  <a:lnTo>
-                    <a:pt x="4297351" y="1388088"/>
-                  </a:lnTo>
-                  <a:lnTo>
-                    <a:pt x="4368974" y="1260153"/>
-                  </a:lnTo>
-                  <a:lnTo>
-                    <a:pt x="4440596" y="1124990"/>
-                  </a:lnTo>
-                  <a:lnTo>
-                    <a:pt x="4512219" y="982192"/>
-                  </a:lnTo>
-                  <a:lnTo>
-                    <a:pt x="4583841" y="831326"/>
-                  </a:lnTo>
-                  <a:lnTo>
-                    <a:pt x="4655464" y="671937"/>
-                  </a:lnTo>
-                  <a:lnTo>
-                    <a:pt x="4727086" y="503544"/>
-                  </a:lnTo>
-                  <a:lnTo>
-                    <a:pt x="4798709" y="325637"/>
-                  </a:lnTo>
-                  <a:lnTo>
-                    <a:pt x="4870331" y="137680"/>
-                  </a:lnTo>
-                  <a:lnTo>
-                    <a:pt x="4919990" y="0"/>
+                    <a:pt x="3939238" y="1932174"/>
+                  </a:lnTo>
+                  <a:lnTo>
+                    <a:pt x="4010861" y="1834977"/>
+                  </a:lnTo>
+                  <a:lnTo>
+                    <a:pt x="4082483" y="1732289"/>
+                  </a:lnTo>
+                  <a:lnTo>
+                    <a:pt x="4154106" y="1623799"/>
+                  </a:lnTo>
+                  <a:lnTo>
+                    <a:pt x="4225729" y="1509181"/>
+                  </a:lnTo>
+                  <a:lnTo>
+                    <a:pt x="4297351" y="1388087"/>
+                  </a:lnTo>
+                  <a:lnTo>
+                    <a:pt x="4368974" y="1260152"/>
+                  </a:lnTo>
+                  <a:lnTo>
+                    <a:pt x="4440596" y="1124989"/>
+                  </a:lnTo>
+                  <a:lnTo>
+                    <a:pt x="4512219" y="982191"/>
+                  </a:lnTo>
+                  <a:lnTo>
+                    <a:pt x="4583841" y="831325"/>
+                  </a:lnTo>
+                  <a:lnTo>
+                    <a:pt x="4655464" y="671936"/>
+                  </a:lnTo>
+                  <a:lnTo>
+                    <a:pt x="4727086" y="503542"/>
+                  </a:lnTo>
+                  <a:lnTo>
+                    <a:pt x="4798709" y="325635"/>
+                  </a:lnTo>
+                  <a:lnTo>
+                    <a:pt x="4870331" y="137678"/>
+                  </a:lnTo>
+                  <a:lnTo>
+                    <a:pt x="4919989" y="0"/>
                   </a:lnTo>
                 </a:path>
               </a:pathLst>
@@ -3910,13 +3910,13 @@
           </p:nvSpPr>
           <p:spPr>
             <a:xfrm>
-              <a:off x="1172049" y="4526431"/>
-              <a:ext cx="7090630" cy="939032"/>
+              <a:off x="1172049" y="4526430"/>
+              <a:ext cx="7090630" cy="939033"/>
             </a:xfrm>
             <a:custGeom>
               <a:avLst/>
               <a:pathLst>
-                <a:path w="7090630" h="939032">
+                <a:path w="7090630" h="939033">
                   <a:moveTo>
                     <a:pt x="7090630" y="0"/>
                   </a:moveTo>
@@ -3933,7 +3933,7 @@
                     <a:pt x="6804139" y="11691"/>
                   </a:lnTo>
                   <a:lnTo>
-                    <a:pt x="6732517" y="14593"/>
+                    <a:pt x="6732517" y="14594"/>
                   </a:lnTo>
                   <a:lnTo>
                     <a:pt x="6660894" y="17487"/>
@@ -3966,7 +3966,7 @@
                     <a:pt x="6016292" y="43160"/>
                   </a:lnTo>
                   <a:lnTo>
-                    <a:pt x="5944669" y="45971"/>
+                    <a:pt x="5944669" y="45972"/>
                   </a:lnTo>
                   <a:lnTo>
                     <a:pt x="5873047" y="48775"/>
@@ -3981,7 +3981,7 @@
                     <a:pt x="5658179" y="57138"/>
                   </a:lnTo>
                   <a:lnTo>
-                    <a:pt x="5586557" y="59909"/>
+                    <a:pt x="5586557" y="59910"/>
                   </a:lnTo>
                   <a:lnTo>
                     <a:pt x="5514934" y="62673"/>
@@ -3993,10 +3993,10 @@
                     <a:pt x="5371689" y="68177"/>
                   </a:lnTo>
                   <a:lnTo>
-                    <a:pt x="5300066" y="70916"/>
-                  </a:lnTo>
-                  <a:lnTo>
-                    <a:pt x="5228444" y="73648"/>
+                    <a:pt x="5300066" y="70917"/>
+                  </a:lnTo>
+                  <a:lnTo>
+                    <a:pt x="5228444" y="73649"/>
                   </a:lnTo>
                   <a:lnTo>
                     <a:pt x="5156821" y="76373"/>
@@ -4008,7 +4008,7 @@
                     <a:pt x="5013576" y="81798"/>
                   </a:lnTo>
                   <a:lnTo>
-                    <a:pt x="4941954" y="84498"/>
+                    <a:pt x="4941954" y="84499"/>
                   </a:lnTo>
                   <a:lnTo>
                     <a:pt x="4870331" y="87192"/>
@@ -4020,16 +4020,16 @@
                     <a:pt x="4727086" y="92555"/>
                   </a:lnTo>
                   <a:lnTo>
-                    <a:pt x="4655464" y="95224"/>
+                    <a:pt x="4655464" y="95225"/>
                   </a:lnTo>
                   <a:lnTo>
                     <a:pt x="4583841" y="97887"/>
                   </a:lnTo>
                   <a:lnTo>
-                    <a:pt x="4512219" y="100541"/>
-                  </a:lnTo>
-                  <a:lnTo>
-                    <a:pt x="4440596" y="103188"/>
+                    <a:pt x="4512219" y="100542"/>
+                  </a:lnTo>
+                  <a:lnTo>
+                    <a:pt x="4440596" y="103189"/>
                   </a:lnTo>
                   <a:lnTo>
                     <a:pt x="4368974" y="105828"/>
@@ -4050,91 +4050,91 @@
                     <a:pt x="4010861" y="118912"/>
                   </a:lnTo>
                   <a:lnTo>
-                    <a:pt x="3939238" y="121506"/>
+                    <a:pt x="3939238" y="121507"/>
                   </a:lnTo>
                   <a:lnTo>
                     <a:pt x="3867616" y="124093"/>
                   </a:lnTo>
                   <a:lnTo>
-                    <a:pt x="3795993" y="126672"/>
-                  </a:lnTo>
-                  <a:lnTo>
-                    <a:pt x="3724371" y="129244"/>
+                    <a:pt x="3795993" y="126673"/>
+                  </a:lnTo>
+                  <a:lnTo>
+                    <a:pt x="3724371" y="129245"/>
                   </a:lnTo>
                   <a:lnTo>
                     <a:pt x="3652748" y="131809"/>
                   </a:lnTo>
                   <a:lnTo>
-                    <a:pt x="3581126" y="134366"/>
-                  </a:lnTo>
-                  <a:lnTo>
-                    <a:pt x="3509503" y="136916"/>
+                    <a:pt x="3581126" y="134367"/>
+                  </a:lnTo>
+                  <a:lnTo>
+                    <a:pt x="3509503" y="136917"/>
                   </a:lnTo>
                   <a:lnTo>
                     <a:pt x="3437881" y="139459"/>
                   </a:lnTo>
                   <a:lnTo>
-                    <a:pt x="3366258" y="141994"/>
-                  </a:lnTo>
-                  <a:lnTo>
-                    <a:pt x="3294636" y="144522"/>
-                  </a:lnTo>
-                  <a:lnTo>
-                    <a:pt x="3223013" y="147043"/>
-                  </a:lnTo>
-                  <a:lnTo>
-                    <a:pt x="3151391" y="149556"/>
+                    <a:pt x="3366258" y="141995"/>
+                  </a:lnTo>
+                  <a:lnTo>
+                    <a:pt x="3294636" y="144523"/>
+                  </a:lnTo>
+                  <a:lnTo>
+                    <a:pt x="3223013" y="147044"/>
+                  </a:lnTo>
+                  <a:lnTo>
+                    <a:pt x="3151391" y="149557"/>
                   </a:lnTo>
                   <a:lnTo>
                     <a:pt x="3079768" y="152063"/>
                   </a:lnTo>
                   <a:lnTo>
-                    <a:pt x="3008146" y="180658"/>
-                  </a:lnTo>
-                  <a:lnTo>
-                    <a:pt x="2936523" y="225689"/>
-                  </a:lnTo>
-                  <a:lnTo>
-                    <a:pt x="2864901" y="268312"/>
-                  </a:lnTo>
-                  <a:lnTo>
-                    <a:pt x="2793278" y="308656"/>
-                  </a:lnTo>
-                  <a:lnTo>
-                    <a:pt x="2721655" y="346842"/>
-                  </a:lnTo>
-                  <a:lnTo>
-                    <a:pt x="2650033" y="382987"/>
+                    <a:pt x="3008146" y="180659"/>
+                  </a:lnTo>
+                  <a:lnTo>
+                    <a:pt x="2936523" y="225690"/>
+                  </a:lnTo>
+                  <a:lnTo>
+                    <a:pt x="2864901" y="268313"/>
+                  </a:lnTo>
+                  <a:lnTo>
+                    <a:pt x="2793278" y="308657"/>
+                  </a:lnTo>
+                  <a:lnTo>
+                    <a:pt x="2721655" y="346843"/>
+                  </a:lnTo>
+                  <a:lnTo>
+                    <a:pt x="2650033" y="382988"/>
                   </a:lnTo>
                   <a:lnTo>
                     <a:pt x="2578410" y="417199"/>
                   </a:lnTo>
                   <a:lnTo>
-                    <a:pt x="2506788" y="449581"/>
+                    <a:pt x="2506788" y="449582"/>
                   </a:lnTo>
                   <a:lnTo>
                     <a:pt x="2435165" y="480232"/>
                   </a:lnTo>
                   <a:lnTo>
-                    <a:pt x="2363543" y="509243"/>
-                  </a:lnTo>
-                  <a:lnTo>
-                    <a:pt x="2291920" y="536704"/>
-                  </a:lnTo>
-                  <a:lnTo>
-                    <a:pt x="2220298" y="562696"/>
-                  </a:lnTo>
-                  <a:lnTo>
-                    <a:pt x="2148675" y="587298"/>
-                  </a:lnTo>
-                  <a:lnTo>
-                    <a:pt x="2077053" y="610584"/>
+                    <a:pt x="2363543" y="509244"/>
+                  </a:lnTo>
+                  <a:lnTo>
+                    <a:pt x="2291920" y="536705"/>
+                  </a:lnTo>
+                  <a:lnTo>
+                    <a:pt x="2220298" y="562697"/>
+                  </a:lnTo>
+                  <a:lnTo>
+                    <a:pt x="2148675" y="587299"/>
+                  </a:lnTo>
+                  <a:lnTo>
+                    <a:pt x="2077053" y="610585"/>
                   </a:lnTo>
                   <a:lnTo>
                     <a:pt x="2005430" y="632626"/>
                   </a:lnTo>
                   <a:lnTo>
-                    <a:pt x="1933808" y="653488"/>
+                    <a:pt x="1933808" y="653489"/>
                   </a:lnTo>
                   <a:lnTo>
                     <a:pt x="1862185" y="673236"/>
@@ -4143,79 +4143,79 @@
                     <a:pt x="1790563" y="691927"/>
                   </a:lnTo>
                   <a:lnTo>
-                    <a:pt x="1718940" y="709618"/>
-                  </a:lnTo>
-                  <a:lnTo>
-                    <a:pt x="1647318" y="726364"/>
-                  </a:lnTo>
-                  <a:lnTo>
-                    <a:pt x="1575695" y="742214"/>
+                    <a:pt x="1718940" y="709619"/>
+                  </a:lnTo>
+                  <a:lnTo>
+                    <a:pt x="1647318" y="726365"/>
+                  </a:lnTo>
+                  <a:lnTo>
+                    <a:pt x="1575695" y="742215"/>
                   </a:lnTo>
                   <a:lnTo>
                     <a:pt x="1504073" y="757217"/>
                   </a:lnTo>
                   <a:lnTo>
-                    <a:pt x="1432450" y="771417"/>
-                  </a:lnTo>
-                  <a:lnTo>
-                    <a:pt x="1360827" y="784858"/>
-                  </a:lnTo>
-                  <a:lnTo>
-                    <a:pt x="1289205" y="797580"/>
-                  </a:lnTo>
-                  <a:lnTo>
-                    <a:pt x="1217582" y="809622"/>
-                  </a:lnTo>
-                  <a:lnTo>
-                    <a:pt x="1145960" y="821020"/>
-                  </a:lnTo>
-                  <a:lnTo>
-                    <a:pt x="1074337" y="831809"/>
+                    <a:pt x="1432450" y="771418"/>
+                  </a:lnTo>
+                  <a:lnTo>
+                    <a:pt x="1360827" y="784859"/>
+                  </a:lnTo>
+                  <a:lnTo>
+                    <a:pt x="1289205" y="797581"/>
+                  </a:lnTo>
+                  <a:lnTo>
+                    <a:pt x="1217582" y="809623"/>
+                  </a:lnTo>
+                  <a:lnTo>
+                    <a:pt x="1145960" y="821021"/>
+                  </a:lnTo>
+                  <a:lnTo>
+                    <a:pt x="1074337" y="831810"/>
                   </a:lnTo>
                   <a:lnTo>
                     <a:pt x="1002715" y="842021"/>
                   </a:lnTo>
                   <a:lnTo>
-                    <a:pt x="931092" y="851686"/>
-                  </a:lnTo>
-                  <a:lnTo>
-                    <a:pt x="859470" y="860835"/>
+                    <a:pt x="931092" y="851687"/>
+                  </a:lnTo>
+                  <a:lnTo>
+                    <a:pt x="859470" y="860836"/>
                   </a:lnTo>
                   <a:lnTo>
                     <a:pt x="787847" y="869495"/>
                   </a:lnTo>
                   <a:lnTo>
-                    <a:pt x="716225" y="877691"/>
-                  </a:lnTo>
-                  <a:lnTo>
-                    <a:pt x="644602" y="885449"/>
-                  </a:lnTo>
-                  <a:lnTo>
-                    <a:pt x="572980" y="892792"/>
-                  </a:lnTo>
-                  <a:lnTo>
-                    <a:pt x="501357" y="899743"/>
-                  </a:lnTo>
-                  <a:lnTo>
-                    <a:pt x="429735" y="906322"/>
-                  </a:lnTo>
-                  <a:lnTo>
-                    <a:pt x="358112" y="912549"/>
-                  </a:lnTo>
-                  <a:lnTo>
-                    <a:pt x="286490" y="918443"/>
-                  </a:lnTo>
-                  <a:lnTo>
-                    <a:pt x="214867" y="924022"/>
-                  </a:lnTo>
-                  <a:lnTo>
-                    <a:pt x="143245" y="929303"/>
-                  </a:lnTo>
-                  <a:lnTo>
-                    <a:pt x="71622" y="934301"/>
-                  </a:lnTo>
-                  <a:lnTo>
-                    <a:pt x="0" y="939032"/>
+                    <a:pt x="716225" y="877692"/>
+                  </a:lnTo>
+                  <a:lnTo>
+                    <a:pt x="644602" y="885450"/>
+                  </a:lnTo>
+                  <a:lnTo>
+                    <a:pt x="572980" y="892793"/>
+                  </a:lnTo>
+                  <a:lnTo>
+                    <a:pt x="501357" y="899744"/>
+                  </a:lnTo>
+                  <a:lnTo>
+                    <a:pt x="429735" y="906323"/>
+                  </a:lnTo>
+                  <a:lnTo>
+                    <a:pt x="358112" y="912550"/>
+                  </a:lnTo>
+                  <a:lnTo>
+                    <a:pt x="286490" y="918444"/>
+                  </a:lnTo>
+                  <a:lnTo>
+                    <a:pt x="214867" y="924023"/>
+                  </a:lnTo>
+                  <a:lnTo>
+                    <a:pt x="143245" y="929304"/>
+                  </a:lnTo>
+                  <a:lnTo>
+                    <a:pt x="71622" y="934302"/>
+                  </a:lnTo>
+                  <a:lnTo>
+                    <a:pt x="0" y="939033"/>
                   </a:lnTo>
                 </a:path>
               </a:pathLst>
@@ -4236,17 +4236,17 @@
           <p:spPr>
             <a:xfrm>
               <a:off x="1172049" y="1896563"/>
-              <a:ext cx="6604604" cy="3398796"/>
+              <a:ext cx="6604602" cy="3398796"/>
             </a:xfrm>
             <a:custGeom>
               <a:avLst/>
               <a:pathLst>
-                <a:path w="6604604" h="3398796">
+                <a:path w="6604602" h="3398796">
                   <a:moveTo>
                     <a:pt x="0" y="3398796"/>
                   </a:moveTo>
                   <a:lnTo>
-                    <a:pt x="71622" y="3391348"/>
+                    <a:pt x="71622" y="3391349"/>
                   </a:lnTo>
                   <a:lnTo>
                     <a:pt x="143245" y="3383683"/>
@@ -4270,10 +4270,10 @@
                     <a:pt x="572980" y="3332728"/>
                   </a:lnTo>
                   <a:lnTo>
-                    <a:pt x="644602" y="3323342"/>
-                  </a:lnTo>
-                  <a:lnTo>
-                    <a:pt x="716225" y="3313681"/>
+                    <a:pt x="644602" y="3323343"/>
+                  </a:lnTo>
+                  <a:lnTo>
+                    <a:pt x="716225" y="3313682"/>
                   </a:lnTo>
                   <a:lnTo>
                     <a:pt x="787847" y="3303737"/>
@@ -4285,7 +4285,7 @@
                     <a:pt x="931092" y="3282965"/>
                   </a:lnTo>
                   <a:lnTo>
-                    <a:pt x="1002715" y="3272119"/>
+                    <a:pt x="1002715" y="3272120"/>
                   </a:lnTo>
                   <a:lnTo>
                     <a:pt x="1074337" y="3260956"/>
@@ -4318,7 +4318,7 @@
                     <a:pt x="1718940" y="3144531"/>
                   </a:lnTo>
                   <a:lnTo>
-                    <a:pt x="1790563" y="3129624"/>
+                    <a:pt x="1790563" y="3129625"/>
                   </a:lnTo>
                   <a:lnTo>
                     <a:pt x="1862185" y="3114280"/>
@@ -4384,7 +4384,7 @@
                     <a:pt x="3294636" y="2692733"/>
                   </a:lnTo>
                   <a:lnTo>
-                    <a:pt x="3366258" y="2664572"/>
+                    <a:pt x="3366258" y="2664571"/>
                   </a:lnTo>
                   <a:lnTo>
                     <a:pt x="3437881" y="2635584"/>
@@ -4399,7 +4399,7 @@
                     <a:pt x="3652748" y="2543418"/>
                   </a:lnTo>
                   <a:lnTo>
-                    <a:pt x="3724371" y="2510877"/>
+                    <a:pt x="3724371" y="2510876"/>
                   </a:lnTo>
                   <a:lnTo>
                     <a:pt x="3795993" y="2477380"/>
@@ -4423,7 +4423,7 @@
                     <a:pt x="4225729" y="2254725"/>
                   </a:lnTo>
                   <a:lnTo>
-                    <a:pt x="4297351" y="2213714"/>
+                    <a:pt x="4297351" y="2213713"/>
                   </a:lnTo>
                   <a:lnTo>
                     <a:pt x="4368974" y="2171499"/>
@@ -4447,82 +4447,82 @@
                     <a:pt x="4798709" y="1890894"/>
                   </a:lnTo>
                   <a:lnTo>
-                    <a:pt x="4870331" y="1839209"/>
-                  </a:lnTo>
-                  <a:lnTo>
-                    <a:pt x="4941954" y="1786008"/>
-                  </a:lnTo>
-                  <a:lnTo>
-                    <a:pt x="5013576" y="1731245"/>
-                  </a:lnTo>
-                  <a:lnTo>
-                    <a:pt x="5085199" y="1674876"/>
-                  </a:lnTo>
-                  <a:lnTo>
-                    <a:pt x="5156821" y="1616854"/>
-                  </a:lnTo>
-                  <a:lnTo>
-                    <a:pt x="5228444" y="1557129"/>
-                  </a:lnTo>
-                  <a:lnTo>
-                    <a:pt x="5300066" y="1495652"/>
-                  </a:lnTo>
-                  <a:lnTo>
-                    <a:pt x="5371689" y="1432371"/>
-                  </a:lnTo>
-                  <a:lnTo>
-                    <a:pt x="5443311" y="1367234"/>
-                  </a:lnTo>
-                  <a:lnTo>
-                    <a:pt x="5514934" y="1300186"/>
-                  </a:lnTo>
-                  <a:lnTo>
-                    <a:pt x="5586557" y="1231171"/>
-                  </a:lnTo>
-                  <a:lnTo>
-                    <a:pt x="5658179" y="1160131"/>
-                  </a:lnTo>
-                  <a:lnTo>
-                    <a:pt x="5729802" y="1087007"/>
-                  </a:lnTo>
-                  <a:lnTo>
-                    <a:pt x="5801424" y="1011738"/>
-                  </a:lnTo>
-                  <a:lnTo>
-                    <a:pt x="5873047" y="934260"/>
-                  </a:lnTo>
-                  <a:lnTo>
-                    <a:pt x="5944669" y="854510"/>
-                  </a:lnTo>
-                  <a:lnTo>
-                    <a:pt x="6016292" y="772420"/>
-                  </a:lnTo>
-                  <a:lnTo>
-                    <a:pt x="6087914" y="687921"/>
-                  </a:lnTo>
-                  <a:lnTo>
-                    <a:pt x="6159537" y="600944"/>
-                  </a:lnTo>
-                  <a:lnTo>
-                    <a:pt x="6231159" y="511415"/>
-                  </a:lnTo>
-                  <a:lnTo>
-                    <a:pt x="6302782" y="419259"/>
-                  </a:lnTo>
-                  <a:lnTo>
-                    <a:pt x="6374404" y="324400"/>
-                  </a:lnTo>
-                  <a:lnTo>
-                    <a:pt x="6446027" y="226757"/>
-                  </a:lnTo>
-                  <a:lnTo>
-                    <a:pt x="6517649" y="126251"/>
-                  </a:lnTo>
-                  <a:lnTo>
-                    <a:pt x="6589272" y="22795"/>
-                  </a:lnTo>
-                  <a:lnTo>
-                    <a:pt x="6604604" y="0"/>
+                    <a:pt x="4870331" y="1839208"/>
+                  </a:lnTo>
+                  <a:lnTo>
+                    <a:pt x="4941954" y="1786007"/>
+                  </a:lnTo>
+                  <a:lnTo>
+                    <a:pt x="5013576" y="1731244"/>
+                  </a:lnTo>
+                  <a:lnTo>
+                    <a:pt x="5085199" y="1674875"/>
+                  </a:lnTo>
+                  <a:lnTo>
+                    <a:pt x="5156821" y="1616853"/>
+                  </a:lnTo>
+                  <a:lnTo>
+                    <a:pt x="5228444" y="1557128"/>
+                  </a:lnTo>
+                  <a:lnTo>
+                    <a:pt x="5300066" y="1495651"/>
+                  </a:lnTo>
+                  <a:lnTo>
+                    <a:pt x="5371689" y="1432370"/>
+                  </a:lnTo>
+                  <a:lnTo>
+                    <a:pt x="5443311" y="1367233"/>
+                  </a:lnTo>
+                  <a:lnTo>
+                    <a:pt x="5514934" y="1300184"/>
+                  </a:lnTo>
+                  <a:lnTo>
+                    <a:pt x="5586557" y="1231169"/>
+                  </a:lnTo>
+                  <a:lnTo>
+                    <a:pt x="5658179" y="1160129"/>
+                  </a:lnTo>
+                  <a:lnTo>
+                    <a:pt x="5729802" y="1087005"/>
+                  </a:lnTo>
+                  <a:lnTo>
+                    <a:pt x="5801424" y="1011736"/>
+                  </a:lnTo>
+                  <a:lnTo>
+                    <a:pt x="5873047" y="934258"/>
+                  </a:lnTo>
+                  <a:lnTo>
+                    <a:pt x="5944669" y="854508"/>
+                  </a:lnTo>
+                  <a:lnTo>
+                    <a:pt x="6016292" y="772418"/>
+                  </a:lnTo>
+                  <a:lnTo>
+                    <a:pt x="6087914" y="687919"/>
+                  </a:lnTo>
+                  <a:lnTo>
+                    <a:pt x="6159537" y="600942"/>
+                  </a:lnTo>
+                  <a:lnTo>
+                    <a:pt x="6231159" y="511412"/>
+                  </a:lnTo>
+                  <a:lnTo>
+                    <a:pt x="6302782" y="419257"/>
+                  </a:lnTo>
+                  <a:lnTo>
+                    <a:pt x="6374404" y="324397"/>
+                  </a:lnTo>
+                  <a:lnTo>
+                    <a:pt x="6446027" y="226755"/>
+                  </a:lnTo>
+                  <a:lnTo>
+                    <a:pt x="6517649" y="126248"/>
+                  </a:lnTo>
+                  <a:lnTo>
+                    <a:pt x="6589272" y="22792"/>
+                  </a:lnTo>
+                  <a:lnTo>
+                    <a:pt x="6604602" y="0"/>
                   </a:lnTo>
                 </a:path>
               </a:pathLst>

--- a/docs/plots/carbo/jx_carbo_linsubhr_dosedisc_grade3.pptx
+++ b/docs/plots/carbo/jx_carbo_linsubhr_dosedisc_grade3.pptx
@@ -3132,524 +3132,572 @@
           <p:spPr>
             <a:xfrm>
               <a:off x="1172049" y="1896563"/>
-              <a:ext cx="7090630" cy="3568900"/>
+              <a:ext cx="7090630" cy="3448270"/>
             </a:xfrm>
             <a:custGeom>
               <a:avLst/>
               <a:pathLst>
-                <a:path w="7090630" h="3568900">
+                <a:path w="7090630" h="3448270">
                   <a:moveTo>
-                    <a:pt x="0" y="2883164"/>
+                    <a:pt x="0" y="1683735"/>
                   </a:moveTo>
                   <a:lnTo>
-                    <a:pt x="71622" y="2880949"/>
-                  </a:lnTo>
-                  <a:lnTo>
-                    <a:pt x="143245" y="2878727"/>
-                  </a:lnTo>
-                  <a:lnTo>
-                    <a:pt x="214867" y="2876500"/>
-                  </a:lnTo>
-                  <a:lnTo>
-                    <a:pt x="286490" y="2874266"/>
-                  </a:lnTo>
-                  <a:lnTo>
-                    <a:pt x="358112" y="2872025"/>
-                  </a:lnTo>
-                  <a:lnTo>
-                    <a:pt x="429735" y="2869778"/>
-                  </a:lnTo>
-                  <a:lnTo>
-                    <a:pt x="501357" y="2867525"/>
-                  </a:lnTo>
-                  <a:lnTo>
-                    <a:pt x="572980" y="2865265"/>
-                  </a:lnTo>
-                  <a:lnTo>
-                    <a:pt x="644602" y="2862998"/>
-                  </a:lnTo>
-                  <a:lnTo>
-                    <a:pt x="716225" y="2860725"/>
-                  </a:lnTo>
-                  <a:lnTo>
-                    <a:pt x="787847" y="2858446"/>
-                  </a:lnTo>
-                  <a:lnTo>
-                    <a:pt x="859470" y="2856159"/>
-                  </a:lnTo>
-                  <a:lnTo>
-                    <a:pt x="931092" y="2853867"/>
-                  </a:lnTo>
-                  <a:lnTo>
-                    <a:pt x="1002715" y="2851568"/>
-                  </a:lnTo>
-                  <a:lnTo>
-                    <a:pt x="1074337" y="2849262"/>
-                  </a:lnTo>
-                  <a:lnTo>
-                    <a:pt x="1145960" y="2846949"/>
-                  </a:lnTo>
-                  <a:lnTo>
-                    <a:pt x="1217582" y="2844630"/>
-                  </a:lnTo>
-                  <a:lnTo>
-                    <a:pt x="1289205" y="2842304"/>
-                  </a:lnTo>
-                  <a:lnTo>
-                    <a:pt x="1360827" y="2839971"/>
-                  </a:lnTo>
-                  <a:lnTo>
-                    <a:pt x="1432450" y="2837632"/>
-                  </a:lnTo>
-                  <a:lnTo>
-                    <a:pt x="1504073" y="2835286"/>
-                  </a:lnTo>
-                  <a:lnTo>
-                    <a:pt x="1575695" y="2832933"/>
-                  </a:lnTo>
-                  <a:lnTo>
-                    <a:pt x="1647318" y="2830574"/>
-                  </a:lnTo>
-                  <a:lnTo>
-                    <a:pt x="1718940" y="2828208"/>
-                  </a:lnTo>
-                  <a:lnTo>
-                    <a:pt x="1790563" y="2825834"/>
-                  </a:lnTo>
-                  <a:lnTo>
-                    <a:pt x="1862185" y="2823454"/>
-                  </a:lnTo>
-                  <a:lnTo>
-                    <a:pt x="1933808" y="2821068"/>
-                  </a:lnTo>
-                  <a:lnTo>
-                    <a:pt x="2005430" y="2818674"/>
-                  </a:lnTo>
-                  <a:lnTo>
-                    <a:pt x="2077053" y="2816273"/>
-                  </a:lnTo>
-                  <a:lnTo>
-                    <a:pt x="2148675" y="2813866"/>
-                  </a:lnTo>
-                  <a:lnTo>
-                    <a:pt x="2220298" y="2811451"/>
-                  </a:lnTo>
-                  <a:lnTo>
-                    <a:pt x="2291920" y="2809030"/>
-                  </a:lnTo>
-                  <a:lnTo>
-                    <a:pt x="2363543" y="2806602"/>
-                  </a:lnTo>
-                  <a:lnTo>
-                    <a:pt x="2435165" y="2804166"/>
-                  </a:lnTo>
-                  <a:lnTo>
-                    <a:pt x="2506788" y="2801724"/>
-                  </a:lnTo>
-                  <a:lnTo>
-                    <a:pt x="2578410" y="2799275"/>
-                  </a:lnTo>
-                  <a:lnTo>
-                    <a:pt x="2650033" y="2796818"/>
-                  </a:lnTo>
-                  <a:lnTo>
-                    <a:pt x="2721655" y="2794355"/>
-                  </a:lnTo>
-                  <a:lnTo>
-                    <a:pt x="2793278" y="2791884"/>
-                  </a:lnTo>
-                  <a:lnTo>
-                    <a:pt x="2864901" y="2789407"/>
-                  </a:lnTo>
-                  <a:lnTo>
-                    <a:pt x="2936523" y="2786922"/>
-                  </a:lnTo>
-                  <a:lnTo>
-                    <a:pt x="3008146" y="2784430"/>
-                  </a:lnTo>
-                  <a:lnTo>
-                    <a:pt x="3079768" y="2762951"/>
-                  </a:lnTo>
-                  <a:lnTo>
-                    <a:pt x="3151391" y="2712688"/>
-                  </a:lnTo>
-                  <a:lnTo>
-                    <a:pt x="3223013" y="2659586"/>
-                  </a:lnTo>
-                  <a:lnTo>
-                    <a:pt x="3294636" y="2603483"/>
-                  </a:lnTo>
-                  <a:lnTo>
-                    <a:pt x="3366258" y="2544212"/>
-                  </a:lnTo>
-                  <a:lnTo>
-                    <a:pt x="3437881" y="2481591"/>
-                  </a:lnTo>
-                  <a:lnTo>
-                    <a:pt x="3509503" y="2415433"/>
-                  </a:lnTo>
-                  <a:lnTo>
-                    <a:pt x="3581126" y="2345538"/>
-                  </a:lnTo>
-                  <a:lnTo>
-                    <a:pt x="3652748" y="2271694"/>
-                  </a:lnTo>
-                  <a:lnTo>
-                    <a:pt x="3724371" y="2193677"/>
-                  </a:lnTo>
-                  <a:lnTo>
-                    <a:pt x="3795993" y="2111254"/>
-                  </a:lnTo>
-                  <a:lnTo>
-                    <a:pt x="3867616" y="2024174"/>
-                  </a:lnTo>
-                  <a:lnTo>
-                    <a:pt x="3939238" y="1932174"/>
-                  </a:lnTo>
-                  <a:lnTo>
-                    <a:pt x="4010861" y="1834977"/>
-                  </a:lnTo>
-                  <a:lnTo>
-                    <a:pt x="4082483" y="1732289"/>
-                  </a:lnTo>
-                  <a:lnTo>
-                    <a:pt x="4154106" y="1623799"/>
-                  </a:lnTo>
-                  <a:lnTo>
-                    <a:pt x="4225729" y="1509181"/>
-                  </a:lnTo>
-                  <a:lnTo>
-                    <a:pt x="4297351" y="1388087"/>
-                  </a:lnTo>
-                  <a:lnTo>
-                    <a:pt x="4368974" y="1260152"/>
-                  </a:lnTo>
-                  <a:lnTo>
-                    <a:pt x="4440596" y="1124989"/>
-                  </a:lnTo>
-                  <a:lnTo>
-                    <a:pt x="4512219" y="982191"/>
-                  </a:lnTo>
-                  <a:lnTo>
-                    <a:pt x="4583841" y="831325"/>
-                  </a:lnTo>
-                  <a:lnTo>
-                    <a:pt x="4655464" y="671936"/>
-                  </a:lnTo>
-                  <a:lnTo>
-                    <a:pt x="4727086" y="503542"/>
-                  </a:lnTo>
-                  <a:lnTo>
-                    <a:pt x="4798709" y="325635"/>
-                  </a:lnTo>
-                  <a:lnTo>
-                    <a:pt x="4870331" y="137678"/>
-                  </a:lnTo>
-                  <a:lnTo>
-                    <a:pt x="4919989" y="0"/>
+                    <a:pt x="71622" y="1721153"/>
+                  </a:lnTo>
+                  <a:lnTo>
+                    <a:pt x="143245" y="1757860"/>
+                  </a:lnTo>
+                  <a:lnTo>
+                    <a:pt x="214867" y="1793870"/>
+                  </a:lnTo>
+                  <a:lnTo>
+                    <a:pt x="286490" y="1829195"/>
+                  </a:lnTo>
+                  <a:lnTo>
+                    <a:pt x="358112" y="1863848"/>
+                  </a:lnTo>
+                  <a:lnTo>
+                    <a:pt x="429735" y="1897843"/>
+                  </a:lnTo>
+                  <a:lnTo>
+                    <a:pt x="501357" y="1931192"/>
+                  </a:lnTo>
+                  <a:lnTo>
+                    <a:pt x="572980" y="1963908"/>
+                  </a:lnTo>
+                  <a:lnTo>
+                    <a:pt x="644602" y="1996001"/>
+                  </a:lnTo>
+                  <a:lnTo>
+                    <a:pt x="716225" y="2027485"/>
+                  </a:lnTo>
+                  <a:lnTo>
+                    <a:pt x="787847" y="2058370"/>
+                  </a:lnTo>
+                  <a:lnTo>
+                    <a:pt x="859470" y="2088668"/>
+                  </a:lnTo>
+                  <a:lnTo>
+                    <a:pt x="931092" y="2118391"/>
+                  </a:lnTo>
+                  <a:lnTo>
+                    <a:pt x="1002715" y="2147548"/>
+                  </a:lnTo>
+                  <a:lnTo>
+                    <a:pt x="1074337" y="2176152"/>
+                  </a:lnTo>
+                  <a:lnTo>
+                    <a:pt x="1145960" y="2204212"/>
+                  </a:lnTo>
+                  <a:lnTo>
+                    <a:pt x="1217582" y="2231738"/>
+                  </a:lnTo>
+                  <a:lnTo>
+                    <a:pt x="1289205" y="2258742"/>
+                  </a:lnTo>
+                  <a:lnTo>
+                    <a:pt x="1360827" y="2285232"/>
+                  </a:lnTo>
+                  <a:lnTo>
+                    <a:pt x="1432450" y="2311219"/>
+                  </a:lnTo>
+                  <a:lnTo>
+                    <a:pt x="1504073" y="2336712"/>
+                  </a:lnTo>
+                  <a:lnTo>
+                    <a:pt x="1575695" y="2361721"/>
+                  </a:lnTo>
+                  <a:lnTo>
+                    <a:pt x="1647318" y="2386254"/>
+                  </a:lnTo>
+                  <a:lnTo>
+                    <a:pt x="1718940" y="2410321"/>
+                  </a:lnTo>
+                  <a:lnTo>
+                    <a:pt x="1790563" y="2433931"/>
+                  </a:lnTo>
+                  <a:lnTo>
+                    <a:pt x="1862185" y="2457092"/>
+                  </a:lnTo>
+                  <a:lnTo>
+                    <a:pt x="1933808" y="2479813"/>
+                  </a:lnTo>
+                  <a:lnTo>
+                    <a:pt x="2005430" y="2502102"/>
+                  </a:lnTo>
+                  <a:lnTo>
+                    <a:pt x="2077053" y="2523967"/>
+                  </a:lnTo>
+                  <a:lnTo>
+                    <a:pt x="2148675" y="2545417"/>
+                  </a:lnTo>
+                  <a:lnTo>
+                    <a:pt x="2220298" y="2566459"/>
+                  </a:lnTo>
+                  <a:lnTo>
+                    <a:pt x="2291920" y="2587101"/>
+                  </a:lnTo>
+                  <a:lnTo>
+                    <a:pt x="2363543" y="2607351"/>
+                  </a:lnTo>
+                  <a:lnTo>
+                    <a:pt x="2435165" y="2627217"/>
+                  </a:lnTo>
+                  <a:lnTo>
+                    <a:pt x="2506788" y="2646704"/>
+                  </a:lnTo>
+                  <a:lnTo>
+                    <a:pt x="2578410" y="2665822"/>
+                  </a:lnTo>
+                  <a:lnTo>
+                    <a:pt x="2650033" y="2684576"/>
+                  </a:lnTo>
+                  <a:lnTo>
+                    <a:pt x="2721655" y="2702973"/>
+                  </a:lnTo>
+                  <a:lnTo>
+                    <a:pt x="2793278" y="2721021"/>
+                  </a:lnTo>
+                  <a:lnTo>
+                    <a:pt x="2864901" y="2738726"/>
+                  </a:lnTo>
+                  <a:lnTo>
+                    <a:pt x="2936523" y="2756095"/>
+                  </a:lnTo>
+                  <a:lnTo>
+                    <a:pt x="3008146" y="2773133"/>
+                  </a:lnTo>
+                  <a:lnTo>
+                    <a:pt x="3079768" y="2770635"/>
+                  </a:lnTo>
+                  <a:lnTo>
+                    <a:pt x="3151391" y="2740126"/>
+                  </a:lnTo>
+                  <a:lnTo>
+                    <a:pt x="3223013" y="2708561"/>
+                  </a:lnTo>
+                  <a:lnTo>
+                    <a:pt x="3294636" y="2675905"/>
+                  </a:lnTo>
+                  <a:lnTo>
+                    <a:pt x="3366258" y="2642119"/>
+                  </a:lnTo>
+                  <a:lnTo>
+                    <a:pt x="3437881" y="2607164"/>
+                  </a:lnTo>
+                  <a:lnTo>
+                    <a:pt x="3509503" y="2571000"/>
+                  </a:lnTo>
+                  <a:lnTo>
+                    <a:pt x="3581126" y="2533585"/>
+                  </a:lnTo>
+                  <a:lnTo>
+                    <a:pt x="3652748" y="2494876"/>
+                  </a:lnTo>
+                  <a:lnTo>
+                    <a:pt x="3724371" y="2454829"/>
+                  </a:lnTo>
+                  <a:lnTo>
+                    <a:pt x="3795993" y="2413395"/>
+                  </a:lnTo>
+                  <a:lnTo>
+                    <a:pt x="3867616" y="2370529"/>
+                  </a:lnTo>
+                  <a:lnTo>
+                    <a:pt x="3939238" y="2326180"/>
+                  </a:lnTo>
+                  <a:lnTo>
+                    <a:pt x="4010861" y="2280297"/>
+                  </a:lnTo>
+                  <a:lnTo>
+                    <a:pt x="4082483" y="2232826"/>
+                  </a:lnTo>
+                  <a:lnTo>
+                    <a:pt x="4154106" y="2183714"/>
+                  </a:lnTo>
+                  <a:lnTo>
+                    <a:pt x="4225729" y="2132903"/>
+                  </a:lnTo>
+                  <a:lnTo>
+                    <a:pt x="4297351" y="2080334"/>
+                  </a:lnTo>
+                  <a:lnTo>
+                    <a:pt x="4368974" y="2025947"/>
+                  </a:lnTo>
+                  <a:lnTo>
+                    <a:pt x="4440596" y="1969678"/>
+                  </a:lnTo>
+                  <a:lnTo>
+                    <a:pt x="4512219" y="1911463"/>
+                  </a:lnTo>
+                  <a:lnTo>
+                    <a:pt x="4583841" y="1851235"/>
+                  </a:lnTo>
+                  <a:lnTo>
+                    <a:pt x="4655464" y="1788923"/>
+                  </a:lnTo>
+                  <a:lnTo>
+                    <a:pt x="4727086" y="1724456"/>
+                  </a:lnTo>
+                  <a:lnTo>
+                    <a:pt x="4798709" y="1657758"/>
+                  </a:lnTo>
+                  <a:lnTo>
+                    <a:pt x="4870331" y="1588754"/>
+                  </a:lnTo>
+                  <a:lnTo>
+                    <a:pt x="4941954" y="1517363"/>
+                  </a:lnTo>
+                  <a:lnTo>
+                    <a:pt x="5013576" y="1443502"/>
+                  </a:lnTo>
+                  <a:lnTo>
+                    <a:pt x="5085199" y="1367086"/>
+                  </a:lnTo>
+                  <a:lnTo>
+                    <a:pt x="5156821" y="1288027"/>
+                  </a:lnTo>
+                  <a:lnTo>
+                    <a:pt x="5228444" y="1206234"/>
+                  </a:lnTo>
+                  <a:lnTo>
+                    <a:pt x="5300066" y="1121611"/>
+                  </a:lnTo>
+                  <a:lnTo>
+                    <a:pt x="5371689" y="1034061"/>
+                  </a:lnTo>
+                  <a:lnTo>
+                    <a:pt x="5443311" y="943483"/>
+                  </a:lnTo>
+                  <a:lnTo>
+                    <a:pt x="5514934" y="849771"/>
+                  </a:lnTo>
+                  <a:lnTo>
+                    <a:pt x="5586557" y="752818"/>
+                  </a:lnTo>
+                  <a:lnTo>
+                    <a:pt x="5658179" y="652511"/>
+                  </a:lnTo>
+                  <a:lnTo>
+                    <a:pt x="5729802" y="548734"/>
+                  </a:lnTo>
+                  <a:lnTo>
+                    <a:pt x="5801424" y="441368"/>
+                  </a:lnTo>
+                  <a:lnTo>
+                    <a:pt x="5873047" y="330288"/>
+                  </a:lnTo>
+                  <a:lnTo>
+                    <a:pt x="5944669" y="215366"/>
+                  </a:lnTo>
+                  <a:lnTo>
+                    <a:pt x="6016292" y="96468"/>
+                  </a:lnTo>
+                  <a:lnTo>
+                    <a:pt x="6072460" y="0"/>
                   </a:lnTo>
                   <a:lnTo>
                     <a:pt x="7090630" y="0"/>
                   </a:lnTo>
                   <a:lnTo>
-                    <a:pt x="7090630" y="2629867"/>
-                  </a:lnTo>
-                  <a:lnTo>
-                    <a:pt x="7019007" y="2632802"/>
-                  </a:lnTo>
-                  <a:lnTo>
-                    <a:pt x="6947385" y="2635729"/>
-                  </a:lnTo>
-                  <a:lnTo>
-                    <a:pt x="6875762" y="2638648"/>
-                  </a:lnTo>
-                  <a:lnTo>
-                    <a:pt x="6804139" y="2641559"/>
-                  </a:lnTo>
-                  <a:lnTo>
-                    <a:pt x="6732517" y="2644461"/>
-                  </a:lnTo>
-                  <a:lnTo>
-                    <a:pt x="6660894" y="2647354"/>
-                  </a:lnTo>
-                  <a:lnTo>
-                    <a:pt x="6589272" y="2650240"/>
-                  </a:lnTo>
-                  <a:lnTo>
-                    <a:pt x="6517649" y="2653117"/>
-                  </a:lnTo>
-                  <a:lnTo>
-                    <a:pt x="6446027" y="2655986"/>
-                  </a:lnTo>
-                  <a:lnTo>
-                    <a:pt x="6374404" y="2658847"/>
-                  </a:lnTo>
-                  <a:lnTo>
-                    <a:pt x="6302782" y="2661699"/>
-                  </a:lnTo>
-                  <a:lnTo>
-                    <a:pt x="6231159" y="2664543"/>
-                  </a:lnTo>
-                  <a:lnTo>
-                    <a:pt x="6159537" y="2667379"/>
-                  </a:lnTo>
-                  <a:lnTo>
-                    <a:pt x="6087914" y="2670207"/>
-                  </a:lnTo>
-                  <a:lnTo>
-                    <a:pt x="6016292" y="2673027"/>
-                  </a:lnTo>
-                  <a:lnTo>
-                    <a:pt x="5944669" y="2675839"/>
-                  </a:lnTo>
-                  <a:lnTo>
-                    <a:pt x="5873047" y="2678642"/>
-                  </a:lnTo>
-                  <a:lnTo>
-                    <a:pt x="5801424" y="2681438"/>
-                  </a:lnTo>
-                  <a:lnTo>
-                    <a:pt x="5729802" y="2684226"/>
-                  </a:lnTo>
-                  <a:lnTo>
-                    <a:pt x="5658179" y="2687005"/>
-                  </a:lnTo>
-                  <a:lnTo>
-                    <a:pt x="5586557" y="2689777"/>
-                  </a:lnTo>
-                  <a:lnTo>
-                    <a:pt x="5514934" y="2692540"/>
-                  </a:lnTo>
-                  <a:lnTo>
-                    <a:pt x="5443311" y="2695296"/>
-                  </a:lnTo>
-                  <a:lnTo>
-                    <a:pt x="5371689" y="2698044"/>
-                  </a:lnTo>
-                  <a:lnTo>
-                    <a:pt x="5300066" y="2700784"/>
-                  </a:lnTo>
-                  <a:lnTo>
-                    <a:pt x="5228444" y="2703516"/>
-                  </a:lnTo>
-                  <a:lnTo>
-                    <a:pt x="5156821" y="2706240"/>
-                  </a:lnTo>
-                  <a:lnTo>
-                    <a:pt x="5085199" y="2708957"/>
-                  </a:lnTo>
-                  <a:lnTo>
-                    <a:pt x="5013576" y="2711665"/>
-                  </a:lnTo>
-                  <a:lnTo>
-                    <a:pt x="4941954" y="2714366"/>
-                  </a:lnTo>
-                  <a:lnTo>
-                    <a:pt x="4870331" y="2717059"/>
-                  </a:lnTo>
-                  <a:lnTo>
-                    <a:pt x="4798709" y="2719744"/>
-                  </a:lnTo>
-                  <a:lnTo>
-                    <a:pt x="4727086" y="2722422"/>
-                  </a:lnTo>
-                  <a:lnTo>
-                    <a:pt x="4655464" y="2725092"/>
-                  </a:lnTo>
-                  <a:lnTo>
-                    <a:pt x="4583841" y="2727754"/>
-                  </a:lnTo>
-                  <a:lnTo>
-                    <a:pt x="4512219" y="2730409"/>
-                  </a:lnTo>
-                  <a:lnTo>
-                    <a:pt x="4440596" y="2733056"/>
-                  </a:lnTo>
-                  <a:lnTo>
-                    <a:pt x="4368974" y="2735695"/>
-                  </a:lnTo>
-                  <a:lnTo>
-                    <a:pt x="4297351" y="2738327"/>
-                  </a:lnTo>
-                  <a:lnTo>
-                    <a:pt x="4225729" y="2740952"/>
-                  </a:lnTo>
-                  <a:lnTo>
-                    <a:pt x="4154106" y="2743568"/>
-                  </a:lnTo>
-                  <a:lnTo>
-                    <a:pt x="4082483" y="2746178"/>
-                  </a:lnTo>
-                  <a:lnTo>
-                    <a:pt x="4010861" y="2748779"/>
-                  </a:lnTo>
-                  <a:lnTo>
-                    <a:pt x="3939238" y="2751374"/>
-                  </a:lnTo>
-                  <a:lnTo>
-                    <a:pt x="3867616" y="2753961"/>
-                  </a:lnTo>
-                  <a:lnTo>
-                    <a:pt x="3795993" y="2756540"/>
-                  </a:lnTo>
-                  <a:lnTo>
-                    <a:pt x="3724371" y="2759112"/>
-                  </a:lnTo>
-                  <a:lnTo>
-                    <a:pt x="3652748" y="2761677"/>
-                  </a:lnTo>
-                  <a:lnTo>
-                    <a:pt x="3581126" y="2764234"/>
-                  </a:lnTo>
-                  <a:lnTo>
-                    <a:pt x="3509503" y="2766784"/>
-                  </a:lnTo>
-                  <a:lnTo>
-                    <a:pt x="3437881" y="2769327"/>
-                  </a:lnTo>
-                  <a:lnTo>
-                    <a:pt x="3366258" y="2771862"/>
-                  </a:lnTo>
-                  <a:lnTo>
-                    <a:pt x="3294636" y="2774390"/>
-                  </a:lnTo>
-                  <a:lnTo>
-                    <a:pt x="3223013" y="2776911"/>
-                  </a:lnTo>
-                  <a:lnTo>
-                    <a:pt x="3151391" y="2779424"/>
-                  </a:lnTo>
-                  <a:lnTo>
-                    <a:pt x="3079768" y="2781931"/>
-                  </a:lnTo>
-                  <a:lnTo>
-                    <a:pt x="3008146" y="2810526"/>
-                  </a:lnTo>
-                  <a:lnTo>
-                    <a:pt x="2936523" y="2855557"/>
-                  </a:lnTo>
-                  <a:lnTo>
-                    <a:pt x="2864901" y="2898180"/>
-                  </a:lnTo>
-                  <a:lnTo>
-                    <a:pt x="2793278" y="2938524"/>
-                  </a:lnTo>
-                  <a:lnTo>
-                    <a:pt x="2721655" y="2976710"/>
-                  </a:lnTo>
-                  <a:lnTo>
-                    <a:pt x="2650033" y="3012855"/>
-                  </a:lnTo>
-                  <a:lnTo>
-                    <a:pt x="2578410" y="3047067"/>
-                  </a:lnTo>
-                  <a:lnTo>
-                    <a:pt x="2506788" y="3079449"/>
-                  </a:lnTo>
-                  <a:lnTo>
-                    <a:pt x="2435165" y="3110100"/>
-                  </a:lnTo>
-                  <a:lnTo>
-                    <a:pt x="2363543" y="3139111"/>
-                  </a:lnTo>
-                  <a:lnTo>
-                    <a:pt x="2291920" y="3166572"/>
-                  </a:lnTo>
-                  <a:lnTo>
-                    <a:pt x="2220298" y="3192564"/>
-                  </a:lnTo>
-                  <a:lnTo>
-                    <a:pt x="2148675" y="3217166"/>
-                  </a:lnTo>
-                  <a:lnTo>
-                    <a:pt x="2077053" y="3240452"/>
-                  </a:lnTo>
-                  <a:lnTo>
-                    <a:pt x="2005430" y="3262494"/>
-                  </a:lnTo>
-                  <a:lnTo>
-                    <a:pt x="1933808" y="3283356"/>
-                  </a:lnTo>
-                  <a:lnTo>
-                    <a:pt x="1862185" y="3303103"/>
-                  </a:lnTo>
-                  <a:lnTo>
-                    <a:pt x="1790563" y="3321795"/>
-                  </a:lnTo>
-                  <a:lnTo>
-                    <a:pt x="1718940" y="3339486"/>
-                  </a:lnTo>
-                  <a:lnTo>
-                    <a:pt x="1647318" y="3356232"/>
-                  </a:lnTo>
-                  <a:lnTo>
-                    <a:pt x="1575695" y="3372082"/>
-                  </a:lnTo>
-                  <a:lnTo>
-                    <a:pt x="1504073" y="3387085"/>
-                  </a:lnTo>
-                  <a:lnTo>
-                    <a:pt x="1432450" y="3401285"/>
-                  </a:lnTo>
-                  <a:lnTo>
-                    <a:pt x="1360827" y="3414726"/>
-                  </a:lnTo>
-                  <a:lnTo>
-                    <a:pt x="1289205" y="3427448"/>
-                  </a:lnTo>
-                  <a:lnTo>
-                    <a:pt x="1217582" y="3439490"/>
-                  </a:lnTo>
-                  <a:lnTo>
-                    <a:pt x="1145960" y="3450888"/>
-                  </a:lnTo>
-                  <a:lnTo>
-                    <a:pt x="1074337" y="3461677"/>
-                  </a:lnTo>
-                  <a:lnTo>
-                    <a:pt x="1002715" y="3471889"/>
-                  </a:lnTo>
-                  <a:lnTo>
-                    <a:pt x="931092" y="3481554"/>
-                  </a:lnTo>
-                  <a:lnTo>
-                    <a:pt x="859470" y="3490703"/>
-                  </a:lnTo>
-                  <a:lnTo>
-                    <a:pt x="787847" y="3499362"/>
-                  </a:lnTo>
-                  <a:lnTo>
-                    <a:pt x="716225" y="3507559"/>
-                  </a:lnTo>
-                  <a:lnTo>
-                    <a:pt x="644602" y="3515317"/>
-                  </a:lnTo>
-                  <a:lnTo>
-                    <a:pt x="572980" y="3522660"/>
-                  </a:lnTo>
-                  <a:lnTo>
-                    <a:pt x="501357" y="3529611"/>
-                  </a:lnTo>
-                  <a:lnTo>
-                    <a:pt x="429735" y="3536190"/>
-                  </a:lnTo>
-                  <a:lnTo>
-                    <a:pt x="358112" y="3542417"/>
-                  </a:lnTo>
-                  <a:lnTo>
-                    <a:pt x="286490" y="3548311"/>
-                  </a:lnTo>
-                  <a:lnTo>
-                    <a:pt x="214867" y="3553890"/>
-                  </a:lnTo>
-                  <a:lnTo>
-                    <a:pt x="143245" y="3559171"/>
-                  </a:lnTo>
-                  <a:lnTo>
-                    <a:pt x="71622" y="3564169"/>
-                  </a:lnTo>
-                  <a:lnTo>
-                    <a:pt x="0" y="3568900"/>
+                    <a:pt x="7090630" y="3358024"/>
+                  </a:lnTo>
+                  <a:lnTo>
+                    <a:pt x="7019007" y="3352316"/>
+                  </a:lnTo>
+                  <a:lnTo>
+                    <a:pt x="6947385" y="3346498"/>
+                  </a:lnTo>
+                  <a:lnTo>
+                    <a:pt x="6875762" y="3340567"/>
+                  </a:lnTo>
+                  <a:lnTo>
+                    <a:pt x="6804139" y="3334521"/>
+                  </a:lnTo>
+                  <a:lnTo>
+                    <a:pt x="6732517" y="3328358"/>
+                  </a:lnTo>
+                  <a:lnTo>
+                    <a:pt x="6660894" y="3322076"/>
+                  </a:lnTo>
+                  <a:lnTo>
+                    <a:pt x="6589272" y="3315672"/>
+                  </a:lnTo>
+                  <a:lnTo>
+                    <a:pt x="6517649" y="3309144"/>
+                  </a:lnTo>
+                  <a:lnTo>
+                    <a:pt x="6446027" y="3302490"/>
+                  </a:lnTo>
+                  <a:lnTo>
+                    <a:pt x="6374404" y="3295706"/>
+                  </a:lnTo>
+                  <a:lnTo>
+                    <a:pt x="6302782" y="3288792"/>
+                  </a:lnTo>
+                  <a:lnTo>
+                    <a:pt x="6231159" y="3281743"/>
+                  </a:lnTo>
+                  <a:lnTo>
+                    <a:pt x="6159537" y="3274557"/>
+                  </a:lnTo>
+                  <a:lnTo>
+                    <a:pt x="6087914" y="3267233"/>
+                  </a:lnTo>
+                  <a:lnTo>
+                    <a:pt x="6016292" y="3259767"/>
+                  </a:lnTo>
+                  <a:lnTo>
+                    <a:pt x="5944669" y="3252156"/>
+                  </a:lnTo>
+                  <a:lnTo>
+                    <a:pt x="5873047" y="3244397"/>
+                  </a:lnTo>
+                  <a:lnTo>
+                    <a:pt x="5801424" y="3236488"/>
+                  </a:lnTo>
+                  <a:lnTo>
+                    <a:pt x="5729802" y="3228426"/>
+                  </a:lnTo>
+                  <a:lnTo>
+                    <a:pt x="5658179" y="3220208"/>
+                  </a:lnTo>
+                  <a:lnTo>
+                    <a:pt x="5586557" y="3211831"/>
+                  </a:lnTo>
+                  <a:lnTo>
+                    <a:pt x="5514934" y="3203291"/>
+                  </a:lnTo>
+                  <a:lnTo>
+                    <a:pt x="5443311" y="3194586"/>
+                  </a:lnTo>
+                  <a:lnTo>
+                    <a:pt x="5371689" y="3185712"/>
+                  </a:lnTo>
+                  <a:lnTo>
+                    <a:pt x="5300066" y="3176666"/>
+                  </a:lnTo>
+                  <a:lnTo>
+                    <a:pt x="5228444" y="3167445"/>
+                  </a:lnTo>
+                  <a:lnTo>
+                    <a:pt x="5156821" y="3158046"/>
+                  </a:lnTo>
+                  <a:lnTo>
+                    <a:pt x="5085199" y="3148464"/>
+                  </a:lnTo>
+                  <a:lnTo>
+                    <a:pt x="5013576" y="3138697"/>
+                  </a:lnTo>
+                  <a:lnTo>
+                    <a:pt x="4941954" y="3128740"/>
+                  </a:lnTo>
+                  <a:lnTo>
+                    <a:pt x="4870331" y="3118591"/>
+                  </a:lnTo>
+                  <a:lnTo>
+                    <a:pt x="4798709" y="3108245"/>
+                  </a:lnTo>
+                  <a:lnTo>
+                    <a:pt x="4727086" y="3097699"/>
+                  </a:lnTo>
+                  <a:lnTo>
+                    <a:pt x="4655464" y="3086948"/>
+                  </a:lnTo>
+                  <a:lnTo>
+                    <a:pt x="4583841" y="3075989"/>
+                  </a:lnTo>
+                  <a:lnTo>
+                    <a:pt x="4512219" y="3064818"/>
+                  </a:lnTo>
+                  <a:lnTo>
+                    <a:pt x="4440596" y="3053430"/>
+                  </a:lnTo>
+                  <a:lnTo>
+                    <a:pt x="4368974" y="3041822"/>
+                  </a:lnTo>
+                  <a:lnTo>
+                    <a:pt x="4297351" y="3029988"/>
+                  </a:lnTo>
+                  <a:lnTo>
+                    <a:pt x="4225729" y="3017926"/>
+                  </a:lnTo>
+                  <a:lnTo>
+                    <a:pt x="4154106" y="3005630"/>
+                  </a:lnTo>
+                  <a:lnTo>
+                    <a:pt x="4082483" y="2993095"/>
+                  </a:lnTo>
+                  <a:lnTo>
+                    <a:pt x="4010861" y="2980318"/>
+                  </a:lnTo>
+                  <a:lnTo>
+                    <a:pt x="3939238" y="2967293"/>
+                  </a:lnTo>
+                  <a:lnTo>
+                    <a:pt x="3867616" y="2954016"/>
+                  </a:lnTo>
+                  <a:lnTo>
+                    <a:pt x="3795993" y="2940482"/>
+                  </a:lnTo>
+                  <a:lnTo>
+                    <a:pt x="3724371" y="2926686"/>
+                  </a:lnTo>
+                  <a:lnTo>
+                    <a:pt x="3652748" y="2912622"/>
+                  </a:lnTo>
+                  <a:lnTo>
+                    <a:pt x="3581126" y="2898286"/>
+                  </a:lnTo>
+                  <a:lnTo>
+                    <a:pt x="3509503" y="2883672"/>
+                  </a:lnTo>
+                  <a:lnTo>
+                    <a:pt x="3437881" y="2868775"/>
+                  </a:lnTo>
+                  <a:lnTo>
+                    <a:pt x="3366258" y="2853589"/>
+                  </a:lnTo>
+                  <a:lnTo>
+                    <a:pt x="3294636" y="2838110"/>
+                  </a:lnTo>
+                  <a:lnTo>
+                    <a:pt x="3223013" y="2822330"/>
+                  </a:lnTo>
+                  <a:lnTo>
+                    <a:pt x="3151391" y="2806245"/>
+                  </a:lnTo>
+                  <a:lnTo>
+                    <a:pt x="3079768" y="2789848"/>
+                  </a:lnTo>
+                  <a:lnTo>
+                    <a:pt x="3008146" y="2800124"/>
+                  </a:lnTo>
+                  <a:lnTo>
+                    <a:pt x="2936523" y="2828627"/>
+                  </a:lnTo>
+                  <a:lnTo>
+                    <a:pt x="2864901" y="2856178"/>
+                  </a:lnTo>
+                  <a:lnTo>
+                    <a:pt x="2793278" y="2882807"/>
+                  </a:lnTo>
+                  <a:lnTo>
+                    <a:pt x="2721655" y="2908546"/>
+                  </a:lnTo>
+                  <a:lnTo>
+                    <a:pt x="2650033" y="2933424"/>
+                  </a:lnTo>
+                  <a:lnTo>
+                    <a:pt x="2578410" y="2957470"/>
+                  </a:lnTo>
+                  <a:lnTo>
+                    <a:pt x="2506788" y="2980713"/>
+                  </a:lnTo>
+                  <a:lnTo>
+                    <a:pt x="2435165" y="3003178"/>
+                  </a:lnTo>
+                  <a:lnTo>
+                    <a:pt x="2363543" y="3024893"/>
+                  </a:lnTo>
+                  <a:lnTo>
+                    <a:pt x="2291920" y="3045881"/>
+                  </a:lnTo>
+                  <a:lnTo>
+                    <a:pt x="2220298" y="3066167"/>
+                  </a:lnTo>
+                  <a:lnTo>
+                    <a:pt x="2148675" y="3085776"/>
+                  </a:lnTo>
+                  <a:lnTo>
+                    <a:pt x="2077053" y="3104728"/>
+                  </a:lnTo>
+                  <a:lnTo>
+                    <a:pt x="2005430" y="3123048"/>
+                  </a:lnTo>
+                  <a:lnTo>
+                    <a:pt x="1933808" y="3140754"/>
+                  </a:lnTo>
+                  <a:lnTo>
+                    <a:pt x="1862185" y="3157869"/>
+                  </a:lnTo>
+                  <a:lnTo>
+                    <a:pt x="1790563" y="3174411"/>
+                  </a:lnTo>
+                  <a:lnTo>
+                    <a:pt x="1718940" y="3190400"/>
+                  </a:lnTo>
+                  <a:lnTo>
+                    <a:pt x="1647318" y="3205855"/>
+                  </a:lnTo>
+                  <a:lnTo>
+                    <a:pt x="1575695" y="3220793"/>
+                  </a:lnTo>
+                  <a:lnTo>
+                    <a:pt x="1504073" y="3235232"/>
+                  </a:lnTo>
+                  <a:lnTo>
+                    <a:pt x="1432450" y="3249187"/>
+                  </a:lnTo>
+                  <a:lnTo>
+                    <a:pt x="1360827" y="3262677"/>
+                  </a:lnTo>
+                  <a:lnTo>
+                    <a:pt x="1289205" y="3275715"/>
+                  </a:lnTo>
+                  <a:lnTo>
+                    <a:pt x="1217582" y="3288317"/>
+                  </a:lnTo>
+                  <a:lnTo>
+                    <a:pt x="1145960" y="3300498"/>
+                  </a:lnTo>
+                  <a:lnTo>
+                    <a:pt x="1074337" y="3312272"/>
+                  </a:lnTo>
+                  <a:lnTo>
+                    <a:pt x="1002715" y="3323652"/>
+                  </a:lnTo>
+                  <a:lnTo>
+                    <a:pt x="931092" y="3334651"/>
+                  </a:lnTo>
+                  <a:lnTo>
+                    <a:pt x="859470" y="3345283"/>
+                  </a:lnTo>
+                  <a:lnTo>
+                    <a:pt x="787847" y="3355559"/>
+                  </a:lnTo>
+                  <a:lnTo>
+                    <a:pt x="716225" y="3365492"/>
+                  </a:lnTo>
+                  <a:lnTo>
+                    <a:pt x="644602" y="3375093"/>
+                  </a:lnTo>
+                  <a:lnTo>
+                    <a:pt x="572980" y="3384372"/>
+                  </a:lnTo>
+                  <a:lnTo>
+                    <a:pt x="501357" y="3393342"/>
+                  </a:lnTo>
+                  <a:lnTo>
+                    <a:pt x="429735" y="3402011"/>
+                  </a:lnTo>
+                  <a:lnTo>
+                    <a:pt x="358112" y="3410391"/>
+                  </a:lnTo>
+                  <a:lnTo>
+                    <a:pt x="286490" y="3418490"/>
+                  </a:lnTo>
+                  <a:lnTo>
+                    <a:pt x="214867" y="3426319"/>
+                  </a:lnTo>
+                  <a:lnTo>
+                    <a:pt x="143245" y="3433886"/>
+                  </a:lnTo>
+                  <a:lnTo>
+                    <a:pt x="71622" y="3441200"/>
+                  </a:lnTo>
+                  <a:lnTo>
+                    <a:pt x="0" y="3448270"/>
                   </a:lnTo>
                   <a:close/>
                 </a:path>
@@ -3676,221 +3724,269 @@
           <p:spPr>
             <a:xfrm>
               <a:off x="1172049" y="1896563"/>
-              <a:ext cx="4919989" cy="2883164"/>
+              <a:ext cx="6072460" cy="2773133"/>
             </a:xfrm>
             <a:custGeom>
               <a:avLst/>
               <a:pathLst>
-                <a:path w="4919989" h="2883164">
+                <a:path w="6072460" h="2773133">
                   <a:moveTo>
-                    <a:pt x="0" y="2883164"/>
+                    <a:pt x="0" y="1683735"/>
                   </a:moveTo>
                   <a:lnTo>
-                    <a:pt x="71622" y="2880949"/>
-                  </a:lnTo>
-                  <a:lnTo>
-                    <a:pt x="143245" y="2878727"/>
-                  </a:lnTo>
-                  <a:lnTo>
-                    <a:pt x="214867" y="2876500"/>
-                  </a:lnTo>
-                  <a:lnTo>
-                    <a:pt x="286490" y="2874266"/>
-                  </a:lnTo>
-                  <a:lnTo>
-                    <a:pt x="358112" y="2872025"/>
-                  </a:lnTo>
-                  <a:lnTo>
-                    <a:pt x="429735" y="2869778"/>
-                  </a:lnTo>
-                  <a:lnTo>
-                    <a:pt x="501357" y="2867525"/>
-                  </a:lnTo>
-                  <a:lnTo>
-                    <a:pt x="572980" y="2865265"/>
-                  </a:lnTo>
-                  <a:lnTo>
-                    <a:pt x="644602" y="2862998"/>
-                  </a:lnTo>
-                  <a:lnTo>
-                    <a:pt x="716225" y="2860725"/>
-                  </a:lnTo>
-                  <a:lnTo>
-                    <a:pt x="787847" y="2858446"/>
-                  </a:lnTo>
-                  <a:lnTo>
-                    <a:pt x="859470" y="2856159"/>
-                  </a:lnTo>
-                  <a:lnTo>
-                    <a:pt x="931092" y="2853867"/>
-                  </a:lnTo>
-                  <a:lnTo>
-                    <a:pt x="1002715" y="2851568"/>
-                  </a:lnTo>
-                  <a:lnTo>
-                    <a:pt x="1074337" y="2849262"/>
-                  </a:lnTo>
-                  <a:lnTo>
-                    <a:pt x="1145960" y="2846949"/>
-                  </a:lnTo>
-                  <a:lnTo>
-                    <a:pt x="1217582" y="2844630"/>
-                  </a:lnTo>
-                  <a:lnTo>
-                    <a:pt x="1289205" y="2842304"/>
-                  </a:lnTo>
-                  <a:lnTo>
-                    <a:pt x="1360827" y="2839971"/>
-                  </a:lnTo>
-                  <a:lnTo>
-                    <a:pt x="1432450" y="2837632"/>
-                  </a:lnTo>
-                  <a:lnTo>
-                    <a:pt x="1504073" y="2835286"/>
-                  </a:lnTo>
-                  <a:lnTo>
-                    <a:pt x="1575695" y="2832933"/>
-                  </a:lnTo>
-                  <a:lnTo>
-                    <a:pt x="1647318" y="2830574"/>
-                  </a:lnTo>
-                  <a:lnTo>
-                    <a:pt x="1718940" y="2828208"/>
-                  </a:lnTo>
-                  <a:lnTo>
-                    <a:pt x="1790563" y="2825834"/>
-                  </a:lnTo>
-                  <a:lnTo>
-                    <a:pt x="1862185" y="2823454"/>
-                  </a:lnTo>
-                  <a:lnTo>
-                    <a:pt x="1933808" y="2821068"/>
-                  </a:lnTo>
-                  <a:lnTo>
-                    <a:pt x="2005430" y="2818674"/>
-                  </a:lnTo>
-                  <a:lnTo>
-                    <a:pt x="2077053" y="2816273"/>
-                  </a:lnTo>
-                  <a:lnTo>
-                    <a:pt x="2148675" y="2813866"/>
-                  </a:lnTo>
-                  <a:lnTo>
-                    <a:pt x="2220298" y="2811451"/>
-                  </a:lnTo>
-                  <a:lnTo>
-                    <a:pt x="2291920" y="2809030"/>
-                  </a:lnTo>
-                  <a:lnTo>
-                    <a:pt x="2363543" y="2806602"/>
-                  </a:lnTo>
-                  <a:lnTo>
-                    <a:pt x="2435165" y="2804166"/>
-                  </a:lnTo>
-                  <a:lnTo>
-                    <a:pt x="2506788" y="2801724"/>
-                  </a:lnTo>
-                  <a:lnTo>
-                    <a:pt x="2578410" y="2799275"/>
-                  </a:lnTo>
-                  <a:lnTo>
-                    <a:pt x="2650033" y="2796818"/>
-                  </a:lnTo>
-                  <a:lnTo>
-                    <a:pt x="2721655" y="2794355"/>
-                  </a:lnTo>
-                  <a:lnTo>
-                    <a:pt x="2793278" y="2791884"/>
-                  </a:lnTo>
-                  <a:lnTo>
-                    <a:pt x="2864901" y="2789407"/>
-                  </a:lnTo>
-                  <a:lnTo>
-                    <a:pt x="2936523" y="2786922"/>
-                  </a:lnTo>
-                  <a:lnTo>
-                    <a:pt x="3008146" y="2784430"/>
-                  </a:lnTo>
-                  <a:lnTo>
-                    <a:pt x="3079768" y="2762951"/>
-                  </a:lnTo>
-                  <a:lnTo>
-                    <a:pt x="3151391" y="2712688"/>
-                  </a:lnTo>
-                  <a:lnTo>
-                    <a:pt x="3223013" y="2659586"/>
-                  </a:lnTo>
-                  <a:lnTo>
-                    <a:pt x="3294636" y="2603483"/>
-                  </a:lnTo>
-                  <a:lnTo>
-                    <a:pt x="3366258" y="2544212"/>
-                  </a:lnTo>
-                  <a:lnTo>
-                    <a:pt x="3437881" y="2481591"/>
-                  </a:lnTo>
-                  <a:lnTo>
-                    <a:pt x="3509503" y="2415433"/>
-                  </a:lnTo>
-                  <a:lnTo>
-                    <a:pt x="3581126" y="2345538"/>
-                  </a:lnTo>
-                  <a:lnTo>
-                    <a:pt x="3652748" y="2271694"/>
-                  </a:lnTo>
-                  <a:lnTo>
-                    <a:pt x="3724371" y="2193677"/>
-                  </a:lnTo>
-                  <a:lnTo>
-                    <a:pt x="3795993" y="2111254"/>
-                  </a:lnTo>
-                  <a:lnTo>
-                    <a:pt x="3867616" y="2024174"/>
-                  </a:lnTo>
-                  <a:lnTo>
-                    <a:pt x="3939238" y="1932174"/>
-                  </a:lnTo>
-                  <a:lnTo>
-                    <a:pt x="4010861" y="1834977"/>
-                  </a:lnTo>
-                  <a:lnTo>
-                    <a:pt x="4082483" y="1732289"/>
-                  </a:lnTo>
-                  <a:lnTo>
-                    <a:pt x="4154106" y="1623799"/>
-                  </a:lnTo>
-                  <a:lnTo>
-                    <a:pt x="4225729" y="1509181"/>
-                  </a:lnTo>
-                  <a:lnTo>
-                    <a:pt x="4297351" y="1388087"/>
-                  </a:lnTo>
-                  <a:lnTo>
-                    <a:pt x="4368974" y="1260152"/>
-                  </a:lnTo>
-                  <a:lnTo>
-                    <a:pt x="4440596" y="1124989"/>
-                  </a:lnTo>
-                  <a:lnTo>
-                    <a:pt x="4512219" y="982191"/>
-                  </a:lnTo>
-                  <a:lnTo>
-                    <a:pt x="4583841" y="831325"/>
-                  </a:lnTo>
-                  <a:lnTo>
-                    <a:pt x="4655464" y="671936"/>
-                  </a:lnTo>
-                  <a:lnTo>
-                    <a:pt x="4727086" y="503542"/>
-                  </a:lnTo>
-                  <a:lnTo>
-                    <a:pt x="4798709" y="325635"/>
-                  </a:lnTo>
-                  <a:lnTo>
-                    <a:pt x="4870331" y="137678"/>
-                  </a:lnTo>
-                  <a:lnTo>
-                    <a:pt x="4919989" y="0"/>
+                    <a:pt x="71622" y="1721153"/>
+                  </a:lnTo>
+                  <a:lnTo>
+                    <a:pt x="143245" y="1757860"/>
+                  </a:lnTo>
+                  <a:lnTo>
+                    <a:pt x="214867" y="1793870"/>
+                  </a:lnTo>
+                  <a:lnTo>
+                    <a:pt x="286490" y="1829195"/>
+                  </a:lnTo>
+                  <a:lnTo>
+                    <a:pt x="358112" y="1863848"/>
+                  </a:lnTo>
+                  <a:lnTo>
+                    <a:pt x="429735" y="1897843"/>
+                  </a:lnTo>
+                  <a:lnTo>
+                    <a:pt x="501357" y="1931192"/>
+                  </a:lnTo>
+                  <a:lnTo>
+                    <a:pt x="572980" y="1963908"/>
+                  </a:lnTo>
+                  <a:lnTo>
+                    <a:pt x="644602" y="1996001"/>
+                  </a:lnTo>
+                  <a:lnTo>
+                    <a:pt x="716225" y="2027485"/>
+                  </a:lnTo>
+                  <a:lnTo>
+                    <a:pt x="787847" y="2058370"/>
+                  </a:lnTo>
+                  <a:lnTo>
+                    <a:pt x="859470" y="2088668"/>
+                  </a:lnTo>
+                  <a:lnTo>
+                    <a:pt x="931092" y="2118391"/>
+                  </a:lnTo>
+                  <a:lnTo>
+                    <a:pt x="1002715" y="2147548"/>
+                  </a:lnTo>
+                  <a:lnTo>
+                    <a:pt x="1074337" y="2176152"/>
+                  </a:lnTo>
+                  <a:lnTo>
+                    <a:pt x="1145960" y="2204212"/>
+                  </a:lnTo>
+                  <a:lnTo>
+                    <a:pt x="1217582" y="2231738"/>
+                  </a:lnTo>
+                  <a:lnTo>
+                    <a:pt x="1289205" y="2258742"/>
+                  </a:lnTo>
+                  <a:lnTo>
+                    <a:pt x="1360827" y="2285232"/>
+                  </a:lnTo>
+                  <a:lnTo>
+                    <a:pt x="1432450" y="2311219"/>
+                  </a:lnTo>
+                  <a:lnTo>
+                    <a:pt x="1504073" y="2336712"/>
+                  </a:lnTo>
+                  <a:lnTo>
+                    <a:pt x="1575695" y="2361721"/>
+                  </a:lnTo>
+                  <a:lnTo>
+                    <a:pt x="1647318" y="2386254"/>
+                  </a:lnTo>
+                  <a:lnTo>
+                    <a:pt x="1718940" y="2410321"/>
+                  </a:lnTo>
+                  <a:lnTo>
+                    <a:pt x="1790563" y="2433931"/>
+                  </a:lnTo>
+                  <a:lnTo>
+                    <a:pt x="1862185" y="2457092"/>
+                  </a:lnTo>
+                  <a:lnTo>
+                    <a:pt x="1933808" y="2479813"/>
+                  </a:lnTo>
+                  <a:lnTo>
+                    <a:pt x="2005430" y="2502102"/>
+                  </a:lnTo>
+                  <a:lnTo>
+                    <a:pt x="2077053" y="2523967"/>
+                  </a:lnTo>
+                  <a:lnTo>
+                    <a:pt x="2148675" y="2545417"/>
+                  </a:lnTo>
+                  <a:lnTo>
+                    <a:pt x="2220298" y="2566459"/>
+                  </a:lnTo>
+                  <a:lnTo>
+                    <a:pt x="2291920" y="2587101"/>
+                  </a:lnTo>
+                  <a:lnTo>
+                    <a:pt x="2363543" y="2607351"/>
+                  </a:lnTo>
+                  <a:lnTo>
+                    <a:pt x="2435165" y="2627217"/>
+                  </a:lnTo>
+                  <a:lnTo>
+                    <a:pt x="2506788" y="2646704"/>
+                  </a:lnTo>
+                  <a:lnTo>
+                    <a:pt x="2578410" y="2665822"/>
+                  </a:lnTo>
+                  <a:lnTo>
+                    <a:pt x="2650033" y="2684576"/>
+                  </a:lnTo>
+                  <a:lnTo>
+                    <a:pt x="2721655" y="2702973"/>
+                  </a:lnTo>
+                  <a:lnTo>
+                    <a:pt x="2793278" y="2721021"/>
+                  </a:lnTo>
+                  <a:lnTo>
+                    <a:pt x="2864901" y="2738726"/>
+                  </a:lnTo>
+                  <a:lnTo>
+                    <a:pt x="2936523" y="2756095"/>
+                  </a:lnTo>
+                  <a:lnTo>
+                    <a:pt x="3008146" y="2773133"/>
+                  </a:lnTo>
+                  <a:lnTo>
+                    <a:pt x="3079768" y="2770635"/>
+                  </a:lnTo>
+                  <a:lnTo>
+                    <a:pt x="3151391" y="2740126"/>
+                  </a:lnTo>
+                  <a:lnTo>
+                    <a:pt x="3223013" y="2708561"/>
+                  </a:lnTo>
+                  <a:lnTo>
+                    <a:pt x="3294636" y="2675905"/>
+                  </a:lnTo>
+                  <a:lnTo>
+                    <a:pt x="3366258" y="2642119"/>
+                  </a:lnTo>
+                  <a:lnTo>
+                    <a:pt x="3437881" y="2607164"/>
+                  </a:lnTo>
+                  <a:lnTo>
+                    <a:pt x="3509503" y="2571000"/>
+                  </a:lnTo>
+                  <a:lnTo>
+                    <a:pt x="3581126" y="2533585"/>
+                  </a:lnTo>
+                  <a:lnTo>
+                    <a:pt x="3652748" y="2494876"/>
+                  </a:lnTo>
+                  <a:lnTo>
+                    <a:pt x="3724371" y="2454829"/>
+                  </a:lnTo>
+                  <a:lnTo>
+                    <a:pt x="3795993" y="2413395"/>
+                  </a:lnTo>
+                  <a:lnTo>
+                    <a:pt x="3867616" y="2370529"/>
+                  </a:lnTo>
+                  <a:lnTo>
+                    <a:pt x="3939238" y="2326180"/>
+                  </a:lnTo>
+                  <a:lnTo>
+                    <a:pt x="4010861" y="2280297"/>
+                  </a:lnTo>
+                  <a:lnTo>
+                    <a:pt x="4082483" y="2232826"/>
+                  </a:lnTo>
+                  <a:lnTo>
+                    <a:pt x="4154106" y="2183714"/>
+                  </a:lnTo>
+                  <a:lnTo>
+                    <a:pt x="4225729" y="2132903"/>
+                  </a:lnTo>
+                  <a:lnTo>
+                    <a:pt x="4297351" y="2080334"/>
+                  </a:lnTo>
+                  <a:lnTo>
+                    <a:pt x="4368974" y="2025947"/>
+                  </a:lnTo>
+                  <a:lnTo>
+                    <a:pt x="4440596" y="1969678"/>
+                  </a:lnTo>
+                  <a:lnTo>
+                    <a:pt x="4512219" y="1911463"/>
+                  </a:lnTo>
+                  <a:lnTo>
+                    <a:pt x="4583841" y="1851235"/>
+                  </a:lnTo>
+                  <a:lnTo>
+                    <a:pt x="4655464" y="1788923"/>
+                  </a:lnTo>
+                  <a:lnTo>
+                    <a:pt x="4727086" y="1724456"/>
+                  </a:lnTo>
+                  <a:lnTo>
+                    <a:pt x="4798709" y="1657758"/>
+                  </a:lnTo>
+                  <a:lnTo>
+                    <a:pt x="4870331" y="1588754"/>
+                  </a:lnTo>
+                  <a:lnTo>
+                    <a:pt x="4941954" y="1517363"/>
+                  </a:lnTo>
+                  <a:lnTo>
+                    <a:pt x="5013576" y="1443502"/>
+                  </a:lnTo>
+                  <a:lnTo>
+                    <a:pt x="5085199" y="1367086"/>
+                  </a:lnTo>
+                  <a:lnTo>
+                    <a:pt x="5156821" y="1288027"/>
+                  </a:lnTo>
+                  <a:lnTo>
+                    <a:pt x="5228444" y="1206234"/>
+                  </a:lnTo>
+                  <a:lnTo>
+                    <a:pt x="5300066" y="1121611"/>
+                  </a:lnTo>
+                  <a:lnTo>
+                    <a:pt x="5371689" y="1034061"/>
+                  </a:lnTo>
+                  <a:lnTo>
+                    <a:pt x="5443311" y="943483"/>
+                  </a:lnTo>
+                  <a:lnTo>
+                    <a:pt x="5514934" y="849771"/>
+                  </a:lnTo>
+                  <a:lnTo>
+                    <a:pt x="5586557" y="752818"/>
+                  </a:lnTo>
+                  <a:lnTo>
+                    <a:pt x="5658179" y="652511"/>
+                  </a:lnTo>
+                  <a:lnTo>
+                    <a:pt x="5729802" y="548734"/>
+                  </a:lnTo>
+                  <a:lnTo>
+                    <a:pt x="5801424" y="441368"/>
+                  </a:lnTo>
+                  <a:lnTo>
+                    <a:pt x="5873047" y="330288"/>
+                  </a:lnTo>
+                  <a:lnTo>
+                    <a:pt x="5944669" y="215366"/>
+                  </a:lnTo>
+                  <a:lnTo>
+                    <a:pt x="6016292" y="96468"/>
+                  </a:lnTo>
+                  <a:lnTo>
+                    <a:pt x="6072460" y="0"/>
                   </a:lnTo>
                 </a:path>
               </a:pathLst>
@@ -3910,312 +4006,312 @@
           </p:nvSpPr>
           <p:spPr>
             <a:xfrm>
-              <a:off x="1172049" y="4526430"/>
-              <a:ext cx="7090630" cy="939033"/>
+              <a:off x="1172049" y="4686411"/>
+              <a:ext cx="7090630" cy="658421"/>
             </a:xfrm>
             <a:custGeom>
               <a:avLst/>
               <a:pathLst>
-                <a:path w="7090630" h="939033">
+                <a:path w="7090630" h="658421">
                   <a:moveTo>
-                    <a:pt x="7090630" y="0"/>
+                    <a:pt x="7090630" y="568175"/>
                   </a:moveTo>
                   <a:lnTo>
-                    <a:pt x="7019007" y="2935"/>
-                  </a:lnTo>
-                  <a:lnTo>
-                    <a:pt x="6947385" y="5862"/>
-                  </a:lnTo>
-                  <a:lnTo>
-                    <a:pt x="6875762" y="8781"/>
-                  </a:lnTo>
-                  <a:lnTo>
-                    <a:pt x="6804139" y="11691"/>
-                  </a:lnTo>
-                  <a:lnTo>
-                    <a:pt x="6732517" y="14594"/>
-                  </a:lnTo>
-                  <a:lnTo>
-                    <a:pt x="6660894" y="17487"/>
-                  </a:lnTo>
-                  <a:lnTo>
-                    <a:pt x="6589272" y="20373"/>
-                  </a:lnTo>
-                  <a:lnTo>
-                    <a:pt x="6517649" y="23250"/>
-                  </a:lnTo>
-                  <a:lnTo>
-                    <a:pt x="6446027" y="26119"/>
-                  </a:lnTo>
-                  <a:lnTo>
-                    <a:pt x="6374404" y="28979"/>
-                  </a:lnTo>
-                  <a:lnTo>
-                    <a:pt x="6302782" y="31832"/>
-                  </a:lnTo>
-                  <a:lnTo>
-                    <a:pt x="6231159" y="34676"/>
-                  </a:lnTo>
-                  <a:lnTo>
-                    <a:pt x="6159537" y="37512"/>
-                  </a:lnTo>
-                  <a:lnTo>
-                    <a:pt x="6087914" y="40340"/>
-                  </a:lnTo>
-                  <a:lnTo>
-                    <a:pt x="6016292" y="43160"/>
-                  </a:lnTo>
-                  <a:lnTo>
-                    <a:pt x="5944669" y="45972"/>
-                  </a:lnTo>
-                  <a:lnTo>
-                    <a:pt x="5873047" y="48775"/>
-                  </a:lnTo>
-                  <a:lnTo>
-                    <a:pt x="5801424" y="51571"/>
-                  </a:lnTo>
-                  <a:lnTo>
-                    <a:pt x="5729802" y="54358"/>
-                  </a:lnTo>
-                  <a:lnTo>
-                    <a:pt x="5658179" y="57138"/>
-                  </a:lnTo>
-                  <a:lnTo>
-                    <a:pt x="5586557" y="59910"/>
-                  </a:lnTo>
-                  <a:lnTo>
-                    <a:pt x="5514934" y="62673"/>
-                  </a:lnTo>
-                  <a:lnTo>
-                    <a:pt x="5443311" y="65429"/>
-                  </a:lnTo>
-                  <a:lnTo>
-                    <a:pt x="5371689" y="68177"/>
-                  </a:lnTo>
-                  <a:lnTo>
-                    <a:pt x="5300066" y="70917"/>
-                  </a:lnTo>
-                  <a:lnTo>
-                    <a:pt x="5228444" y="73649"/>
-                  </a:lnTo>
-                  <a:lnTo>
-                    <a:pt x="5156821" y="76373"/>
-                  </a:lnTo>
-                  <a:lnTo>
-                    <a:pt x="5085199" y="79089"/>
-                  </a:lnTo>
-                  <a:lnTo>
-                    <a:pt x="5013576" y="81798"/>
-                  </a:lnTo>
-                  <a:lnTo>
-                    <a:pt x="4941954" y="84499"/>
-                  </a:lnTo>
-                  <a:lnTo>
-                    <a:pt x="4870331" y="87192"/>
-                  </a:lnTo>
-                  <a:lnTo>
-                    <a:pt x="4798709" y="89877"/>
-                  </a:lnTo>
-                  <a:lnTo>
-                    <a:pt x="4727086" y="92555"/>
-                  </a:lnTo>
-                  <a:lnTo>
-                    <a:pt x="4655464" y="95225"/>
-                  </a:lnTo>
-                  <a:lnTo>
-                    <a:pt x="4583841" y="97887"/>
-                  </a:lnTo>
-                  <a:lnTo>
-                    <a:pt x="4512219" y="100542"/>
-                  </a:lnTo>
-                  <a:lnTo>
-                    <a:pt x="4440596" y="103189"/>
-                  </a:lnTo>
-                  <a:lnTo>
-                    <a:pt x="4368974" y="105828"/>
-                  </a:lnTo>
-                  <a:lnTo>
-                    <a:pt x="4297351" y="108460"/>
-                  </a:lnTo>
-                  <a:lnTo>
-                    <a:pt x="4225729" y="111084"/>
-                  </a:lnTo>
-                  <a:lnTo>
-                    <a:pt x="4154106" y="113701"/>
-                  </a:lnTo>
-                  <a:lnTo>
-                    <a:pt x="4082483" y="116310"/>
-                  </a:lnTo>
-                  <a:lnTo>
-                    <a:pt x="4010861" y="118912"/>
-                  </a:lnTo>
-                  <a:lnTo>
-                    <a:pt x="3939238" y="121507"/>
-                  </a:lnTo>
-                  <a:lnTo>
-                    <a:pt x="3867616" y="124093"/>
-                  </a:lnTo>
-                  <a:lnTo>
-                    <a:pt x="3795993" y="126673"/>
-                  </a:lnTo>
-                  <a:lnTo>
-                    <a:pt x="3724371" y="129245"/>
-                  </a:lnTo>
-                  <a:lnTo>
-                    <a:pt x="3652748" y="131809"/>
-                  </a:lnTo>
-                  <a:lnTo>
-                    <a:pt x="3581126" y="134367"/>
-                  </a:lnTo>
-                  <a:lnTo>
-                    <a:pt x="3509503" y="136917"/>
-                  </a:lnTo>
-                  <a:lnTo>
-                    <a:pt x="3437881" y="139459"/>
-                  </a:lnTo>
-                  <a:lnTo>
-                    <a:pt x="3366258" y="141995"/>
-                  </a:lnTo>
-                  <a:lnTo>
-                    <a:pt x="3294636" y="144523"/>
-                  </a:lnTo>
-                  <a:lnTo>
-                    <a:pt x="3223013" y="147044"/>
-                  </a:lnTo>
-                  <a:lnTo>
-                    <a:pt x="3151391" y="149557"/>
-                  </a:lnTo>
-                  <a:lnTo>
-                    <a:pt x="3079768" y="152063"/>
-                  </a:lnTo>
-                  <a:lnTo>
-                    <a:pt x="3008146" y="180659"/>
-                  </a:lnTo>
-                  <a:lnTo>
-                    <a:pt x="2936523" y="225690"/>
-                  </a:lnTo>
-                  <a:lnTo>
-                    <a:pt x="2864901" y="268313"/>
-                  </a:lnTo>
-                  <a:lnTo>
-                    <a:pt x="2793278" y="308657"/>
-                  </a:lnTo>
-                  <a:lnTo>
-                    <a:pt x="2721655" y="346843"/>
-                  </a:lnTo>
-                  <a:lnTo>
-                    <a:pt x="2650033" y="382988"/>
-                  </a:lnTo>
-                  <a:lnTo>
-                    <a:pt x="2578410" y="417199"/>
-                  </a:lnTo>
-                  <a:lnTo>
-                    <a:pt x="2506788" y="449582"/>
-                  </a:lnTo>
-                  <a:lnTo>
-                    <a:pt x="2435165" y="480232"/>
-                  </a:lnTo>
-                  <a:lnTo>
-                    <a:pt x="2363543" y="509244"/>
-                  </a:lnTo>
-                  <a:lnTo>
-                    <a:pt x="2291920" y="536705"/>
-                  </a:lnTo>
-                  <a:lnTo>
-                    <a:pt x="2220298" y="562697"/>
-                  </a:lnTo>
-                  <a:lnTo>
-                    <a:pt x="2148675" y="587299"/>
-                  </a:lnTo>
-                  <a:lnTo>
-                    <a:pt x="2077053" y="610585"/>
-                  </a:lnTo>
-                  <a:lnTo>
-                    <a:pt x="2005430" y="632626"/>
-                  </a:lnTo>
-                  <a:lnTo>
-                    <a:pt x="1933808" y="653489"/>
-                  </a:lnTo>
-                  <a:lnTo>
-                    <a:pt x="1862185" y="673236"/>
-                  </a:lnTo>
-                  <a:lnTo>
-                    <a:pt x="1790563" y="691927"/>
-                  </a:lnTo>
-                  <a:lnTo>
-                    <a:pt x="1718940" y="709619"/>
-                  </a:lnTo>
-                  <a:lnTo>
-                    <a:pt x="1647318" y="726365"/>
-                  </a:lnTo>
-                  <a:lnTo>
-                    <a:pt x="1575695" y="742215"/>
-                  </a:lnTo>
-                  <a:lnTo>
-                    <a:pt x="1504073" y="757217"/>
-                  </a:lnTo>
-                  <a:lnTo>
-                    <a:pt x="1432450" y="771418"/>
-                  </a:lnTo>
-                  <a:lnTo>
-                    <a:pt x="1360827" y="784859"/>
-                  </a:lnTo>
-                  <a:lnTo>
-                    <a:pt x="1289205" y="797581"/>
-                  </a:lnTo>
-                  <a:lnTo>
-                    <a:pt x="1217582" y="809623"/>
-                  </a:lnTo>
-                  <a:lnTo>
-                    <a:pt x="1145960" y="821021"/>
-                  </a:lnTo>
-                  <a:lnTo>
-                    <a:pt x="1074337" y="831810"/>
-                  </a:lnTo>
-                  <a:lnTo>
-                    <a:pt x="1002715" y="842021"/>
-                  </a:lnTo>
-                  <a:lnTo>
-                    <a:pt x="931092" y="851687"/>
-                  </a:lnTo>
-                  <a:lnTo>
-                    <a:pt x="859470" y="860836"/>
-                  </a:lnTo>
-                  <a:lnTo>
-                    <a:pt x="787847" y="869495"/>
-                  </a:lnTo>
-                  <a:lnTo>
-                    <a:pt x="716225" y="877692"/>
-                  </a:lnTo>
-                  <a:lnTo>
-                    <a:pt x="644602" y="885450"/>
-                  </a:lnTo>
-                  <a:lnTo>
-                    <a:pt x="572980" y="892793"/>
-                  </a:lnTo>
-                  <a:lnTo>
-                    <a:pt x="501357" y="899744"/>
-                  </a:lnTo>
-                  <a:lnTo>
-                    <a:pt x="429735" y="906323"/>
-                  </a:lnTo>
-                  <a:lnTo>
-                    <a:pt x="358112" y="912550"/>
-                  </a:lnTo>
-                  <a:lnTo>
-                    <a:pt x="286490" y="918444"/>
-                  </a:lnTo>
-                  <a:lnTo>
-                    <a:pt x="214867" y="924023"/>
-                  </a:lnTo>
-                  <a:lnTo>
-                    <a:pt x="143245" y="929304"/>
-                  </a:lnTo>
-                  <a:lnTo>
-                    <a:pt x="71622" y="934302"/>
-                  </a:lnTo>
-                  <a:lnTo>
-                    <a:pt x="0" y="939033"/>
+                    <a:pt x="7019007" y="562468"/>
+                  </a:lnTo>
+                  <a:lnTo>
+                    <a:pt x="6947385" y="556650"/>
+                  </a:lnTo>
+                  <a:lnTo>
+                    <a:pt x="6875762" y="550719"/>
+                  </a:lnTo>
+                  <a:lnTo>
+                    <a:pt x="6804139" y="544673"/>
+                  </a:lnTo>
+                  <a:lnTo>
+                    <a:pt x="6732517" y="538510"/>
+                  </a:lnTo>
+                  <a:lnTo>
+                    <a:pt x="6660894" y="532228"/>
+                  </a:lnTo>
+                  <a:lnTo>
+                    <a:pt x="6589272" y="525824"/>
+                  </a:lnTo>
+                  <a:lnTo>
+                    <a:pt x="6517649" y="519296"/>
+                  </a:lnTo>
+                  <a:lnTo>
+                    <a:pt x="6446027" y="512641"/>
+                  </a:lnTo>
+                  <a:lnTo>
+                    <a:pt x="6374404" y="505858"/>
+                  </a:lnTo>
+                  <a:lnTo>
+                    <a:pt x="6302782" y="498943"/>
+                  </a:lnTo>
+                  <a:lnTo>
+                    <a:pt x="6231159" y="491895"/>
+                  </a:lnTo>
+                  <a:lnTo>
+                    <a:pt x="6159537" y="484709"/>
+                  </a:lnTo>
+                  <a:lnTo>
+                    <a:pt x="6087914" y="477385"/>
+                  </a:lnTo>
+                  <a:lnTo>
+                    <a:pt x="6016292" y="469918"/>
+                  </a:lnTo>
+                  <a:lnTo>
+                    <a:pt x="5944669" y="462307"/>
+                  </a:lnTo>
+                  <a:lnTo>
+                    <a:pt x="5873047" y="454549"/>
+                  </a:lnTo>
+                  <a:lnTo>
+                    <a:pt x="5801424" y="446640"/>
+                  </a:lnTo>
+                  <a:lnTo>
+                    <a:pt x="5729802" y="438578"/>
+                  </a:lnTo>
+                  <a:lnTo>
+                    <a:pt x="5658179" y="430360"/>
+                  </a:lnTo>
+                  <a:lnTo>
+                    <a:pt x="5586557" y="421982"/>
+                  </a:lnTo>
+                  <a:lnTo>
+                    <a:pt x="5514934" y="413443"/>
+                  </a:lnTo>
+                  <a:lnTo>
+                    <a:pt x="5443311" y="404737"/>
+                  </a:lnTo>
+                  <a:lnTo>
+                    <a:pt x="5371689" y="395864"/>
+                  </a:lnTo>
+                  <a:lnTo>
+                    <a:pt x="5300066" y="386818"/>
+                  </a:lnTo>
+                  <a:lnTo>
+                    <a:pt x="5228444" y="377597"/>
+                  </a:lnTo>
+                  <a:lnTo>
+                    <a:pt x="5156821" y="368198"/>
+                  </a:lnTo>
+                  <a:lnTo>
+                    <a:pt x="5085199" y="358616"/>
+                  </a:lnTo>
+                  <a:lnTo>
+                    <a:pt x="5013576" y="348849"/>
+                  </a:lnTo>
+                  <a:lnTo>
+                    <a:pt x="4941954" y="338892"/>
+                  </a:lnTo>
+                  <a:lnTo>
+                    <a:pt x="4870331" y="328743"/>
+                  </a:lnTo>
+                  <a:lnTo>
+                    <a:pt x="4798709" y="318397"/>
+                  </a:lnTo>
+                  <a:lnTo>
+                    <a:pt x="4727086" y="307850"/>
+                  </a:lnTo>
+                  <a:lnTo>
+                    <a:pt x="4655464" y="297100"/>
+                  </a:lnTo>
+                  <a:lnTo>
+                    <a:pt x="4583841" y="286141"/>
+                  </a:lnTo>
+                  <a:lnTo>
+                    <a:pt x="4512219" y="274969"/>
+                  </a:lnTo>
+                  <a:lnTo>
+                    <a:pt x="4440596" y="263582"/>
+                  </a:lnTo>
+                  <a:lnTo>
+                    <a:pt x="4368974" y="251973"/>
+                  </a:lnTo>
+                  <a:lnTo>
+                    <a:pt x="4297351" y="240140"/>
+                  </a:lnTo>
+                  <a:lnTo>
+                    <a:pt x="4225729" y="228078"/>
+                  </a:lnTo>
+                  <a:lnTo>
+                    <a:pt x="4154106" y="215781"/>
+                  </a:lnTo>
+                  <a:lnTo>
+                    <a:pt x="4082483" y="203247"/>
+                  </a:lnTo>
+                  <a:lnTo>
+                    <a:pt x="4010861" y="190470"/>
+                  </a:lnTo>
+                  <a:lnTo>
+                    <a:pt x="3939238" y="177445"/>
+                  </a:lnTo>
+                  <a:lnTo>
+                    <a:pt x="3867616" y="164168"/>
+                  </a:lnTo>
+                  <a:lnTo>
+                    <a:pt x="3795993" y="150634"/>
+                  </a:lnTo>
+                  <a:lnTo>
+                    <a:pt x="3724371" y="136838"/>
+                  </a:lnTo>
+                  <a:lnTo>
+                    <a:pt x="3652748" y="122774"/>
+                  </a:lnTo>
+                  <a:lnTo>
+                    <a:pt x="3581126" y="108438"/>
+                  </a:lnTo>
+                  <a:lnTo>
+                    <a:pt x="3509503" y="93824"/>
+                  </a:lnTo>
+                  <a:lnTo>
+                    <a:pt x="3437881" y="78927"/>
+                  </a:lnTo>
+                  <a:lnTo>
+                    <a:pt x="3366258" y="63741"/>
+                  </a:lnTo>
+                  <a:lnTo>
+                    <a:pt x="3294636" y="48261"/>
+                  </a:lnTo>
+                  <a:lnTo>
+                    <a:pt x="3223013" y="32482"/>
+                  </a:lnTo>
+                  <a:lnTo>
+                    <a:pt x="3151391" y="16396"/>
+                  </a:lnTo>
+                  <a:lnTo>
+                    <a:pt x="3079768" y="0"/>
+                  </a:lnTo>
+                  <a:lnTo>
+                    <a:pt x="3008146" y="10276"/>
+                  </a:lnTo>
+                  <a:lnTo>
+                    <a:pt x="2936523" y="38779"/>
+                  </a:lnTo>
+                  <a:lnTo>
+                    <a:pt x="2864901" y="66329"/>
+                  </a:lnTo>
+                  <a:lnTo>
+                    <a:pt x="2793278" y="92958"/>
+                  </a:lnTo>
+                  <a:lnTo>
+                    <a:pt x="2721655" y="118697"/>
+                  </a:lnTo>
+                  <a:lnTo>
+                    <a:pt x="2650033" y="143576"/>
+                  </a:lnTo>
+                  <a:lnTo>
+                    <a:pt x="2578410" y="167622"/>
+                  </a:lnTo>
+                  <a:lnTo>
+                    <a:pt x="2506788" y="190865"/>
+                  </a:lnTo>
+                  <a:lnTo>
+                    <a:pt x="2435165" y="213330"/>
+                  </a:lnTo>
+                  <a:lnTo>
+                    <a:pt x="2363543" y="235044"/>
+                  </a:lnTo>
+                  <a:lnTo>
+                    <a:pt x="2291920" y="256033"/>
+                  </a:lnTo>
+                  <a:lnTo>
+                    <a:pt x="2220298" y="276319"/>
+                  </a:lnTo>
+                  <a:lnTo>
+                    <a:pt x="2148675" y="295927"/>
+                  </a:lnTo>
+                  <a:lnTo>
+                    <a:pt x="2077053" y="314880"/>
+                  </a:lnTo>
+                  <a:lnTo>
+                    <a:pt x="2005430" y="333199"/>
+                  </a:lnTo>
+                  <a:lnTo>
+                    <a:pt x="1933808" y="350906"/>
+                  </a:lnTo>
+                  <a:lnTo>
+                    <a:pt x="1862185" y="368020"/>
+                  </a:lnTo>
+                  <a:lnTo>
+                    <a:pt x="1790563" y="384563"/>
+                  </a:lnTo>
+                  <a:lnTo>
+                    <a:pt x="1718940" y="400552"/>
+                  </a:lnTo>
+                  <a:lnTo>
+                    <a:pt x="1647318" y="416007"/>
+                  </a:lnTo>
+                  <a:lnTo>
+                    <a:pt x="1575695" y="430945"/>
+                  </a:lnTo>
+                  <a:lnTo>
+                    <a:pt x="1504073" y="445383"/>
+                  </a:lnTo>
+                  <a:lnTo>
+                    <a:pt x="1432450" y="459339"/>
+                  </a:lnTo>
+                  <a:lnTo>
+                    <a:pt x="1360827" y="472828"/>
+                  </a:lnTo>
+                  <a:lnTo>
+                    <a:pt x="1289205" y="485866"/>
+                  </a:lnTo>
+                  <a:lnTo>
+                    <a:pt x="1217582" y="498469"/>
+                  </a:lnTo>
+                  <a:lnTo>
+                    <a:pt x="1145960" y="510650"/>
+                  </a:lnTo>
+                  <a:lnTo>
+                    <a:pt x="1074337" y="522423"/>
+                  </a:lnTo>
+                  <a:lnTo>
+                    <a:pt x="1002715" y="533803"/>
+                  </a:lnTo>
+                  <a:lnTo>
+                    <a:pt x="931092" y="544803"/>
+                  </a:lnTo>
+                  <a:lnTo>
+                    <a:pt x="859470" y="555435"/>
+                  </a:lnTo>
+                  <a:lnTo>
+                    <a:pt x="787847" y="565711"/>
+                  </a:lnTo>
+                  <a:lnTo>
+                    <a:pt x="716225" y="575644"/>
+                  </a:lnTo>
+                  <a:lnTo>
+                    <a:pt x="644602" y="585244"/>
+                  </a:lnTo>
+                  <a:lnTo>
+                    <a:pt x="572980" y="594524"/>
+                  </a:lnTo>
+                  <a:lnTo>
+                    <a:pt x="501357" y="603494"/>
+                  </a:lnTo>
+                  <a:lnTo>
+                    <a:pt x="429735" y="612163"/>
+                  </a:lnTo>
+                  <a:lnTo>
+                    <a:pt x="358112" y="620543"/>
+                  </a:lnTo>
+                  <a:lnTo>
+                    <a:pt x="286490" y="628642"/>
+                  </a:lnTo>
+                  <a:lnTo>
+                    <a:pt x="214867" y="636471"/>
+                  </a:lnTo>
+                  <a:lnTo>
+                    <a:pt x="143245" y="644038"/>
+                  </a:lnTo>
+                  <a:lnTo>
+                    <a:pt x="71622" y="651352"/>
+                  </a:lnTo>
+                  <a:lnTo>
+                    <a:pt x="0" y="658421"/>
                   </a:lnTo>
                 </a:path>
               </a:pathLst>
@@ -4235,294 +4331,312 @@
           </p:nvSpPr>
           <p:spPr>
             <a:xfrm>
-              <a:off x="1172049" y="1896563"/>
-              <a:ext cx="6604602" cy="3398796"/>
+              <a:off x="1172049" y="4228256"/>
+              <a:ext cx="7090630" cy="686606"/>
             </a:xfrm>
             <a:custGeom>
               <a:avLst/>
               <a:pathLst>
-                <a:path w="6604602" h="3398796">
+                <a:path w="7090630" h="686606">
                   <a:moveTo>
-                    <a:pt x="0" y="3398796"/>
+                    <a:pt x="0" y="686606"/>
                   </a:moveTo>
                   <a:lnTo>
-                    <a:pt x="71622" y="3391349"/>
-                  </a:lnTo>
-                  <a:lnTo>
-                    <a:pt x="143245" y="3383683"/>
-                  </a:lnTo>
-                  <a:lnTo>
-                    <a:pt x="214867" y="3375792"/>
-                  </a:lnTo>
-                  <a:lnTo>
-                    <a:pt x="286490" y="3367670"/>
-                  </a:lnTo>
-                  <a:lnTo>
-                    <a:pt x="358112" y="3359310"/>
-                  </a:lnTo>
-                  <a:lnTo>
-                    <a:pt x="429735" y="3350704"/>
-                  </a:lnTo>
-                  <a:lnTo>
-                    <a:pt x="501357" y="3341846"/>
-                  </a:lnTo>
-                  <a:lnTo>
-                    <a:pt x="572980" y="3332728"/>
-                  </a:lnTo>
-                  <a:lnTo>
-                    <a:pt x="644602" y="3323343"/>
-                  </a:lnTo>
-                  <a:lnTo>
-                    <a:pt x="716225" y="3313682"/>
-                  </a:lnTo>
-                  <a:lnTo>
-                    <a:pt x="787847" y="3303737"/>
-                  </a:lnTo>
-                  <a:lnTo>
-                    <a:pt x="859470" y="3293501"/>
-                  </a:lnTo>
-                  <a:lnTo>
-                    <a:pt x="931092" y="3282965"/>
-                  </a:lnTo>
-                  <a:lnTo>
-                    <a:pt x="1002715" y="3272120"/>
-                  </a:lnTo>
-                  <a:lnTo>
-                    <a:pt x="1074337" y="3260956"/>
-                  </a:lnTo>
-                  <a:lnTo>
-                    <a:pt x="1145960" y="3249465"/>
-                  </a:lnTo>
-                  <a:lnTo>
-                    <a:pt x="1217582" y="3237637"/>
-                  </a:lnTo>
-                  <a:lnTo>
-                    <a:pt x="1289205" y="3225461"/>
-                  </a:lnTo>
-                  <a:lnTo>
-                    <a:pt x="1360827" y="3212929"/>
-                  </a:lnTo>
-                  <a:lnTo>
-                    <a:pt x="1432450" y="3200029"/>
-                  </a:lnTo>
-                  <a:lnTo>
-                    <a:pt x="1504073" y="3186750"/>
-                  </a:lnTo>
-                  <a:lnTo>
-                    <a:pt x="1575695" y="3173082"/>
-                  </a:lnTo>
-                  <a:lnTo>
-                    <a:pt x="1647318" y="3159013"/>
-                  </a:lnTo>
-                  <a:lnTo>
-                    <a:pt x="1718940" y="3144531"/>
-                  </a:lnTo>
-                  <a:lnTo>
-                    <a:pt x="1790563" y="3129625"/>
-                  </a:lnTo>
-                  <a:lnTo>
-                    <a:pt x="1862185" y="3114280"/>
-                  </a:lnTo>
-                  <a:lnTo>
-                    <a:pt x="1933808" y="3098486"/>
-                  </a:lnTo>
-                  <a:lnTo>
-                    <a:pt x="2005430" y="3082229"/>
-                  </a:lnTo>
-                  <a:lnTo>
-                    <a:pt x="2077053" y="3065494"/>
-                  </a:lnTo>
-                  <a:lnTo>
-                    <a:pt x="2148675" y="3048269"/>
-                  </a:lnTo>
-                  <a:lnTo>
-                    <a:pt x="2220298" y="3030538"/>
-                  </a:lnTo>
-                  <a:lnTo>
-                    <a:pt x="2291920" y="3012287"/>
-                  </a:lnTo>
-                  <a:lnTo>
-                    <a:pt x="2363543" y="2993500"/>
-                  </a:lnTo>
-                  <a:lnTo>
-                    <a:pt x="2435165" y="2974163"/>
-                  </a:lnTo>
-                  <a:lnTo>
-                    <a:pt x="2506788" y="2954258"/>
-                  </a:lnTo>
-                  <a:lnTo>
-                    <a:pt x="2578410" y="2933769"/>
-                  </a:lnTo>
-                  <a:lnTo>
-                    <a:pt x="2650033" y="2912679"/>
-                  </a:lnTo>
-                  <a:lnTo>
-                    <a:pt x="2721655" y="2890970"/>
-                  </a:lnTo>
-                  <a:lnTo>
-                    <a:pt x="2793278" y="2868625"/>
-                  </a:lnTo>
-                  <a:lnTo>
-                    <a:pt x="2864901" y="2845624"/>
-                  </a:lnTo>
-                  <a:lnTo>
-                    <a:pt x="2936523" y="2821948"/>
-                  </a:lnTo>
-                  <a:lnTo>
-                    <a:pt x="3008146" y="2797577"/>
-                  </a:lnTo>
-                  <a:lnTo>
-                    <a:pt x="3079768" y="2772492"/>
-                  </a:lnTo>
-                  <a:lnTo>
-                    <a:pt x="3151391" y="2746670"/>
-                  </a:lnTo>
-                  <a:lnTo>
-                    <a:pt x="3223013" y="2720092"/>
-                  </a:lnTo>
-                  <a:lnTo>
-                    <a:pt x="3294636" y="2692733"/>
-                  </a:lnTo>
-                  <a:lnTo>
-                    <a:pt x="3366258" y="2664571"/>
-                  </a:lnTo>
-                  <a:lnTo>
-                    <a:pt x="3437881" y="2635584"/>
-                  </a:lnTo>
-                  <a:lnTo>
-                    <a:pt x="3509503" y="2605746"/>
-                  </a:lnTo>
-                  <a:lnTo>
-                    <a:pt x="3581126" y="2575033"/>
-                  </a:lnTo>
-                  <a:lnTo>
-                    <a:pt x="3652748" y="2543418"/>
-                  </a:lnTo>
-                  <a:lnTo>
-                    <a:pt x="3724371" y="2510876"/>
-                  </a:lnTo>
-                  <a:lnTo>
-                    <a:pt x="3795993" y="2477380"/>
-                  </a:lnTo>
-                  <a:lnTo>
-                    <a:pt x="3867616" y="2442901"/>
-                  </a:lnTo>
-                  <a:lnTo>
-                    <a:pt x="3939238" y="2407410"/>
-                  </a:lnTo>
-                  <a:lnTo>
-                    <a:pt x="4010861" y="2370878"/>
-                  </a:lnTo>
-                  <a:lnTo>
-                    <a:pt x="4082483" y="2333274"/>
-                  </a:lnTo>
-                  <a:lnTo>
-                    <a:pt x="4154106" y="2294567"/>
-                  </a:lnTo>
-                  <a:lnTo>
-                    <a:pt x="4225729" y="2254725"/>
-                  </a:lnTo>
-                  <a:lnTo>
-                    <a:pt x="4297351" y="2213713"/>
-                  </a:lnTo>
-                  <a:lnTo>
-                    <a:pt x="4368974" y="2171499"/>
-                  </a:lnTo>
-                  <a:lnTo>
-                    <a:pt x="4440596" y="2128046"/>
-                  </a:lnTo>
-                  <a:lnTo>
-                    <a:pt x="4512219" y="2083318"/>
-                  </a:lnTo>
-                  <a:lnTo>
-                    <a:pt x="4583841" y="2037278"/>
-                  </a:lnTo>
-                  <a:lnTo>
-                    <a:pt x="4655464" y="1989887"/>
-                  </a:lnTo>
-                  <a:lnTo>
-                    <a:pt x="4727086" y="1941106"/>
-                  </a:lnTo>
-                  <a:lnTo>
-                    <a:pt x="4798709" y="1890894"/>
-                  </a:lnTo>
-                  <a:lnTo>
-                    <a:pt x="4870331" y="1839208"/>
-                  </a:lnTo>
-                  <a:lnTo>
-                    <a:pt x="4941954" y="1786007"/>
-                  </a:lnTo>
-                  <a:lnTo>
-                    <a:pt x="5013576" y="1731244"/>
-                  </a:lnTo>
-                  <a:lnTo>
-                    <a:pt x="5085199" y="1674875"/>
-                  </a:lnTo>
-                  <a:lnTo>
-                    <a:pt x="5156821" y="1616853"/>
-                  </a:lnTo>
-                  <a:lnTo>
-                    <a:pt x="5228444" y="1557128"/>
-                  </a:lnTo>
-                  <a:lnTo>
-                    <a:pt x="5300066" y="1495651"/>
-                  </a:lnTo>
-                  <a:lnTo>
-                    <a:pt x="5371689" y="1432370"/>
-                  </a:lnTo>
-                  <a:lnTo>
-                    <a:pt x="5443311" y="1367233"/>
-                  </a:lnTo>
-                  <a:lnTo>
-                    <a:pt x="5514934" y="1300184"/>
-                  </a:lnTo>
-                  <a:lnTo>
-                    <a:pt x="5586557" y="1231169"/>
-                  </a:lnTo>
-                  <a:lnTo>
-                    <a:pt x="5658179" y="1160129"/>
-                  </a:lnTo>
-                  <a:lnTo>
-                    <a:pt x="5729802" y="1087005"/>
-                  </a:lnTo>
-                  <a:lnTo>
-                    <a:pt x="5801424" y="1011736"/>
-                  </a:lnTo>
-                  <a:lnTo>
-                    <a:pt x="5873047" y="934258"/>
-                  </a:lnTo>
-                  <a:lnTo>
-                    <a:pt x="5944669" y="854508"/>
-                  </a:lnTo>
-                  <a:lnTo>
-                    <a:pt x="6016292" y="772418"/>
-                  </a:lnTo>
-                  <a:lnTo>
-                    <a:pt x="6087914" y="687919"/>
-                  </a:lnTo>
-                  <a:lnTo>
-                    <a:pt x="6159537" y="600942"/>
-                  </a:lnTo>
-                  <a:lnTo>
-                    <a:pt x="6231159" y="511412"/>
-                  </a:lnTo>
-                  <a:lnTo>
-                    <a:pt x="6302782" y="419257"/>
-                  </a:lnTo>
-                  <a:lnTo>
-                    <a:pt x="6374404" y="324397"/>
-                  </a:lnTo>
-                  <a:lnTo>
-                    <a:pt x="6446027" y="226755"/>
-                  </a:lnTo>
-                  <a:lnTo>
-                    <a:pt x="6517649" y="126248"/>
-                  </a:lnTo>
-                  <a:lnTo>
-                    <a:pt x="6589272" y="22792"/>
-                  </a:lnTo>
-                  <a:lnTo>
-                    <a:pt x="6604602" y="0"/>
+                    <a:pt x="71622" y="681888"/>
+                  </a:lnTo>
+                  <a:lnTo>
+                    <a:pt x="143245" y="677135"/>
+                  </a:lnTo>
+                  <a:lnTo>
+                    <a:pt x="214867" y="672348"/>
+                  </a:lnTo>
+                  <a:lnTo>
+                    <a:pt x="286490" y="667524"/>
+                  </a:lnTo>
+                  <a:lnTo>
+                    <a:pt x="358112" y="662665"/>
+                  </a:lnTo>
+                  <a:lnTo>
+                    <a:pt x="429735" y="657769"/>
+                  </a:lnTo>
+                  <a:lnTo>
+                    <a:pt x="501357" y="652837"/>
+                  </a:lnTo>
+                  <a:lnTo>
+                    <a:pt x="572980" y="647869"/>
+                  </a:lnTo>
+                  <a:lnTo>
+                    <a:pt x="644602" y="642863"/>
+                  </a:lnTo>
+                  <a:lnTo>
+                    <a:pt x="716225" y="637820"/>
+                  </a:lnTo>
+                  <a:lnTo>
+                    <a:pt x="787847" y="632740"/>
+                  </a:lnTo>
+                  <a:lnTo>
+                    <a:pt x="859470" y="627622"/>
+                  </a:lnTo>
+                  <a:lnTo>
+                    <a:pt x="931092" y="622466"/>
+                  </a:lnTo>
+                  <a:lnTo>
+                    <a:pt x="1002715" y="617272"/>
+                  </a:lnTo>
+                  <a:lnTo>
+                    <a:pt x="1074337" y="612038"/>
+                  </a:lnTo>
+                  <a:lnTo>
+                    <a:pt x="1145960" y="606766"/>
+                  </a:lnTo>
+                  <a:lnTo>
+                    <a:pt x="1217582" y="601455"/>
+                  </a:lnTo>
+                  <a:lnTo>
+                    <a:pt x="1289205" y="596105"/>
+                  </a:lnTo>
+                  <a:lnTo>
+                    <a:pt x="1360827" y="590714"/>
+                  </a:lnTo>
+                  <a:lnTo>
+                    <a:pt x="1432450" y="585283"/>
+                  </a:lnTo>
+                  <a:lnTo>
+                    <a:pt x="1504073" y="579812"/>
+                  </a:lnTo>
+                  <a:lnTo>
+                    <a:pt x="1575695" y="574301"/>
+                  </a:lnTo>
+                  <a:lnTo>
+                    <a:pt x="1647318" y="568748"/>
+                  </a:lnTo>
+                  <a:lnTo>
+                    <a:pt x="1718940" y="563154"/>
+                  </a:lnTo>
+                  <a:lnTo>
+                    <a:pt x="1790563" y="557519"/>
+                  </a:lnTo>
+                  <a:lnTo>
+                    <a:pt x="1862185" y="551841"/>
+                  </a:lnTo>
+                  <a:lnTo>
+                    <a:pt x="1933808" y="546122"/>
+                  </a:lnTo>
+                  <a:lnTo>
+                    <a:pt x="2005430" y="540359"/>
+                  </a:lnTo>
+                  <a:lnTo>
+                    <a:pt x="2077053" y="534554"/>
+                  </a:lnTo>
+                  <a:lnTo>
+                    <a:pt x="2148675" y="528706"/>
+                  </a:lnTo>
+                  <a:lnTo>
+                    <a:pt x="2220298" y="522814"/>
+                  </a:lnTo>
+                  <a:lnTo>
+                    <a:pt x="2291920" y="516879"/>
+                  </a:lnTo>
+                  <a:lnTo>
+                    <a:pt x="2363543" y="510899"/>
+                  </a:lnTo>
+                  <a:lnTo>
+                    <a:pt x="2435165" y="504875"/>
+                  </a:lnTo>
+                  <a:lnTo>
+                    <a:pt x="2506788" y="498806"/>
+                  </a:lnTo>
+                  <a:lnTo>
+                    <a:pt x="2578410" y="492692"/>
+                  </a:lnTo>
+                  <a:lnTo>
+                    <a:pt x="2650033" y="486532"/>
+                  </a:lnTo>
+                  <a:lnTo>
+                    <a:pt x="2721655" y="480327"/>
+                  </a:lnTo>
+                  <a:lnTo>
+                    <a:pt x="2793278" y="474076"/>
+                  </a:lnTo>
+                  <a:lnTo>
+                    <a:pt x="2864901" y="467778"/>
+                  </a:lnTo>
+                  <a:lnTo>
+                    <a:pt x="2936523" y="461433"/>
+                  </a:lnTo>
+                  <a:lnTo>
+                    <a:pt x="3008146" y="455041"/>
+                  </a:lnTo>
+                  <a:lnTo>
+                    <a:pt x="3079768" y="448601"/>
+                  </a:lnTo>
+                  <a:lnTo>
+                    <a:pt x="3151391" y="442114"/>
+                  </a:lnTo>
+                  <a:lnTo>
+                    <a:pt x="3223013" y="435578"/>
+                  </a:lnTo>
+                  <a:lnTo>
+                    <a:pt x="3294636" y="428994"/>
+                  </a:lnTo>
+                  <a:lnTo>
+                    <a:pt x="3366258" y="422360"/>
+                  </a:lnTo>
+                  <a:lnTo>
+                    <a:pt x="3437881" y="415678"/>
+                  </a:lnTo>
+                  <a:lnTo>
+                    <a:pt x="3509503" y="408946"/>
+                  </a:lnTo>
+                  <a:lnTo>
+                    <a:pt x="3581126" y="402163"/>
+                  </a:lnTo>
+                  <a:lnTo>
+                    <a:pt x="3652748" y="395330"/>
+                  </a:lnTo>
+                  <a:lnTo>
+                    <a:pt x="3724371" y="388447"/>
+                  </a:lnTo>
+                  <a:lnTo>
+                    <a:pt x="3795993" y="381512"/>
+                  </a:lnTo>
+                  <a:lnTo>
+                    <a:pt x="3867616" y="374526"/>
+                  </a:lnTo>
+                  <a:lnTo>
+                    <a:pt x="3939238" y="367487"/>
+                  </a:lnTo>
+                  <a:lnTo>
+                    <a:pt x="4010861" y="360397"/>
+                  </a:lnTo>
+                  <a:lnTo>
+                    <a:pt x="4082483" y="353253"/>
+                  </a:lnTo>
+                  <a:lnTo>
+                    <a:pt x="4154106" y="346057"/>
+                  </a:lnTo>
+                  <a:lnTo>
+                    <a:pt x="4225729" y="338807"/>
+                  </a:lnTo>
+                  <a:lnTo>
+                    <a:pt x="4297351" y="331503"/>
+                  </a:lnTo>
+                  <a:lnTo>
+                    <a:pt x="4368974" y="324144"/>
+                  </a:lnTo>
+                  <a:lnTo>
+                    <a:pt x="4440596" y="316731"/>
+                  </a:lnTo>
+                  <a:lnTo>
+                    <a:pt x="4512219" y="309263"/>
+                  </a:lnTo>
+                  <a:lnTo>
+                    <a:pt x="4583841" y="301740"/>
+                  </a:lnTo>
+                  <a:lnTo>
+                    <a:pt x="4655464" y="294160"/>
+                  </a:lnTo>
+                  <a:lnTo>
+                    <a:pt x="4727086" y="286524"/>
+                  </a:lnTo>
+                  <a:lnTo>
+                    <a:pt x="4798709" y="278831"/>
+                  </a:lnTo>
+                  <a:lnTo>
+                    <a:pt x="4870331" y="271081"/>
+                  </a:lnTo>
+                  <a:lnTo>
+                    <a:pt x="4941954" y="263274"/>
+                  </a:lnTo>
+                  <a:lnTo>
+                    <a:pt x="5013576" y="255408"/>
+                  </a:lnTo>
+                  <a:lnTo>
+                    <a:pt x="5085199" y="247484"/>
+                  </a:lnTo>
+                  <a:lnTo>
+                    <a:pt x="5156821" y="239501"/>
+                  </a:lnTo>
+                  <a:lnTo>
+                    <a:pt x="5228444" y="231458"/>
+                  </a:lnTo>
+                  <a:lnTo>
+                    <a:pt x="5300066" y="223356"/>
+                  </a:lnTo>
+                  <a:lnTo>
+                    <a:pt x="5371689" y="215193"/>
+                  </a:lnTo>
+                  <a:lnTo>
+                    <a:pt x="5443311" y="206970"/>
+                  </a:lnTo>
+                  <a:lnTo>
+                    <a:pt x="5514934" y="198686"/>
+                  </a:lnTo>
+                  <a:lnTo>
+                    <a:pt x="5586557" y="190340"/>
+                  </a:lnTo>
+                  <a:lnTo>
+                    <a:pt x="5658179" y="181932"/>
+                  </a:lnTo>
+                  <a:lnTo>
+                    <a:pt x="5729802" y="173461"/>
+                  </a:lnTo>
+                  <a:lnTo>
+                    <a:pt x="5801424" y="164927"/>
+                  </a:lnTo>
+                  <a:lnTo>
+                    <a:pt x="5873047" y="156330"/>
+                  </a:lnTo>
+                  <a:lnTo>
+                    <a:pt x="5944669" y="147669"/>
+                  </a:lnTo>
+                  <a:lnTo>
+                    <a:pt x="6016292" y="138944"/>
+                  </a:lnTo>
+                  <a:lnTo>
+                    <a:pt x="6087914" y="130154"/>
+                  </a:lnTo>
+                  <a:lnTo>
+                    <a:pt x="6159537" y="121298"/>
+                  </a:lnTo>
+                  <a:lnTo>
+                    <a:pt x="6231159" y="112377"/>
+                  </a:lnTo>
+                  <a:lnTo>
+                    <a:pt x="6302782" y="103389"/>
+                  </a:lnTo>
+                  <a:lnTo>
+                    <a:pt x="6374404" y="94334"/>
+                  </a:lnTo>
+                  <a:lnTo>
+                    <a:pt x="6446027" y="85212"/>
+                  </a:lnTo>
+                  <a:lnTo>
+                    <a:pt x="6517649" y="76022"/>
+                  </a:lnTo>
+                  <a:lnTo>
+                    <a:pt x="6589272" y="66764"/>
+                  </a:lnTo>
+                  <a:lnTo>
+                    <a:pt x="6660894" y="57437"/>
+                  </a:lnTo>
+                  <a:lnTo>
+                    <a:pt x="6732517" y="48040"/>
+                  </a:lnTo>
+                  <a:lnTo>
+                    <a:pt x="6804139" y="38574"/>
+                  </a:lnTo>
+                  <a:lnTo>
+                    <a:pt x="6875762" y="29037"/>
+                  </a:lnTo>
+                  <a:lnTo>
+                    <a:pt x="6947385" y="19430"/>
+                  </a:lnTo>
+                  <a:lnTo>
+                    <a:pt x="7019007" y="9751"/>
+                  </a:lnTo>
+                  <a:lnTo>
+                    <a:pt x="7090630" y="0"/>
                   </a:lnTo>
                 </a:path>
               </a:pathLst>

--- a/docs/plots/carbo/jx_carbo_linsubhr_dosedisc_grade3.pptx
+++ b/docs/plots/carbo/jx_carbo_linsubhr_dosedisc_grade3.pptx
@@ -2271,7 +2271,7 @@
           </p:nvSpPr>
           <p:spPr>
             <a:xfrm>
-              <a:off x="817517" y="5114368"/>
+              <a:off x="817517" y="5142518"/>
               <a:ext cx="7799693" cy="0"/>
             </a:xfrm>
             <a:custGeom>
@@ -2314,7 +2314,7 @@
           </p:nvSpPr>
           <p:spPr>
             <a:xfrm>
-              <a:off x="817517" y="4244691"/>
+              <a:off x="817517" y="4313054"/>
               <a:ext cx="7799693" cy="0"/>
             </a:xfrm>
             <a:custGeom>
@@ -2357,7 +2357,7 @@
           </p:nvSpPr>
           <p:spPr>
             <a:xfrm>
-              <a:off x="817517" y="3375014"/>
+              <a:off x="817517" y="3483591"/>
               <a:ext cx="7799693" cy="0"/>
             </a:xfrm>
             <a:custGeom>
@@ -2400,7 +2400,7 @@
           </p:nvSpPr>
           <p:spPr>
             <a:xfrm>
-              <a:off x="817517" y="2505337"/>
+              <a:off x="817517" y="2654127"/>
               <a:ext cx="7799693" cy="0"/>
             </a:xfrm>
             <a:custGeom>
@@ -2443,15 +2443,15 @@
           </p:nvSpPr>
           <p:spPr>
             <a:xfrm>
-              <a:off x="2122745" y="1896563"/>
-              <a:ext cx="0" cy="3826579"/>
+              <a:off x="2122745" y="2073503"/>
+              <a:ext cx="0" cy="3649639"/>
             </a:xfrm>
             <a:custGeom>
               <a:avLst/>
               <a:pathLst>
-                <a:path w="0" h="3826579">
+                <a:path w="0" h="3649639">
                   <a:moveTo>
-                    <a:pt x="0" y="3826579"/>
+                    <a:pt x="0" y="3649639"/>
                   </a:moveTo>
                   <a:lnTo>
                     <a:pt x="0" y="0"/>
@@ -2486,15 +2486,15 @@
           </p:nvSpPr>
           <p:spPr>
             <a:xfrm>
-              <a:off x="3487174" y="1896563"/>
-              <a:ext cx="0" cy="3826579"/>
+              <a:off x="3487174" y="2073503"/>
+              <a:ext cx="0" cy="3649639"/>
             </a:xfrm>
             <a:custGeom>
               <a:avLst/>
               <a:pathLst>
-                <a:path w="0" h="3826579">
+                <a:path w="0" h="3649639">
                   <a:moveTo>
-                    <a:pt x="0" y="3826579"/>
+                    <a:pt x="0" y="3649639"/>
                   </a:moveTo>
                   <a:lnTo>
                     <a:pt x="0" y="0"/>
@@ -2529,15 +2529,15 @@
           </p:nvSpPr>
           <p:spPr>
             <a:xfrm>
-              <a:off x="4851604" y="1896563"/>
-              <a:ext cx="0" cy="3826579"/>
+              <a:off x="4851604" y="2073503"/>
+              <a:ext cx="0" cy="3649639"/>
             </a:xfrm>
             <a:custGeom>
               <a:avLst/>
               <a:pathLst>
-                <a:path w="0" h="3826579">
+                <a:path w="0" h="3649639">
                   <a:moveTo>
-                    <a:pt x="0" y="3826579"/>
+                    <a:pt x="0" y="3649639"/>
                   </a:moveTo>
                   <a:lnTo>
                     <a:pt x="0" y="0"/>
@@ -2572,15 +2572,15 @@
           </p:nvSpPr>
           <p:spPr>
             <a:xfrm>
-              <a:off x="6216034" y="1896563"/>
-              <a:ext cx="0" cy="3826579"/>
+              <a:off x="6216034" y="2073503"/>
+              <a:ext cx="0" cy="3649639"/>
             </a:xfrm>
             <a:custGeom>
               <a:avLst/>
               <a:pathLst>
-                <a:path w="0" h="3826579">
+                <a:path w="0" h="3649639">
                   <a:moveTo>
-                    <a:pt x="0" y="3826579"/>
+                    <a:pt x="0" y="3649639"/>
                   </a:moveTo>
                   <a:lnTo>
                     <a:pt x="0" y="0"/>
@@ -2615,15 +2615,15 @@
           </p:nvSpPr>
           <p:spPr>
             <a:xfrm>
-              <a:off x="7580464" y="1896563"/>
-              <a:ext cx="0" cy="3826579"/>
+              <a:off x="7580464" y="2073503"/>
+              <a:ext cx="0" cy="3649639"/>
             </a:xfrm>
             <a:custGeom>
               <a:avLst/>
               <a:pathLst>
-                <a:path w="0" h="3826579">
+                <a:path w="0" h="3649639">
                   <a:moveTo>
-                    <a:pt x="0" y="3826579"/>
+                    <a:pt x="0" y="3649639"/>
                   </a:moveTo>
                   <a:lnTo>
                     <a:pt x="0" y="0"/>
@@ -2658,7 +2658,7 @@
           </p:nvSpPr>
           <p:spPr>
             <a:xfrm>
-              <a:off x="817517" y="5549207"/>
+              <a:off x="817517" y="5557249"/>
               <a:ext cx="7799693" cy="0"/>
             </a:xfrm>
             <a:custGeom>
@@ -2701,7 +2701,7 @@
           </p:nvSpPr>
           <p:spPr>
             <a:xfrm>
-              <a:off x="817517" y="4679530"/>
+              <a:off x="817517" y="4727786"/>
               <a:ext cx="7799693" cy="0"/>
             </a:xfrm>
             <a:custGeom>
@@ -2744,7 +2744,7 @@
           </p:nvSpPr>
           <p:spPr>
             <a:xfrm>
-              <a:off x="817517" y="3809853"/>
+              <a:off x="817517" y="3898322"/>
               <a:ext cx="7799693" cy="0"/>
             </a:xfrm>
             <a:custGeom>
@@ -2787,7 +2787,7 @@
           </p:nvSpPr>
           <p:spPr>
             <a:xfrm>
-              <a:off x="817517" y="2940175"/>
+              <a:off x="817517" y="3068859"/>
               <a:ext cx="7799693" cy="0"/>
             </a:xfrm>
             <a:custGeom>
@@ -2830,7 +2830,7 @@
           </p:nvSpPr>
           <p:spPr>
             <a:xfrm>
-              <a:off x="817517" y="2070498"/>
+              <a:off x="817517" y="2239395"/>
               <a:ext cx="7799693" cy="0"/>
             </a:xfrm>
             <a:custGeom>
@@ -2873,15 +2873,15 @@
           </p:nvSpPr>
           <p:spPr>
             <a:xfrm>
-              <a:off x="1440530" y="1896563"/>
-              <a:ext cx="0" cy="3826579"/>
+              <a:off x="1440530" y="2073503"/>
+              <a:ext cx="0" cy="3649639"/>
             </a:xfrm>
             <a:custGeom>
               <a:avLst/>
               <a:pathLst>
-                <a:path w="0" h="3826579">
+                <a:path w="0" h="3649639">
                   <a:moveTo>
-                    <a:pt x="0" y="3826579"/>
+                    <a:pt x="0" y="3649639"/>
                   </a:moveTo>
                   <a:lnTo>
                     <a:pt x="0" y="0"/>
@@ -2916,15 +2916,15 @@
           </p:nvSpPr>
           <p:spPr>
             <a:xfrm>
-              <a:off x="2804959" y="1896563"/>
-              <a:ext cx="0" cy="3826579"/>
+              <a:off x="2804959" y="2073503"/>
+              <a:ext cx="0" cy="3649639"/>
             </a:xfrm>
             <a:custGeom>
               <a:avLst/>
               <a:pathLst>
-                <a:path w="0" h="3826579">
+                <a:path w="0" h="3649639">
                   <a:moveTo>
-                    <a:pt x="0" y="3826579"/>
+                    <a:pt x="0" y="3649639"/>
                   </a:moveTo>
                   <a:lnTo>
                     <a:pt x="0" y="0"/>
@@ -2959,15 +2959,15 @@
           </p:nvSpPr>
           <p:spPr>
             <a:xfrm>
-              <a:off x="4169389" y="1896563"/>
-              <a:ext cx="0" cy="3826579"/>
+              <a:off x="4169389" y="2073503"/>
+              <a:ext cx="0" cy="3649639"/>
             </a:xfrm>
             <a:custGeom>
               <a:avLst/>
               <a:pathLst>
-                <a:path w="0" h="3826579">
+                <a:path w="0" h="3649639">
                   <a:moveTo>
-                    <a:pt x="0" y="3826579"/>
+                    <a:pt x="0" y="3649639"/>
                   </a:moveTo>
                   <a:lnTo>
                     <a:pt x="0" y="0"/>
@@ -3002,15 +3002,15 @@
           </p:nvSpPr>
           <p:spPr>
             <a:xfrm>
-              <a:off x="5533819" y="1896563"/>
-              <a:ext cx="0" cy="3826579"/>
+              <a:off x="5533819" y="2073503"/>
+              <a:ext cx="0" cy="3649639"/>
             </a:xfrm>
             <a:custGeom>
               <a:avLst/>
               <a:pathLst>
-                <a:path w="0" h="3826579">
+                <a:path w="0" h="3649639">
                   <a:moveTo>
-                    <a:pt x="0" y="3826579"/>
+                    <a:pt x="0" y="3649639"/>
                   </a:moveTo>
                   <a:lnTo>
                     <a:pt x="0" y="0"/>
@@ -3045,15 +3045,15 @@
           </p:nvSpPr>
           <p:spPr>
             <a:xfrm>
-              <a:off x="6898249" y="1896563"/>
-              <a:ext cx="0" cy="3826579"/>
+              <a:off x="6898249" y="2073503"/>
+              <a:ext cx="0" cy="3649639"/>
             </a:xfrm>
             <a:custGeom>
               <a:avLst/>
               <a:pathLst>
-                <a:path w="0" h="3826579">
+                <a:path w="0" h="3649639">
                   <a:moveTo>
-                    <a:pt x="0" y="3826579"/>
+                    <a:pt x="0" y="3649639"/>
                   </a:moveTo>
                   <a:lnTo>
                     <a:pt x="0" y="0"/>
@@ -3088,15 +3088,15 @@
           </p:nvSpPr>
           <p:spPr>
             <a:xfrm>
-              <a:off x="8262679" y="1896563"/>
-              <a:ext cx="0" cy="3826579"/>
+              <a:off x="8262679" y="2073503"/>
+              <a:ext cx="0" cy="3649639"/>
             </a:xfrm>
             <a:custGeom>
               <a:avLst/>
               <a:pathLst>
-                <a:path w="0" h="3826579">
+                <a:path w="0" h="3649639">
                   <a:moveTo>
-                    <a:pt x="0" y="3826579"/>
+                    <a:pt x="0" y="3649639"/>
                   </a:moveTo>
                   <a:lnTo>
                     <a:pt x="0" y="0"/>
@@ -3131,267 +3131,267 @@
           </p:nvSpPr>
           <p:spPr>
             <a:xfrm>
-              <a:off x="1172049" y="1896563"/>
-              <a:ext cx="7090630" cy="3448270"/>
+              <a:off x="1172049" y="2073503"/>
+              <a:ext cx="7090630" cy="3288823"/>
             </a:xfrm>
             <a:custGeom>
               <a:avLst/>
               <a:pathLst>
-                <a:path w="7090630" h="3448270">
+                <a:path w="7090630" h="3288823">
                   <a:moveTo>
-                    <a:pt x="0" y="1683735"/>
+                    <a:pt x="0" y="1605880"/>
                   </a:moveTo>
                   <a:lnTo>
-                    <a:pt x="71622" y="1721153"/>
-                  </a:lnTo>
-                  <a:lnTo>
-                    <a:pt x="143245" y="1757860"/>
-                  </a:lnTo>
-                  <a:lnTo>
-                    <a:pt x="214867" y="1793870"/>
-                  </a:lnTo>
-                  <a:lnTo>
-                    <a:pt x="286490" y="1829195"/>
-                  </a:lnTo>
-                  <a:lnTo>
-                    <a:pt x="358112" y="1863848"/>
-                  </a:lnTo>
-                  <a:lnTo>
-                    <a:pt x="429735" y="1897843"/>
-                  </a:lnTo>
-                  <a:lnTo>
-                    <a:pt x="501357" y="1931192"/>
-                  </a:lnTo>
-                  <a:lnTo>
-                    <a:pt x="572980" y="1963908"/>
-                  </a:lnTo>
-                  <a:lnTo>
-                    <a:pt x="644602" y="1996001"/>
-                  </a:lnTo>
-                  <a:lnTo>
-                    <a:pt x="716225" y="2027485"/>
-                  </a:lnTo>
-                  <a:lnTo>
-                    <a:pt x="787847" y="2058370"/>
-                  </a:lnTo>
-                  <a:lnTo>
-                    <a:pt x="859470" y="2088668"/>
-                  </a:lnTo>
-                  <a:lnTo>
-                    <a:pt x="931092" y="2118391"/>
-                  </a:lnTo>
-                  <a:lnTo>
-                    <a:pt x="1002715" y="2147548"/>
-                  </a:lnTo>
-                  <a:lnTo>
-                    <a:pt x="1074337" y="2176152"/>
-                  </a:lnTo>
-                  <a:lnTo>
-                    <a:pt x="1145960" y="2204212"/>
-                  </a:lnTo>
-                  <a:lnTo>
-                    <a:pt x="1217582" y="2231738"/>
-                  </a:lnTo>
-                  <a:lnTo>
-                    <a:pt x="1289205" y="2258742"/>
-                  </a:lnTo>
-                  <a:lnTo>
-                    <a:pt x="1360827" y="2285232"/>
-                  </a:lnTo>
-                  <a:lnTo>
-                    <a:pt x="1432450" y="2311219"/>
-                  </a:lnTo>
-                  <a:lnTo>
-                    <a:pt x="1504073" y="2336712"/>
-                  </a:lnTo>
-                  <a:lnTo>
-                    <a:pt x="1575695" y="2361721"/>
-                  </a:lnTo>
-                  <a:lnTo>
-                    <a:pt x="1647318" y="2386254"/>
-                  </a:lnTo>
-                  <a:lnTo>
-                    <a:pt x="1718940" y="2410321"/>
-                  </a:lnTo>
-                  <a:lnTo>
-                    <a:pt x="1790563" y="2433931"/>
-                  </a:lnTo>
-                  <a:lnTo>
-                    <a:pt x="1862185" y="2457092"/>
-                  </a:lnTo>
-                  <a:lnTo>
-                    <a:pt x="1933808" y="2479813"/>
-                  </a:lnTo>
-                  <a:lnTo>
-                    <a:pt x="2005430" y="2502102"/>
-                  </a:lnTo>
-                  <a:lnTo>
-                    <a:pt x="2077053" y="2523967"/>
-                  </a:lnTo>
-                  <a:lnTo>
-                    <a:pt x="2148675" y="2545417"/>
-                  </a:lnTo>
-                  <a:lnTo>
-                    <a:pt x="2220298" y="2566459"/>
-                  </a:lnTo>
-                  <a:lnTo>
-                    <a:pt x="2291920" y="2587101"/>
-                  </a:lnTo>
-                  <a:lnTo>
-                    <a:pt x="2363543" y="2607351"/>
-                  </a:lnTo>
-                  <a:lnTo>
-                    <a:pt x="2435165" y="2627217"/>
-                  </a:lnTo>
-                  <a:lnTo>
-                    <a:pt x="2506788" y="2646704"/>
-                  </a:lnTo>
-                  <a:lnTo>
-                    <a:pt x="2578410" y="2665822"/>
-                  </a:lnTo>
-                  <a:lnTo>
-                    <a:pt x="2650033" y="2684576"/>
-                  </a:lnTo>
-                  <a:lnTo>
-                    <a:pt x="2721655" y="2702973"/>
-                  </a:lnTo>
-                  <a:lnTo>
-                    <a:pt x="2793278" y="2721021"/>
-                  </a:lnTo>
-                  <a:lnTo>
-                    <a:pt x="2864901" y="2738726"/>
-                  </a:lnTo>
-                  <a:lnTo>
-                    <a:pt x="2936523" y="2756095"/>
-                  </a:lnTo>
-                  <a:lnTo>
-                    <a:pt x="3008146" y="2773133"/>
-                  </a:lnTo>
-                  <a:lnTo>
-                    <a:pt x="3079768" y="2770635"/>
-                  </a:lnTo>
-                  <a:lnTo>
-                    <a:pt x="3151391" y="2740126"/>
-                  </a:lnTo>
-                  <a:lnTo>
-                    <a:pt x="3223013" y="2708561"/>
-                  </a:lnTo>
-                  <a:lnTo>
-                    <a:pt x="3294636" y="2675905"/>
-                  </a:lnTo>
-                  <a:lnTo>
-                    <a:pt x="3366258" y="2642119"/>
-                  </a:lnTo>
-                  <a:lnTo>
-                    <a:pt x="3437881" y="2607164"/>
-                  </a:lnTo>
-                  <a:lnTo>
-                    <a:pt x="3509503" y="2571000"/>
-                  </a:lnTo>
-                  <a:lnTo>
-                    <a:pt x="3581126" y="2533585"/>
-                  </a:lnTo>
-                  <a:lnTo>
-                    <a:pt x="3652748" y="2494876"/>
-                  </a:lnTo>
-                  <a:lnTo>
-                    <a:pt x="3724371" y="2454829"/>
-                  </a:lnTo>
-                  <a:lnTo>
-                    <a:pt x="3795993" y="2413395"/>
-                  </a:lnTo>
-                  <a:lnTo>
-                    <a:pt x="3867616" y="2370529"/>
-                  </a:lnTo>
-                  <a:lnTo>
-                    <a:pt x="3939238" y="2326180"/>
-                  </a:lnTo>
-                  <a:lnTo>
-                    <a:pt x="4010861" y="2280297"/>
-                  </a:lnTo>
-                  <a:lnTo>
-                    <a:pt x="4082483" y="2232826"/>
-                  </a:lnTo>
-                  <a:lnTo>
-                    <a:pt x="4154106" y="2183714"/>
-                  </a:lnTo>
-                  <a:lnTo>
-                    <a:pt x="4225729" y="2132903"/>
-                  </a:lnTo>
-                  <a:lnTo>
-                    <a:pt x="4297351" y="2080334"/>
-                  </a:lnTo>
-                  <a:lnTo>
-                    <a:pt x="4368974" y="2025947"/>
-                  </a:lnTo>
-                  <a:lnTo>
-                    <a:pt x="4440596" y="1969678"/>
-                  </a:lnTo>
-                  <a:lnTo>
-                    <a:pt x="4512219" y="1911463"/>
-                  </a:lnTo>
-                  <a:lnTo>
-                    <a:pt x="4583841" y="1851235"/>
-                  </a:lnTo>
-                  <a:lnTo>
-                    <a:pt x="4655464" y="1788923"/>
-                  </a:lnTo>
-                  <a:lnTo>
-                    <a:pt x="4727086" y="1724456"/>
-                  </a:lnTo>
-                  <a:lnTo>
-                    <a:pt x="4798709" y="1657758"/>
-                  </a:lnTo>
-                  <a:lnTo>
-                    <a:pt x="4870331" y="1588754"/>
-                  </a:lnTo>
-                  <a:lnTo>
-                    <a:pt x="4941954" y="1517363"/>
-                  </a:lnTo>
-                  <a:lnTo>
-                    <a:pt x="5013576" y="1443502"/>
-                  </a:lnTo>
-                  <a:lnTo>
-                    <a:pt x="5085199" y="1367086"/>
-                  </a:lnTo>
-                  <a:lnTo>
-                    <a:pt x="5156821" y="1288027"/>
-                  </a:lnTo>
-                  <a:lnTo>
-                    <a:pt x="5228444" y="1206234"/>
-                  </a:lnTo>
-                  <a:lnTo>
-                    <a:pt x="5300066" y="1121611"/>
-                  </a:lnTo>
-                  <a:lnTo>
-                    <a:pt x="5371689" y="1034061"/>
-                  </a:lnTo>
-                  <a:lnTo>
-                    <a:pt x="5443311" y="943483"/>
-                  </a:lnTo>
-                  <a:lnTo>
-                    <a:pt x="5514934" y="849771"/>
-                  </a:lnTo>
-                  <a:lnTo>
-                    <a:pt x="5586557" y="752818"/>
-                  </a:lnTo>
-                  <a:lnTo>
-                    <a:pt x="5658179" y="652511"/>
-                  </a:lnTo>
-                  <a:lnTo>
-                    <a:pt x="5729802" y="548734"/>
-                  </a:lnTo>
-                  <a:lnTo>
-                    <a:pt x="5801424" y="441368"/>
-                  </a:lnTo>
-                  <a:lnTo>
-                    <a:pt x="5873047" y="330288"/>
-                  </a:lnTo>
-                  <a:lnTo>
-                    <a:pt x="5944669" y="215366"/>
-                  </a:lnTo>
-                  <a:lnTo>
-                    <a:pt x="6016292" y="96468"/>
+                    <a:pt x="71622" y="1641568"/>
+                  </a:lnTo>
+                  <a:lnTo>
+                    <a:pt x="143245" y="1676578"/>
+                  </a:lnTo>
+                  <a:lnTo>
+                    <a:pt x="214867" y="1710922"/>
+                  </a:lnTo>
+                  <a:lnTo>
+                    <a:pt x="286490" y="1744613"/>
+                  </a:lnTo>
+                  <a:lnTo>
+                    <a:pt x="358112" y="1777665"/>
+                  </a:lnTo>
+                  <a:lnTo>
+                    <a:pt x="429735" y="1810088"/>
+                  </a:lnTo>
+                  <a:lnTo>
+                    <a:pt x="501357" y="1841895"/>
+                  </a:lnTo>
+                  <a:lnTo>
+                    <a:pt x="572980" y="1873097"/>
+                  </a:lnTo>
+                  <a:lnTo>
+                    <a:pt x="644602" y="1903707"/>
+                  </a:lnTo>
+                  <a:lnTo>
+                    <a:pt x="716225" y="1933735"/>
+                  </a:lnTo>
+                  <a:lnTo>
+                    <a:pt x="787847" y="1963192"/>
+                  </a:lnTo>
+                  <a:lnTo>
+                    <a:pt x="859470" y="1992089"/>
+                  </a:lnTo>
+                  <a:lnTo>
+                    <a:pt x="931092" y="2020437"/>
+                  </a:lnTo>
+                  <a:lnTo>
+                    <a:pt x="1002715" y="2048247"/>
+                  </a:lnTo>
+                  <a:lnTo>
+                    <a:pt x="1074337" y="2075527"/>
+                  </a:lnTo>
+                  <a:lnTo>
+                    <a:pt x="1145960" y="2102290"/>
+                  </a:lnTo>
+                  <a:lnTo>
+                    <a:pt x="1217582" y="2128544"/>
+                  </a:lnTo>
+                  <a:lnTo>
+                    <a:pt x="1289205" y="2154299"/>
+                  </a:lnTo>
+                  <a:lnTo>
+                    <a:pt x="1360827" y="2179564"/>
+                  </a:lnTo>
+                  <a:lnTo>
+                    <a:pt x="1432450" y="2204349"/>
+                  </a:lnTo>
+                  <a:lnTo>
+                    <a:pt x="1504073" y="2228664"/>
+                  </a:lnTo>
+                  <a:lnTo>
+                    <a:pt x="1575695" y="2252516"/>
+                  </a:lnTo>
+                  <a:lnTo>
+                    <a:pt x="1647318" y="2275915"/>
+                  </a:lnTo>
+                  <a:lnTo>
+                    <a:pt x="1718940" y="2298869"/>
+                  </a:lnTo>
+                  <a:lnTo>
+                    <a:pt x="1790563" y="2321387"/>
+                  </a:lnTo>
+                  <a:lnTo>
+                    <a:pt x="1862185" y="2343477"/>
+                  </a:lnTo>
+                  <a:lnTo>
+                    <a:pt x="1933808" y="2365147"/>
+                  </a:lnTo>
+                  <a:lnTo>
+                    <a:pt x="2005430" y="2386405"/>
+                  </a:lnTo>
+                  <a:lnTo>
+                    <a:pt x="2077053" y="2407260"/>
+                  </a:lnTo>
+                  <a:lnTo>
+                    <a:pt x="2148675" y="2427718"/>
+                  </a:lnTo>
+                  <a:lnTo>
+                    <a:pt x="2220298" y="2447787"/>
+                  </a:lnTo>
+                  <a:lnTo>
+                    <a:pt x="2291920" y="2467475"/>
+                  </a:lnTo>
+                  <a:lnTo>
+                    <a:pt x="2363543" y="2486789"/>
+                  </a:lnTo>
+                  <a:lnTo>
+                    <a:pt x="2435165" y="2505735"/>
+                  </a:lnTo>
+                  <a:lnTo>
+                    <a:pt x="2506788" y="2524322"/>
+                  </a:lnTo>
+                  <a:lnTo>
+                    <a:pt x="2578410" y="2542555"/>
+                  </a:lnTo>
+                  <a:lnTo>
+                    <a:pt x="2650033" y="2560442"/>
+                  </a:lnTo>
+                  <a:lnTo>
+                    <a:pt x="2721655" y="2577989"/>
+                  </a:lnTo>
+                  <a:lnTo>
+                    <a:pt x="2793278" y="2595202"/>
+                  </a:lnTo>
+                  <a:lnTo>
+                    <a:pt x="2864901" y="2612089"/>
+                  </a:lnTo>
+                  <a:lnTo>
+                    <a:pt x="2936523" y="2628654"/>
+                  </a:lnTo>
+                  <a:lnTo>
+                    <a:pt x="3008146" y="2644904"/>
+                  </a:lnTo>
+                  <a:lnTo>
+                    <a:pt x="3079768" y="2642522"/>
+                  </a:lnTo>
+                  <a:lnTo>
+                    <a:pt x="3151391" y="2613423"/>
+                  </a:lnTo>
+                  <a:lnTo>
+                    <a:pt x="3223013" y="2583318"/>
+                  </a:lnTo>
+                  <a:lnTo>
+                    <a:pt x="3294636" y="2552172"/>
+                  </a:lnTo>
+                  <a:lnTo>
+                    <a:pt x="3366258" y="2519948"/>
+                  </a:lnTo>
+                  <a:lnTo>
+                    <a:pt x="3437881" y="2486610"/>
+                  </a:lnTo>
+                  <a:lnTo>
+                    <a:pt x="3509503" y="2452118"/>
+                  </a:lnTo>
+                  <a:lnTo>
+                    <a:pt x="3581126" y="2416433"/>
+                  </a:lnTo>
+                  <a:lnTo>
+                    <a:pt x="3652748" y="2379514"/>
+                  </a:lnTo>
+                  <a:lnTo>
+                    <a:pt x="3724371" y="2341318"/>
+                  </a:lnTo>
+                  <a:lnTo>
+                    <a:pt x="3795993" y="2301801"/>
+                  </a:lnTo>
+                  <a:lnTo>
+                    <a:pt x="3867616" y="2260917"/>
+                  </a:lnTo>
+                  <a:lnTo>
+                    <a:pt x="3939238" y="2218618"/>
+                  </a:lnTo>
+                  <a:lnTo>
+                    <a:pt x="4010861" y="2174857"/>
+                  </a:lnTo>
+                  <a:lnTo>
+                    <a:pt x="4082483" y="2129581"/>
+                  </a:lnTo>
+                  <a:lnTo>
+                    <a:pt x="4154106" y="2082740"/>
+                  </a:lnTo>
+                  <a:lnTo>
+                    <a:pt x="4225729" y="2034278"/>
+                  </a:lnTo>
+                  <a:lnTo>
+                    <a:pt x="4297351" y="1984140"/>
+                  </a:lnTo>
+                  <a:lnTo>
+                    <a:pt x="4368974" y="1932268"/>
+                  </a:lnTo>
+                  <a:lnTo>
+                    <a:pt x="4440596" y="1878601"/>
+                  </a:lnTo>
+                  <a:lnTo>
+                    <a:pt x="4512219" y="1823078"/>
+                  </a:lnTo>
+                  <a:lnTo>
+                    <a:pt x="4583841" y="1765634"/>
+                  </a:lnTo>
+                  <a:lnTo>
+                    <a:pt x="4655464" y="1706204"/>
+                  </a:lnTo>
+                  <a:lnTo>
+                    <a:pt x="4727086" y="1644717"/>
+                  </a:lnTo>
+                  <a:lnTo>
+                    <a:pt x="4798709" y="1581104"/>
+                  </a:lnTo>
+                  <a:lnTo>
+                    <a:pt x="4870331" y="1515291"/>
+                  </a:lnTo>
+                  <a:lnTo>
+                    <a:pt x="4941954" y="1447200"/>
+                  </a:lnTo>
+                  <a:lnTo>
+                    <a:pt x="5013576" y="1376755"/>
+                  </a:lnTo>
+                  <a:lnTo>
+                    <a:pt x="5085199" y="1303873"/>
+                  </a:lnTo>
+                  <a:lnTo>
+                    <a:pt x="5156821" y="1228470"/>
+                  </a:lnTo>
+                  <a:lnTo>
+                    <a:pt x="5228444" y="1150458"/>
+                  </a:lnTo>
+                  <a:lnTo>
+                    <a:pt x="5300066" y="1069748"/>
+                  </a:lnTo>
+                  <a:lnTo>
+                    <a:pt x="5371689" y="986246"/>
+                  </a:lnTo>
+                  <a:lnTo>
+                    <a:pt x="5443311" y="899856"/>
+                  </a:lnTo>
+                  <a:lnTo>
+                    <a:pt x="5514934" y="810478"/>
+                  </a:lnTo>
+                  <a:lnTo>
+                    <a:pt x="5586557" y="718008"/>
+                  </a:lnTo>
+                  <a:lnTo>
+                    <a:pt x="5658179" y="622339"/>
+                  </a:lnTo>
+                  <a:lnTo>
+                    <a:pt x="5729802" y="523361"/>
+                  </a:lnTo>
+                  <a:lnTo>
+                    <a:pt x="5801424" y="420959"/>
+                  </a:lnTo>
+                  <a:lnTo>
+                    <a:pt x="5873047" y="315016"/>
+                  </a:lnTo>
+                  <a:lnTo>
+                    <a:pt x="5944669" y="205407"/>
+                  </a:lnTo>
+                  <a:lnTo>
+                    <a:pt x="6016292" y="92007"/>
                   </a:lnTo>
                   <a:lnTo>
                     <a:pt x="6072460" y="0"/>
@@ -3400,304 +3400,304 @@
                     <a:pt x="7090630" y="0"/>
                   </a:lnTo>
                   <a:lnTo>
-                    <a:pt x="7090630" y="3358024"/>
-                  </a:lnTo>
-                  <a:lnTo>
-                    <a:pt x="7019007" y="3352316"/>
-                  </a:lnTo>
-                  <a:lnTo>
-                    <a:pt x="6947385" y="3346498"/>
-                  </a:lnTo>
-                  <a:lnTo>
-                    <a:pt x="6875762" y="3340567"/>
-                  </a:lnTo>
-                  <a:lnTo>
-                    <a:pt x="6804139" y="3334521"/>
-                  </a:lnTo>
-                  <a:lnTo>
-                    <a:pt x="6732517" y="3328358"/>
-                  </a:lnTo>
-                  <a:lnTo>
-                    <a:pt x="6660894" y="3322076"/>
-                  </a:lnTo>
-                  <a:lnTo>
-                    <a:pt x="6589272" y="3315672"/>
-                  </a:lnTo>
-                  <a:lnTo>
-                    <a:pt x="6517649" y="3309144"/>
-                  </a:lnTo>
-                  <a:lnTo>
-                    <a:pt x="6446027" y="3302490"/>
-                  </a:lnTo>
-                  <a:lnTo>
-                    <a:pt x="6374404" y="3295706"/>
-                  </a:lnTo>
-                  <a:lnTo>
-                    <a:pt x="6302782" y="3288792"/>
-                  </a:lnTo>
-                  <a:lnTo>
-                    <a:pt x="6231159" y="3281743"/>
-                  </a:lnTo>
-                  <a:lnTo>
-                    <a:pt x="6159537" y="3274557"/>
-                  </a:lnTo>
-                  <a:lnTo>
-                    <a:pt x="6087914" y="3267233"/>
-                  </a:lnTo>
-                  <a:lnTo>
-                    <a:pt x="6016292" y="3259767"/>
-                  </a:lnTo>
-                  <a:lnTo>
-                    <a:pt x="5944669" y="3252156"/>
-                  </a:lnTo>
-                  <a:lnTo>
-                    <a:pt x="5873047" y="3244397"/>
-                  </a:lnTo>
-                  <a:lnTo>
-                    <a:pt x="5801424" y="3236488"/>
-                  </a:lnTo>
-                  <a:lnTo>
-                    <a:pt x="5729802" y="3228426"/>
-                  </a:lnTo>
-                  <a:lnTo>
-                    <a:pt x="5658179" y="3220208"/>
-                  </a:lnTo>
-                  <a:lnTo>
-                    <a:pt x="5586557" y="3211831"/>
-                  </a:lnTo>
-                  <a:lnTo>
-                    <a:pt x="5514934" y="3203291"/>
-                  </a:lnTo>
-                  <a:lnTo>
-                    <a:pt x="5443311" y="3194586"/>
-                  </a:lnTo>
-                  <a:lnTo>
-                    <a:pt x="5371689" y="3185712"/>
-                  </a:lnTo>
-                  <a:lnTo>
-                    <a:pt x="5300066" y="3176666"/>
-                  </a:lnTo>
-                  <a:lnTo>
-                    <a:pt x="5228444" y="3167445"/>
-                  </a:lnTo>
-                  <a:lnTo>
-                    <a:pt x="5156821" y="3158046"/>
-                  </a:lnTo>
-                  <a:lnTo>
-                    <a:pt x="5085199" y="3148464"/>
-                  </a:lnTo>
-                  <a:lnTo>
-                    <a:pt x="5013576" y="3138697"/>
-                  </a:lnTo>
-                  <a:lnTo>
-                    <a:pt x="4941954" y="3128740"/>
-                  </a:lnTo>
-                  <a:lnTo>
-                    <a:pt x="4870331" y="3118591"/>
-                  </a:lnTo>
-                  <a:lnTo>
-                    <a:pt x="4798709" y="3108245"/>
-                  </a:lnTo>
-                  <a:lnTo>
-                    <a:pt x="4727086" y="3097699"/>
-                  </a:lnTo>
-                  <a:lnTo>
-                    <a:pt x="4655464" y="3086948"/>
-                  </a:lnTo>
-                  <a:lnTo>
-                    <a:pt x="4583841" y="3075989"/>
-                  </a:lnTo>
-                  <a:lnTo>
-                    <a:pt x="4512219" y="3064818"/>
-                  </a:lnTo>
-                  <a:lnTo>
-                    <a:pt x="4440596" y="3053430"/>
-                  </a:lnTo>
-                  <a:lnTo>
-                    <a:pt x="4368974" y="3041822"/>
-                  </a:lnTo>
-                  <a:lnTo>
-                    <a:pt x="4297351" y="3029988"/>
-                  </a:lnTo>
-                  <a:lnTo>
-                    <a:pt x="4225729" y="3017926"/>
-                  </a:lnTo>
-                  <a:lnTo>
-                    <a:pt x="4154106" y="3005630"/>
-                  </a:lnTo>
-                  <a:lnTo>
-                    <a:pt x="4082483" y="2993095"/>
-                  </a:lnTo>
-                  <a:lnTo>
-                    <a:pt x="4010861" y="2980318"/>
-                  </a:lnTo>
-                  <a:lnTo>
-                    <a:pt x="3939238" y="2967293"/>
-                  </a:lnTo>
-                  <a:lnTo>
-                    <a:pt x="3867616" y="2954016"/>
-                  </a:lnTo>
-                  <a:lnTo>
-                    <a:pt x="3795993" y="2940482"/>
-                  </a:lnTo>
-                  <a:lnTo>
-                    <a:pt x="3724371" y="2926686"/>
-                  </a:lnTo>
-                  <a:lnTo>
-                    <a:pt x="3652748" y="2912622"/>
-                  </a:lnTo>
-                  <a:lnTo>
-                    <a:pt x="3581126" y="2898286"/>
-                  </a:lnTo>
-                  <a:lnTo>
-                    <a:pt x="3509503" y="2883672"/>
-                  </a:lnTo>
-                  <a:lnTo>
-                    <a:pt x="3437881" y="2868775"/>
-                  </a:lnTo>
-                  <a:lnTo>
-                    <a:pt x="3366258" y="2853589"/>
-                  </a:lnTo>
-                  <a:lnTo>
-                    <a:pt x="3294636" y="2838110"/>
-                  </a:lnTo>
-                  <a:lnTo>
-                    <a:pt x="3223013" y="2822330"/>
-                  </a:lnTo>
-                  <a:lnTo>
-                    <a:pt x="3151391" y="2806245"/>
-                  </a:lnTo>
-                  <a:lnTo>
-                    <a:pt x="3079768" y="2789848"/>
-                  </a:lnTo>
-                  <a:lnTo>
-                    <a:pt x="3008146" y="2800124"/>
-                  </a:lnTo>
-                  <a:lnTo>
-                    <a:pt x="2936523" y="2828627"/>
-                  </a:lnTo>
-                  <a:lnTo>
-                    <a:pt x="2864901" y="2856178"/>
-                  </a:lnTo>
-                  <a:lnTo>
-                    <a:pt x="2793278" y="2882807"/>
-                  </a:lnTo>
-                  <a:lnTo>
-                    <a:pt x="2721655" y="2908546"/>
-                  </a:lnTo>
-                  <a:lnTo>
-                    <a:pt x="2650033" y="2933424"/>
-                  </a:lnTo>
-                  <a:lnTo>
-                    <a:pt x="2578410" y="2957470"/>
-                  </a:lnTo>
-                  <a:lnTo>
-                    <a:pt x="2506788" y="2980713"/>
-                  </a:lnTo>
-                  <a:lnTo>
-                    <a:pt x="2435165" y="3003178"/>
-                  </a:lnTo>
-                  <a:lnTo>
-                    <a:pt x="2363543" y="3024893"/>
-                  </a:lnTo>
-                  <a:lnTo>
-                    <a:pt x="2291920" y="3045881"/>
-                  </a:lnTo>
-                  <a:lnTo>
-                    <a:pt x="2220298" y="3066167"/>
-                  </a:lnTo>
-                  <a:lnTo>
-                    <a:pt x="2148675" y="3085776"/>
-                  </a:lnTo>
-                  <a:lnTo>
-                    <a:pt x="2077053" y="3104728"/>
-                  </a:lnTo>
-                  <a:lnTo>
-                    <a:pt x="2005430" y="3123048"/>
-                  </a:lnTo>
-                  <a:lnTo>
-                    <a:pt x="1933808" y="3140754"/>
-                  </a:lnTo>
-                  <a:lnTo>
-                    <a:pt x="1862185" y="3157869"/>
-                  </a:lnTo>
-                  <a:lnTo>
-                    <a:pt x="1790563" y="3174411"/>
-                  </a:lnTo>
-                  <a:lnTo>
-                    <a:pt x="1718940" y="3190400"/>
-                  </a:lnTo>
-                  <a:lnTo>
-                    <a:pt x="1647318" y="3205855"/>
-                  </a:lnTo>
-                  <a:lnTo>
-                    <a:pt x="1575695" y="3220793"/>
-                  </a:lnTo>
-                  <a:lnTo>
-                    <a:pt x="1504073" y="3235232"/>
-                  </a:lnTo>
-                  <a:lnTo>
-                    <a:pt x="1432450" y="3249187"/>
-                  </a:lnTo>
-                  <a:lnTo>
-                    <a:pt x="1360827" y="3262677"/>
-                  </a:lnTo>
-                  <a:lnTo>
-                    <a:pt x="1289205" y="3275715"/>
-                  </a:lnTo>
-                  <a:lnTo>
-                    <a:pt x="1217582" y="3288317"/>
-                  </a:lnTo>
-                  <a:lnTo>
-                    <a:pt x="1145960" y="3300498"/>
-                  </a:lnTo>
-                  <a:lnTo>
-                    <a:pt x="1074337" y="3312272"/>
-                  </a:lnTo>
-                  <a:lnTo>
-                    <a:pt x="1002715" y="3323652"/>
-                  </a:lnTo>
-                  <a:lnTo>
-                    <a:pt x="931092" y="3334651"/>
-                  </a:lnTo>
-                  <a:lnTo>
-                    <a:pt x="859470" y="3345283"/>
-                  </a:lnTo>
-                  <a:lnTo>
-                    <a:pt x="787847" y="3355559"/>
-                  </a:lnTo>
-                  <a:lnTo>
-                    <a:pt x="716225" y="3365492"/>
-                  </a:lnTo>
-                  <a:lnTo>
-                    <a:pt x="644602" y="3375093"/>
-                  </a:lnTo>
-                  <a:lnTo>
-                    <a:pt x="572980" y="3384372"/>
-                  </a:lnTo>
-                  <a:lnTo>
-                    <a:pt x="501357" y="3393342"/>
-                  </a:lnTo>
-                  <a:lnTo>
-                    <a:pt x="429735" y="3402011"/>
-                  </a:lnTo>
-                  <a:lnTo>
-                    <a:pt x="358112" y="3410391"/>
-                  </a:lnTo>
-                  <a:lnTo>
-                    <a:pt x="286490" y="3418490"/>
-                  </a:lnTo>
-                  <a:lnTo>
-                    <a:pt x="214867" y="3426319"/>
-                  </a:lnTo>
-                  <a:lnTo>
-                    <a:pt x="143245" y="3433886"/>
-                  </a:lnTo>
-                  <a:lnTo>
-                    <a:pt x="71622" y="3441200"/>
-                  </a:lnTo>
-                  <a:lnTo>
-                    <a:pt x="0" y="3448270"/>
+                    <a:pt x="7090630" y="3202750"/>
+                  </a:lnTo>
+                  <a:lnTo>
+                    <a:pt x="7019007" y="3197306"/>
+                  </a:lnTo>
+                  <a:lnTo>
+                    <a:pt x="6947385" y="3191757"/>
+                  </a:lnTo>
+                  <a:lnTo>
+                    <a:pt x="6875762" y="3186100"/>
+                  </a:lnTo>
+                  <a:lnTo>
+                    <a:pt x="6804139" y="3180334"/>
+                  </a:lnTo>
+                  <a:lnTo>
+                    <a:pt x="6732517" y="3174456"/>
+                  </a:lnTo>
+                  <a:lnTo>
+                    <a:pt x="6660894" y="3168465"/>
+                  </a:lnTo>
+                  <a:lnTo>
+                    <a:pt x="6589272" y="3162357"/>
+                  </a:lnTo>
+                  <a:lnTo>
+                    <a:pt x="6517649" y="3156131"/>
+                  </a:lnTo>
+                  <a:lnTo>
+                    <a:pt x="6446027" y="3149784"/>
+                  </a:lnTo>
+                  <a:lnTo>
+                    <a:pt x="6374404" y="3143314"/>
+                  </a:lnTo>
+                  <a:lnTo>
+                    <a:pt x="6302782" y="3136719"/>
+                  </a:lnTo>
+                  <a:lnTo>
+                    <a:pt x="6231159" y="3129996"/>
+                  </a:lnTo>
+                  <a:lnTo>
+                    <a:pt x="6159537" y="3123143"/>
+                  </a:lnTo>
+                  <a:lnTo>
+                    <a:pt x="6087914" y="3116157"/>
+                  </a:lnTo>
+                  <a:lnTo>
+                    <a:pt x="6016292" y="3109036"/>
+                  </a:lnTo>
+                  <a:lnTo>
+                    <a:pt x="5944669" y="3101777"/>
+                  </a:lnTo>
+                  <a:lnTo>
+                    <a:pt x="5873047" y="3094377"/>
+                  </a:lnTo>
+                  <a:lnTo>
+                    <a:pt x="5801424" y="3086834"/>
+                  </a:lnTo>
+                  <a:lnTo>
+                    <a:pt x="5729802" y="3079145"/>
+                  </a:lnTo>
+                  <a:lnTo>
+                    <a:pt x="5658179" y="3071307"/>
+                  </a:lnTo>
+                  <a:lnTo>
+                    <a:pt x="5586557" y="3063317"/>
+                  </a:lnTo>
+                  <a:lnTo>
+                    <a:pt x="5514934" y="3055172"/>
+                  </a:lnTo>
+                  <a:lnTo>
+                    <a:pt x="5443311" y="3046869"/>
+                  </a:lnTo>
+                  <a:lnTo>
+                    <a:pt x="5371689" y="3038406"/>
+                  </a:lnTo>
+                  <a:lnTo>
+                    <a:pt x="5300066" y="3029778"/>
+                  </a:lnTo>
+                  <a:lnTo>
+                    <a:pt x="5228444" y="3020984"/>
+                  </a:lnTo>
+                  <a:lnTo>
+                    <a:pt x="5156821" y="3012019"/>
+                  </a:lnTo>
+                  <a:lnTo>
+                    <a:pt x="5085199" y="3002880"/>
+                  </a:lnTo>
+                  <a:lnTo>
+                    <a:pt x="5013576" y="2993565"/>
+                  </a:lnTo>
+                  <a:lnTo>
+                    <a:pt x="4941954" y="2984069"/>
+                  </a:lnTo>
+                  <a:lnTo>
+                    <a:pt x="4870331" y="2974389"/>
+                  </a:lnTo>
+                  <a:lnTo>
+                    <a:pt x="4798709" y="2964521"/>
+                  </a:lnTo>
+                  <a:lnTo>
+                    <a:pt x="4727086" y="2954462"/>
+                  </a:lnTo>
+                  <a:lnTo>
+                    <a:pt x="4655464" y="2944209"/>
+                  </a:lnTo>
+                  <a:lnTo>
+                    <a:pt x="4583841" y="2933756"/>
+                  </a:lnTo>
+                  <a:lnTo>
+                    <a:pt x="4512219" y="2923102"/>
+                  </a:lnTo>
+                  <a:lnTo>
+                    <a:pt x="4440596" y="2912240"/>
+                  </a:lnTo>
+                  <a:lnTo>
+                    <a:pt x="4368974" y="2901169"/>
+                  </a:lnTo>
+                  <a:lnTo>
+                    <a:pt x="4297351" y="2889883"/>
+                  </a:lnTo>
+                  <a:lnTo>
+                    <a:pt x="4225729" y="2878378"/>
+                  </a:lnTo>
+                  <a:lnTo>
+                    <a:pt x="4154106" y="2866650"/>
+                  </a:lnTo>
+                  <a:lnTo>
+                    <a:pt x="4082483" y="2854696"/>
+                  </a:lnTo>
+                  <a:lnTo>
+                    <a:pt x="4010861" y="2842509"/>
+                  </a:lnTo>
+                  <a:lnTo>
+                    <a:pt x="3939238" y="2830087"/>
+                  </a:lnTo>
+                  <a:lnTo>
+                    <a:pt x="3867616" y="2817424"/>
+                  </a:lnTo>
+                  <a:lnTo>
+                    <a:pt x="3795993" y="2804515"/>
+                  </a:lnTo>
+                  <a:lnTo>
+                    <a:pt x="3724371" y="2791357"/>
+                  </a:lnTo>
+                  <a:lnTo>
+                    <a:pt x="3652748" y="2777943"/>
+                  </a:lnTo>
+                  <a:lnTo>
+                    <a:pt x="3581126" y="2764270"/>
+                  </a:lnTo>
+                  <a:lnTo>
+                    <a:pt x="3509503" y="2750332"/>
+                  </a:lnTo>
+                  <a:lnTo>
+                    <a:pt x="3437881" y="2736124"/>
+                  </a:lnTo>
+                  <a:lnTo>
+                    <a:pt x="3366258" y="2721641"/>
+                  </a:lnTo>
+                  <a:lnTo>
+                    <a:pt x="3294636" y="2706877"/>
+                  </a:lnTo>
+                  <a:lnTo>
+                    <a:pt x="3223013" y="2691827"/>
+                  </a:lnTo>
+                  <a:lnTo>
+                    <a:pt x="3151391" y="2676485"/>
+                  </a:lnTo>
+                  <a:lnTo>
+                    <a:pt x="3079768" y="2660846"/>
+                  </a:lnTo>
+                  <a:lnTo>
+                    <a:pt x="3008146" y="2670647"/>
+                  </a:lnTo>
+                  <a:lnTo>
+                    <a:pt x="2936523" y="2697833"/>
+                  </a:lnTo>
+                  <a:lnTo>
+                    <a:pt x="2864901" y="2724109"/>
+                  </a:lnTo>
+                  <a:lnTo>
+                    <a:pt x="2793278" y="2749507"/>
+                  </a:lnTo>
+                  <a:lnTo>
+                    <a:pt x="2721655" y="2774055"/>
+                  </a:lnTo>
+                  <a:lnTo>
+                    <a:pt x="2650033" y="2797783"/>
+                  </a:lnTo>
+                  <a:lnTo>
+                    <a:pt x="2578410" y="2820718"/>
+                  </a:lnTo>
+                  <a:lnTo>
+                    <a:pt x="2506788" y="2842886"/>
+                  </a:lnTo>
+                  <a:lnTo>
+                    <a:pt x="2435165" y="2864312"/>
+                  </a:lnTo>
+                  <a:lnTo>
+                    <a:pt x="2363543" y="2885023"/>
+                  </a:lnTo>
+                  <a:lnTo>
+                    <a:pt x="2291920" y="2905040"/>
+                  </a:lnTo>
+                  <a:lnTo>
+                    <a:pt x="2220298" y="2924389"/>
+                  </a:lnTo>
+                  <a:lnTo>
+                    <a:pt x="2148675" y="2943091"/>
+                  </a:lnTo>
+                  <a:lnTo>
+                    <a:pt x="2077053" y="2961167"/>
+                  </a:lnTo>
+                  <a:lnTo>
+                    <a:pt x="2005430" y="2978639"/>
+                  </a:lnTo>
+                  <a:lnTo>
+                    <a:pt x="1933808" y="2995527"/>
+                  </a:lnTo>
+                  <a:lnTo>
+                    <a:pt x="1862185" y="3011850"/>
+                  </a:lnTo>
+                  <a:lnTo>
+                    <a:pt x="1790563" y="3027627"/>
+                  </a:lnTo>
+                  <a:lnTo>
+                    <a:pt x="1718940" y="3042877"/>
+                  </a:lnTo>
+                  <a:lnTo>
+                    <a:pt x="1647318" y="3057617"/>
+                  </a:lnTo>
+                  <a:lnTo>
+                    <a:pt x="1575695" y="3071865"/>
+                  </a:lnTo>
+                  <a:lnTo>
+                    <a:pt x="1504073" y="3085636"/>
+                  </a:lnTo>
+                  <a:lnTo>
+                    <a:pt x="1432450" y="3098946"/>
+                  </a:lnTo>
+                  <a:lnTo>
+                    <a:pt x="1360827" y="3111812"/>
+                  </a:lnTo>
+                  <a:lnTo>
+                    <a:pt x="1289205" y="3124247"/>
+                  </a:lnTo>
+                  <a:lnTo>
+                    <a:pt x="1217582" y="3136266"/>
+                  </a:lnTo>
+                  <a:lnTo>
+                    <a:pt x="1145960" y="3147884"/>
+                  </a:lnTo>
+                  <a:lnTo>
+                    <a:pt x="1074337" y="3159113"/>
+                  </a:lnTo>
+                  <a:lnTo>
+                    <a:pt x="1002715" y="3169967"/>
+                  </a:lnTo>
+                  <a:lnTo>
+                    <a:pt x="931092" y="3180458"/>
+                  </a:lnTo>
+                  <a:lnTo>
+                    <a:pt x="859470" y="3190598"/>
+                  </a:lnTo>
+                  <a:lnTo>
+                    <a:pt x="787847" y="3200399"/>
+                  </a:lnTo>
+                  <a:lnTo>
+                    <a:pt x="716225" y="3209873"/>
+                  </a:lnTo>
+                  <a:lnTo>
+                    <a:pt x="644602" y="3219030"/>
+                  </a:lnTo>
+                  <a:lnTo>
+                    <a:pt x="572980" y="3227880"/>
+                  </a:lnTo>
+                  <a:lnTo>
+                    <a:pt x="501357" y="3236435"/>
+                  </a:lnTo>
+                  <a:lnTo>
+                    <a:pt x="429735" y="3244704"/>
+                  </a:lnTo>
+                  <a:lnTo>
+                    <a:pt x="358112" y="3252696"/>
+                  </a:lnTo>
+                  <a:lnTo>
+                    <a:pt x="286490" y="3260421"/>
+                  </a:lnTo>
+                  <a:lnTo>
+                    <a:pt x="214867" y="3267887"/>
+                  </a:lnTo>
+                  <a:lnTo>
+                    <a:pt x="143245" y="3275104"/>
+                  </a:lnTo>
+                  <a:lnTo>
+                    <a:pt x="71622" y="3282080"/>
+                  </a:lnTo>
+                  <a:lnTo>
+                    <a:pt x="0" y="3288823"/>
                   </a:lnTo>
                   <a:close/>
                 </a:path>
@@ -3723,267 +3723,267 @@
           </p:nvSpPr>
           <p:spPr>
             <a:xfrm>
-              <a:off x="1172049" y="1896563"/>
-              <a:ext cx="6072460" cy="2773133"/>
+              <a:off x="1172049" y="2073503"/>
+              <a:ext cx="6072460" cy="2644904"/>
             </a:xfrm>
             <a:custGeom>
               <a:avLst/>
               <a:pathLst>
-                <a:path w="6072460" h="2773133">
+                <a:path w="6072460" h="2644904">
                   <a:moveTo>
-                    <a:pt x="0" y="1683735"/>
+                    <a:pt x="0" y="1605880"/>
                   </a:moveTo>
                   <a:lnTo>
-                    <a:pt x="71622" y="1721153"/>
-                  </a:lnTo>
-                  <a:lnTo>
-                    <a:pt x="143245" y="1757860"/>
-                  </a:lnTo>
-                  <a:lnTo>
-                    <a:pt x="214867" y="1793870"/>
-                  </a:lnTo>
-                  <a:lnTo>
-                    <a:pt x="286490" y="1829195"/>
-                  </a:lnTo>
-                  <a:lnTo>
-                    <a:pt x="358112" y="1863848"/>
-                  </a:lnTo>
-                  <a:lnTo>
-                    <a:pt x="429735" y="1897843"/>
-                  </a:lnTo>
-                  <a:lnTo>
-                    <a:pt x="501357" y="1931192"/>
-                  </a:lnTo>
-                  <a:lnTo>
-                    <a:pt x="572980" y="1963908"/>
-                  </a:lnTo>
-                  <a:lnTo>
-                    <a:pt x="644602" y="1996001"/>
-                  </a:lnTo>
-                  <a:lnTo>
-                    <a:pt x="716225" y="2027485"/>
-                  </a:lnTo>
-                  <a:lnTo>
-                    <a:pt x="787847" y="2058370"/>
-                  </a:lnTo>
-                  <a:lnTo>
-                    <a:pt x="859470" y="2088668"/>
-                  </a:lnTo>
-                  <a:lnTo>
-                    <a:pt x="931092" y="2118391"/>
-                  </a:lnTo>
-                  <a:lnTo>
-                    <a:pt x="1002715" y="2147548"/>
-                  </a:lnTo>
-                  <a:lnTo>
-                    <a:pt x="1074337" y="2176152"/>
-                  </a:lnTo>
-                  <a:lnTo>
-                    <a:pt x="1145960" y="2204212"/>
-                  </a:lnTo>
-                  <a:lnTo>
-                    <a:pt x="1217582" y="2231738"/>
-                  </a:lnTo>
-                  <a:lnTo>
-                    <a:pt x="1289205" y="2258742"/>
-                  </a:lnTo>
-                  <a:lnTo>
-                    <a:pt x="1360827" y="2285232"/>
-                  </a:lnTo>
-                  <a:lnTo>
-                    <a:pt x="1432450" y="2311219"/>
-                  </a:lnTo>
-                  <a:lnTo>
-                    <a:pt x="1504073" y="2336712"/>
-                  </a:lnTo>
-                  <a:lnTo>
-                    <a:pt x="1575695" y="2361721"/>
-                  </a:lnTo>
-                  <a:lnTo>
-                    <a:pt x="1647318" y="2386254"/>
-                  </a:lnTo>
-                  <a:lnTo>
-                    <a:pt x="1718940" y="2410321"/>
-                  </a:lnTo>
-                  <a:lnTo>
-                    <a:pt x="1790563" y="2433931"/>
-                  </a:lnTo>
-                  <a:lnTo>
-                    <a:pt x="1862185" y="2457092"/>
-                  </a:lnTo>
-                  <a:lnTo>
-                    <a:pt x="1933808" y="2479813"/>
-                  </a:lnTo>
-                  <a:lnTo>
-                    <a:pt x="2005430" y="2502102"/>
-                  </a:lnTo>
-                  <a:lnTo>
-                    <a:pt x="2077053" y="2523967"/>
-                  </a:lnTo>
-                  <a:lnTo>
-                    <a:pt x="2148675" y="2545417"/>
-                  </a:lnTo>
-                  <a:lnTo>
-                    <a:pt x="2220298" y="2566459"/>
-                  </a:lnTo>
-                  <a:lnTo>
-                    <a:pt x="2291920" y="2587101"/>
-                  </a:lnTo>
-                  <a:lnTo>
-                    <a:pt x="2363543" y="2607351"/>
-                  </a:lnTo>
-                  <a:lnTo>
-                    <a:pt x="2435165" y="2627217"/>
-                  </a:lnTo>
-                  <a:lnTo>
-                    <a:pt x="2506788" y="2646704"/>
-                  </a:lnTo>
-                  <a:lnTo>
-                    <a:pt x="2578410" y="2665822"/>
-                  </a:lnTo>
-                  <a:lnTo>
-                    <a:pt x="2650033" y="2684576"/>
-                  </a:lnTo>
-                  <a:lnTo>
-                    <a:pt x="2721655" y="2702973"/>
-                  </a:lnTo>
-                  <a:lnTo>
-                    <a:pt x="2793278" y="2721021"/>
-                  </a:lnTo>
-                  <a:lnTo>
-                    <a:pt x="2864901" y="2738726"/>
-                  </a:lnTo>
-                  <a:lnTo>
-                    <a:pt x="2936523" y="2756095"/>
-                  </a:lnTo>
-                  <a:lnTo>
-                    <a:pt x="3008146" y="2773133"/>
-                  </a:lnTo>
-                  <a:lnTo>
-                    <a:pt x="3079768" y="2770635"/>
-                  </a:lnTo>
-                  <a:lnTo>
-                    <a:pt x="3151391" y="2740126"/>
-                  </a:lnTo>
-                  <a:lnTo>
-                    <a:pt x="3223013" y="2708561"/>
-                  </a:lnTo>
-                  <a:lnTo>
-                    <a:pt x="3294636" y="2675905"/>
-                  </a:lnTo>
-                  <a:lnTo>
-                    <a:pt x="3366258" y="2642119"/>
-                  </a:lnTo>
-                  <a:lnTo>
-                    <a:pt x="3437881" y="2607164"/>
-                  </a:lnTo>
-                  <a:lnTo>
-                    <a:pt x="3509503" y="2571000"/>
-                  </a:lnTo>
-                  <a:lnTo>
-                    <a:pt x="3581126" y="2533585"/>
-                  </a:lnTo>
-                  <a:lnTo>
-                    <a:pt x="3652748" y="2494876"/>
-                  </a:lnTo>
-                  <a:lnTo>
-                    <a:pt x="3724371" y="2454829"/>
-                  </a:lnTo>
-                  <a:lnTo>
-                    <a:pt x="3795993" y="2413395"/>
-                  </a:lnTo>
-                  <a:lnTo>
-                    <a:pt x="3867616" y="2370529"/>
-                  </a:lnTo>
-                  <a:lnTo>
-                    <a:pt x="3939238" y="2326180"/>
-                  </a:lnTo>
-                  <a:lnTo>
-                    <a:pt x="4010861" y="2280297"/>
-                  </a:lnTo>
-                  <a:lnTo>
-                    <a:pt x="4082483" y="2232826"/>
-                  </a:lnTo>
-                  <a:lnTo>
-                    <a:pt x="4154106" y="2183714"/>
-                  </a:lnTo>
-                  <a:lnTo>
-                    <a:pt x="4225729" y="2132903"/>
-                  </a:lnTo>
-                  <a:lnTo>
-                    <a:pt x="4297351" y="2080334"/>
-                  </a:lnTo>
-                  <a:lnTo>
-                    <a:pt x="4368974" y="2025947"/>
-                  </a:lnTo>
-                  <a:lnTo>
-                    <a:pt x="4440596" y="1969678"/>
-                  </a:lnTo>
-                  <a:lnTo>
-                    <a:pt x="4512219" y="1911463"/>
-                  </a:lnTo>
-                  <a:lnTo>
-                    <a:pt x="4583841" y="1851235"/>
-                  </a:lnTo>
-                  <a:lnTo>
-                    <a:pt x="4655464" y="1788923"/>
-                  </a:lnTo>
-                  <a:lnTo>
-                    <a:pt x="4727086" y="1724456"/>
-                  </a:lnTo>
-                  <a:lnTo>
-                    <a:pt x="4798709" y="1657758"/>
-                  </a:lnTo>
-                  <a:lnTo>
-                    <a:pt x="4870331" y="1588754"/>
-                  </a:lnTo>
-                  <a:lnTo>
-                    <a:pt x="4941954" y="1517363"/>
-                  </a:lnTo>
-                  <a:lnTo>
-                    <a:pt x="5013576" y="1443502"/>
-                  </a:lnTo>
-                  <a:lnTo>
-                    <a:pt x="5085199" y="1367086"/>
-                  </a:lnTo>
-                  <a:lnTo>
-                    <a:pt x="5156821" y="1288027"/>
-                  </a:lnTo>
-                  <a:lnTo>
-                    <a:pt x="5228444" y="1206234"/>
-                  </a:lnTo>
-                  <a:lnTo>
-                    <a:pt x="5300066" y="1121611"/>
-                  </a:lnTo>
-                  <a:lnTo>
-                    <a:pt x="5371689" y="1034061"/>
-                  </a:lnTo>
-                  <a:lnTo>
-                    <a:pt x="5443311" y="943483"/>
-                  </a:lnTo>
-                  <a:lnTo>
-                    <a:pt x="5514934" y="849771"/>
-                  </a:lnTo>
-                  <a:lnTo>
-                    <a:pt x="5586557" y="752818"/>
-                  </a:lnTo>
-                  <a:lnTo>
-                    <a:pt x="5658179" y="652511"/>
-                  </a:lnTo>
-                  <a:lnTo>
-                    <a:pt x="5729802" y="548734"/>
-                  </a:lnTo>
-                  <a:lnTo>
-                    <a:pt x="5801424" y="441368"/>
-                  </a:lnTo>
-                  <a:lnTo>
-                    <a:pt x="5873047" y="330288"/>
-                  </a:lnTo>
-                  <a:lnTo>
-                    <a:pt x="5944669" y="215366"/>
-                  </a:lnTo>
-                  <a:lnTo>
-                    <a:pt x="6016292" y="96468"/>
+                    <a:pt x="71622" y="1641568"/>
+                  </a:lnTo>
+                  <a:lnTo>
+                    <a:pt x="143245" y="1676578"/>
+                  </a:lnTo>
+                  <a:lnTo>
+                    <a:pt x="214867" y="1710922"/>
+                  </a:lnTo>
+                  <a:lnTo>
+                    <a:pt x="286490" y="1744613"/>
+                  </a:lnTo>
+                  <a:lnTo>
+                    <a:pt x="358112" y="1777665"/>
+                  </a:lnTo>
+                  <a:lnTo>
+                    <a:pt x="429735" y="1810088"/>
+                  </a:lnTo>
+                  <a:lnTo>
+                    <a:pt x="501357" y="1841895"/>
+                  </a:lnTo>
+                  <a:lnTo>
+                    <a:pt x="572980" y="1873097"/>
+                  </a:lnTo>
+                  <a:lnTo>
+                    <a:pt x="644602" y="1903707"/>
+                  </a:lnTo>
+                  <a:lnTo>
+                    <a:pt x="716225" y="1933735"/>
+                  </a:lnTo>
+                  <a:lnTo>
+                    <a:pt x="787847" y="1963192"/>
+                  </a:lnTo>
+                  <a:lnTo>
+                    <a:pt x="859470" y="1992089"/>
+                  </a:lnTo>
+                  <a:lnTo>
+                    <a:pt x="931092" y="2020437"/>
+                  </a:lnTo>
+                  <a:lnTo>
+                    <a:pt x="1002715" y="2048247"/>
+                  </a:lnTo>
+                  <a:lnTo>
+                    <a:pt x="1074337" y="2075527"/>
+                  </a:lnTo>
+                  <a:lnTo>
+                    <a:pt x="1145960" y="2102290"/>
+                  </a:lnTo>
+                  <a:lnTo>
+                    <a:pt x="1217582" y="2128544"/>
+                  </a:lnTo>
+                  <a:lnTo>
+                    <a:pt x="1289205" y="2154299"/>
+                  </a:lnTo>
+                  <a:lnTo>
+                    <a:pt x="1360827" y="2179564"/>
+                  </a:lnTo>
+                  <a:lnTo>
+                    <a:pt x="1432450" y="2204349"/>
+                  </a:lnTo>
+                  <a:lnTo>
+                    <a:pt x="1504073" y="2228664"/>
+                  </a:lnTo>
+                  <a:lnTo>
+                    <a:pt x="1575695" y="2252516"/>
+                  </a:lnTo>
+                  <a:lnTo>
+                    <a:pt x="1647318" y="2275915"/>
+                  </a:lnTo>
+                  <a:lnTo>
+                    <a:pt x="1718940" y="2298869"/>
+                  </a:lnTo>
+                  <a:lnTo>
+                    <a:pt x="1790563" y="2321387"/>
+                  </a:lnTo>
+                  <a:lnTo>
+                    <a:pt x="1862185" y="2343477"/>
+                  </a:lnTo>
+                  <a:lnTo>
+                    <a:pt x="1933808" y="2365147"/>
+                  </a:lnTo>
+                  <a:lnTo>
+                    <a:pt x="2005430" y="2386405"/>
+                  </a:lnTo>
+                  <a:lnTo>
+                    <a:pt x="2077053" y="2407260"/>
+                  </a:lnTo>
+                  <a:lnTo>
+                    <a:pt x="2148675" y="2427718"/>
+                  </a:lnTo>
+                  <a:lnTo>
+                    <a:pt x="2220298" y="2447787"/>
+                  </a:lnTo>
+                  <a:lnTo>
+                    <a:pt x="2291920" y="2467475"/>
+                  </a:lnTo>
+                  <a:lnTo>
+                    <a:pt x="2363543" y="2486789"/>
+                  </a:lnTo>
+                  <a:lnTo>
+                    <a:pt x="2435165" y="2505735"/>
+                  </a:lnTo>
+                  <a:lnTo>
+                    <a:pt x="2506788" y="2524322"/>
+                  </a:lnTo>
+                  <a:lnTo>
+                    <a:pt x="2578410" y="2542555"/>
+                  </a:lnTo>
+                  <a:lnTo>
+                    <a:pt x="2650033" y="2560442"/>
+                  </a:lnTo>
+                  <a:lnTo>
+                    <a:pt x="2721655" y="2577989"/>
+                  </a:lnTo>
+                  <a:lnTo>
+                    <a:pt x="2793278" y="2595202"/>
+                  </a:lnTo>
+                  <a:lnTo>
+                    <a:pt x="2864901" y="2612089"/>
+                  </a:lnTo>
+                  <a:lnTo>
+                    <a:pt x="2936523" y="2628654"/>
+                  </a:lnTo>
+                  <a:lnTo>
+                    <a:pt x="3008146" y="2644904"/>
+                  </a:lnTo>
+                  <a:lnTo>
+                    <a:pt x="3079768" y="2642522"/>
+                  </a:lnTo>
+                  <a:lnTo>
+                    <a:pt x="3151391" y="2613423"/>
+                  </a:lnTo>
+                  <a:lnTo>
+                    <a:pt x="3223013" y="2583318"/>
+                  </a:lnTo>
+                  <a:lnTo>
+                    <a:pt x="3294636" y="2552172"/>
+                  </a:lnTo>
+                  <a:lnTo>
+                    <a:pt x="3366258" y="2519948"/>
+                  </a:lnTo>
+                  <a:lnTo>
+                    <a:pt x="3437881" y="2486610"/>
+                  </a:lnTo>
+                  <a:lnTo>
+                    <a:pt x="3509503" y="2452118"/>
+                  </a:lnTo>
+                  <a:lnTo>
+                    <a:pt x="3581126" y="2416433"/>
+                  </a:lnTo>
+                  <a:lnTo>
+                    <a:pt x="3652748" y="2379514"/>
+                  </a:lnTo>
+                  <a:lnTo>
+                    <a:pt x="3724371" y="2341318"/>
+                  </a:lnTo>
+                  <a:lnTo>
+                    <a:pt x="3795993" y="2301801"/>
+                  </a:lnTo>
+                  <a:lnTo>
+                    <a:pt x="3867616" y="2260917"/>
+                  </a:lnTo>
+                  <a:lnTo>
+                    <a:pt x="3939238" y="2218618"/>
+                  </a:lnTo>
+                  <a:lnTo>
+                    <a:pt x="4010861" y="2174857"/>
+                  </a:lnTo>
+                  <a:lnTo>
+                    <a:pt x="4082483" y="2129581"/>
+                  </a:lnTo>
+                  <a:lnTo>
+                    <a:pt x="4154106" y="2082740"/>
+                  </a:lnTo>
+                  <a:lnTo>
+                    <a:pt x="4225729" y="2034278"/>
+                  </a:lnTo>
+                  <a:lnTo>
+                    <a:pt x="4297351" y="1984140"/>
+                  </a:lnTo>
+                  <a:lnTo>
+                    <a:pt x="4368974" y="1932268"/>
+                  </a:lnTo>
+                  <a:lnTo>
+                    <a:pt x="4440596" y="1878601"/>
+                  </a:lnTo>
+                  <a:lnTo>
+                    <a:pt x="4512219" y="1823078"/>
+                  </a:lnTo>
+                  <a:lnTo>
+                    <a:pt x="4583841" y="1765634"/>
+                  </a:lnTo>
+                  <a:lnTo>
+                    <a:pt x="4655464" y="1706204"/>
+                  </a:lnTo>
+                  <a:lnTo>
+                    <a:pt x="4727086" y="1644717"/>
+                  </a:lnTo>
+                  <a:lnTo>
+                    <a:pt x="4798709" y="1581104"/>
+                  </a:lnTo>
+                  <a:lnTo>
+                    <a:pt x="4870331" y="1515291"/>
+                  </a:lnTo>
+                  <a:lnTo>
+                    <a:pt x="4941954" y="1447200"/>
+                  </a:lnTo>
+                  <a:lnTo>
+                    <a:pt x="5013576" y="1376755"/>
+                  </a:lnTo>
+                  <a:lnTo>
+                    <a:pt x="5085199" y="1303873"/>
+                  </a:lnTo>
+                  <a:lnTo>
+                    <a:pt x="5156821" y="1228470"/>
+                  </a:lnTo>
+                  <a:lnTo>
+                    <a:pt x="5228444" y="1150458"/>
+                  </a:lnTo>
+                  <a:lnTo>
+                    <a:pt x="5300066" y="1069748"/>
+                  </a:lnTo>
+                  <a:lnTo>
+                    <a:pt x="5371689" y="986246"/>
+                  </a:lnTo>
+                  <a:lnTo>
+                    <a:pt x="5443311" y="899856"/>
+                  </a:lnTo>
+                  <a:lnTo>
+                    <a:pt x="5514934" y="810478"/>
+                  </a:lnTo>
+                  <a:lnTo>
+                    <a:pt x="5586557" y="718008"/>
+                  </a:lnTo>
+                  <a:lnTo>
+                    <a:pt x="5658179" y="622339"/>
+                  </a:lnTo>
+                  <a:lnTo>
+                    <a:pt x="5729802" y="523361"/>
+                  </a:lnTo>
+                  <a:lnTo>
+                    <a:pt x="5801424" y="420959"/>
+                  </a:lnTo>
+                  <a:lnTo>
+                    <a:pt x="5873047" y="315016"/>
+                  </a:lnTo>
+                  <a:lnTo>
+                    <a:pt x="5944669" y="205407"/>
+                  </a:lnTo>
+                  <a:lnTo>
+                    <a:pt x="6016292" y="92007"/>
                   </a:lnTo>
                   <a:lnTo>
                     <a:pt x="6072460" y="0"/>
@@ -4006,312 +4006,312 @@
           </p:nvSpPr>
           <p:spPr>
             <a:xfrm>
-              <a:off x="1172049" y="4686411"/>
-              <a:ext cx="7090630" cy="658421"/>
+              <a:off x="1172049" y="4734349"/>
+              <a:ext cx="7090630" cy="627976"/>
             </a:xfrm>
             <a:custGeom>
               <a:avLst/>
               <a:pathLst>
-                <a:path w="7090630" h="658421">
+                <a:path w="7090630" h="627976">
                   <a:moveTo>
-                    <a:pt x="7090630" y="568175"/>
+                    <a:pt x="7090630" y="541903"/>
                   </a:moveTo>
                   <a:lnTo>
-                    <a:pt x="7019007" y="562468"/>
-                  </a:lnTo>
-                  <a:lnTo>
-                    <a:pt x="6947385" y="556650"/>
-                  </a:lnTo>
-                  <a:lnTo>
-                    <a:pt x="6875762" y="550719"/>
-                  </a:lnTo>
-                  <a:lnTo>
-                    <a:pt x="6804139" y="544673"/>
-                  </a:lnTo>
-                  <a:lnTo>
-                    <a:pt x="6732517" y="538510"/>
-                  </a:lnTo>
-                  <a:lnTo>
-                    <a:pt x="6660894" y="532228"/>
-                  </a:lnTo>
-                  <a:lnTo>
-                    <a:pt x="6589272" y="525824"/>
-                  </a:lnTo>
-                  <a:lnTo>
-                    <a:pt x="6517649" y="519296"/>
-                  </a:lnTo>
-                  <a:lnTo>
-                    <a:pt x="6446027" y="512641"/>
-                  </a:lnTo>
-                  <a:lnTo>
-                    <a:pt x="6374404" y="505858"/>
-                  </a:lnTo>
-                  <a:lnTo>
-                    <a:pt x="6302782" y="498943"/>
-                  </a:lnTo>
-                  <a:lnTo>
-                    <a:pt x="6231159" y="491895"/>
-                  </a:lnTo>
-                  <a:lnTo>
-                    <a:pt x="6159537" y="484709"/>
-                  </a:lnTo>
-                  <a:lnTo>
-                    <a:pt x="6087914" y="477385"/>
-                  </a:lnTo>
-                  <a:lnTo>
-                    <a:pt x="6016292" y="469918"/>
-                  </a:lnTo>
-                  <a:lnTo>
-                    <a:pt x="5944669" y="462307"/>
-                  </a:lnTo>
-                  <a:lnTo>
-                    <a:pt x="5873047" y="454549"/>
-                  </a:lnTo>
-                  <a:lnTo>
-                    <a:pt x="5801424" y="446640"/>
-                  </a:lnTo>
-                  <a:lnTo>
-                    <a:pt x="5729802" y="438578"/>
-                  </a:lnTo>
-                  <a:lnTo>
-                    <a:pt x="5658179" y="430360"/>
-                  </a:lnTo>
-                  <a:lnTo>
-                    <a:pt x="5586557" y="421982"/>
-                  </a:lnTo>
-                  <a:lnTo>
-                    <a:pt x="5514934" y="413443"/>
-                  </a:lnTo>
-                  <a:lnTo>
-                    <a:pt x="5443311" y="404737"/>
-                  </a:lnTo>
-                  <a:lnTo>
-                    <a:pt x="5371689" y="395864"/>
-                  </a:lnTo>
-                  <a:lnTo>
-                    <a:pt x="5300066" y="386818"/>
-                  </a:lnTo>
-                  <a:lnTo>
-                    <a:pt x="5228444" y="377597"/>
-                  </a:lnTo>
-                  <a:lnTo>
-                    <a:pt x="5156821" y="368198"/>
-                  </a:lnTo>
-                  <a:lnTo>
-                    <a:pt x="5085199" y="358616"/>
-                  </a:lnTo>
-                  <a:lnTo>
-                    <a:pt x="5013576" y="348849"/>
-                  </a:lnTo>
-                  <a:lnTo>
-                    <a:pt x="4941954" y="338892"/>
-                  </a:lnTo>
-                  <a:lnTo>
-                    <a:pt x="4870331" y="328743"/>
-                  </a:lnTo>
-                  <a:lnTo>
-                    <a:pt x="4798709" y="318397"/>
-                  </a:lnTo>
-                  <a:lnTo>
-                    <a:pt x="4727086" y="307850"/>
-                  </a:lnTo>
-                  <a:lnTo>
-                    <a:pt x="4655464" y="297100"/>
-                  </a:lnTo>
-                  <a:lnTo>
-                    <a:pt x="4583841" y="286141"/>
-                  </a:lnTo>
-                  <a:lnTo>
-                    <a:pt x="4512219" y="274969"/>
-                  </a:lnTo>
-                  <a:lnTo>
-                    <a:pt x="4440596" y="263582"/>
-                  </a:lnTo>
-                  <a:lnTo>
-                    <a:pt x="4368974" y="251973"/>
-                  </a:lnTo>
-                  <a:lnTo>
-                    <a:pt x="4297351" y="240140"/>
-                  </a:lnTo>
-                  <a:lnTo>
-                    <a:pt x="4225729" y="228078"/>
-                  </a:lnTo>
-                  <a:lnTo>
-                    <a:pt x="4154106" y="215781"/>
-                  </a:lnTo>
-                  <a:lnTo>
-                    <a:pt x="4082483" y="203247"/>
-                  </a:lnTo>
-                  <a:lnTo>
-                    <a:pt x="4010861" y="190470"/>
-                  </a:lnTo>
-                  <a:lnTo>
-                    <a:pt x="3939238" y="177445"/>
-                  </a:lnTo>
-                  <a:lnTo>
-                    <a:pt x="3867616" y="164168"/>
-                  </a:lnTo>
-                  <a:lnTo>
-                    <a:pt x="3795993" y="150634"/>
-                  </a:lnTo>
-                  <a:lnTo>
-                    <a:pt x="3724371" y="136838"/>
-                  </a:lnTo>
-                  <a:lnTo>
-                    <a:pt x="3652748" y="122774"/>
-                  </a:lnTo>
-                  <a:lnTo>
-                    <a:pt x="3581126" y="108438"/>
-                  </a:lnTo>
-                  <a:lnTo>
-                    <a:pt x="3509503" y="93824"/>
-                  </a:lnTo>
-                  <a:lnTo>
-                    <a:pt x="3437881" y="78927"/>
-                  </a:lnTo>
-                  <a:lnTo>
-                    <a:pt x="3366258" y="63741"/>
-                  </a:lnTo>
-                  <a:lnTo>
-                    <a:pt x="3294636" y="48261"/>
-                  </a:lnTo>
-                  <a:lnTo>
-                    <a:pt x="3223013" y="32482"/>
-                  </a:lnTo>
-                  <a:lnTo>
-                    <a:pt x="3151391" y="16396"/>
+                    <a:pt x="7019007" y="536459"/>
+                  </a:lnTo>
+                  <a:lnTo>
+                    <a:pt x="6947385" y="530910"/>
+                  </a:lnTo>
+                  <a:lnTo>
+                    <a:pt x="6875762" y="525254"/>
+                  </a:lnTo>
+                  <a:lnTo>
+                    <a:pt x="6804139" y="519488"/>
+                  </a:lnTo>
+                  <a:lnTo>
+                    <a:pt x="6732517" y="513610"/>
+                  </a:lnTo>
+                  <a:lnTo>
+                    <a:pt x="6660894" y="507618"/>
+                  </a:lnTo>
+                  <a:lnTo>
+                    <a:pt x="6589272" y="501510"/>
+                  </a:lnTo>
+                  <a:lnTo>
+                    <a:pt x="6517649" y="495284"/>
+                  </a:lnTo>
+                  <a:lnTo>
+                    <a:pt x="6446027" y="488937"/>
+                  </a:lnTo>
+                  <a:lnTo>
+                    <a:pt x="6374404" y="482467"/>
+                  </a:lnTo>
+                  <a:lnTo>
+                    <a:pt x="6302782" y="475872"/>
+                  </a:lnTo>
+                  <a:lnTo>
+                    <a:pt x="6231159" y="469149"/>
+                  </a:lnTo>
+                  <a:lnTo>
+                    <a:pt x="6159537" y="462296"/>
+                  </a:lnTo>
+                  <a:lnTo>
+                    <a:pt x="6087914" y="455311"/>
+                  </a:lnTo>
+                  <a:lnTo>
+                    <a:pt x="6016292" y="448189"/>
+                  </a:lnTo>
+                  <a:lnTo>
+                    <a:pt x="5944669" y="440930"/>
+                  </a:lnTo>
+                  <a:lnTo>
+                    <a:pt x="5873047" y="433531"/>
+                  </a:lnTo>
+                  <a:lnTo>
+                    <a:pt x="5801424" y="425987"/>
+                  </a:lnTo>
+                  <a:lnTo>
+                    <a:pt x="5729802" y="418298"/>
+                  </a:lnTo>
+                  <a:lnTo>
+                    <a:pt x="5658179" y="410460"/>
+                  </a:lnTo>
+                  <a:lnTo>
+                    <a:pt x="5586557" y="402470"/>
+                  </a:lnTo>
+                  <a:lnTo>
+                    <a:pt x="5514934" y="394325"/>
+                  </a:lnTo>
+                  <a:lnTo>
+                    <a:pt x="5443311" y="386023"/>
+                  </a:lnTo>
+                  <a:lnTo>
+                    <a:pt x="5371689" y="377559"/>
+                  </a:lnTo>
+                  <a:lnTo>
+                    <a:pt x="5300066" y="368932"/>
+                  </a:lnTo>
+                  <a:lnTo>
+                    <a:pt x="5228444" y="360137"/>
+                  </a:lnTo>
+                  <a:lnTo>
+                    <a:pt x="5156821" y="351172"/>
+                  </a:lnTo>
+                  <a:lnTo>
+                    <a:pt x="5085199" y="342034"/>
+                  </a:lnTo>
+                  <a:lnTo>
+                    <a:pt x="5013576" y="332718"/>
+                  </a:lnTo>
+                  <a:lnTo>
+                    <a:pt x="4941954" y="323222"/>
+                  </a:lnTo>
+                  <a:lnTo>
+                    <a:pt x="4870331" y="313542"/>
+                  </a:lnTo>
+                  <a:lnTo>
+                    <a:pt x="4798709" y="303674"/>
+                  </a:lnTo>
+                  <a:lnTo>
+                    <a:pt x="4727086" y="293615"/>
+                  </a:lnTo>
+                  <a:lnTo>
+                    <a:pt x="4655464" y="283362"/>
+                  </a:lnTo>
+                  <a:lnTo>
+                    <a:pt x="4583841" y="272910"/>
+                  </a:lnTo>
+                  <a:lnTo>
+                    <a:pt x="4512219" y="262255"/>
+                  </a:lnTo>
+                  <a:lnTo>
+                    <a:pt x="4440596" y="251394"/>
+                  </a:lnTo>
+                  <a:lnTo>
+                    <a:pt x="4368974" y="240322"/>
+                  </a:lnTo>
+                  <a:lnTo>
+                    <a:pt x="4297351" y="229036"/>
+                  </a:lnTo>
+                  <a:lnTo>
+                    <a:pt x="4225729" y="217531"/>
+                  </a:lnTo>
+                  <a:lnTo>
+                    <a:pt x="4154106" y="205804"/>
+                  </a:lnTo>
+                  <a:lnTo>
+                    <a:pt x="4082483" y="193849"/>
+                  </a:lnTo>
+                  <a:lnTo>
+                    <a:pt x="4010861" y="181663"/>
+                  </a:lnTo>
+                  <a:lnTo>
+                    <a:pt x="3939238" y="169240"/>
+                  </a:lnTo>
+                  <a:lnTo>
+                    <a:pt x="3867616" y="156577"/>
+                  </a:lnTo>
+                  <a:lnTo>
+                    <a:pt x="3795993" y="143669"/>
+                  </a:lnTo>
+                  <a:lnTo>
+                    <a:pt x="3724371" y="130510"/>
+                  </a:lnTo>
+                  <a:lnTo>
+                    <a:pt x="3652748" y="117097"/>
+                  </a:lnTo>
+                  <a:lnTo>
+                    <a:pt x="3581126" y="103424"/>
+                  </a:lnTo>
+                  <a:lnTo>
+                    <a:pt x="3509503" y="89485"/>
+                  </a:lnTo>
+                  <a:lnTo>
+                    <a:pt x="3437881" y="75277"/>
+                  </a:lnTo>
+                  <a:lnTo>
+                    <a:pt x="3366258" y="60794"/>
+                  </a:lnTo>
+                  <a:lnTo>
+                    <a:pt x="3294636" y="46030"/>
+                  </a:lnTo>
+                  <a:lnTo>
+                    <a:pt x="3223013" y="30980"/>
+                  </a:lnTo>
+                  <a:lnTo>
+                    <a:pt x="3151391" y="15638"/>
                   </a:lnTo>
                   <a:lnTo>
                     <a:pt x="3079768" y="0"/>
                   </a:lnTo>
                   <a:lnTo>
-                    <a:pt x="3008146" y="10276"/>
-                  </a:lnTo>
-                  <a:lnTo>
-                    <a:pt x="2936523" y="38779"/>
-                  </a:lnTo>
-                  <a:lnTo>
-                    <a:pt x="2864901" y="66329"/>
-                  </a:lnTo>
-                  <a:lnTo>
-                    <a:pt x="2793278" y="92958"/>
-                  </a:lnTo>
-                  <a:lnTo>
-                    <a:pt x="2721655" y="118697"/>
-                  </a:lnTo>
-                  <a:lnTo>
-                    <a:pt x="2650033" y="143576"/>
-                  </a:lnTo>
-                  <a:lnTo>
-                    <a:pt x="2578410" y="167622"/>
-                  </a:lnTo>
-                  <a:lnTo>
-                    <a:pt x="2506788" y="190865"/>
-                  </a:lnTo>
-                  <a:lnTo>
-                    <a:pt x="2435165" y="213330"/>
-                  </a:lnTo>
-                  <a:lnTo>
-                    <a:pt x="2363543" y="235044"/>
-                  </a:lnTo>
-                  <a:lnTo>
-                    <a:pt x="2291920" y="256033"/>
-                  </a:lnTo>
-                  <a:lnTo>
-                    <a:pt x="2220298" y="276319"/>
-                  </a:lnTo>
-                  <a:lnTo>
-                    <a:pt x="2148675" y="295927"/>
-                  </a:lnTo>
-                  <a:lnTo>
-                    <a:pt x="2077053" y="314880"/>
-                  </a:lnTo>
-                  <a:lnTo>
-                    <a:pt x="2005430" y="333199"/>
-                  </a:lnTo>
-                  <a:lnTo>
-                    <a:pt x="1933808" y="350906"/>
-                  </a:lnTo>
-                  <a:lnTo>
-                    <a:pt x="1862185" y="368020"/>
-                  </a:lnTo>
-                  <a:lnTo>
-                    <a:pt x="1790563" y="384563"/>
-                  </a:lnTo>
-                  <a:lnTo>
-                    <a:pt x="1718940" y="400552"/>
-                  </a:lnTo>
-                  <a:lnTo>
-                    <a:pt x="1647318" y="416007"/>
-                  </a:lnTo>
-                  <a:lnTo>
-                    <a:pt x="1575695" y="430945"/>
-                  </a:lnTo>
-                  <a:lnTo>
-                    <a:pt x="1504073" y="445383"/>
-                  </a:lnTo>
-                  <a:lnTo>
-                    <a:pt x="1432450" y="459339"/>
-                  </a:lnTo>
-                  <a:lnTo>
-                    <a:pt x="1360827" y="472828"/>
-                  </a:lnTo>
-                  <a:lnTo>
-                    <a:pt x="1289205" y="485866"/>
-                  </a:lnTo>
-                  <a:lnTo>
-                    <a:pt x="1217582" y="498469"/>
-                  </a:lnTo>
-                  <a:lnTo>
-                    <a:pt x="1145960" y="510650"/>
-                  </a:lnTo>
-                  <a:lnTo>
-                    <a:pt x="1074337" y="522423"/>
-                  </a:lnTo>
-                  <a:lnTo>
-                    <a:pt x="1002715" y="533803"/>
-                  </a:lnTo>
-                  <a:lnTo>
-                    <a:pt x="931092" y="544803"/>
-                  </a:lnTo>
-                  <a:lnTo>
-                    <a:pt x="859470" y="555435"/>
-                  </a:lnTo>
-                  <a:lnTo>
-                    <a:pt x="787847" y="565711"/>
-                  </a:lnTo>
-                  <a:lnTo>
-                    <a:pt x="716225" y="575644"/>
-                  </a:lnTo>
-                  <a:lnTo>
-                    <a:pt x="644602" y="585244"/>
-                  </a:lnTo>
-                  <a:lnTo>
-                    <a:pt x="572980" y="594524"/>
-                  </a:lnTo>
-                  <a:lnTo>
-                    <a:pt x="501357" y="603494"/>
-                  </a:lnTo>
-                  <a:lnTo>
-                    <a:pt x="429735" y="612163"/>
-                  </a:lnTo>
-                  <a:lnTo>
-                    <a:pt x="358112" y="620543"/>
-                  </a:lnTo>
-                  <a:lnTo>
-                    <a:pt x="286490" y="628642"/>
-                  </a:lnTo>
-                  <a:lnTo>
-                    <a:pt x="214867" y="636471"/>
-                  </a:lnTo>
-                  <a:lnTo>
-                    <a:pt x="143245" y="644038"/>
-                  </a:lnTo>
-                  <a:lnTo>
-                    <a:pt x="71622" y="651352"/>
-                  </a:lnTo>
-                  <a:lnTo>
-                    <a:pt x="0" y="658421"/>
+                    <a:pt x="3008146" y="9801"/>
+                  </a:lnTo>
+                  <a:lnTo>
+                    <a:pt x="2936523" y="36986"/>
+                  </a:lnTo>
+                  <a:lnTo>
+                    <a:pt x="2864901" y="63262"/>
+                  </a:lnTo>
+                  <a:lnTo>
+                    <a:pt x="2793278" y="88660"/>
+                  </a:lnTo>
+                  <a:lnTo>
+                    <a:pt x="2721655" y="113209"/>
+                  </a:lnTo>
+                  <a:lnTo>
+                    <a:pt x="2650033" y="136937"/>
+                  </a:lnTo>
+                  <a:lnTo>
+                    <a:pt x="2578410" y="159871"/>
+                  </a:lnTo>
+                  <a:lnTo>
+                    <a:pt x="2506788" y="182039"/>
+                  </a:lnTo>
+                  <a:lnTo>
+                    <a:pt x="2435165" y="203466"/>
+                  </a:lnTo>
+                  <a:lnTo>
+                    <a:pt x="2363543" y="224176"/>
+                  </a:lnTo>
+                  <a:lnTo>
+                    <a:pt x="2291920" y="244194"/>
+                  </a:lnTo>
+                  <a:lnTo>
+                    <a:pt x="2220298" y="263542"/>
+                  </a:lnTo>
+                  <a:lnTo>
+                    <a:pt x="2148675" y="282244"/>
+                  </a:lnTo>
+                  <a:lnTo>
+                    <a:pt x="2077053" y="300320"/>
+                  </a:lnTo>
+                  <a:lnTo>
+                    <a:pt x="2005430" y="317792"/>
+                  </a:lnTo>
+                  <a:lnTo>
+                    <a:pt x="1933808" y="334680"/>
+                  </a:lnTo>
+                  <a:lnTo>
+                    <a:pt x="1862185" y="351003"/>
+                  </a:lnTo>
+                  <a:lnTo>
+                    <a:pt x="1790563" y="366781"/>
+                  </a:lnTo>
+                  <a:lnTo>
+                    <a:pt x="1718940" y="382031"/>
+                  </a:lnTo>
+                  <a:lnTo>
+                    <a:pt x="1647318" y="396771"/>
+                  </a:lnTo>
+                  <a:lnTo>
+                    <a:pt x="1575695" y="411018"/>
+                  </a:lnTo>
+                  <a:lnTo>
+                    <a:pt x="1504073" y="424789"/>
+                  </a:lnTo>
+                  <a:lnTo>
+                    <a:pt x="1432450" y="438099"/>
+                  </a:lnTo>
+                  <a:lnTo>
+                    <a:pt x="1360827" y="450965"/>
+                  </a:lnTo>
+                  <a:lnTo>
+                    <a:pt x="1289205" y="463400"/>
+                  </a:lnTo>
+                  <a:lnTo>
+                    <a:pt x="1217582" y="475420"/>
+                  </a:lnTo>
+                  <a:lnTo>
+                    <a:pt x="1145960" y="487037"/>
+                  </a:lnTo>
+                  <a:lnTo>
+                    <a:pt x="1074337" y="498267"/>
+                  </a:lnTo>
+                  <a:lnTo>
+                    <a:pt x="1002715" y="509121"/>
+                  </a:lnTo>
+                  <a:lnTo>
+                    <a:pt x="931092" y="519611"/>
+                  </a:lnTo>
+                  <a:lnTo>
+                    <a:pt x="859470" y="529752"/>
+                  </a:lnTo>
+                  <a:lnTo>
+                    <a:pt x="787847" y="539553"/>
+                  </a:lnTo>
+                  <a:lnTo>
+                    <a:pt x="716225" y="549026"/>
+                  </a:lnTo>
+                  <a:lnTo>
+                    <a:pt x="644602" y="558183"/>
+                  </a:lnTo>
+                  <a:lnTo>
+                    <a:pt x="572980" y="567034"/>
+                  </a:lnTo>
+                  <a:lnTo>
+                    <a:pt x="501357" y="575588"/>
+                  </a:lnTo>
+                  <a:lnTo>
+                    <a:pt x="429735" y="583857"/>
+                  </a:lnTo>
+                  <a:lnTo>
+                    <a:pt x="358112" y="591849"/>
+                  </a:lnTo>
+                  <a:lnTo>
+                    <a:pt x="286490" y="599574"/>
+                  </a:lnTo>
+                  <a:lnTo>
+                    <a:pt x="214867" y="607041"/>
+                  </a:lnTo>
+                  <a:lnTo>
+                    <a:pt x="143245" y="614258"/>
+                  </a:lnTo>
+                  <a:lnTo>
+                    <a:pt x="71622" y="621234"/>
+                  </a:lnTo>
+                  <a:lnTo>
+                    <a:pt x="0" y="627976"/>
                   </a:lnTo>
                 </a:path>
               </a:pathLst>
@@ -4331,309 +4331,309 @@
           </p:nvSpPr>
           <p:spPr>
             <a:xfrm>
-              <a:off x="1172049" y="4228256"/>
-              <a:ext cx="7090630" cy="686606"/>
+              <a:off x="1172049" y="4297379"/>
+              <a:ext cx="7090630" cy="654857"/>
             </a:xfrm>
             <a:custGeom>
               <a:avLst/>
               <a:pathLst>
-                <a:path w="7090630" h="686606">
+                <a:path w="7090630" h="654857">
                   <a:moveTo>
-                    <a:pt x="0" y="686606"/>
+                    <a:pt x="0" y="654857"/>
                   </a:moveTo>
                   <a:lnTo>
-                    <a:pt x="71622" y="681888"/>
-                  </a:lnTo>
-                  <a:lnTo>
-                    <a:pt x="143245" y="677135"/>
-                  </a:lnTo>
-                  <a:lnTo>
-                    <a:pt x="214867" y="672348"/>
-                  </a:lnTo>
-                  <a:lnTo>
-                    <a:pt x="286490" y="667524"/>
-                  </a:lnTo>
-                  <a:lnTo>
-                    <a:pt x="358112" y="662665"/>
-                  </a:lnTo>
-                  <a:lnTo>
-                    <a:pt x="429735" y="657769"/>
-                  </a:lnTo>
-                  <a:lnTo>
-                    <a:pt x="501357" y="652837"/>
-                  </a:lnTo>
-                  <a:lnTo>
-                    <a:pt x="572980" y="647869"/>
-                  </a:lnTo>
-                  <a:lnTo>
-                    <a:pt x="644602" y="642863"/>
-                  </a:lnTo>
-                  <a:lnTo>
-                    <a:pt x="716225" y="637820"/>
-                  </a:lnTo>
-                  <a:lnTo>
-                    <a:pt x="787847" y="632740"/>
-                  </a:lnTo>
-                  <a:lnTo>
-                    <a:pt x="859470" y="627622"/>
-                  </a:lnTo>
-                  <a:lnTo>
-                    <a:pt x="931092" y="622466"/>
-                  </a:lnTo>
-                  <a:lnTo>
-                    <a:pt x="1002715" y="617272"/>
-                  </a:lnTo>
-                  <a:lnTo>
-                    <a:pt x="1074337" y="612038"/>
-                  </a:lnTo>
-                  <a:lnTo>
-                    <a:pt x="1145960" y="606766"/>
-                  </a:lnTo>
-                  <a:lnTo>
-                    <a:pt x="1217582" y="601455"/>
-                  </a:lnTo>
-                  <a:lnTo>
-                    <a:pt x="1289205" y="596105"/>
-                  </a:lnTo>
-                  <a:lnTo>
-                    <a:pt x="1360827" y="590714"/>
-                  </a:lnTo>
-                  <a:lnTo>
-                    <a:pt x="1432450" y="585283"/>
-                  </a:lnTo>
-                  <a:lnTo>
-                    <a:pt x="1504073" y="579812"/>
-                  </a:lnTo>
-                  <a:lnTo>
-                    <a:pt x="1575695" y="574301"/>
-                  </a:lnTo>
-                  <a:lnTo>
-                    <a:pt x="1647318" y="568748"/>
-                  </a:lnTo>
-                  <a:lnTo>
-                    <a:pt x="1718940" y="563154"/>
-                  </a:lnTo>
-                  <a:lnTo>
-                    <a:pt x="1790563" y="557519"/>
-                  </a:lnTo>
-                  <a:lnTo>
-                    <a:pt x="1862185" y="551841"/>
-                  </a:lnTo>
-                  <a:lnTo>
-                    <a:pt x="1933808" y="546122"/>
-                  </a:lnTo>
-                  <a:lnTo>
-                    <a:pt x="2005430" y="540359"/>
-                  </a:lnTo>
-                  <a:lnTo>
-                    <a:pt x="2077053" y="534554"/>
-                  </a:lnTo>
-                  <a:lnTo>
-                    <a:pt x="2148675" y="528706"/>
-                  </a:lnTo>
-                  <a:lnTo>
-                    <a:pt x="2220298" y="522814"/>
-                  </a:lnTo>
-                  <a:lnTo>
-                    <a:pt x="2291920" y="516879"/>
-                  </a:lnTo>
-                  <a:lnTo>
-                    <a:pt x="2363543" y="510899"/>
-                  </a:lnTo>
-                  <a:lnTo>
-                    <a:pt x="2435165" y="504875"/>
-                  </a:lnTo>
-                  <a:lnTo>
-                    <a:pt x="2506788" y="498806"/>
-                  </a:lnTo>
-                  <a:lnTo>
-                    <a:pt x="2578410" y="492692"/>
-                  </a:lnTo>
-                  <a:lnTo>
-                    <a:pt x="2650033" y="486532"/>
-                  </a:lnTo>
-                  <a:lnTo>
-                    <a:pt x="2721655" y="480327"/>
-                  </a:lnTo>
-                  <a:lnTo>
-                    <a:pt x="2793278" y="474076"/>
-                  </a:lnTo>
-                  <a:lnTo>
-                    <a:pt x="2864901" y="467778"/>
-                  </a:lnTo>
-                  <a:lnTo>
-                    <a:pt x="2936523" y="461433"/>
-                  </a:lnTo>
-                  <a:lnTo>
-                    <a:pt x="3008146" y="455041"/>
-                  </a:lnTo>
-                  <a:lnTo>
-                    <a:pt x="3079768" y="448601"/>
-                  </a:lnTo>
-                  <a:lnTo>
-                    <a:pt x="3151391" y="442114"/>
-                  </a:lnTo>
-                  <a:lnTo>
-                    <a:pt x="3223013" y="435578"/>
-                  </a:lnTo>
-                  <a:lnTo>
-                    <a:pt x="3294636" y="428994"/>
-                  </a:lnTo>
-                  <a:lnTo>
-                    <a:pt x="3366258" y="422360"/>
-                  </a:lnTo>
-                  <a:lnTo>
-                    <a:pt x="3437881" y="415678"/>
-                  </a:lnTo>
-                  <a:lnTo>
-                    <a:pt x="3509503" y="408946"/>
-                  </a:lnTo>
-                  <a:lnTo>
-                    <a:pt x="3581126" y="402163"/>
-                  </a:lnTo>
-                  <a:lnTo>
-                    <a:pt x="3652748" y="395330"/>
-                  </a:lnTo>
-                  <a:lnTo>
-                    <a:pt x="3724371" y="388447"/>
-                  </a:lnTo>
-                  <a:lnTo>
-                    <a:pt x="3795993" y="381512"/>
-                  </a:lnTo>
-                  <a:lnTo>
-                    <a:pt x="3867616" y="374526"/>
-                  </a:lnTo>
-                  <a:lnTo>
-                    <a:pt x="3939238" y="367487"/>
-                  </a:lnTo>
-                  <a:lnTo>
-                    <a:pt x="4010861" y="360397"/>
-                  </a:lnTo>
-                  <a:lnTo>
-                    <a:pt x="4082483" y="353253"/>
-                  </a:lnTo>
-                  <a:lnTo>
-                    <a:pt x="4154106" y="346057"/>
-                  </a:lnTo>
-                  <a:lnTo>
-                    <a:pt x="4225729" y="338807"/>
-                  </a:lnTo>
-                  <a:lnTo>
-                    <a:pt x="4297351" y="331503"/>
-                  </a:lnTo>
-                  <a:lnTo>
-                    <a:pt x="4368974" y="324144"/>
-                  </a:lnTo>
-                  <a:lnTo>
-                    <a:pt x="4440596" y="316731"/>
-                  </a:lnTo>
-                  <a:lnTo>
-                    <a:pt x="4512219" y="309263"/>
-                  </a:lnTo>
-                  <a:lnTo>
-                    <a:pt x="4583841" y="301740"/>
-                  </a:lnTo>
-                  <a:lnTo>
-                    <a:pt x="4655464" y="294160"/>
-                  </a:lnTo>
-                  <a:lnTo>
-                    <a:pt x="4727086" y="286524"/>
-                  </a:lnTo>
-                  <a:lnTo>
-                    <a:pt x="4798709" y="278831"/>
-                  </a:lnTo>
-                  <a:lnTo>
-                    <a:pt x="4870331" y="271081"/>
-                  </a:lnTo>
-                  <a:lnTo>
-                    <a:pt x="4941954" y="263274"/>
-                  </a:lnTo>
-                  <a:lnTo>
-                    <a:pt x="5013576" y="255408"/>
-                  </a:lnTo>
-                  <a:lnTo>
-                    <a:pt x="5085199" y="247484"/>
-                  </a:lnTo>
-                  <a:lnTo>
-                    <a:pt x="5156821" y="239501"/>
-                  </a:lnTo>
-                  <a:lnTo>
-                    <a:pt x="5228444" y="231458"/>
-                  </a:lnTo>
-                  <a:lnTo>
-                    <a:pt x="5300066" y="223356"/>
-                  </a:lnTo>
-                  <a:lnTo>
-                    <a:pt x="5371689" y="215193"/>
-                  </a:lnTo>
-                  <a:lnTo>
-                    <a:pt x="5443311" y="206970"/>
-                  </a:lnTo>
-                  <a:lnTo>
-                    <a:pt x="5514934" y="198686"/>
-                  </a:lnTo>
-                  <a:lnTo>
-                    <a:pt x="5586557" y="190340"/>
-                  </a:lnTo>
-                  <a:lnTo>
-                    <a:pt x="5658179" y="181932"/>
-                  </a:lnTo>
-                  <a:lnTo>
-                    <a:pt x="5729802" y="173461"/>
-                  </a:lnTo>
-                  <a:lnTo>
-                    <a:pt x="5801424" y="164927"/>
-                  </a:lnTo>
-                  <a:lnTo>
-                    <a:pt x="5873047" y="156330"/>
-                  </a:lnTo>
-                  <a:lnTo>
-                    <a:pt x="5944669" y="147669"/>
-                  </a:lnTo>
-                  <a:lnTo>
-                    <a:pt x="6016292" y="138944"/>
-                  </a:lnTo>
-                  <a:lnTo>
-                    <a:pt x="6087914" y="130154"/>
-                  </a:lnTo>
-                  <a:lnTo>
-                    <a:pt x="6159537" y="121298"/>
-                  </a:lnTo>
-                  <a:lnTo>
-                    <a:pt x="6231159" y="112377"/>
-                  </a:lnTo>
-                  <a:lnTo>
-                    <a:pt x="6302782" y="103389"/>
-                  </a:lnTo>
-                  <a:lnTo>
-                    <a:pt x="6374404" y="94334"/>
-                  </a:lnTo>
-                  <a:lnTo>
-                    <a:pt x="6446027" y="85212"/>
-                  </a:lnTo>
-                  <a:lnTo>
-                    <a:pt x="6517649" y="76022"/>
-                  </a:lnTo>
-                  <a:lnTo>
-                    <a:pt x="6589272" y="66764"/>
-                  </a:lnTo>
-                  <a:lnTo>
-                    <a:pt x="6660894" y="57437"/>
-                  </a:lnTo>
-                  <a:lnTo>
-                    <a:pt x="6732517" y="48040"/>
-                  </a:lnTo>
-                  <a:lnTo>
-                    <a:pt x="6804139" y="38574"/>
-                  </a:lnTo>
-                  <a:lnTo>
-                    <a:pt x="6875762" y="29037"/>
-                  </a:lnTo>
-                  <a:lnTo>
-                    <a:pt x="6947385" y="19430"/>
-                  </a:lnTo>
-                  <a:lnTo>
-                    <a:pt x="7019007" y="9751"/>
+                    <a:pt x="71622" y="650358"/>
+                  </a:lnTo>
+                  <a:lnTo>
+                    <a:pt x="143245" y="645825"/>
+                  </a:lnTo>
+                  <a:lnTo>
+                    <a:pt x="214867" y="641258"/>
+                  </a:lnTo>
+                  <a:lnTo>
+                    <a:pt x="286490" y="636658"/>
+                  </a:lnTo>
+                  <a:lnTo>
+                    <a:pt x="358112" y="632023"/>
+                  </a:lnTo>
+                  <a:lnTo>
+                    <a:pt x="429735" y="627354"/>
+                  </a:lnTo>
+                  <a:lnTo>
+                    <a:pt x="501357" y="622650"/>
+                  </a:lnTo>
+                  <a:lnTo>
+                    <a:pt x="572980" y="617911"/>
+                  </a:lnTo>
+                  <a:lnTo>
+                    <a:pt x="644602" y="613137"/>
+                  </a:lnTo>
+                  <a:lnTo>
+                    <a:pt x="716225" y="608328"/>
+                  </a:lnTo>
+                  <a:lnTo>
+                    <a:pt x="787847" y="603482"/>
+                  </a:lnTo>
+                  <a:lnTo>
+                    <a:pt x="859470" y="598601"/>
+                  </a:lnTo>
+                  <a:lnTo>
+                    <a:pt x="931092" y="593683"/>
+                  </a:lnTo>
+                  <a:lnTo>
+                    <a:pt x="1002715" y="588729"/>
+                  </a:lnTo>
+                  <a:lnTo>
+                    <a:pt x="1074337" y="583738"/>
+                  </a:lnTo>
+                  <a:lnTo>
+                    <a:pt x="1145960" y="578710"/>
+                  </a:lnTo>
+                  <a:lnTo>
+                    <a:pt x="1217582" y="573644"/>
+                  </a:lnTo>
+                  <a:lnTo>
+                    <a:pt x="1289205" y="568541"/>
+                  </a:lnTo>
+                  <a:lnTo>
+                    <a:pt x="1360827" y="563400"/>
+                  </a:lnTo>
+                  <a:lnTo>
+                    <a:pt x="1432450" y="558220"/>
+                  </a:lnTo>
+                  <a:lnTo>
+                    <a:pt x="1504073" y="553002"/>
+                  </a:lnTo>
+                  <a:lnTo>
+                    <a:pt x="1575695" y="547745"/>
+                  </a:lnTo>
+                  <a:lnTo>
+                    <a:pt x="1647318" y="542449"/>
+                  </a:lnTo>
+                  <a:lnTo>
+                    <a:pt x="1718940" y="537114"/>
+                  </a:lnTo>
+                  <a:lnTo>
+                    <a:pt x="1790563" y="531739"/>
+                  </a:lnTo>
+                  <a:lnTo>
+                    <a:pt x="1862185" y="526324"/>
+                  </a:lnTo>
+                  <a:lnTo>
+                    <a:pt x="1933808" y="520869"/>
+                  </a:lnTo>
+                  <a:lnTo>
+                    <a:pt x="2005430" y="515373"/>
+                  </a:lnTo>
+                  <a:lnTo>
+                    <a:pt x="2077053" y="509837"/>
+                  </a:lnTo>
+                  <a:lnTo>
+                    <a:pt x="2148675" y="504259"/>
+                  </a:lnTo>
+                  <a:lnTo>
+                    <a:pt x="2220298" y="498640"/>
+                  </a:lnTo>
+                  <a:lnTo>
+                    <a:pt x="2291920" y="492978"/>
+                  </a:lnTo>
+                  <a:lnTo>
+                    <a:pt x="2363543" y="487275"/>
+                  </a:lnTo>
+                  <a:lnTo>
+                    <a:pt x="2435165" y="481530"/>
+                  </a:lnTo>
+                  <a:lnTo>
+                    <a:pt x="2506788" y="475741"/>
+                  </a:lnTo>
+                  <a:lnTo>
+                    <a:pt x="2578410" y="469910"/>
+                  </a:lnTo>
+                  <a:lnTo>
+                    <a:pt x="2650033" y="464035"/>
+                  </a:lnTo>
+                  <a:lnTo>
+                    <a:pt x="2721655" y="458117"/>
+                  </a:lnTo>
+                  <a:lnTo>
+                    <a:pt x="2793278" y="452154"/>
+                  </a:lnTo>
+                  <a:lnTo>
+                    <a:pt x="2864901" y="446148"/>
+                  </a:lnTo>
+                  <a:lnTo>
+                    <a:pt x="2936523" y="440096"/>
+                  </a:lnTo>
+                  <a:lnTo>
+                    <a:pt x="3008146" y="434000"/>
+                  </a:lnTo>
+                  <a:lnTo>
+                    <a:pt x="3079768" y="427858"/>
+                  </a:lnTo>
+                  <a:lnTo>
+                    <a:pt x="3151391" y="421670"/>
+                  </a:lnTo>
+                  <a:lnTo>
+                    <a:pt x="3223013" y="415437"/>
+                  </a:lnTo>
+                  <a:lnTo>
+                    <a:pt x="3294636" y="409157"/>
+                  </a:lnTo>
+                  <a:lnTo>
+                    <a:pt x="3366258" y="402831"/>
+                  </a:lnTo>
+                  <a:lnTo>
+                    <a:pt x="3437881" y="396457"/>
+                  </a:lnTo>
+                  <a:lnTo>
+                    <a:pt x="3509503" y="390036"/>
+                  </a:lnTo>
+                  <a:lnTo>
+                    <a:pt x="3581126" y="383567"/>
+                  </a:lnTo>
+                  <a:lnTo>
+                    <a:pt x="3652748" y="377050"/>
+                  </a:lnTo>
+                  <a:lnTo>
+                    <a:pt x="3724371" y="370485"/>
+                  </a:lnTo>
+                  <a:lnTo>
+                    <a:pt x="3795993" y="363871"/>
+                  </a:lnTo>
+                  <a:lnTo>
+                    <a:pt x="3867616" y="357208"/>
+                  </a:lnTo>
+                  <a:lnTo>
+                    <a:pt x="3939238" y="350495"/>
+                  </a:lnTo>
+                  <a:lnTo>
+                    <a:pt x="4010861" y="343732"/>
+                  </a:lnTo>
+                  <a:lnTo>
+                    <a:pt x="4082483" y="336919"/>
+                  </a:lnTo>
+                  <a:lnTo>
+                    <a:pt x="4154106" y="330055"/>
+                  </a:lnTo>
+                  <a:lnTo>
+                    <a:pt x="4225729" y="323140"/>
+                  </a:lnTo>
+                  <a:lnTo>
+                    <a:pt x="4297351" y="316174"/>
+                  </a:lnTo>
+                  <a:lnTo>
+                    <a:pt x="4368974" y="309156"/>
+                  </a:lnTo>
+                  <a:lnTo>
+                    <a:pt x="4440596" y="302086"/>
+                  </a:lnTo>
+                  <a:lnTo>
+                    <a:pt x="4512219" y="294963"/>
+                  </a:lnTo>
+                  <a:lnTo>
+                    <a:pt x="4583841" y="287787"/>
+                  </a:lnTo>
+                  <a:lnTo>
+                    <a:pt x="4655464" y="280558"/>
+                  </a:lnTo>
+                  <a:lnTo>
+                    <a:pt x="4727086" y="273275"/>
+                  </a:lnTo>
+                  <a:lnTo>
+                    <a:pt x="4798709" y="265938"/>
+                  </a:lnTo>
+                  <a:lnTo>
+                    <a:pt x="4870331" y="258547"/>
+                  </a:lnTo>
+                  <a:lnTo>
+                    <a:pt x="4941954" y="251100"/>
+                  </a:lnTo>
+                  <a:lnTo>
+                    <a:pt x="5013576" y="243598"/>
+                  </a:lnTo>
+                  <a:lnTo>
+                    <a:pt x="5085199" y="236040"/>
+                  </a:lnTo>
+                  <a:lnTo>
+                    <a:pt x="5156821" y="228426"/>
+                  </a:lnTo>
+                  <a:lnTo>
+                    <a:pt x="5228444" y="220756"/>
+                  </a:lnTo>
+                  <a:lnTo>
+                    <a:pt x="5300066" y="213028"/>
+                  </a:lnTo>
+                  <a:lnTo>
+                    <a:pt x="5371689" y="205243"/>
+                  </a:lnTo>
+                  <a:lnTo>
+                    <a:pt x="5443311" y="197400"/>
+                  </a:lnTo>
+                  <a:lnTo>
+                    <a:pt x="5514934" y="189499"/>
+                  </a:lnTo>
+                  <a:lnTo>
+                    <a:pt x="5586557" y="181538"/>
+                  </a:lnTo>
+                  <a:lnTo>
+                    <a:pt x="5658179" y="173519"/>
+                  </a:lnTo>
+                  <a:lnTo>
+                    <a:pt x="5729802" y="165440"/>
+                  </a:lnTo>
+                  <a:lnTo>
+                    <a:pt x="5801424" y="157301"/>
+                  </a:lnTo>
+                  <a:lnTo>
+                    <a:pt x="5873047" y="149102"/>
+                  </a:lnTo>
+                  <a:lnTo>
+                    <a:pt x="5944669" y="140841"/>
+                  </a:lnTo>
+                  <a:lnTo>
+                    <a:pt x="6016292" y="132519"/>
+                  </a:lnTo>
+                  <a:lnTo>
+                    <a:pt x="6087914" y="124135"/>
+                  </a:lnTo>
+                  <a:lnTo>
+                    <a:pt x="6159537" y="115689"/>
+                  </a:lnTo>
+                  <a:lnTo>
+                    <a:pt x="6231159" y="107180"/>
+                  </a:lnTo>
+                  <a:lnTo>
+                    <a:pt x="6302782" y="98608"/>
+                  </a:lnTo>
+                  <a:lnTo>
+                    <a:pt x="6374404" y="89972"/>
+                  </a:lnTo>
+                  <a:lnTo>
+                    <a:pt x="6446027" y="81272"/>
+                  </a:lnTo>
+                  <a:lnTo>
+                    <a:pt x="6517649" y="72507"/>
+                  </a:lnTo>
+                  <a:lnTo>
+                    <a:pt x="6589272" y="63677"/>
+                  </a:lnTo>
+                  <a:lnTo>
+                    <a:pt x="6660894" y="54781"/>
+                  </a:lnTo>
+                  <a:lnTo>
+                    <a:pt x="6732517" y="45819"/>
+                  </a:lnTo>
+                  <a:lnTo>
+                    <a:pt x="6804139" y="36790"/>
+                  </a:lnTo>
+                  <a:lnTo>
+                    <a:pt x="6875762" y="27695"/>
+                  </a:lnTo>
+                  <a:lnTo>
+                    <a:pt x="6947385" y="18531"/>
+                  </a:lnTo>
+                  <a:lnTo>
+                    <a:pt x="7019007" y="9300"/>
                   </a:lnTo>
                   <a:lnTo>
                     <a:pt x="7090630" y="0"/>
@@ -4665,7 +4665,7 @@
           </p:nvSpPr>
           <p:spPr>
             <a:xfrm>
-              <a:off x="817517" y="4679530"/>
+              <a:off x="817517" y="4727786"/>
               <a:ext cx="7799693" cy="0"/>
             </a:xfrm>
             <a:custGeom>
@@ -4708,15 +4708,15 @@
           </p:nvSpPr>
           <p:spPr>
             <a:xfrm>
-              <a:off x="4222163" y="1896563"/>
-              <a:ext cx="0" cy="3826579"/>
+              <a:off x="4222163" y="2073503"/>
+              <a:ext cx="0" cy="3649639"/>
             </a:xfrm>
             <a:custGeom>
               <a:avLst/>
               <a:pathLst>
-                <a:path w="0" h="3826579">
+                <a:path w="0" h="3649639">
                   <a:moveTo>
-                    <a:pt x="0" y="3826579"/>
+                    <a:pt x="0" y="3649639"/>
                   </a:moveTo>
                   <a:lnTo>
                     <a:pt x="0" y="0"/>
@@ -4751,7 +4751,7 @@
           </p:nvSpPr>
           <p:spPr>
             <a:xfrm>
-              <a:off x="692708" y="5509156"/>
+              <a:off x="692708" y="5517199"/>
               <a:ext cx="62179" cy="80101"/>
             </a:xfrm>
             <a:prstGeom prst="rect">
@@ -4797,7 +4797,7 @@
           </p:nvSpPr>
           <p:spPr>
             <a:xfrm>
-              <a:off x="692708" y="4639479"/>
+              <a:off x="692708" y="4687735"/>
               <a:ext cx="62179" cy="80101"/>
             </a:xfrm>
             <a:prstGeom prst="rect">
@@ -4843,7 +4843,7 @@
           </p:nvSpPr>
           <p:spPr>
             <a:xfrm>
-              <a:off x="692708" y="3769802"/>
+              <a:off x="692708" y="3858272"/>
               <a:ext cx="62179" cy="80101"/>
             </a:xfrm>
             <a:prstGeom prst="rect">
@@ -4889,7 +4889,7 @@
           </p:nvSpPr>
           <p:spPr>
             <a:xfrm>
-              <a:off x="692708" y="2900125"/>
+              <a:off x="692708" y="3028808"/>
               <a:ext cx="62179" cy="80101"/>
             </a:xfrm>
             <a:prstGeom prst="rect">
@@ -4935,7 +4935,7 @@
           </p:nvSpPr>
           <p:spPr>
             <a:xfrm>
-              <a:off x="692708" y="2030448"/>
+              <a:off x="692708" y="2199345"/>
               <a:ext cx="62179" cy="80101"/>
             </a:xfrm>
             <a:prstGeom prst="rect">
@@ -5303,7 +5303,7 @@
           </p:nvSpPr>
           <p:spPr>
             <a:xfrm rot="-5400000">
-              <a:off x="68446" y="3759743"/>
+              <a:off x="68446" y="3848213"/>
               <a:ext cx="1016904" cy="100218"/>
             </a:xfrm>
             <a:prstGeom prst="rect">
@@ -5344,6 +5344,52 @@
         <p:sp>
           <p:nvSpPr>
             <p:cNvPr id="43" name="tx43"/>
+            <p:cNvSpPr/>
+            <p:nvPr/>
+          </p:nvSpPr>
+          <p:spPr>
+            <a:xfrm>
+              <a:off x="817517" y="1896563"/>
+              <a:ext cx="4433376" cy="82021"/>
+            </a:xfrm>
+            <a:prstGeom prst="rect">
+              <a:avLst/>
+            </a:prstGeom>
+            <a:noFill/>
+          </p:spPr>
+          <p:txBody>
+            <a:bodyPr lIns="0" rIns="0" tIns="0" bIns="0" anchorCtr="1" anchor="ctr" wrap="none"/>
+            <a:lstStyle/>
+            <a:p>
+              <a:pPr algn="l" marL="0" marR="0" indent="0">
+                <a:lnSpc>
+                  <a:spcPts val="900"/>
+                </a:lnSpc>
+                <a:spcBef>
+                  <a:spcPts val="0"/>
+                </a:spcBef>
+                <a:spcAft>
+                  <a:spcPts val="0"/>
+                </a:spcAft>
+              </a:pPr>
+              <a:r>
+                <a:rPr sz="900">
+                  <a:solidFill>
+                    <a:srgbClr val="404040">
+                      <a:alpha val="100000"/>
+                    </a:srgbClr>
+                  </a:solidFill>
+                  <a:latin typeface="Helvetica"/>
+                  <a:cs typeface="Helvetica"/>
+                </a:rPr>
+                <a:t>subHR = 1.07 (95% CI 0.83-1.38), p = 0.585   (per 25 mg increase in dose discrepancy)</a:t>
+              </a:r>
+            </a:p>
+          </p:txBody>
+        </p:sp>
+        <p:sp>
+          <p:nvSpPr>
+            <p:cNvPr id="44" name="tx44"/>
             <p:cNvSpPr/>
             <p:nvPr/>
           </p:nvSpPr>

--- a/docs/plots/carbo/jx_carbo_linsubhr_dosedisc_grade3.pptx
+++ b/docs/plots/carbo/jx_carbo_linsubhr_dosedisc_grade3.pptx
@@ -2271,26 +2271,26 @@
           </p:nvSpPr>
           <p:spPr>
             <a:xfrm>
-              <a:off x="817517" y="5142518"/>
-              <a:ext cx="7799693" cy="0"/>
+              <a:off x="915645" y="5071743"/>
+              <a:ext cx="7682587" cy="0"/>
             </a:xfrm>
             <a:custGeom>
               <a:avLst/>
               <a:pathLst>
-                <a:path w="7799693" h="0">
+                <a:path w="7682587" h="0">
                   <a:moveTo>
                     <a:pt x="0" y="0"/>
                   </a:moveTo>
                   <a:lnTo>
-                    <a:pt x="7799693" y="0"/>
-                  </a:lnTo>
-                  <a:lnTo>
-                    <a:pt x="7799693" y="0"/>
+                    <a:pt x="7682587" y="0"/>
+                  </a:lnTo>
+                  <a:lnTo>
+                    <a:pt x="7682587" y="0"/>
                   </a:lnTo>
                 </a:path>
               </a:pathLst>
             </a:custGeom>
-            <a:ln w="6775" cap="flat">
+            <a:ln w="8623" cap="flat">
               <a:solidFill>
                 <a:srgbClr val="EBEBEB">
                   <a:alpha val="100000"/>
@@ -2314,26 +2314,26 @@
           </p:nvSpPr>
           <p:spPr>
             <a:xfrm>
-              <a:off x="817517" y="4313054"/>
-              <a:ext cx="7799693" cy="0"/>
+              <a:off x="915645" y="4298074"/>
+              <a:ext cx="7682587" cy="0"/>
             </a:xfrm>
             <a:custGeom>
               <a:avLst/>
               <a:pathLst>
-                <a:path w="7799693" h="0">
+                <a:path w="7682587" h="0">
                   <a:moveTo>
                     <a:pt x="0" y="0"/>
                   </a:moveTo>
                   <a:lnTo>
-                    <a:pt x="7799693" y="0"/>
-                  </a:lnTo>
-                  <a:lnTo>
-                    <a:pt x="7799693" y="0"/>
+                    <a:pt x="7682587" y="0"/>
+                  </a:lnTo>
+                  <a:lnTo>
+                    <a:pt x="7682587" y="0"/>
                   </a:lnTo>
                 </a:path>
               </a:pathLst>
             </a:custGeom>
-            <a:ln w="6775" cap="flat">
+            <a:ln w="8623" cap="flat">
               <a:solidFill>
                 <a:srgbClr val="EBEBEB">
                   <a:alpha val="100000"/>
@@ -2357,26 +2357,26 @@
           </p:nvSpPr>
           <p:spPr>
             <a:xfrm>
-              <a:off x="817517" y="3483591"/>
-              <a:ext cx="7799693" cy="0"/>
+              <a:off x="915645" y="3524405"/>
+              <a:ext cx="7682587" cy="0"/>
             </a:xfrm>
             <a:custGeom>
               <a:avLst/>
               <a:pathLst>
-                <a:path w="7799693" h="0">
+                <a:path w="7682587" h="0">
                   <a:moveTo>
                     <a:pt x="0" y="0"/>
                   </a:moveTo>
                   <a:lnTo>
-                    <a:pt x="7799693" y="0"/>
-                  </a:lnTo>
-                  <a:lnTo>
-                    <a:pt x="7799693" y="0"/>
+                    <a:pt x="7682587" y="0"/>
+                  </a:lnTo>
+                  <a:lnTo>
+                    <a:pt x="7682587" y="0"/>
                   </a:lnTo>
                 </a:path>
               </a:pathLst>
             </a:custGeom>
-            <a:ln w="6775" cap="flat">
+            <a:ln w="8623" cap="flat">
               <a:solidFill>
                 <a:srgbClr val="EBEBEB">
                   <a:alpha val="100000"/>
@@ -2400,26 +2400,26 @@
           </p:nvSpPr>
           <p:spPr>
             <a:xfrm>
-              <a:off x="817517" y="2654127"/>
-              <a:ext cx="7799693" cy="0"/>
+              <a:off x="915645" y="2750737"/>
+              <a:ext cx="7682587" cy="0"/>
             </a:xfrm>
             <a:custGeom>
               <a:avLst/>
               <a:pathLst>
-                <a:path w="7799693" h="0">
+                <a:path w="7682587" h="0">
                   <a:moveTo>
                     <a:pt x="0" y="0"/>
                   </a:moveTo>
                   <a:lnTo>
-                    <a:pt x="7799693" y="0"/>
-                  </a:lnTo>
-                  <a:lnTo>
-                    <a:pt x="7799693" y="0"/>
+                    <a:pt x="7682587" y="0"/>
+                  </a:lnTo>
+                  <a:lnTo>
+                    <a:pt x="7682587" y="0"/>
                   </a:lnTo>
                 </a:path>
               </a:pathLst>
             </a:custGeom>
-            <a:ln w="6775" cap="flat">
+            <a:ln w="8623" cap="flat">
               <a:solidFill>
                 <a:srgbClr val="EBEBEB">
                   <a:alpha val="100000"/>
@@ -2443,15 +2443,15 @@
           </p:nvSpPr>
           <p:spPr>
             <a:xfrm>
-              <a:off x="2122745" y="2073503"/>
-              <a:ext cx="0" cy="3649639"/>
+              <a:off x="2201275" y="2209169"/>
+              <a:ext cx="0" cy="3404141"/>
             </a:xfrm>
             <a:custGeom>
               <a:avLst/>
               <a:pathLst>
-                <a:path w="0" h="3649639">
+                <a:path w="0" h="3404141">
                   <a:moveTo>
-                    <a:pt x="0" y="3649639"/>
+                    <a:pt x="0" y="3404141"/>
                   </a:moveTo>
                   <a:lnTo>
                     <a:pt x="0" y="0"/>
@@ -2462,7 +2462,7 @@
                 </a:path>
               </a:pathLst>
             </a:custGeom>
-            <a:ln w="6775" cap="flat">
+            <a:ln w="8623" cap="flat">
               <a:solidFill>
                 <a:srgbClr val="EBEBEB">
                   <a:alpha val="100000"/>
@@ -2486,15 +2486,15 @@
           </p:nvSpPr>
           <p:spPr>
             <a:xfrm>
-              <a:off x="3487174" y="2073503"/>
-              <a:ext cx="0" cy="3649639"/>
+              <a:off x="3545219" y="2209169"/>
+              <a:ext cx="0" cy="3404141"/>
             </a:xfrm>
             <a:custGeom>
               <a:avLst/>
               <a:pathLst>
-                <a:path w="0" h="3649639">
+                <a:path w="0" h="3404141">
                   <a:moveTo>
-                    <a:pt x="0" y="3649639"/>
+                    <a:pt x="0" y="3404141"/>
                   </a:moveTo>
                   <a:lnTo>
                     <a:pt x="0" y="0"/>
@@ -2505,7 +2505,7 @@
                 </a:path>
               </a:pathLst>
             </a:custGeom>
-            <a:ln w="6775" cap="flat">
+            <a:ln w="8623" cap="flat">
               <a:solidFill>
                 <a:srgbClr val="EBEBEB">
                   <a:alpha val="100000"/>
@@ -2529,15 +2529,15 @@
           </p:nvSpPr>
           <p:spPr>
             <a:xfrm>
-              <a:off x="4851604" y="2073503"/>
-              <a:ext cx="0" cy="3649639"/>
+              <a:off x="4889163" y="2209169"/>
+              <a:ext cx="0" cy="3404141"/>
             </a:xfrm>
             <a:custGeom>
               <a:avLst/>
               <a:pathLst>
-                <a:path w="0" h="3649639">
+                <a:path w="0" h="3404141">
                   <a:moveTo>
-                    <a:pt x="0" y="3649639"/>
+                    <a:pt x="0" y="3404141"/>
                   </a:moveTo>
                   <a:lnTo>
                     <a:pt x="0" y="0"/>
@@ -2548,7 +2548,7 @@
                 </a:path>
               </a:pathLst>
             </a:custGeom>
-            <a:ln w="6775" cap="flat">
+            <a:ln w="8623" cap="flat">
               <a:solidFill>
                 <a:srgbClr val="EBEBEB">
                   <a:alpha val="100000"/>
@@ -2572,15 +2572,15 @@
           </p:nvSpPr>
           <p:spPr>
             <a:xfrm>
-              <a:off x="6216034" y="2073503"/>
-              <a:ext cx="0" cy="3649639"/>
+              <a:off x="6233107" y="2209169"/>
+              <a:ext cx="0" cy="3404141"/>
             </a:xfrm>
             <a:custGeom>
               <a:avLst/>
               <a:pathLst>
-                <a:path w="0" h="3649639">
+                <a:path w="0" h="3404141">
                   <a:moveTo>
-                    <a:pt x="0" y="3649639"/>
+                    <a:pt x="0" y="3404141"/>
                   </a:moveTo>
                   <a:lnTo>
                     <a:pt x="0" y="0"/>
@@ -2591,7 +2591,7 @@
                 </a:path>
               </a:pathLst>
             </a:custGeom>
-            <a:ln w="6775" cap="flat">
+            <a:ln w="8623" cap="flat">
               <a:solidFill>
                 <a:srgbClr val="EBEBEB">
                   <a:alpha val="100000"/>
@@ -2615,15 +2615,15 @@
           </p:nvSpPr>
           <p:spPr>
             <a:xfrm>
-              <a:off x="7580464" y="2073503"/>
-              <a:ext cx="0" cy="3649639"/>
+              <a:off x="7577051" y="2209169"/>
+              <a:ext cx="0" cy="3404141"/>
             </a:xfrm>
             <a:custGeom>
               <a:avLst/>
               <a:pathLst>
-                <a:path w="0" h="3649639">
+                <a:path w="0" h="3404141">
                   <a:moveTo>
-                    <a:pt x="0" y="3649639"/>
+                    <a:pt x="0" y="3404141"/>
                   </a:moveTo>
                   <a:lnTo>
                     <a:pt x="0" y="0"/>
@@ -2634,7 +2634,7 @@
                 </a:path>
               </a:pathLst>
             </a:custGeom>
-            <a:ln w="6775" cap="flat">
+            <a:ln w="8623" cap="flat">
               <a:solidFill>
                 <a:srgbClr val="EBEBEB">
                   <a:alpha val="100000"/>
@@ -2658,26 +2658,26 @@
           </p:nvSpPr>
           <p:spPr>
             <a:xfrm>
-              <a:off x="817517" y="5557249"/>
-              <a:ext cx="7799693" cy="0"/>
+              <a:off x="915645" y="5458577"/>
+              <a:ext cx="7682587" cy="0"/>
             </a:xfrm>
             <a:custGeom>
               <a:avLst/>
               <a:pathLst>
-                <a:path w="7799693" h="0">
+                <a:path w="7682587" h="0">
                   <a:moveTo>
                     <a:pt x="0" y="0"/>
                   </a:moveTo>
                   <a:lnTo>
-                    <a:pt x="7799693" y="0"/>
-                  </a:lnTo>
-                  <a:lnTo>
-                    <a:pt x="7799693" y="0"/>
+                    <a:pt x="7682587" y="0"/>
+                  </a:lnTo>
+                  <a:lnTo>
+                    <a:pt x="7682587" y="0"/>
                   </a:lnTo>
                 </a:path>
               </a:pathLst>
             </a:custGeom>
-            <a:ln w="13550" cap="flat">
+            <a:ln w="17246" cap="flat">
               <a:solidFill>
                 <a:srgbClr val="EBEBEB">
                   <a:alpha val="100000"/>
@@ -2701,26 +2701,26 @@
           </p:nvSpPr>
           <p:spPr>
             <a:xfrm>
-              <a:off x="817517" y="4727786"/>
-              <a:ext cx="7799693" cy="0"/>
+              <a:off x="915645" y="4684908"/>
+              <a:ext cx="7682587" cy="0"/>
             </a:xfrm>
             <a:custGeom>
               <a:avLst/>
               <a:pathLst>
-                <a:path w="7799693" h="0">
+                <a:path w="7682587" h="0">
                   <a:moveTo>
                     <a:pt x="0" y="0"/>
                   </a:moveTo>
                   <a:lnTo>
-                    <a:pt x="7799693" y="0"/>
-                  </a:lnTo>
-                  <a:lnTo>
-                    <a:pt x="7799693" y="0"/>
+                    <a:pt x="7682587" y="0"/>
+                  </a:lnTo>
+                  <a:lnTo>
+                    <a:pt x="7682587" y="0"/>
                   </a:lnTo>
                 </a:path>
               </a:pathLst>
             </a:custGeom>
-            <a:ln w="13550" cap="flat">
+            <a:ln w="17246" cap="flat">
               <a:solidFill>
                 <a:srgbClr val="EBEBEB">
                   <a:alpha val="100000"/>
@@ -2744,26 +2744,26 @@
           </p:nvSpPr>
           <p:spPr>
             <a:xfrm>
-              <a:off x="817517" y="3898322"/>
-              <a:ext cx="7799693" cy="0"/>
+              <a:off x="915645" y="3911240"/>
+              <a:ext cx="7682587" cy="0"/>
             </a:xfrm>
             <a:custGeom>
               <a:avLst/>
               <a:pathLst>
-                <a:path w="7799693" h="0">
+                <a:path w="7682587" h="0">
                   <a:moveTo>
                     <a:pt x="0" y="0"/>
                   </a:moveTo>
                   <a:lnTo>
-                    <a:pt x="7799693" y="0"/>
-                  </a:lnTo>
-                  <a:lnTo>
-                    <a:pt x="7799693" y="0"/>
+                    <a:pt x="7682587" y="0"/>
+                  </a:lnTo>
+                  <a:lnTo>
+                    <a:pt x="7682587" y="0"/>
                   </a:lnTo>
                 </a:path>
               </a:pathLst>
             </a:custGeom>
-            <a:ln w="13550" cap="flat">
+            <a:ln w="17246" cap="flat">
               <a:solidFill>
                 <a:srgbClr val="EBEBEB">
                   <a:alpha val="100000"/>
@@ -2787,26 +2787,26 @@
           </p:nvSpPr>
           <p:spPr>
             <a:xfrm>
-              <a:off x="817517" y="3068859"/>
-              <a:ext cx="7799693" cy="0"/>
+              <a:off x="915645" y="3137571"/>
+              <a:ext cx="7682587" cy="0"/>
             </a:xfrm>
             <a:custGeom>
               <a:avLst/>
               <a:pathLst>
-                <a:path w="7799693" h="0">
+                <a:path w="7682587" h="0">
                   <a:moveTo>
                     <a:pt x="0" y="0"/>
                   </a:moveTo>
                   <a:lnTo>
-                    <a:pt x="7799693" y="0"/>
-                  </a:lnTo>
-                  <a:lnTo>
-                    <a:pt x="7799693" y="0"/>
+                    <a:pt x="7682587" y="0"/>
+                  </a:lnTo>
+                  <a:lnTo>
+                    <a:pt x="7682587" y="0"/>
                   </a:lnTo>
                 </a:path>
               </a:pathLst>
             </a:custGeom>
-            <a:ln w="13550" cap="flat">
+            <a:ln w="17246" cap="flat">
               <a:solidFill>
                 <a:srgbClr val="EBEBEB">
                   <a:alpha val="100000"/>
@@ -2830,26 +2830,26 @@
           </p:nvSpPr>
           <p:spPr>
             <a:xfrm>
-              <a:off x="817517" y="2239395"/>
-              <a:ext cx="7799693" cy="0"/>
+              <a:off x="915645" y="2363903"/>
+              <a:ext cx="7682587" cy="0"/>
             </a:xfrm>
             <a:custGeom>
               <a:avLst/>
               <a:pathLst>
-                <a:path w="7799693" h="0">
+                <a:path w="7682587" h="0">
                   <a:moveTo>
                     <a:pt x="0" y="0"/>
                   </a:moveTo>
                   <a:lnTo>
-                    <a:pt x="7799693" y="0"/>
-                  </a:lnTo>
-                  <a:lnTo>
-                    <a:pt x="7799693" y="0"/>
+                    <a:pt x="7682587" y="0"/>
+                  </a:lnTo>
+                  <a:lnTo>
+                    <a:pt x="7682587" y="0"/>
                   </a:lnTo>
                 </a:path>
               </a:pathLst>
             </a:custGeom>
-            <a:ln w="13550" cap="flat">
+            <a:ln w="17246" cap="flat">
               <a:solidFill>
                 <a:srgbClr val="EBEBEB">
                   <a:alpha val="100000"/>
@@ -2873,15 +2873,15 @@
           </p:nvSpPr>
           <p:spPr>
             <a:xfrm>
-              <a:off x="1440530" y="2073503"/>
-              <a:ext cx="0" cy="3649639"/>
+              <a:off x="1529303" y="2209169"/>
+              <a:ext cx="0" cy="3404141"/>
             </a:xfrm>
             <a:custGeom>
               <a:avLst/>
               <a:pathLst>
-                <a:path w="0" h="3649639">
+                <a:path w="0" h="3404141">
                   <a:moveTo>
-                    <a:pt x="0" y="3649639"/>
+                    <a:pt x="0" y="3404141"/>
                   </a:moveTo>
                   <a:lnTo>
                     <a:pt x="0" y="0"/>
@@ -2892,7 +2892,7 @@
                 </a:path>
               </a:pathLst>
             </a:custGeom>
-            <a:ln w="13550" cap="flat">
+            <a:ln w="17246" cap="flat">
               <a:solidFill>
                 <a:srgbClr val="EBEBEB">
                   <a:alpha val="100000"/>
@@ -2916,15 +2916,15 @@
           </p:nvSpPr>
           <p:spPr>
             <a:xfrm>
-              <a:off x="2804959" y="2073503"/>
-              <a:ext cx="0" cy="3649639"/>
+              <a:off x="2873247" y="2209169"/>
+              <a:ext cx="0" cy="3404141"/>
             </a:xfrm>
             <a:custGeom>
               <a:avLst/>
               <a:pathLst>
-                <a:path w="0" h="3649639">
+                <a:path w="0" h="3404141">
                   <a:moveTo>
-                    <a:pt x="0" y="3649639"/>
+                    <a:pt x="0" y="3404141"/>
                   </a:moveTo>
                   <a:lnTo>
                     <a:pt x="0" y="0"/>
@@ -2935,7 +2935,7 @@
                 </a:path>
               </a:pathLst>
             </a:custGeom>
-            <a:ln w="13550" cap="flat">
+            <a:ln w="17246" cap="flat">
               <a:solidFill>
                 <a:srgbClr val="EBEBEB">
                   <a:alpha val="100000"/>
@@ -2959,15 +2959,15 @@
           </p:nvSpPr>
           <p:spPr>
             <a:xfrm>
-              <a:off x="4169389" y="2073503"/>
-              <a:ext cx="0" cy="3649639"/>
+              <a:off x="4217191" y="2209169"/>
+              <a:ext cx="0" cy="3404141"/>
             </a:xfrm>
             <a:custGeom>
               <a:avLst/>
               <a:pathLst>
-                <a:path w="0" h="3649639">
+                <a:path w="0" h="3404141">
                   <a:moveTo>
-                    <a:pt x="0" y="3649639"/>
+                    <a:pt x="0" y="3404141"/>
                   </a:moveTo>
                   <a:lnTo>
                     <a:pt x="0" y="0"/>
@@ -2978,7 +2978,7 @@
                 </a:path>
               </a:pathLst>
             </a:custGeom>
-            <a:ln w="13550" cap="flat">
+            <a:ln w="17246" cap="flat">
               <a:solidFill>
                 <a:srgbClr val="EBEBEB">
                   <a:alpha val="100000"/>
@@ -3002,15 +3002,15 @@
           </p:nvSpPr>
           <p:spPr>
             <a:xfrm>
-              <a:off x="5533819" y="2073503"/>
-              <a:ext cx="0" cy="3649639"/>
+              <a:off x="5561135" y="2209169"/>
+              <a:ext cx="0" cy="3404141"/>
             </a:xfrm>
             <a:custGeom>
               <a:avLst/>
               <a:pathLst>
-                <a:path w="0" h="3649639">
+                <a:path w="0" h="3404141">
                   <a:moveTo>
-                    <a:pt x="0" y="3649639"/>
+                    <a:pt x="0" y="3404141"/>
                   </a:moveTo>
                   <a:lnTo>
                     <a:pt x="0" y="0"/>
@@ -3021,7 +3021,7 @@
                 </a:path>
               </a:pathLst>
             </a:custGeom>
-            <a:ln w="13550" cap="flat">
+            <a:ln w="17246" cap="flat">
               <a:solidFill>
                 <a:srgbClr val="EBEBEB">
                   <a:alpha val="100000"/>
@@ -3045,15 +3045,15 @@
           </p:nvSpPr>
           <p:spPr>
             <a:xfrm>
-              <a:off x="6898249" y="2073503"/>
-              <a:ext cx="0" cy="3649639"/>
+              <a:off x="6905079" y="2209169"/>
+              <a:ext cx="0" cy="3404141"/>
             </a:xfrm>
             <a:custGeom>
               <a:avLst/>
               <a:pathLst>
-                <a:path w="0" h="3649639">
+                <a:path w="0" h="3404141">
                   <a:moveTo>
-                    <a:pt x="0" y="3649639"/>
+                    <a:pt x="0" y="3404141"/>
                   </a:moveTo>
                   <a:lnTo>
                     <a:pt x="0" y="0"/>
@@ -3064,7 +3064,7 @@
                 </a:path>
               </a:pathLst>
             </a:custGeom>
-            <a:ln w="13550" cap="flat">
+            <a:ln w="17246" cap="flat">
               <a:solidFill>
                 <a:srgbClr val="EBEBEB">
                   <a:alpha val="100000"/>
@@ -3088,15 +3088,15 @@
           </p:nvSpPr>
           <p:spPr>
             <a:xfrm>
-              <a:off x="8262679" y="2073503"/>
-              <a:ext cx="0" cy="3649639"/>
+              <a:off x="8249023" y="2209169"/>
+              <a:ext cx="0" cy="3404141"/>
             </a:xfrm>
             <a:custGeom>
               <a:avLst/>
               <a:pathLst>
-                <a:path w="0" h="3649639">
+                <a:path w="0" h="3404141">
                   <a:moveTo>
-                    <a:pt x="0" y="3649639"/>
+                    <a:pt x="0" y="3404141"/>
                   </a:moveTo>
                   <a:lnTo>
                     <a:pt x="0" y="0"/>
@@ -3107,7 +3107,7 @@
                 </a:path>
               </a:pathLst>
             </a:custGeom>
-            <a:ln w="13550" cap="flat">
+            <a:ln w="17246" cap="flat">
               <a:solidFill>
                 <a:srgbClr val="EBEBEB">
                   <a:alpha val="100000"/>
@@ -3131,573 +3131,573 @@
           </p:nvSpPr>
           <p:spPr>
             <a:xfrm>
-              <a:off x="1172049" y="2073503"/>
-              <a:ext cx="7090630" cy="3288823"/>
+              <a:off x="1264853" y="2209169"/>
+              <a:ext cx="6984170" cy="3067596"/>
             </a:xfrm>
             <a:custGeom>
               <a:avLst/>
               <a:pathLst>
-                <a:path w="7090630" h="3288823">
+                <a:path w="6984170" h="3067596">
                   <a:moveTo>
-                    <a:pt x="0" y="1605880"/>
+                    <a:pt x="0" y="1497858"/>
                   </a:moveTo>
                   <a:lnTo>
-                    <a:pt x="71622" y="1641568"/>
-                  </a:lnTo>
-                  <a:lnTo>
-                    <a:pt x="143245" y="1676578"/>
-                  </a:lnTo>
-                  <a:lnTo>
-                    <a:pt x="214867" y="1710922"/>
-                  </a:lnTo>
-                  <a:lnTo>
-                    <a:pt x="286490" y="1744613"/>
-                  </a:lnTo>
-                  <a:lnTo>
-                    <a:pt x="358112" y="1777665"/>
-                  </a:lnTo>
-                  <a:lnTo>
-                    <a:pt x="429735" y="1810088"/>
-                  </a:lnTo>
-                  <a:lnTo>
-                    <a:pt x="501357" y="1841895"/>
-                  </a:lnTo>
-                  <a:lnTo>
-                    <a:pt x="572980" y="1873097"/>
-                  </a:lnTo>
-                  <a:lnTo>
-                    <a:pt x="644602" y="1903707"/>
-                  </a:lnTo>
-                  <a:lnTo>
-                    <a:pt x="716225" y="1933735"/>
-                  </a:lnTo>
-                  <a:lnTo>
-                    <a:pt x="787847" y="1963192"/>
-                  </a:lnTo>
-                  <a:lnTo>
-                    <a:pt x="859470" y="1992089"/>
-                  </a:lnTo>
-                  <a:lnTo>
-                    <a:pt x="931092" y="2020437"/>
-                  </a:lnTo>
-                  <a:lnTo>
-                    <a:pt x="1002715" y="2048247"/>
-                  </a:lnTo>
-                  <a:lnTo>
-                    <a:pt x="1074337" y="2075527"/>
-                  </a:lnTo>
-                  <a:lnTo>
-                    <a:pt x="1145960" y="2102290"/>
-                  </a:lnTo>
-                  <a:lnTo>
-                    <a:pt x="1217582" y="2128544"/>
-                  </a:lnTo>
-                  <a:lnTo>
-                    <a:pt x="1289205" y="2154299"/>
-                  </a:lnTo>
-                  <a:lnTo>
-                    <a:pt x="1360827" y="2179564"/>
-                  </a:lnTo>
-                  <a:lnTo>
-                    <a:pt x="1432450" y="2204349"/>
-                  </a:lnTo>
-                  <a:lnTo>
-                    <a:pt x="1504073" y="2228664"/>
-                  </a:lnTo>
-                  <a:lnTo>
-                    <a:pt x="1575695" y="2252516"/>
-                  </a:lnTo>
-                  <a:lnTo>
-                    <a:pt x="1647318" y="2275915"/>
-                  </a:lnTo>
-                  <a:lnTo>
-                    <a:pt x="1718940" y="2298869"/>
-                  </a:lnTo>
-                  <a:lnTo>
-                    <a:pt x="1790563" y="2321387"/>
-                  </a:lnTo>
-                  <a:lnTo>
-                    <a:pt x="1862185" y="2343477"/>
-                  </a:lnTo>
-                  <a:lnTo>
-                    <a:pt x="1933808" y="2365147"/>
-                  </a:lnTo>
-                  <a:lnTo>
-                    <a:pt x="2005430" y="2386405"/>
-                  </a:lnTo>
-                  <a:lnTo>
-                    <a:pt x="2077053" y="2407260"/>
-                  </a:lnTo>
-                  <a:lnTo>
-                    <a:pt x="2148675" y="2427718"/>
-                  </a:lnTo>
-                  <a:lnTo>
-                    <a:pt x="2220298" y="2447787"/>
-                  </a:lnTo>
-                  <a:lnTo>
-                    <a:pt x="2291920" y="2467475"/>
-                  </a:lnTo>
-                  <a:lnTo>
-                    <a:pt x="2363543" y="2486789"/>
-                  </a:lnTo>
-                  <a:lnTo>
-                    <a:pt x="2435165" y="2505735"/>
-                  </a:lnTo>
-                  <a:lnTo>
-                    <a:pt x="2506788" y="2524322"/>
-                  </a:lnTo>
-                  <a:lnTo>
-                    <a:pt x="2578410" y="2542555"/>
-                  </a:lnTo>
-                  <a:lnTo>
-                    <a:pt x="2650033" y="2560442"/>
-                  </a:lnTo>
-                  <a:lnTo>
-                    <a:pt x="2721655" y="2577989"/>
-                  </a:lnTo>
-                  <a:lnTo>
-                    <a:pt x="2793278" y="2595202"/>
-                  </a:lnTo>
-                  <a:lnTo>
-                    <a:pt x="2864901" y="2612089"/>
-                  </a:lnTo>
-                  <a:lnTo>
-                    <a:pt x="2936523" y="2628654"/>
-                  </a:lnTo>
-                  <a:lnTo>
-                    <a:pt x="3008146" y="2644904"/>
-                  </a:lnTo>
-                  <a:lnTo>
-                    <a:pt x="3079768" y="2642522"/>
-                  </a:lnTo>
-                  <a:lnTo>
-                    <a:pt x="3151391" y="2613423"/>
-                  </a:lnTo>
-                  <a:lnTo>
-                    <a:pt x="3223013" y="2583318"/>
-                  </a:lnTo>
-                  <a:lnTo>
-                    <a:pt x="3294636" y="2552172"/>
-                  </a:lnTo>
-                  <a:lnTo>
-                    <a:pt x="3366258" y="2519948"/>
-                  </a:lnTo>
-                  <a:lnTo>
-                    <a:pt x="3437881" y="2486610"/>
-                  </a:lnTo>
-                  <a:lnTo>
-                    <a:pt x="3509503" y="2452118"/>
-                  </a:lnTo>
-                  <a:lnTo>
-                    <a:pt x="3581126" y="2416433"/>
-                  </a:lnTo>
-                  <a:lnTo>
-                    <a:pt x="3652748" y="2379514"/>
-                  </a:lnTo>
-                  <a:lnTo>
-                    <a:pt x="3724371" y="2341318"/>
-                  </a:lnTo>
-                  <a:lnTo>
-                    <a:pt x="3795993" y="2301801"/>
-                  </a:lnTo>
-                  <a:lnTo>
-                    <a:pt x="3867616" y="2260917"/>
-                  </a:lnTo>
-                  <a:lnTo>
-                    <a:pt x="3939238" y="2218618"/>
-                  </a:lnTo>
-                  <a:lnTo>
-                    <a:pt x="4010861" y="2174857"/>
-                  </a:lnTo>
-                  <a:lnTo>
-                    <a:pt x="4082483" y="2129581"/>
-                  </a:lnTo>
-                  <a:lnTo>
-                    <a:pt x="4154106" y="2082740"/>
-                  </a:lnTo>
-                  <a:lnTo>
-                    <a:pt x="4225729" y="2034278"/>
-                  </a:lnTo>
-                  <a:lnTo>
-                    <a:pt x="4297351" y="1984140"/>
-                  </a:lnTo>
-                  <a:lnTo>
-                    <a:pt x="4368974" y="1932268"/>
-                  </a:lnTo>
-                  <a:lnTo>
-                    <a:pt x="4440596" y="1878601"/>
-                  </a:lnTo>
-                  <a:lnTo>
-                    <a:pt x="4512219" y="1823078"/>
-                  </a:lnTo>
-                  <a:lnTo>
-                    <a:pt x="4583841" y="1765634"/>
-                  </a:lnTo>
-                  <a:lnTo>
-                    <a:pt x="4655464" y="1706204"/>
-                  </a:lnTo>
-                  <a:lnTo>
-                    <a:pt x="4727086" y="1644717"/>
-                  </a:lnTo>
-                  <a:lnTo>
-                    <a:pt x="4798709" y="1581104"/>
-                  </a:lnTo>
-                  <a:lnTo>
-                    <a:pt x="4870331" y="1515291"/>
-                  </a:lnTo>
-                  <a:lnTo>
-                    <a:pt x="4941954" y="1447200"/>
-                  </a:lnTo>
-                  <a:lnTo>
-                    <a:pt x="5013576" y="1376755"/>
-                  </a:lnTo>
-                  <a:lnTo>
-                    <a:pt x="5085199" y="1303873"/>
-                  </a:lnTo>
-                  <a:lnTo>
-                    <a:pt x="5156821" y="1228470"/>
-                  </a:lnTo>
-                  <a:lnTo>
-                    <a:pt x="5228444" y="1150458"/>
-                  </a:lnTo>
-                  <a:lnTo>
-                    <a:pt x="5300066" y="1069748"/>
-                  </a:lnTo>
-                  <a:lnTo>
-                    <a:pt x="5371689" y="986246"/>
-                  </a:lnTo>
-                  <a:lnTo>
-                    <a:pt x="5443311" y="899856"/>
-                  </a:lnTo>
-                  <a:lnTo>
-                    <a:pt x="5514934" y="810478"/>
-                  </a:lnTo>
-                  <a:lnTo>
-                    <a:pt x="5586557" y="718008"/>
-                  </a:lnTo>
-                  <a:lnTo>
-                    <a:pt x="5658179" y="622339"/>
-                  </a:lnTo>
-                  <a:lnTo>
-                    <a:pt x="5729802" y="523361"/>
-                  </a:lnTo>
-                  <a:lnTo>
-                    <a:pt x="5801424" y="420959"/>
-                  </a:lnTo>
-                  <a:lnTo>
-                    <a:pt x="5873047" y="315016"/>
-                  </a:lnTo>
-                  <a:lnTo>
-                    <a:pt x="5944669" y="205407"/>
-                  </a:lnTo>
-                  <a:lnTo>
-                    <a:pt x="6016292" y="92007"/>
-                  </a:lnTo>
-                  <a:lnTo>
-                    <a:pt x="6072460" y="0"/>
-                  </a:lnTo>
-                  <a:lnTo>
-                    <a:pt x="7090630" y="0"/>
-                  </a:lnTo>
-                  <a:lnTo>
-                    <a:pt x="7090630" y="3202750"/>
-                  </a:lnTo>
-                  <a:lnTo>
-                    <a:pt x="7019007" y="3197306"/>
-                  </a:lnTo>
-                  <a:lnTo>
-                    <a:pt x="6947385" y="3191757"/>
-                  </a:lnTo>
-                  <a:lnTo>
-                    <a:pt x="6875762" y="3186100"/>
-                  </a:lnTo>
-                  <a:lnTo>
-                    <a:pt x="6804139" y="3180334"/>
-                  </a:lnTo>
-                  <a:lnTo>
-                    <a:pt x="6732517" y="3174456"/>
-                  </a:lnTo>
-                  <a:lnTo>
-                    <a:pt x="6660894" y="3168465"/>
-                  </a:lnTo>
-                  <a:lnTo>
-                    <a:pt x="6589272" y="3162357"/>
-                  </a:lnTo>
-                  <a:lnTo>
-                    <a:pt x="6517649" y="3156131"/>
-                  </a:lnTo>
-                  <a:lnTo>
-                    <a:pt x="6446027" y="3149784"/>
-                  </a:lnTo>
-                  <a:lnTo>
-                    <a:pt x="6374404" y="3143314"/>
-                  </a:lnTo>
-                  <a:lnTo>
-                    <a:pt x="6302782" y="3136719"/>
-                  </a:lnTo>
-                  <a:lnTo>
-                    <a:pt x="6231159" y="3129996"/>
-                  </a:lnTo>
-                  <a:lnTo>
-                    <a:pt x="6159537" y="3123143"/>
-                  </a:lnTo>
-                  <a:lnTo>
-                    <a:pt x="6087914" y="3116157"/>
-                  </a:lnTo>
-                  <a:lnTo>
-                    <a:pt x="6016292" y="3109036"/>
-                  </a:lnTo>
-                  <a:lnTo>
-                    <a:pt x="5944669" y="3101777"/>
-                  </a:lnTo>
-                  <a:lnTo>
-                    <a:pt x="5873047" y="3094377"/>
-                  </a:lnTo>
-                  <a:lnTo>
-                    <a:pt x="5801424" y="3086834"/>
-                  </a:lnTo>
-                  <a:lnTo>
-                    <a:pt x="5729802" y="3079145"/>
-                  </a:lnTo>
-                  <a:lnTo>
-                    <a:pt x="5658179" y="3071307"/>
-                  </a:lnTo>
-                  <a:lnTo>
-                    <a:pt x="5586557" y="3063317"/>
-                  </a:lnTo>
-                  <a:lnTo>
-                    <a:pt x="5514934" y="3055172"/>
-                  </a:lnTo>
-                  <a:lnTo>
-                    <a:pt x="5443311" y="3046869"/>
-                  </a:lnTo>
-                  <a:lnTo>
-                    <a:pt x="5371689" y="3038406"/>
-                  </a:lnTo>
-                  <a:lnTo>
-                    <a:pt x="5300066" y="3029778"/>
-                  </a:lnTo>
-                  <a:lnTo>
-                    <a:pt x="5228444" y="3020984"/>
-                  </a:lnTo>
-                  <a:lnTo>
-                    <a:pt x="5156821" y="3012019"/>
-                  </a:lnTo>
-                  <a:lnTo>
-                    <a:pt x="5085199" y="3002880"/>
-                  </a:lnTo>
-                  <a:lnTo>
-                    <a:pt x="5013576" y="2993565"/>
-                  </a:lnTo>
-                  <a:lnTo>
-                    <a:pt x="4941954" y="2984069"/>
-                  </a:lnTo>
-                  <a:lnTo>
-                    <a:pt x="4870331" y="2974389"/>
-                  </a:lnTo>
-                  <a:lnTo>
-                    <a:pt x="4798709" y="2964521"/>
-                  </a:lnTo>
-                  <a:lnTo>
-                    <a:pt x="4727086" y="2954462"/>
-                  </a:lnTo>
-                  <a:lnTo>
-                    <a:pt x="4655464" y="2944209"/>
-                  </a:lnTo>
-                  <a:lnTo>
-                    <a:pt x="4583841" y="2933756"/>
-                  </a:lnTo>
-                  <a:lnTo>
-                    <a:pt x="4512219" y="2923102"/>
-                  </a:lnTo>
-                  <a:lnTo>
-                    <a:pt x="4440596" y="2912240"/>
-                  </a:lnTo>
-                  <a:lnTo>
-                    <a:pt x="4368974" y="2901169"/>
-                  </a:lnTo>
-                  <a:lnTo>
-                    <a:pt x="4297351" y="2889883"/>
-                  </a:lnTo>
-                  <a:lnTo>
-                    <a:pt x="4225729" y="2878378"/>
-                  </a:lnTo>
-                  <a:lnTo>
-                    <a:pt x="4154106" y="2866650"/>
-                  </a:lnTo>
-                  <a:lnTo>
-                    <a:pt x="4082483" y="2854696"/>
-                  </a:lnTo>
-                  <a:lnTo>
-                    <a:pt x="4010861" y="2842509"/>
-                  </a:lnTo>
-                  <a:lnTo>
-                    <a:pt x="3939238" y="2830087"/>
-                  </a:lnTo>
-                  <a:lnTo>
-                    <a:pt x="3867616" y="2817424"/>
-                  </a:lnTo>
-                  <a:lnTo>
-                    <a:pt x="3795993" y="2804515"/>
-                  </a:lnTo>
-                  <a:lnTo>
-                    <a:pt x="3724371" y="2791357"/>
-                  </a:lnTo>
-                  <a:lnTo>
-                    <a:pt x="3652748" y="2777943"/>
-                  </a:lnTo>
-                  <a:lnTo>
-                    <a:pt x="3581126" y="2764270"/>
-                  </a:lnTo>
-                  <a:lnTo>
-                    <a:pt x="3509503" y="2750332"/>
-                  </a:lnTo>
-                  <a:lnTo>
-                    <a:pt x="3437881" y="2736124"/>
-                  </a:lnTo>
-                  <a:lnTo>
-                    <a:pt x="3366258" y="2721641"/>
-                  </a:lnTo>
-                  <a:lnTo>
-                    <a:pt x="3294636" y="2706877"/>
-                  </a:lnTo>
-                  <a:lnTo>
-                    <a:pt x="3223013" y="2691827"/>
-                  </a:lnTo>
-                  <a:lnTo>
-                    <a:pt x="3151391" y="2676485"/>
-                  </a:lnTo>
-                  <a:lnTo>
-                    <a:pt x="3079768" y="2660846"/>
-                  </a:lnTo>
-                  <a:lnTo>
-                    <a:pt x="3008146" y="2670647"/>
-                  </a:lnTo>
-                  <a:lnTo>
-                    <a:pt x="2936523" y="2697833"/>
-                  </a:lnTo>
-                  <a:lnTo>
-                    <a:pt x="2864901" y="2724109"/>
-                  </a:lnTo>
-                  <a:lnTo>
-                    <a:pt x="2793278" y="2749507"/>
-                  </a:lnTo>
-                  <a:lnTo>
-                    <a:pt x="2721655" y="2774055"/>
-                  </a:lnTo>
-                  <a:lnTo>
-                    <a:pt x="2650033" y="2797783"/>
-                  </a:lnTo>
-                  <a:lnTo>
-                    <a:pt x="2578410" y="2820718"/>
-                  </a:lnTo>
-                  <a:lnTo>
-                    <a:pt x="2506788" y="2842886"/>
-                  </a:lnTo>
-                  <a:lnTo>
-                    <a:pt x="2435165" y="2864312"/>
-                  </a:lnTo>
-                  <a:lnTo>
-                    <a:pt x="2363543" y="2885023"/>
-                  </a:lnTo>
-                  <a:lnTo>
-                    <a:pt x="2291920" y="2905040"/>
-                  </a:lnTo>
-                  <a:lnTo>
-                    <a:pt x="2220298" y="2924389"/>
-                  </a:lnTo>
-                  <a:lnTo>
-                    <a:pt x="2148675" y="2943091"/>
-                  </a:lnTo>
-                  <a:lnTo>
-                    <a:pt x="2077053" y="2961167"/>
-                  </a:lnTo>
-                  <a:lnTo>
-                    <a:pt x="2005430" y="2978639"/>
-                  </a:lnTo>
-                  <a:lnTo>
-                    <a:pt x="1933808" y="2995527"/>
-                  </a:lnTo>
-                  <a:lnTo>
-                    <a:pt x="1862185" y="3011850"/>
-                  </a:lnTo>
-                  <a:lnTo>
-                    <a:pt x="1790563" y="3027627"/>
-                  </a:lnTo>
-                  <a:lnTo>
-                    <a:pt x="1718940" y="3042877"/>
-                  </a:lnTo>
-                  <a:lnTo>
-                    <a:pt x="1647318" y="3057617"/>
-                  </a:lnTo>
-                  <a:lnTo>
-                    <a:pt x="1575695" y="3071865"/>
-                  </a:lnTo>
-                  <a:lnTo>
-                    <a:pt x="1504073" y="3085636"/>
-                  </a:lnTo>
-                  <a:lnTo>
-                    <a:pt x="1432450" y="3098946"/>
-                  </a:lnTo>
-                  <a:lnTo>
-                    <a:pt x="1360827" y="3111812"/>
-                  </a:lnTo>
-                  <a:lnTo>
-                    <a:pt x="1289205" y="3124247"/>
-                  </a:lnTo>
-                  <a:lnTo>
-                    <a:pt x="1217582" y="3136266"/>
-                  </a:lnTo>
-                  <a:lnTo>
-                    <a:pt x="1145960" y="3147884"/>
-                  </a:lnTo>
-                  <a:lnTo>
-                    <a:pt x="1074337" y="3159113"/>
-                  </a:lnTo>
-                  <a:lnTo>
-                    <a:pt x="1002715" y="3169967"/>
-                  </a:lnTo>
-                  <a:lnTo>
-                    <a:pt x="931092" y="3180458"/>
-                  </a:lnTo>
-                  <a:lnTo>
-                    <a:pt x="859470" y="3190598"/>
-                  </a:lnTo>
-                  <a:lnTo>
-                    <a:pt x="787847" y="3200399"/>
-                  </a:lnTo>
-                  <a:lnTo>
-                    <a:pt x="716225" y="3209873"/>
-                  </a:lnTo>
-                  <a:lnTo>
-                    <a:pt x="644602" y="3219030"/>
-                  </a:lnTo>
-                  <a:lnTo>
-                    <a:pt x="572980" y="3227880"/>
-                  </a:lnTo>
-                  <a:lnTo>
-                    <a:pt x="501357" y="3236435"/>
-                  </a:lnTo>
-                  <a:lnTo>
-                    <a:pt x="429735" y="3244704"/>
-                  </a:lnTo>
-                  <a:lnTo>
-                    <a:pt x="358112" y="3252696"/>
-                  </a:lnTo>
-                  <a:lnTo>
-                    <a:pt x="286490" y="3260421"/>
-                  </a:lnTo>
-                  <a:lnTo>
-                    <a:pt x="214867" y="3267887"/>
-                  </a:lnTo>
-                  <a:lnTo>
-                    <a:pt x="143245" y="3275104"/>
-                  </a:lnTo>
-                  <a:lnTo>
-                    <a:pt x="71622" y="3282080"/>
-                  </a:lnTo>
-                  <a:lnTo>
-                    <a:pt x="0" y="3288823"/>
+                    <a:pt x="70547" y="1531146"/>
+                  </a:lnTo>
+                  <a:lnTo>
+                    <a:pt x="141094" y="1563800"/>
+                  </a:lnTo>
+                  <a:lnTo>
+                    <a:pt x="211641" y="1595834"/>
+                  </a:lnTo>
+                  <a:lnTo>
+                    <a:pt x="282188" y="1627260"/>
+                  </a:lnTo>
+                  <a:lnTo>
+                    <a:pt x="352735" y="1658088"/>
+                  </a:lnTo>
+                  <a:lnTo>
+                    <a:pt x="423283" y="1688330"/>
+                  </a:lnTo>
+                  <a:lnTo>
+                    <a:pt x="493830" y="1717997"/>
+                  </a:lnTo>
+                  <a:lnTo>
+                    <a:pt x="564377" y="1747101"/>
+                  </a:lnTo>
+                  <a:lnTo>
+                    <a:pt x="634924" y="1775651"/>
+                  </a:lnTo>
+                  <a:lnTo>
+                    <a:pt x="705471" y="1803659"/>
+                  </a:lnTo>
+                  <a:lnTo>
+                    <a:pt x="776018" y="1831135"/>
+                  </a:lnTo>
+                  <a:lnTo>
+                    <a:pt x="846566" y="1858088"/>
+                  </a:lnTo>
+                  <a:lnTo>
+                    <a:pt x="917113" y="1884530"/>
+                  </a:lnTo>
+                  <a:lnTo>
+                    <a:pt x="987660" y="1910468"/>
+                  </a:lnTo>
+                  <a:lnTo>
+                    <a:pt x="1058207" y="1935914"/>
+                  </a:lnTo>
+                  <a:lnTo>
+                    <a:pt x="1128754" y="1960877"/>
+                  </a:lnTo>
+                  <a:lnTo>
+                    <a:pt x="1199301" y="1985364"/>
+                  </a:lnTo>
+                  <a:lnTo>
+                    <a:pt x="1269849" y="2009387"/>
+                  </a:lnTo>
+                  <a:lnTo>
+                    <a:pt x="1340396" y="2032953"/>
+                  </a:lnTo>
+                  <a:lnTo>
+                    <a:pt x="1410943" y="2056071"/>
+                  </a:lnTo>
+                  <a:lnTo>
+                    <a:pt x="1481490" y="2078750"/>
+                  </a:lnTo>
+                  <a:lnTo>
+                    <a:pt x="1552037" y="2100997"/>
+                  </a:lnTo>
+                  <a:lnTo>
+                    <a:pt x="1622584" y="2122822"/>
+                  </a:lnTo>
+                  <a:lnTo>
+                    <a:pt x="1693132" y="2144232"/>
+                  </a:lnTo>
+                  <a:lnTo>
+                    <a:pt x="1763679" y="2165236"/>
+                  </a:lnTo>
+                  <a:lnTo>
+                    <a:pt x="1834226" y="2185840"/>
+                  </a:lnTo>
+                  <a:lnTo>
+                    <a:pt x="1904773" y="2206052"/>
+                  </a:lnTo>
+                  <a:lnTo>
+                    <a:pt x="1975320" y="2225881"/>
+                  </a:lnTo>
+                  <a:lnTo>
+                    <a:pt x="2045868" y="2245332"/>
+                  </a:lnTo>
+                  <a:lnTo>
+                    <a:pt x="2116415" y="2264414"/>
+                  </a:lnTo>
+                  <a:lnTo>
+                    <a:pt x="2186962" y="2283133"/>
+                  </a:lnTo>
+                  <a:lnTo>
+                    <a:pt x="2257509" y="2301497"/>
+                  </a:lnTo>
+                  <a:lnTo>
+                    <a:pt x="2328056" y="2319511"/>
+                  </a:lnTo>
+                  <a:lnTo>
+                    <a:pt x="2398603" y="2337184"/>
+                  </a:lnTo>
+                  <a:lnTo>
+                    <a:pt x="2469151" y="2354520"/>
+                  </a:lnTo>
+                  <a:lnTo>
+                    <a:pt x="2539698" y="2371527"/>
+                  </a:lnTo>
+                  <a:lnTo>
+                    <a:pt x="2610245" y="2388210"/>
+                  </a:lnTo>
+                  <a:lnTo>
+                    <a:pt x="2680792" y="2404577"/>
+                  </a:lnTo>
+                  <a:lnTo>
+                    <a:pt x="2751339" y="2420632"/>
+                  </a:lnTo>
+                  <a:lnTo>
+                    <a:pt x="2821886" y="2436383"/>
+                  </a:lnTo>
+                  <a:lnTo>
+                    <a:pt x="2892434" y="2451834"/>
+                  </a:lnTo>
+                  <a:lnTo>
+                    <a:pt x="2962981" y="2466991"/>
+                  </a:lnTo>
+                  <a:lnTo>
+                    <a:pt x="3033528" y="2464769"/>
+                  </a:lnTo>
+                  <a:lnTo>
+                    <a:pt x="3104075" y="2437628"/>
+                  </a:lnTo>
+                  <a:lnTo>
+                    <a:pt x="3174622" y="2409548"/>
+                  </a:lnTo>
+                  <a:lnTo>
+                    <a:pt x="3245169" y="2380497"/>
+                  </a:lnTo>
+                  <a:lnTo>
+                    <a:pt x="3315717" y="2350440"/>
+                  </a:lnTo>
+                  <a:lnTo>
+                    <a:pt x="3386264" y="2319345"/>
+                  </a:lnTo>
+                  <a:lnTo>
+                    <a:pt x="3456811" y="2287173"/>
+                  </a:lnTo>
+                  <a:lnTo>
+                    <a:pt x="3527358" y="2253889"/>
+                  </a:lnTo>
+                  <a:lnTo>
+                    <a:pt x="3597905" y="2219453"/>
+                  </a:lnTo>
+                  <a:lnTo>
+                    <a:pt x="3668452" y="2183826"/>
+                  </a:lnTo>
+                  <a:lnTo>
+                    <a:pt x="3739000" y="2146967"/>
+                  </a:lnTo>
+                  <a:lnTo>
+                    <a:pt x="3809547" y="2108833"/>
+                  </a:lnTo>
+                  <a:lnTo>
+                    <a:pt x="3880094" y="2069380"/>
+                  </a:lnTo>
+                  <a:lnTo>
+                    <a:pt x="3950641" y="2028562"/>
+                  </a:lnTo>
+                  <a:lnTo>
+                    <a:pt x="4021188" y="1986332"/>
+                  </a:lnTo>
+                  <a:lnTo>
+                    <a:pt x="4091736" y="1942641"/>
+                  </a:lnTo>
+                  <a:lnTo>
+                    <a:pt x="4162283" y="1897440"/>
+                  </a:lnTo>
+                  <a:lnTo>
+                    <a:pt x="4232830" y="1850674"/>
+                  </a:lnTo>
+                  <a:lnTo>
+                    <a:pt x="4303377" y="1802291"/>
+                  </a:lnTo>
+                  <a:lnTo>
+                    <a:pt x="4373924" y="1752234"/>
+                  </a:lnTo>
+                  <a:lnTo>
+                    <a:pt x="4444471" y="1700446"/>
+                  </a:lnTo>
+                  <a:lnTo>
+                    <a:pt x="4515019" y="1646867"/>
+                  </a:lnTo>
+                  <a:lnTo>
+                    <a:pt x="4585566" y="1591434"/>
+                  </a:lnTo>
+                  <a:lnTo>
+                    <a:pt x="4656113" y="1534083"/>
+                  </a:lnTo>
+                  <a:lnTo>
+                    <a:pt x="4726660" y="1474749"/>
+                  </a:lnTo>
+                  <a:lnTo>
+                    <a:pt x="4797207" y="1413363"/>
+                  </a:lnTo>
+                  <a:lnTo>
+                    <a:pt x="4867754" y="1349853"/>
+                  </a:lnTo>
+                  <a:lnTo>
+                    <a:pt x="4938302" y="1284146"/>
+                  </a:lnTo>
+                  <a:lnTo>
+                    <a:pt x="5008849" y="1216166"/>
+                  </a:lnTo>
+                  <a:lnTo>
+                    <a:pt x="5079396" y="1145835"/>
+                  </a:lnTo>
+                  <a:lnTo>
+                    <a:pt x="5149943" y="1073071"/>
+                  </a:lnTo>
+                  <a:lnTo>
+                    <a:pt x="5220490" y="997790"/>
+                  </a:lnTo>
+                  <a:lnTo>
+                    <a:pt x="5291037" y="919905"/>
+                  </a:lnTo>
+                  <a:lnTo>
+                    <a:pt x="5361585" y="839326"/>
+                  </a:lnTo>
+                  <a:lnTo>
+                    <a:pt x="5432132" y="755960"/>
+                  </a:lnTo>
+                  <a:lnTo>
+                    <a:pt x="5502679" y="669710"/>
+                  </a:lnTo>
+                  <a:lnTo>
+                    <a:pt x="5573226" y="580477"/>
+                  </a:lnTo>
+                  <a:lnTo>
+                    <a:pt x="5643773" y="488157"/>
+                  </a:lnTo>
+                  <a:lnTo>
+                    <a:pt x="5714320" y="392643"/>
+                  </a:lnTo>
+                  <a:lnTo>
+                    <a:pt x="5784868" y="293826"/>
+                  </a:lnTo>
+                  <a:lnTo>
+                    <a:pt x="5855415" y="191590"/>
+                  </a:lnTo>
+                  <a:lnTo>
+                    <a:pt x="5925962" y="85818"/>
+                  </a:lnTo>
+                  <a:lnTo>
+                    <a:pt x="5981287" y="0"/>
+                  </a:lnTo>
+                  <a:lnTo>
+                    <a:pt x="6984170" y="0"/>
+                  </a:lnTo>
+                  <a:lnTo>
+                    <a:pt x="6984170" y="2987313"/>
+                  </a:lnTo>
+                  <a:lnTo>
+                    <a:pt x="6913622" y="2982235"/>
+                  </a:lnTo>
+                  <a:lnTo>
+                    <a:pt x="6843075" y="2977059"/>
+                  </a:lnTo>
+                  <a:lnTo>
+                    <a:pt x="6772528" y="2971783"/>
+                  </a:lnTo>
+                  <a:lnTo>
+                    <a:pt x="6701981" y="2966405"/>
+                  </a:lnTo>
+                  <a:lnTo>
+                    <a:pt x="6631434" y="2960922"/>
+                  </a:lnTo>
+                  <a:lnTo>
+                    <a:pt x="6560887" y="2955334"/>
+                  </a:lnTo>
+                  <a:lnTo>
+                    <a:pt x="6490339" y="2949637"/>
+                  </a:lnTo>
+                  <a:lnTo>
+                    <a:pt x="6419792" y="2943829"/>
+                  </a:lnTo>
+                  <a:lnTo>
+                    <a:pt x="6349245" y="2937909"/>
+                  </a:lnTo>
+                  <a:lnTo>
+                    <a:pt x="6278698" y="2931875"/>
+                  </a:lnTo>
+                  <a:lnTo>
+                    <a:pt x="6208151" y="2925723"/>
+                  </a:lnTo>
+                  <a:lnTo>
+                    <a:pt x="6137604" y="2919453"/>
+                  </a:lnTo>
+                  <a:lnTo>
+                    <a:pt x="6067056" y="2913061"/>
+                  </a:lnTo>
+                  <a:lnTo>
+                    <a:pt x="5996509" y="2906545"/>
+                  </a:lnTo>
+                  <a:lnTo>
+                    <a:pt x="5925962" y="2899903"/>
+                  </a:lnTo>
+                  <a:lnTo>
+                    <a:pt x="5855415" y="2893132"/>
+                  </a:lnTo>
+                  <a:lnTo>
+                    <a:pt x="5784868" y="2886230"/>
+                  </a:lnTo>
+                  <a:lnTo>
+                    <a:pt x="5714320" y="2879194"/>
+                  </a:lnTo>
+                  <a:lnTo>
+                    <a:pt x="5643773" y="2872022"/>
+                  </a:lnTo>
+                  <a:lnTo>
+                    <a:pt x="5573226" y="2864711"/>
+                  </a:lnTo>
+                  <a:lnTo>
+                    <a:pt x="5502679" y="2857259"/>
+                  </a:lnTo>
+                  <a:lnTo>
+                    <a:pt x="5432132" y="2849662"/>
+                  </a:lnTo>
+                  <a:lnTo>
+                    <a:pt x="5361585" y="2841918"/>
+                  </a:lnTo>
+                  <a:lnTo>
+                    <a:pt x="5291037" y="2834023"/>
+                  </a:lnTo>
+                  <a:lnTo>
+                    <a:pt x="5220490" y="2825976"/>
+                  </a:lnTo>
+                  <a:lnTo>
+                    <a:pt x="5149943" y="2817773"/>
+                  </a:lnTo>
+                  <a:lnTo>
+                    <a:pt x="5079396" y="2809411"/>
+                  </a:lnTo>
+                  <a:lnTo>
+                    <a:pt x="5008849" y="2800888"/>
+                  </a:lnTo>
+                  <a:lnTo>
+                    <a:pt x="4938302" y="2792199"/>
+                  </a:lnTo>
+                  <a:lnTo>
+                    <a:pt x="4867754" y="2783341"/>
+                  </a:lnTo>
+                  <a:lnTo>
+                    <a:pt x="4797207" y="2774312"/>
+                  </a:lnTo>
+                  <a:lnTo>
+                    <a:pt x="4726660" y="2765108"/>
+                  </a:lnTo>
+                  <a:lnTo>
+                    <a:pt x="4656113" y="2755726"/>
+                  </a:lnTo>
+                  <a:lnTo>
+                    <a:pt x="4585566" y="2746162"/>
+                  </a:lnTo>
+                  <a:lnTo>
+                    <a:pt x="4515019" y="2736413"/>
+                  </a:lnTo>
+                  <a:lnTo>
+                    <a:pt x="4444471" y="2726475"/>
+                  </a:lnTo>
+                  <a:lnTo>
+                    <a:pt x="4373924" y="2716345"/>
+                  </a:lnTo>
+                  <a:lnTo>
+                    <a:pt x="4303377" y="2706018"/>
+                  </a:lnTo>
+                  <a:lnTo>
+                    <a:pt x="4232830" y="2695491"/>
+                  </a:lnTo>
+                  <a:lnTo>
+                    <a:pt x="4162283" y="2684760"/>
+                  </a:lnTo>
+                  <a:lnTo>
+                    <a:pt x="4091736" y="2673821"/>
+                  </a:lnTo>
+                  <a:lnTo>
+                    <a:pt x="4021188" y="2662671"/>
+                  </a:lnTo>
+                  <a:lnTo>
+                    <a:pt x="3950641" y="2651304"/>
+                  </a:lnTo>
+                  <a:lnTo>
+                    <a:pt x="3880094" y="2639717"/>
+                  </a:lnTo>
+                  <a:lnTo>
+                    <a:pt x="3809547" y="2627906"/>
+                  </a:lnTo>
+                  <a:lnTo>
+                    <a:pt x="3739000" y="2615866"/>
+                  </a:lnTo>
+                  <a:lnTo>
+                    <a:pt x="3668452" y="2603593"/>
+                  </a:lnTo>
+                  <a:lnTo>
+                    <a:pt x="3597905" y="2591081"/>
+                  </a:lnTo>
+                  <a:lnTo>
+                    <a:pt x="3527358" y="2578328"/>
+                  </a:lnTo>
+                  <a:lnTo>
+                    <a:pt x="3456811" y="2565327"/>
+                  </a:lnTo>
+                  <a:lnTo>
+                    <a:pt x="3386264" y="2552075"/>
+                  </a:lnTo>
+                  <a:lnTo>
+                    <a:pt x="3315717" y="2538566"/>
+                  </a:lnTo>
+                  <a:lnTo>
+                    <a:pt x="3245169" y="2524795"/>
+                  </a:lnTo>
+                  <a:lnTo>
+                    <a:pt x="3174622" y="2510757"/>
+                  </a:lnTo>
+                  <a:lnTo>
+                    <a:pt x="3104075" y="2496448"/>
+                  </a:lnTo>
+                  <a:lnTo>
+                    <a:pt x="3033528" y="2481861"/>
+                  </a:lnTo>
+                  <a:lnTo>
+                    <a:pt x="2962981" y="2491003"/>
+                  </a:lnTo>
+                  <a:lnTo>
+                    <a:pt x="2892434" y="2516359"/>
+                  </a:lnTo>
+                  <a:lnTo>
+                    <a:pt x="2821886" y="2540868"/>
+                  </a:lnTo>
+                  <a:lnTo>
+                    <a:pt x="2751339" y="2564558"/>
+                  </a:lnTo>
+                  <a:lnTo>
+                    <a:pt x="2680792" y="2587455"/>
+                  </a:lnTo>
+                  <a:lnTo>
+                    <a:pt x="2610245" y="2609587"/>
+                  </a:lnTo>
+                  <a:lnTo>
+                    <a:pt x="2539698" y="2630979"/>
+                  </a:lnTo>
+                  <a:lnTo>
+                    <a:pt x="2469151" y="2651655"/>
+                  </a:lnTo>
+                  <a:lnTo>
+                    <a:pt x="2398603" y="2671641"/>
+                  </a:lnTo>
+                  <a:lnTo>
+                    <a:pt x="2328056" y="2690958"/>
+                  </a:lnTo>
+                  <a:lnTo>
+                    <a:pt x="2257509" y="2709629"/>
+                  </a:lnTo>
+                  <a:lnTo>
+                    <a:pt x="2186962" y="2727676"/>
+                  </a:lnTo>
+                  <a:lnTo>
+                    <a:pt x="2116415" y="2745120"/>
+                  </a:lnTo>
+                  <a:lnTo>
+                    <a:pt x="2045868" y="2761980"/>
+                  </a:lnTo>
+                  <a:lnTo>
+                    <a:pt x="1975320" y="2778277"/>
+                  </a:lnTo>
+                  <a:lnTo>
+                    <a:pt x="1904773" y="2794029"/>
+                  </a:lnTo>
+                  <a:lnTo>
+                    <a:pt x="1834226" y="2809254"/>
+                  </a:lnTo>
+                  <a:lnTo>
+                    <a:pt x="1763679" y="2823970"/>
+                  </a:lnTo>
+                  <a:lnTo>
+                    <a:pt x="1693132" y="2838194"/>
+                  </a:lnTo>
+                  <a:lnTo>
+                    <a:pt x="1622584" y="2851943"/>
+                  </a:lnTo>
+                  <a:lnTo>
+                    <a:pt x="1552037" y="2865232"/>
+                  </a:lnTo>
+                  <a:lnTo>
+                    <a:pt x="1481490" y="2878076"/>
+                  </a:lnTo>
+                  <a:lnTo>
+                    <a:pt x="1410943" y="2890491"/>
+                  </a:lnTo>
+                  <a:lnTo>
+                    <a:pt x="1340396" y="2902491"/>
+                  </a:lnTo>
+                  <a:lnTo>
+                    <a:pt x="1269849" y="2914090"/>
+                  </a:lnTo>
+                  <a:lnTo>
+                    <a:pt x="1199301" y="2925301"/>
+                  </a:lnTo>
+                  <a:lnTo>
+                    <a:pt x="1128754" y="2936138"/>
+                  </a:lnTo>
+                  <a:lnTo>
+                    <a:pt x="1058207" y="2946611"/>
+                  </a:lnTo>
+                  <a:lnTo>
+                    <a:pt x="987660" y="2956735"/>
+                  </a:lnTo>
+                  <a:lnTo>
+                    <a:pt x="917113" y="2966520"/>
+                  </a:lnTo>
+                  <a:lnTo>
+                    <a:pt x="846566" y="2975978"/>
+                  </a:lnTo>
+                  <a:lnTo>
+                    <a:pt x="776018" y="2985120"/>
+                  </a:lnTo>
+                  <a:lnTo>
+                    <a:pt x="705471" y="2993957"/>
+                  </a:lnTo>
+                  <a:lnTo>
+                    <a:pt x="634924" y="3002497"/>
+                  </a:lnTo>
+                  <a:lnTo>
+                    <a:pt x="564377" y="3010753"/>
+                  </a:lnTo>
+                  <a:lnTo>
+                    <a:pt x="493830" y="3018732"/>
+                  </a:lnTo>
+                  <a:lnTo>
+                    <a:pt x="423283" y="3026444"/>
+                  </a:lnTo>
+                  <a:lnTo>
+                    <a:pt x="352735" y="3033899"/>
+                  </a:lnTo>
+                  <a:lnTo>
+                    <a:pt x="282188" y="3041104"/>
+                  </a:lnTo>
+                  <a:lnTo>
+                    <a:pt x="211641" y="3048069"/>
+                  </a:lnTo>
+                  <a:lnTo>
+                    <a:pt x="141094" y="3054800"/>
+                  </a:lnTo>
+                  <a:lnTo>
+                    <a:pt x="70547" y="3061307"/>
+                  </a:lnTo>
+                  <a:lnTo>
+                    <a:pt x="0" y="3067596"/>
                   </a:lnTo>
                   <a:close/>
                 </a:path>
@@ -3723,270 +3723,270 @@
           </p:nvSpPr>
           <p:spPr>
             <a:xfrm>
-              <a:off x="1172049" y="2073503"/>
-              <a:ext cx="6072460" cy="2644904"/>
+              <a:off x="1264853" y="2209169"/>
+              <a:ext cx="5981287" cy="2466991"/>
             </a:xfrm>
             <a:custGeom>
               <a:avLst/>
               <a:pathLst>
-                <a:path w="6072460" h="2644904">
+                <a:path w="5981287" h="2466991">
                   <a:moveTo>
-                    <a:pt x="0" y="1605880"/>
+                    <a:pt x="0" y="1497858"/>
                   </a:moveTo>
                   <a:lnTo>
-                    <a:pt x="71622" y="1641568"/>
-                  </a:lnTo>
-                  <a:lnTo>
-                    <a:pt x="143245" y="1676578"/>
-                  </a:lnTo>
-                  <a:lnTo>
-                    <a:pt x="214867" y="1710922"/>
-                  </a:lnTo>
-                  <a:lnTo>
-                    <a:pt x="286490" y="1744613"/>
-                  </a:lnTo>
-                  <a:lnTo>
-                    <a:pt x="358112" y="1777665"/>
-                  </a:lnTo>
-                  <a:lnTo>
-                    <a:pt x="429735" y="1810088"/>
-                  </a:lnTo>
-                  <a:lnTo>
-                    <a:pt x="501357" y="1841895"/>
-                  </a:lnTo>
-                  <a:lnTo>
-                    <a:pt x="572980" y="1873097"/>
-                  </a:lnTo>
-                  <a:lnTo>
-                    <a:pt x="644602" y="1903707"/>
-                  </a:lnTo>
-                  <a:lnTo>
-                    <a:pt x="716225" y="1933735"/>
-                  </a:lnTo>
-                  <a:lnTo>
-                    <a:pt x="787847" y="1963192"/>
-                  </a:lnTo>
-                  <a:lnTo>
-                    <a:pt x="859470" y="1992089"/>
-                  </a:lnTo>
-                  <a:lnTo>
-                    <a:pt x="931092" y="2020437"/>
-                  </a:lnTo>
-                  <a:lnTo>
-                    <a:pt x="1002715" y="2048247"/>
-                  </a:lnTo>
-                  <a:lnTo>
-                    <a:pt x="1074337" y="2075527"/>
-                  </a:lnTo>
-                  <a:lnTo>
-                    <a:pt x="1145960" y="2102290"/>
-                  </a:lnTo>
-                  <a:lnTo>
-                    <a:pt x="1217582" y="2128544"/>
-                  </a:lnTo>
-                  <a:lnTo>
-                    <a:pt x="1289205" y="2154299"/>
-                  </a:lnTo>
-                  <a:lnTo>
-                    <a:pt x="1360827" y="2179564"/>
-                  </a:lnTo>
-                  <a:lnTo>
-                    <a:pt x="1432450" y="2204349"/>
-                  </a:lnTo>
-                  <a:lnTo>
-                    <a:pt x="1504073" y="2228664"/>
-                  </a:lnTo>
-                  <a:lnTo>
-                    <a:pt x="1575695" y="2252516"/>
-                  </a:lnTo>
-                  <a:lnTo>
-                    <a:pt x="1647318" y="2275915"/>
-                  </a:lnTo>
-                  <a:lnTo>
-                    <a:pt x="1718940" y="2298869"/>
-                  </a:lnTo>
-                  <a:lnTo>
-                    <a:pt x="1790563" y="2321387"/>
-                  </a:lnTo>
-                  <a:lnTo>
-                    <a:pt x="1862185" y="2343477"/>
-                  </a:lnTo>
-                  <a:lnTo>
-                    <a:pt x="1933808" y="2365147"/>
-                  </a:lnTo>
-                  <a:lnTo>
-                    <a:pt x="2005430" y="2386405"/>
-                  </a:lnTo>
-                  <a:lnTo>
-                    <a:pt x="2077053" y="2407260"/>
-                  </a:lnTo>
-                  <a:lnTo>
-                    <a:pt x="2148675" y="2427718"/>
-                  </a:lnTo>
-                  <a:lnTo>
-                    <a:pt x="2220298" y="2447787"/>
-                  </a:lnTo>
-                  <a:lnTo>
-                    <a:pt x="2291920" y="2467475"/>
-                  </a:lnTo>
-                  <a:lnTo>
-                    <a:pt x="2363543" y="2486789"/>
-                  </a:lnTo>
-                  <a:lnTo>
-                    <a:pt x="2435165" y="2505735"/>
-                  </a:lnTo>
-                  <a:lnTo>
-                    <a:pt x="2506788" y="2524322"/>
-                  </a:lnTo>
-                  <a:lnTo>
-                    <a:pt x="2578410" y="2542555"/>
-                  </a:lnTo>
-                  <a:lnTo>
-                    <a:pt x="2650033" y="2560442"/>
-                  </a:lnTo>
-                  <a:lnTo>
-                    <a:pt x="2721655" y="2577989"/>
-                  </a:lnTo>
-                  <a:lnTo>
-                    <a:pt x="2793278" y="2595202"/>
-                  </a:lnTo>
-                  <a:lnTo>
-                    <a:pt x="2864901" y="2612089"/>
-                  </a:lnTo>
-                  <a:lnTo>
-                    <a:pt x="2936523" y="2628654"/>
-                  </a:lnTo>
-                  <a:lnTo>
-                    <a:pt x="3008146" y="2644904"/>
-                  </a:lnTo>
-                  <a:lnTo>
-                    <a:pt x="3079768" y="2642522"/>
-                  </a:lnTo>
-                  <a:lnTo>
-                    <a:pt x="3151391" y="2613423"/>
-                  </a:lnTo>
-                  <a:lnTo>
-                    <a:pt x="3223013" y="2583318"/>
-                  </a:lnTo>
-                  <a:lnTo>
-                    <a:pt x="3294636" y="2552172"/>
-                  </a:lnTo>
-                  <a:lnTo>
-                    <a:pt x="3366258" y="2519948"/>
-                  </a:lnTo>
-                  <a:lnTo>
-                    <a:pt x="3437881" y="2486610"/>
-                  </a:lnTo>
-                  <a:lnTo>
-                    <a:pt x="3509503" y="2452118"/>
-                  </a:lnTo>
-                  <a:lnTo>
-                    <a:pt x="3581126" y="2416433"/>
-                  </a:lnTo>
-                  <a:lnTo>
-                    <a:pt x="3652748" y="2379514"/>
-                  </a:lnTo>
-                  <a:lnTo>
-                    <a:pt x="3724371" y="2341318"/>
-                  </a:lnTo>
-                  <a:lnTo>
-                    <a:pt x="3795993" y="2301801"/>
-                  </a:lnTo>
-                  <a:lnTo>
-                    <a:pt x="3867616" y="2260917"/>
-                  </a:lnTo>
-                  <a:lnTo>
-                    <a:pt x="3939238" y="2218618"/>
-                  </a:lnTo>
-                  <a:lnTo>
-                    <a:pt x="4010861" y="2174857"/>
-                  </a:lnTo>
-                  <a:lnTo>
-                    <a:pt x="4082483" y="2129581"/>
-                  </a:lnTo>
-                  <a:lnTo>
-                    <a:pt x="4154106" y="2082740"/>
-                  </a:lnTo>
-                  <a:lnTo>
-                    <a:pt x="4225729" y="2034278"/>
-                  </a:lnTo>
-                  <a:lnTo>
-                    <a:pt x="4297351" y="1984140"/>
-                  </a:lnTo>
-                  <a:lnTo>
-                    <a:pt x="4368974" y="1932268"/>
-                  </a:lnTo>
-                  <a:lnTo>
-                    <a:pt x="4440596" y="1878601"/>
-                  </a:lnTo>
-                  <a:lnTo>
-                    <a:pt x="4512219" y="1823078"/>
-                  </a:lnTo>
-                  <a:lnTo>
-                    <a:pt x="4583841" y="1765634"/>
-                  </a:lnTo>
-                  <a:lnTo>
-                    <a:pt x="4655464" y="1706204"/>
-                  </a:lnTo>
-                  <a:lnTo>
-                    <a:pt x="4727086" y="1644717"/>
-                  </a:lnTo>
-                  <a:lnTo>
-                    <a:pt x="4798709" y="1581104"/>
-                  </a:lnTo>
-                  <a:lnTo>
-                    <a:pt x="4870331" y="1515291"/>
-                  </a:lnTo>
-                  <a:lnTo>
-                    <a:pt x="4941954" y="1447200"/>
-                  </a:lnTo>
-                  <a:lnTo>
-                    <a:pt x="5013576" y="1376755"/>
-                  </a:lnTo>
-                  <a:lnTo>
-                    <a:pt x="5085199" y="1303873"/>
-                  </a:lnTo>
-                  <a:lnTo>
-                    <a:pt x="5156821" y="1228470"/>
-                  </a:lnTo>
-                  <a:lnTo>
-                    <a:pt x="5228444" y="1150458"/>
-                  </a:lnTo>
-                  <a:lnTo>
-                    <a:pt x="5300066" y="1069748"/>
-                  </a:lnTo>
-                  <a:lnTo>
-                    <a:pt x="5371689" y="986246"/>
-                  </a:lnTo>
-                  <a:lnTo>
-                    <a:pt x="5443311" y="899856"/>
-                  </a:lnTo>
-                  <a:lnTo>
-                    <a:pt x="5514934" y="810478"/>
-                  </a:lnTo>
-                  <a:lnTo>
-                    <a:pt x="5586557" y="718008"/>
-                  </a:lnTo>
-                  <a:lnTo>
-                    <a:pt x="5658179" y="622339"/>
-                  </a:lnTo>
-                  <a:lnTo>
-                    <a:pt x="5729802" y="523361"/>
-                  </a:lnTo>
-                  <a:lnTo>
-                    <a:pt x="5801424" y="420959"/>
-                  </a:lnTo>
-                  <a:lnTo>
-                    <a:pt x="5873047" y="315016"/>
-                  </a:lnTo>
-                  <a:lnTo>
-                    <a:pt x="5944669" y="205407"/>
-                  </a:lnTo>
-                  <a:lnTo>
-                    <a:pt x="6016292" y="92007"/>
-                  </a:lnTo>
-                  <a:lnTo>
-                    <a:pt x="6072460" y="0"/>
+                    <a:pt x="70547" y="1531146"/>
+                  </a:lnTo>
+                  <a:lnTo>
+                    <a:pt x="141094" y="1563800"/>
+                  </a:lnTo>
+                  <a:lnTo>
+                    <a:pt x="211641" y="1595834"/>
+                  </a:lnTo>
+                  <a:lnTo>
+                    <a:pt x="282188" y="1627260"/>
+                  </a:lnTo>
+                  <a:lnTo>
+                    <a:pt x="352735" y="1658088"/>
+                  </a:lnTo>
+                  <a:lnTo>
+                    <a:pt x="423283" y="1688330"/>
+                  </a:lnTo>
+                  <a:lnTo>
+                    <a:pt x="493830" y="1717997"/>
+                  </a:lnTo>
+                  <a:lnTo>
+                    <a:pt x="564377" y="1747101"/>
+                  </a:lnTo>
+                  <a:lnTo>
+                    <a:pt x="634924" y="1775651"/>
+                  </a:lnTo>
+                  <a:lnTo>
+                    <a:pt x="705471" y="1803659"/>
+                  </a:lnTo>
+                  <a:lnTo>
+                    <a:pt x="776018" y="1831135"/>
+                  </a:lnTo>
+                  <a:lnTo>
+                    <a:pt x="846566" y="1858088"/>
+                  </a:lnTo>
+                  <a:lnTo>
+                    <a:pt x="917113" y="1884530"/>
+                  </a:lnTo>
+                  <a:lnTo>
+                    <a:pt x="987660" y="1910468"/>
+                  </a:lnTo>
+                  <a:lnTo>
+                    <a:pt x="1058207" y="1935914"/>
+                  </a:lnTo>
+                  <a:lnTo>
+                    <a:pt x="1128754" y="1960877"/>
+                  </a:lnTo>
+                  <a:lnTo>
+                    <a:pt x="1199301" y="1985364"/>
+                  </a:lnTo>
+                  <a:lnTo>
+                    <a:pt x="1269849" y="2009387"/>
+                  </a:lnTo>
+                  <a:lnTo>
+                    <a:pt x="1340396" y="2032953"/>
+                  </a:lnTo>
+                  <a:lnTo>
+                    <a:pt x="1410943" y="2056071"/>
+                  </a:lnTo>
+                  <a:lnTo>
+                    <a:pt x="1481490" y="2078750"/>
+                  </a:lnTo>
+                  <a:lnTo>
+                    <a:pt x="1552037" y="2100997"/>
+                  </a:lnTo>
+                  <a:lnTo>
+                    <a:pt x="1622584" y="2122822"/>
+                  </a:lnTo>
+                  <a:lnTo>
+                    <a:pt x="1693132" y="2144232"/>
+                  </a:lnTo>
+                  <a:lnTo>
+                    <a:pt x="1763679" y="2165236"/>
+                  </a:lnTo>
+                  <a:lnTo>
+                    <a:pt x="1834226" y="2185840"/>
+                  </a:lnTo>
+                  <a:lnTo>
+                    <a:pt x="1904773" y="2206052"/>
+                  </a:lnTo>
+                  <a:lnTo>
+                    <a:pt x="1975320" y="2225881"/>
+                  </a:lnTo>
+                  <a:lnTo>
+                    <a:pt x="2045868" y="2245332"/>
+                  </a:lnTo>
+                  <a:lnTo>
+                    <a:pt x="2116415" y="2264414"/>
+                  </a:lnTo>
+                  <a:lnTo>
+                    <a:pt x="2186962" y="2283133"/>
+                  </a:lnTo>
+                  <a:lnTo>
+                    <a:pt x="2257509" y="2301497"/>
+                  </a:lnTo>
+                  <a:lnTo>
+                    <a:pt x="2328056" y="2319511"/>
+                  </a:lnTo>
+                  <a:lnTo>
+                    <a:pt x="2398603" y="2337184"/>
+                  </a:lnTo>
+                  <a:lnTo>
+                    <a:pt x="2469151" y="2354520"/>
+                  </a:lnTo>
+                  <a:lnTo>
+                    <a:pt x="2539698" y="2371527"/>
+                  </a:lnTo>
+                  <a:lnTo>
+                    <a:pt x="2610245" y="2388210"/>
+                  </a:lnTo>
+                  <a:lnTo>
+                    <a:pt x="2680792" y="2404577"/>
+                  </a:lnTo>
+                  <a:lnTo>
+                    <a:pt x="2751339" y="2420632"/>
+                  </a:lnTo>
+                  <a:lnTo>
+                    <a:pt x="2821886" y="2436383"/>
+                  </a:lnTo>
+                  <a:lnTo>
+                    <a:pt x="2892434" y="2451834"/>
+                  </a:lnTo>
+                  <a:lnTo>
+                    <a:pt x="2962981" y="2466991"/>
+                  </a:lnTo>
+                  <a:lnTo>
+                    <a:pt x="3033528" y="2464769"/>
+                  </a:lnTo>
+                  <a:lnTo>
+                    <a:pt x="3104075" y="2437628"/>
+                  </a:lnTo>
+                  <a:lnTo>
+                    <a:pt x="3174622" y="2409548"/>
+                  </a:lnTo>
+                  <a:lnTo>
+                    <a:pt x="3245169" y="2380497"/>
+                  </a:lnTo>
+                  <a:lnTo>
+                    <a:pt x="3315717" y="2350440"/>
+                  </a:lnTo>
+                  <a:lnTo>
+                    <a:pt x="3386264" y="2319345"/>
+                  </a:lnTo>
+                  <a:lnTo>
+                    <a:pt x="3456811" y="2287173"/>
+                  </a:lnTo>
+                  <a:lnTo>
+                    <a:pt x="3527358" y="2253889"/>
+                  </a:lnTo>
+                  <a:lnTo>
+                    <a:pt x="3597905" y="2219453"/>
+                  </a:lnTo>
+                  <a:lnTo>
+                    <a:pt x="3668452" y="2183826"/>
+                  </a:lnTo>
+                  <a:lnTo>
+                    <a:pt x="3739000" y="2146967"/>
+                  </a:lnTo>
+                  <a:lnTo>
+                    <a:pt x="3809547" y="2108833"/>
+                  </a:lnTo>
+                  <a:lnTo>
+                    <a:pt x="3880094" y="2069380"/>
+                  </a:lnTo>
+                  <a:lnTo>
+                    <a:pt x="3950641" y="2028562"/>
+                  </a:lnTo>
+                  <a:lnTo>
+                    <a:pt x="4021188" y="1986332"/>
+                  </a:lnTo>
+                  <a:lnTo>
+                    <a:pt x="4091736" y="1942641"/>
+                  </a:lnTo>
+                  <a:lnTo>
+                    <a:pt x="4162283" y="1897440"/>
+                  </a:lnTo>
+                  <a:lnTo>
+                    <a:pt x="4232830" y="1850674"/>
+                  </a:lnTo>
+                  <a:lnTo>
+                    <a:pt x="4303377" y="1802291"/>
+                  </a:lnTo>
+                  <a:lnTo>
+                    <a:pt x="4373924" y="1752234"/>
+                  </a:lnTo>
+                  <a:lnTo>
+                    <a:pt x="4444471" y="1700446"/>
+                  </a:lnTo>
+                  <a:lnTo>
+                    <a:pt x="4515019" y="1646867"/>
+                  </a:lnTo>
+                  <a:lnTo>
+                    <a:pt x="4585566" y="1591434"/>
+                  </a:lnTo>
+                  <a:lnTo>
+                    <a:pt x="4656113" y="1534083"/>
+                  </a:lnTo>
+                  <a:lnTo>
+                    <a:pt x="4726660" y="1474749"/>
+                  </a:lnTo>
+                  <a:lnTo>
+                    <a:pt x="4797207" y="1413363"/>
+                  </a:lnTo>
+                  <a:lnTo>
+                    <a:pt x="4867754" y="1349853"/>
+                  </a:lnTo>
+                  <a:lnTo>
+                    <a:pt x="4938302" y="1284146"/>
+                  </a:lnTo>
+                  <a:lnTo>
+                    <a:pt x="5008849" y="1216166"/>
+                  </a:lnTo>
+                  <a:lnTo>
+                    <a:pt x="5079396" y="1145835"/>
+                  </a:lnTo>
+                  <a:lnTo>
+                    <a:pt x="5149943" y="1073071"/>
+                  </a:lnTo>
+                  <a:lnTo>
+                    <a:pt x="5220490" y="997790"/>
+                  </a:lnTo>
+                  <a:lnTo>
+                    <a:pt x="5291037" y="919905"/>
+                  </a:lnTo>
+                  <a:lnTo>
+                    <a:pt x="5361585" y="839326"/>
+                  </a:lnTo>
+                  <a:lnTo>
+                    <a:pt x="5432132" y="755960"/>
+                  </a:lnTo>
+                  <a:lnTo>
+                    <a:pt x="5502679" y="669710"/>
+                  </a:lnTo>
+                  <a:lnTo>
+                    <a:pt x="5573226" y="580477"/>
+                  </a:lnTo>
+                  <a:lnTo>
+                    <a:pt x="5643773" y="488157"/>
+                  </a:lnTo>
+                  <a:lnTo>
+                    <a:pt x="5714320" y="392643"/>
+                  </a:lnTo>
+                  <a:lnTo>
+                    <a:pt x="5784868" y="293826"/>
+                  </a:lnTo>
+                  <a:lnTo>
+                    <a:pt x="5855415" y="191590"/>
+                  </a:lnTo>
+                  <a:lnTo>
+                    <a:pt x="5925962" y="85818"/>
+                  </a:lnTo>
+                  <a:lnTo>
+                    <a:pt x="5981287" y="0"/>
                   </a:lnTo>
                 </a:path>
               </a:pathLst>
@@ -4006,312 +4006,312 @@
           </p:nvSpPr>
           <p:spPr>
             <a:xfrm>
-              <a:off x="1172049" y="4734349"/>
-              <a:ext cx="7090630" cy="627976"/>
+              <a:off x="1264853" y="4691030"/>
+              <a:ext cx="6984170" cy="585734"/>
             </a:xfrm>
             <a:custGeom>
               <a:avLst/>
               <a:pathLst>
-                <a:path w="7090630" h="627976">
+                <a:path w="6984170" h="585734">
                   <a:moveTo>
-                    <a:pt x="7090630" y="541903"/>
+                    <a:pt x="6984170" y="505451"/>
                   </a:moveTo>
                   <a:lnTo>
-                    <a:pt x="7019007" y="536459"/>
-                  </a:lnTo>
-                  <a:lnTo>
-                    <a:pt x="6947385" y="530910"/>
-                  </a:lnTo>
-                  <a:lnTo>
-                    <a:pt x="6875762" y="525254"/>
-                  </a:lnTo>
-                  <a:lnTo>
-                    <a:pt x="6804139" y="519488"/>
-                  </a:lnTo>
-                  <a:lnTo>
-                    <a:pt x="6732517" y="513610"/>
-                  </a:lnTo>
-                  <a:lnTo>
-                    <a:pt x="6660894" y="507618"/>
-                  </a:lnTo>
-                  <a:lnTo>
-                    <a:pt x="6589272" y="501510"/>
-                  </a:lnTo>
-                  <a:lnTo>
-                    <a:pt x="6517649" y="495284"/>
-                  </a:lnTo>
-                  <a:lnTo>
-                    <a:pt x="6446027" y="488937"/>
-                  </a:lnTo>
-                  <a:lnTo>
-                    <a:pt x="6374404" y="482467"/>
-                  </a:lnTo>
-                  <a:lnTo>
-                    <a:pt x="6302782" y="475872"/>
-                  </a:lnTo>
-                  <a:lnTo>
-                    <a:pt x="6231159" y="469149"/>
-                  </a:lnTo>
-                  <a:lnTo>
-                    <a:pt x="6159537" y="462296"/>
-                  </a:lnTo>
-                  <a:lnTo>
-                    <a:pt x="6087914" y="455311"/>
-                  </a:lnTo>
-                  <a:lnTo>
-                    <a:pt x="6016292" y="448189"/>
-                  </a:lnTo>
-                  <a:lnTo>
-                    <a:pt x="5944669" y="440930"/>
-                  </a:lnTo>
-                  <a:lnTo>
-                    <a:pt x="5873047" y="433531"/>
-                  </a:lnTo>
-                  <a:lnTo>
-                    <a:pt x="5801424" y="425987"/>
-                  </a:lnTo>
-                  <a:lnTo>
-                    <a:pt x="5729802" y="418298"/>
-                  </a:lnTo>
-                  <a:lnTo>
-                    <a:pt x="5658179" y="410460"/>
-                  </a:lnTo>
-                  <a:lnTo>
-                    <a:pt x="5586557" y="402470"/>
-                  </a:lnTo>
-                  <a:lnTo>
-                    <a:pt x="5514934" y="394325"/>
-                  </a:lnTo>
-                  <a:lnTo>
-                    <a:pt x="5443311" y="386023"/>
-                  </a:lnTo>
-                  <a:lnTo>
-                    <a:pt x="5371689" y="377559"/>
-                  </a:lnTo>
-                  <a:lnTo>
-                    <a:pt x="5300066" y="368932"/>
-                  </a:lnTo>
-                  <a:lnTo>
-                    <a:pt x="5228444" y="360137"/>
-                  </a:lnTo>
-                  <a:lnTo>
-                    <a:pt x="5156821" y="351172"/>
-                  </a:lnTo>
-                  <a:lnTo>
-                    <a:pt x="5085199" y="342034"/>
-                  </a:lnTo>
-                  <a:lnTo>
-                    <a:pt x="5013576" y="332718"/>
-                  </a:lnTo>
-                  <a:lnTo>
-                    <a:pt x="4941954" y="323222"/>
-                  </a:lnTo>
-                  <a:lnTo>
-                    <a:pt x="4870331" y="313542"/>
-                  </a:lnTo>
-                  <a:lnTo>
-                    <a:pt x="4798709" y="303674"/>
-                  </a:lnTo>
-                  <a:lnTo>
-                    <a:pt x="4727086" y="293615"/>
-                  </a:lnTo>
-                  <a:lnTo>
-                    <a:pt x="4655464" y="283362"/>
-                  </a:lnTo>
-                  <a:lnTo>
-                    <a:pt x="4583841" y="272910"/>
-                  </a:lnTo>
-                  <a:lnTo>
-                    <a:pt x="4512219" y="262255"/>
-                  </a:lnTo>
-                  <a:lnTo>
-                    <a:pt x="4440596" y="251394"/>
-                  </a:lnTo>
-                  <a:lnTo>
-                    <a:pt x="4368974" y="240322"/>
-                  </a:lnTo>
-                  <a:lnTo>
-                    <a:pt x="4297351" y="229036"/>
-                  </a:lnTo>
-                  <a:lnTo>
-                    <a:pt x="4225729" y="217531"/>
-                  </a:lnTo>
-                  <a:lnTo>
-                    <a:pt x="4154106" y="205804"/>
-                  </a:lnTo>
-                  <a:lnTo>
-                    <a:pt x="4082483" y="193849"/>
-                  </a:lnTo>
-                  <a:lnTo>
-                    <a:pt x="4010861" y="181663"/>
-                  </a:lnTo>
-                  <a:lnTo>
-                    <a:pt x="3939238" y="169240"/>
-                  </a:lnTo>
-                  <a:lnTo>
-                    <a:pt x="3867616" y="156577"/>
-                  </a:lnTo>
-                  <a:lnTo>
-                    <a:pt x="3795993" y="143669"/>
-                  </a:lnTo>
-                  <a:lnTo>
-                    <a:pt x="3724371" y="130510"/>
-                  </a:lnTo>
-                  <a:lnTo>
-                    <a:pt x="3652748" y="117097"/>
-                  </a:lnTo>
-                  <a:lnTo>
-                    <a:pt x="3581126" y="103424"/>
-                  </a:lnTo>
-                  <a:lnTo>
-                    <a:pt x="3509503" y="89485"/>
-                  </a:lnTo>
-                  <a:lnTo>
-                    <a:pt x="3437881" y="75277"/>
-                  </a:lnTo>
-                  <a:lnTo>
-                    <a:pt x="3366258" y="60794"/>
-                  </a:lnTo>
-                  <a:lnTo>
-                    <a:pt x="3294636" y="46030"/>
-                  </a:lnTo>
-                  <a:lnTo>
-                    <a:pt x="3223013" y="30980"/>
-                  </a:lnTo>
-                  <a:lnTo>
-                    <a:pt x="3151391" y="15638"/>
-                  </a:lnTo>
-                  <a:lnTo>
-                    <a:pt x="3079768" y="0"/>
-                  </a:lnTo>
-                  <a:lnTo>
-                    <a:pt x="3008146" y="9801"/>
-                  </a:lnTo>
-                  <a:lnTo>
-                    <a:pt x="2936523" y="36986"/>
-                  </a:lnTo>
-                  <a:lnTo>
-                    <a:pt x="2864901" y="63262"/>
-                  </a:lnTo>
-                  <a:lnTo>
-                    <a:pt x="2793278" y="88660"/>
-                  </a:lnTo>
-                  <a:lnTo>
-                    <a:pt x="2721655" y="113209"/>
-                  </a:lnTo>
-                  <a:lnTo>
-                    <a:pt x="2650033" y="136937"/>
-                  </a:lnTo>
-                  <a:lnTo>
-                    <a:pt x="2578410" y="159871"/>
-                  </a:lnTo>
-                  <a:lnTo>
-                    <a:pt x="2506788" y="182039"/>
-                  </a:lnTo>
-                  <a:lnTo>
-                    <a:pt x="2435165" y="203466"/>
-                  </a:lnTo>
-                  <a:lnTo>
-                    <a:pt x="2363543" y="224176"/>
-                  </a:lnTo>
-                  <a:lnTo>
-                    <a:pt x="2291920" y="244194"/>
-                  </a:lnTo>
-                  <a:lnTo>
-                    <a:pt x="2220298" y="263542"/>
-                  </a:lnTo>
-                  <a:lnTo>
-                    <a:pt x="2148675" y="282244"/>
-                  </a:lnTo>
-                  <a:lnTo>
-                    <a:pt x="2077053" y="300320"/>
-                  </a:lnTo>
-                  <a:lnTo>
-                    <a:pt x="2005430" y="317792"/>
-                  </a:lnTo>
-                  <a:lnTo>
-                    <a:pt x="1933808" y="334680"/>
-                  </a:lnTo>
-                  <a:lnTo>
-                    <a:pt x="1862185" y="351003"/>
-                  </a:lnTo>
-                  <a:lnTo>
-                    <a:pt x="1790563" y="366781"/>
-                  </a:lnTo>
-                  <a:lnTo>
-                    <a:pt x="1718940" y="382031"/>
-                  </a:lnTo>
-                  <a:lnTo>
-                    <a:pt x="1647318" y="396771"/>
-                  </a:lnTo>
-                  <a:lnTo>
-                    <a:pt x="1575695" y="411018"/>
-                  </a:lnTo>
-                  <a:lnTo>
-                    <a:pt x="1504073" y="424789"/>
-                  </a:lnTo>
-                  <a:lnTo>
-                    <a:pt x="1432450" y="438099"/>
-                  </a:lnTo>
-                  <a:lnTo>
-                    <a:pt x="1360827" y="450965"/>
-                  </a:lnTo>
-                  <a:lnTo>
-                    <a:pt x="1289205" y="463400"/>
-                  </a:lnTo>
-                  <a:lnTo>
-                    <a:pt x="1217582" y="475420"/>
-                  </a:lnTo>
-                  <a:lnTo>
-                    <a:pt x="1145960" y="487037"/>
-                  </a:lnTo>
-                  <a:lnTo>
-                    <a:pt x="1074337" y="498267"/>
-                  </a:lnTo>
-                  <a:lnTo>
-                    <a:pt x="1002715" y="509121"/>
-                  </a:lnTo>
-                  <a:lnTo>
-                    <a:pt x="931092" y="519611"/>
-                  </a:lnTo>
-                  <a:lnTo>
-                    <a:pt x="859470" y="529752"/>
-                  </a:lnTo>
-                  <a:lnTo>
-                    <a:pt x="787847" y="539553"/>
-                  </a:lnTo>
-                  <a:lnTo>
-                    <a:pt x="716225" y="549026"/>
-                  </a:lnTo>
-                  <a:lnTo>
-                    <a:pt x="644602" y="558183"/>
-                  </a:lnTo>
-                  <a:lnTo>
-                    <a:pt x="572980" y="567034"/>
-                  </a:lnTo>
-                  <a:lnTo>
-                    <a:pt x="501357" y="575588"/>
-                  </a:lnTo>
-                  <a:lnTo>
-                    <a:pt x="429735" y="583857"/>
-                  </a:lnTo>
-                  <a:lnTo>
-                    <a:pt x="358112" y="591849"/>
-                  </a:lnTo>
-                  <a:lnTo>
-                    <a:pt x="286490" y="599574"/>
-                  </a:lnTo>
-                  <a:lnTo>
-                    <a:pt x="214867" y="607041"/>
-                  </a:lnTo>
-                  <a:lnTo>
-                    <a:pt x="143245" y="614258"/>
-                  </a:lnTo>
-                  <a:lnTo>
-                    <a:pt x="71622" y="621234"/>
-                  </a:lnTo>
-                  <a:lnTo>
-                    <a:pt x="0" y="627976"/>
+                    <a:pt x="6913622" y="500374"/>
+                  </a:lnTo>
+                  <a:lnTo>
+                    <a:pt x="6843075" y="495198"/>
+                  </a:lnTo>
+                  <a:lnTo>
+                    <a:pt x="6772528" y="489922"/>
+                  </a:lnTo>
+                  <a:lnTo>
+                    <a:pt x="6701981" y="484543"/>
+                  </a:lnTo>
+                  <a:lnTo>
+                    <a:pt x="6631434" y="479061"/>
+                  </a:lnTo>
+                  <a:lnTo>
+                    <a:pt x="6560887" y="473472"/>
+                  </a:lnTo>
+                  <a:lnTo>
+                    <a:pt x="6490339" y="467775"/>
+                  </a:lnTo>
+                  <a:lnTo>
+                    <a:pt x="6419792" y="461968"/>
+                  </a:lnTo>
+                  <a:lnTo>
+                    <a:pt x="6349245" y="456048"/>
+                  </a:lnTo>
+                  <a:lnTo>
+                    <a:pt x="6278698" y="450014"/>
+                  </a:lnTo>
+                  <a:lnTo>
+                    <a:pt x="6208151" y="443862"/>
+                  </a:lnTo>
+                  <a:lnTo>
+                    <a:pt x="6137604" y="437591"/>
+                  </a:lnTo>
+                  <a:lnTo>
+                    <a:pt x="6067056" y="431199"/>
+                  </a:lnTo>
+                  <a:lnTo>
+                    <a:pt x="5996509" y="424683"/>
+                  </a:lnTo>
+                  <a:lnTo>
+                    <a:pt x="5925962" y="418041"/>
+                  </a:lnTo>
+                  <a:lnTo>
+                    <a:pt x="5855415" y="411271"/>
+                  </a:lnTo>
+                  <a:lnTo>
+                    <a:pt x="5784868" y="404369"/>
+                  </a:lnTo>
+                  <a:lnTo>
+                    <a:pt x="5714320" y="397333"/>
+                  </a:lnTo>
+                  <a:lnTo>
+                    <a:pt x="5643773" y="390161"/>
+                  </a:lnTo>
+                  <a:lnTo>
+                    <a:pt x="5573226" y="382850"/>
+                  </a:lnTo>
+                  <a:lnTo>
+                    <a:pt x="5502679" y="375397"/>
+                  </a:lnTo>
+                  <a:lnTo>
+                    <a:pt x="5432132" y="367800"/>
+                  </a:lnTo>
+                  <a:lnTo>
+                    <a:pt x="5361585" y="360056"/>
+                  </a:lnTo>
+                  <a:lnTo>
+                    <a:pt x="5291037" y="352162"/>
+                  </a:lnTo>
+                  <a:lnTo>
+                    <a:pt x="5220490" y="344115"/>
+                  </a:lnTo>
+                  <a:lnTo>
+                    <a:pt x="5149943" y="335912"/>
+                  </a:lnTo>
+                  <a:lnTo>
+                    <a:pt x="5079396" y="327550"/>
+                  </a:lnTo>
+                  <a:lnTo>
+                    <a:pt x="5008849" y="319026"/>
+                  </a:lnTo>
+                  <a:lnTo>
+                    <a:pt x="4938302" y="310337"/>
+                  </a:lnTo>
+                  <a:lnTo>
+                    <a:pt x="4867754" y="301480"/>
+                  </a:lnTo>
+                  <a:lnTo>
+                    <a:pt x="4797207" y="292451"/>
+                  </a:lnTo>
+                  <a:lnTo>
+                    <a:pt x="4726660" y="283247"/>
+                  </a:lnTo>
+                  <a:lnTo>
+                    <a:pt x="4656113" y="273865"/>
+                  </a:lnTo>
+                  <a:lnTo>
+                    <a:pt x="4585566" y="264301"/>
+                  </a:lnTo>
+                  <a:lnTo>
+                    <a:pt x="4515019" y="254552"/>
+                  </a:lnTo>
+                  <a:lnTo>
+                    <a:pt x="4444471" y="244614"/>
+                  </a:lnTo>
+                  <a:lnTo>
+                    <a:pt x="4373924" y="234483"/>
+                  </a:lnTo>
+                  <a:lnTo>
+                    <a:pt x="4303377" y="224156"/>
+                  </a:lnTo>
+                  <a:lnTo>
+                    <a:pt x="4232830" y="213630"/>
+                  </a:lnTo>
+                  <a:lnTo>
+                    <a:pt x="4162283" y="202899"/>
+                  </a:lnTo>
+                  <a:lnTo>
+                    <a:pt x="4091736" y="191960"/>
+                  </a:lnTo>
+                  <a:lnTo>
+                    <a:pt x="4021188" y="180809"/>
+                  </a:lnTo>
+                  <a:lnTo>
+                    <a:pt x="3950641" y="169443"/>
+                  </a:lnTo>
+                  <a:lnTo>
+                    <a:pt x="3880094" y="157856"/>
+                  </a:lnTo>
+                  <a:lnTo>
+                    <a:pt x="3809547" y="146045"/>
+                  </a:lnTo>
+                  <a:lnTo>
+                    <a:pt x="3739000" y="134005"/>
+                  </a:lnTo>
+                  <a:lnTo>
+                    <a:pt x="3668452" y="121731"/>
+                  </a:lnTo>
+                  <a:lnTo>
+                    <a:pt x="3597905" y="109220"/>
+                  </a:lnTo>
+                  <a:lnTo>
+                    <a:pt x="3527358" y="96467"/>
+                  </a:lnTo>
+                  <a:lnTo>
+                    <a:pt x="3456811" y="83466"/>
+                  </a:lnTo>
+                  <a:lnTo>
+                    <a:pt x="3386264" y="70214"/>
+                  </a:lnTo>
+                  <a:lnTo>
+                    <a:pt x="3315717" y="56704"/>
+                  </a:lnTo>
+                  <a:lnTo>
+                    <a:pt x="3245169" y="42934"/>
+                  </a:lnTo>
+                  <a:lnTo>
+                    <a:pt x="3174622" y="28896"/>
+                  </a:lnTo>
+                  <a:lnTo>
+                    <a:pt x="3104075" y="14586"/>
+                  </a:lnTo>
+                  <a:lnTo>
+                    <a:pt x="3033528" y="0"/>
+                  </a:lnTo>
+                  <a:lnTo>
+                    <a:pt x="2962981" y="9141"/>
+                  </a:lnTo>
+                  <a:lnTo>
+                    <a:pt x="2892434" y="34498"/>
+                  </a:lnTo>
+                  <a:lnTo>
+                    <a:pt x="2821886" y="59007"/>
+                  </a:lnTo>
+                  <a:lnTo>
+                    <a:pt x="2751339" y="82696"/>
+                  </a:lnTo>
+                  <a:lnTo>
+                    <a:pt x="2680792" y="105594"/>
+                  </a:lnTo>
+                  <a:lnTo>
+                    <a:pt x="2610245" y="127725"/>
+                  </a:lnTo>
+                  <a:lnTo>
+                    <a:pt x="2539698" y="149117"/>
+                  </a:lnTo>
+                  <a:lnTo>
+                    <a:pt x="2469151" y="169794"/>
+                  </a:lnTo>
+                  <a:lnTo>
+                    <a:pt x="2398603" y="189779"/>
+                  </a:lnTo>
+                  <a:lnTo>
+                    <a:pt x="2328056" y="209096"/>
+                  </a:lnTo>
+                  <a:lnTo>
+                    <a:pt x="2257509" y="227768"/>
+                  </a:lnTo>
+                  <a:lnTo>
+                    <a:pt x="2186962" y="245815"/>
+                  </a:lnTo>
+                  <a:lnTo>
+                    <a:pt x="2116415" y="263258"/>
+                  </a:lnTo>
+                  <a:lnTo>
+                    <a:pt x="2045868" y="280119"/>
+                  </a:lnTo>
+                  <a:lnTo>
+                    <a:pt x="1975320" y="296415"/>
+                  </a:lnTo>
+                  <a:lnTo>
+                    <a:pt x="1904773" y="312167"/>
+                  </a:lnTo>
+                  <a:lnTo>
+                    <a:pt x="1834226" y="327393"/>
+                  </a:lnTo>
+                  <a:lnTo>
+                    <a:pt x="1763679" y="342109"/>
+                  </a:lnTo>
+                  <a:lnTo>
+                    <a:pt x="1693132" y="356333"/>
+                  </a:lnTo>
+                  <a:lnTo>
+                    <a:pt x="1622584" y="370081"/>
+                  </a:lnTo>
+                  <a:lnTo>
+                    <a:pt x="1552037" y="383370"/>
+                  </a:lnTo>
+                  <a:lnTo>
+                    <a:pt x="1481490" y="396215"/>
+                  </a:lnTo>
+                  <a:lnTo>
+                    <a:pt x="1410943" y="408630"/>
+                  </a:lnTo>
+                  <a:lnTo>
+                    <a:pt x="1340396" y="420630"/>
+                  </a:lnTo>
+                  <a:lnTo>
+                    <a:pt x="1269849" y="432229"/>
+                  </a:lnTo>
+                  <a:lnTo>
+                    <a:pt x="1199301" y="443440"/>
+                  </a:lnTo>
+                  <a:lnTo>
+                    <a:pt x="1128754" y="454276"/>
+                  </a:lnTo>
+                  <a:lnTo>
+                    <a:pt x="1058207" y="464750"/>
+                  </a:lnTo>
+                  <a:lnTo>
+                    <a:pt x="987660" y="474874"/>
+                  </a:lnTo>
+                  <a:lnTo>
+                    <a:pt x="917113" y="484659"/>
+                  </a:lnTo>
+                  <a:lnTo>
+                    <a:pt x="846566" y="494117"/>
+                  </a:lnTo>
+                  <a:lnTo>
+                    <a:pt x="776018" y="503259"/>
+                  </a:lnTo>
+                  <a:lnTo>
+                    <a:pt x="705471" y="512095"/>
+                  </a:lnTo>
+                  <a:lnTo>
+                    <a:pt x="634924" y="520636"/>
+                  </a:lnTo>
+                  <a:lnTo>
+                    <a:pt x="564377" y="528891"/>
+                  </a:lnTo>
+                  <a:lnTo>
+                    <a:pt x="493830" y="536870"/>
+                  </a:lnTo>
+                  <a:lnTo>
+                    <a:pt x="423283" y="544583"/>
+                  </a:lnTo>
+                  <a:lnTo>
+                    <a:pt x="352735" y="552037"/>
+                  </a:lnTo>
+                  <a:lnTo>
+                    <a:pt x="282188" y="559243"/>
+                  </a:lnTo>
+                  <a:lnTo>
+                    <a:pt x="211641" y="566207"/>
+                  </a:lnTo>
+                  <a:lnTo>
+                    <a:pt x="141094" y="572939"/>
+                  </a:lnTo>
+                  <a:lnTo>
+                    <a:pt x="70547" y="579445"/>
+                  </a:lnTo>
+                  <a:lnTo>
+                    <a:pt x="0" y="585734"/>
                   </a:lnTo>
                 </a:path>
               </a:pathLst>
@@ -4331,312 +4331,312 @@
           </p:nvSpPr>
           <p:spPr>
             <a:xfrm>
-              <a:off x="1172049" y="4297379"/>
-              <a:ext cx="7090630" cy="654857"/>
+              <a:off x="1264853" y="4283453"/>
+              <a:ext cx="6984170" cy="610807"/>
             </a:xfrm>
             <a:custGeom>
               <a:avLst/>
               <a:pathLst>
-                <a:path w="7090630" h="654857">
+                <a:path w="6984170" h="610807">
                   <a:moveTo>
-                    <a:pt x="0" y="654857"/>
+                    <a:pt x="0" y="610807"/>
                   </a:moveTo>
                   <a:lnTo>
-                    <a:pt x="71622" y="650358"/>
-                  </a:lnTo>
-                  <a:lnTo>
-                    <a:pt x="143245" y="645825"/>
-                  </a:lnTo>
-                  <a:lnTo>
-                    <a:pt x="214867" y="641258"/>
-                  </a:lnTo>
-                  <a:lnTo>
-                    <a:pt x="286490" y="636658"/>
-                  </a:lnTo>
-                  <a:lnTo>
-                    <a:pt x="358112" y="632023"/>
-                  </a:lnTo>
-                  <a:lnTo>
-                    <a:pt x="429735" y="627354"/>
-                  </a:lnTo>
-                  <a:lnTo>
-                    <a:pt x="501357" y="622650"/>
-                  </a:lnTo>
-                  <a:lnTo>
-                    <a:pt x="572980" y="617911"/>
-                  </a:lnTo>
-                  <a:lnTo>
-                    <a:pt x="644602" y="613137"/>
-                  </a:lnTo>
-                  <a:lnTo>
-                    <a:pt x="716225" y="608328"/>
-                  </a:lnTo>
-                  <a:lnTo>
-                    <a:pt x="787847" y="603482"/>
-                  </a:lnTo>
-                  <a:lnTo>
-                    <a:pt x="859470" y="598601"/>
-                  </a:lnTo>
-                  <a:lnTo>
-                    <a:pt x="931092" y="593683"/>
-                  </a:lnTo>
-                  <a:lnTo>
-                    <a:pt x="1002715" y="588729"/>
-                  </a:lnTo>
-                  <a:lnTo>
-                    <a:pt x="1074337" y="583738"/>
-                  </a:lnTo>
-                  <a:lnTo>
-                    <a:pt x="1145960" y="578710"/>
-                  </a:lnTo>
-                  <a:lnTo>
-                    <a:pt x="1217582" y="573644"/>
-                  </a:lnTo>
-                  <a:lnTo>
-                    <a:pt x="1289205" y="568541"/>
-                  </a:lnTo>
-                  <a:lnTo>
-                    <a:pt x="1360827" y="563400"/>
-                  </a:lnTo>
-                  <a:lnTo>
-                    <a:pt x="1432450" y="558220"/>
-                  </a:lnTo>
-                  <a:lnTo>
-                    <a:pt x="1504073" y="553002"/>
-                  </a:lnTo>
-                  <a:lnTo>
-                    <a:pt x="1575695" y="547745"/>
-                  </a:lnTo>
-                  <a:lnTo>
-                    <a:pt x="1647318" y="542449"/>
-                  </a:lnTo>
-                  <a:lnTo>
-                    <a:pt x="1718940" y="537114"/>
-                  </a:lnTo>
-                  <a:lnTo>
-                    <a:pt x="1790563" y="531739"/>
-                  </a:lnTo>
-                  <a:lnTo>
-                    <a:pt x="1862185" y="526324"/>
-                  </a:lnTo>
-                  <a:lnTo>
-                    <a:pt x="1933808" y="520869"/>
-                  </a:lnTo>
-                  <a:lnTo>
-                    <a:pt x="2005430" y="515373"/>
-                  </a:lnTo>
-                  <a:lnTo>
-                    <a:pt x="2077053" y="509837"/>
-                  </a:lnTo>
-                  <a:lnTo>
-                    <a:pt x="2148675" y="504259"/>
-                  </a:lnTo>
-                  <a:lnTo>
-                    <a:pt x="2220298" y="498640"/>
-                  </a:lnTo>
-                  <a:lnTo>
-                    <a:pt x="2291920" y="492978"/>
-                  </a:lnTo>
-                  <a:lnTo>
-                    <a:pt x="2363543" y="487275"/>
-                  </a:lnTo>
-                  <a:lnTo>
-                    <a:pt x="2435165" y="481530"/>
-                  </a:lnTo>
-                  <a:lnTo>
-                    <a:pt x="2506788" y="475741"/>
-                  </a:lnTo>
-                  <a:lnTo>
-                    <a:pt x="2578410" y="469910"/>
-                  </a:lnTo>
-                  <a:lnTo>
-                    <a:pt x="2650033" y="464035"/>
-                  </a:lnTo>
-                  <a:lnTo>
-                    <a:pt x="2721655" y="458117"/>
-                  </a:lnTo>
-                  <a:lnTo>
-                    <a:pt x="2793278" y="452154"/>
-                  </a:lnTo>
-                  <a:lnTo>
-                    <a:pt x="2864901" y="446148"/>
-                  </a:lnTo>
-                  <a:lnTo>
-                    <a:pt x="2936523" y="440096"/>
-                  </a:lnTo>
-                  <a:lnTo>
-                    <a:pt x="3008146" y="434000"/>
-                  </a:lnTo>
-                  <a:lnTo>
-                    <a:pt x="3079768" y="427858"/>
-                  </a:lnTo>
-                  <a:lnTo>
-                    <a:pt x="3151391" y="421670"/>
-                  </a:lnTo>
-                  <a:lnTo>
-                    <a:pt x="3223013" y="415437"/>
-                  </a:lnTo>
-                  <a:lnTo>
-                    <a:pt x="3294636" y="409157"/>
-                  </a:lnTo>
-                  <a:lnTo>
-                    <a:pt x="3366258" y="402831"/>
-                  </a:lnTo>
-                  <a:lnTo>
-                    <a:pt x="3437881" y="396457"/>
-                  </a:lnTo>
-                  <a:lnTo>
-                    <a:pt x="3509503" y="390036"/>
-                  </a:lnTo>
-                  <a:lnTo>
-                    <a:pt x="3581126" y="383567"/>
-                  </a:lnTo>
-                  <a:lnTo>
-                    <a:pt x="3652748" y="377050"/>
-                  </a:lnTo>
-                  <a:lnTo>
-                    <a:pt x="3724371" y="370485"/>
-                  </a:lnTo>
-                  <a:lnTo>
-                    <a:pt x="3795993" y="363871"/>
-                  </a:lnTo>
-                  <a:lnTo>
-                    <a:pt x="3867616" y="357208"/>
-                  </a:lnTo>
-                  <a:lnTo>
-                    <a:pt x="3939238" y="350495"/>
-                  </a:lnTo>
-                  <a:lnTo>
-                    <a:pt x="4010861" y="343732"/>
-                  </a:lnTo>
-                  <a:lnTo>
-                    <a:pt x="4082483" y="336919"/>
-                  </a:lnTo>
-                  <a:lnTo>
-                    <a:pt x="4154106" y="330055"/>
-                  </a:lnTo>
-                  <a:lnTo>
-                    <a:pt x="4225729" y="323140"/>
-                  </a:lnTo>
-                  <a:lnTo>
-                    <a:pt x="4297351" y="316174"/>
-                  </a:lnTo>
-                  <a:lnTo>
-                    <a:pt x="4368974" y="309156"/>
-                  </a:lnTo>
-                  <a:lnTo>
-                    <a:pt x="4440596" y="302086"/>
-                  </a:lnTo>
-                  <a:lnTo>
-                    <a:pt x="4512219" y="294963"/>
-                  </a:lnTo>
-                  <a:lnTo>
-                    <a:pt x="4583841" y="287787"/>
-                  </a:lnTo>
-                  <a:lnTo>
-                    <a:pt x="4655464" y="280558"/>
-                  </a:lnTo>
-                  <a:lnTo>
-                    <a:pt x="4727086" y="273275"/>
-                  </a:lnTo>
-                  <a:lnTo>
-                    <a:pt x="4798709" y="265938"/>
-                  </a:lnTo>
-                  <a:lnTo>
-                    <a:pt x="4870331" y="258547"/>
-                  </a:lnTo>
-                  <a:lnTo>
-                    <a:pt x="4941954" y="251100"/>
-                  </a:lnTo>
-                  <a:lnTo>
-                    <a:pt x="5013576" y="243598"/>
-                  </a:lnTo>
-                  <a:lnTo>
-                    <a:pt x="5085199" y="236040"/>
-                  </a:lnTo>
-                  <a:lnTo>
-                    <a:pt x="5156821" y="228426"/>
-                  </a:lnTo>
-                  <a:lnTo>
-                    <a:pt x="5228444" y="220756"/>
-                  </a:lnTo>
-                  <a:lnTo>
-                    <a:pt x="5300066" y="213028"/>
-                  </a:lnTo>
-                  <a:lnTo>
-                    <a:pt x="5371689" y="205243"/>
-                  </a:lnTo>
-                  <a:lnTo>
-                    <a:pt x="5443311" y="197400"/>
-                  </a:lnTo>
-                  <a:lnTo>
-                    <a:pt x="5514934" y="189499"/>
-                  </a:lnTo>
-                  <a:lnTo>
-                    <a:pt x="5586557" y="181538"/>
-                  </a:lnTo>
-                  <a:lnTo>
-                    <a:pt x="5658179" y="173519"/>
-                  </a:lnTo>
-                  <a:lnTo>
-                    <a:pt x="5729802" y="165440"/>
-                  </a:lnTo>
-                  <a:lnTo>
-                    <a:pt x="5801424" y="157301"/>
-                  </a:lnTo>
-                  <a:lnTo>
-                    <a:pt x="5873047" y="149102"/>
-                  </a:lnTo>
-                  <a:lnTo>
-                    <a:pt x="5944669" y="140841"/>
-                  </a:lnTo>
-                  <a:lnTo>
-                    <a:pt x="6016292" y="132519"/>
-                  </a:lnTo>
-                  <a:lnTo>
-                    <a:pt x="6087914" y="124135"/>
-                  </a:lnTo>
-                  <a:lnTo>
-                    <a:pt x="6159537" y="115689"/>
-                  </a:lnTo>
-                  <a:lnTo>
-                    <a:pt x="6231159" y="107180"/>
-                  </a:lnTo>
-                  <a:lnTo>
-                    <a:pt x="6302782" y="98608"/>
-                  </a:lnTo>
-                  <a:lnTo>
-                    <a:pt x="6374404" y="89972"/>
-                  </a:lnTo>
-                  <a:lnTo>
-                    <a:pt x="6446027" y="81272"/>
-                  </a:lnTo>
-                  <a:lnTo>
-                    <a:pt x="6517649" y="72507"/>
-                  </a:lnTo>
-                  <a:lnTo>
-                    <a:pt x="6589272" y="63677"/>
-                  </a:lnTo>
-                  <a:lnTo>
-                    <a:pt x="6660894" y="54781"/>
-                  </a:lnTo>
-                  <a:lnTo>
-                    <a:pt x="6732517" y="45819"/>
-                  </a:lnTo>
-                  <a:lnTo>
-                    <a:pt x="6804139" y="36790"/>
-                  </a:lnTo>
-                  <a:lnTo>
-                    <a:pt x="6875762" y="27695"/>
-                  </a:lnTo>
-                  <a:lnTo>
-                    <a:pt x="6947385" y="18531"/>
-                  </a:lnTo>
-                  <a:lnTo>
-                    <a:pt x="7019007" y="9300"/>
-                  </a:lnTo>
-                  <a:lnTo>
-                    <a:pt x="7090630" y="0"/>
+                    <a:pt x="70547" y="606611"/>
+                  </a:lnTo>
+                  <a:lnTo>
+                    <a:pt x="141094" y="602383"/>
+                  </a:lnTo>
+                  <a:lnTo>
+                    <a:pt x="211641" y="598123"/>
+                  </a:lnTo>
+                  <a:lnTo>
+                    <a:pt x="282188" y="593832"/>
+                  </a:lnTo>
+                  <a:lnTo>
+                    <a:pt x="352735" y="589509"/>
+                  </a:lnTo>
+                  <a:lnTo>
+                    <a:pt x="423283" y="585154"/>
+                  </a:lnTo>
+                  <a:lnTo>
+                    <a:pt x="493830" y="580767"/>
+                  </a:lnTo>
+                  <a:lnTo>
+                    <a:pt x="564377" y="576347"/>
+                  </a:lnTo>
+                  <a:lnTo>
+                    <a:pt x="634924" y="571894"/>
+                  </a:lnTo>
+                  <a:lnTo>
+                    <a:pt x="705471" y="567408"/>
+                  </a:lnTo>
+                  <a:lnTo>
+                    <a:pt x="776018" y="562888"/>
+                  </a:lnTo>
+                  <a:lnTo>
+                    <a:pt x="846566" y="558335"/>
+                  </a:lnTo>
+                  <a:lnTo>
+                    <a:pt x="917113" y="553748"/>
+                  </a:lnTo>
+                  <a:lnTo>
+                    <a:pt x="987660" y="549127"/>
+                  </a:lnTo>
+                  <a:lnTo>
+                    <a:pt x="1058207" y="544472"/>
+                  </a:lnTo>
+                  <a:lnTo>
+                    <a:pt x="1128754" y="539782"/>
+                  </a:lnTo>
+                  <a:lnTo>
+                    <a:pt x="1199301" y="535057"/>
+                  </a:lnTo>
+                  <a:lnTo>
+                    <a:pt x="1269849" y="530297"/>
+                  </a:lnTo>
+                  <a:lnTo>
+                    <a:pt x="1340396" y="525502"/>
+                  </a:lnTo>
+                  <a:lnTo>
+                    <a:pt x="1410943" y="520671"/>
+                  </a:lnTo>
+                  <a:lnTo>
+                    <a:pt x="1481490" y="515804"/>
+                  </a:lnTo>
+                  <a:lnTo>
+                    <a:pt x="1552037" y="510900"/>
+                  </a:lnTo>
+                  <a:lnTo>
+                    <a:pt x="1622584" y="505961"/>
+                  </a:lnTo>
+                  <a:lnTo>
+                    <a:pt x="1693132" y="500984"/>
+                  </a:lnTo>
+                  <a:lnTo>
+                    <a:pt x="1763679" y="495971"/>
+                  </a:lnTo>
+                  <a:lnTo>
+                    <a:pt x="1834226" y="490920"/>
+                  </a:lnTo>
+                  <a:lnTo>
+                    <a:pt x="1904773" y="485832"/>
+                  </a:lnTo>
+                  <a:lnTo>
+                    <a:pt x="1975320" y="480706"/>
+                  </a:lnTo>
+                  <a:lnTo>
+                    <a:pt x="2045868" y="475542"/>
+                  </a:lnTo>
+                  <a:lnTo>
+                    <a:pt x="2116415" y="470339"/>
+                  </a:lnTo>
+                  <a:lnTo>
+                    <a:pt x="2186962" y="465098"/>
+                  </a:lnTo>
+                  <a:lnTo>
+                    <a:pt x="2257509" y="459818"/>
+                  </a:lnTo>
+                  <a:lnTo>
+                    <a:pt x="2328056" y="454498"/>
+                  </a:lnTo>
+                  <a:lnTo>
+                    <a:pt x="2398603" y="449139"/>
+                  </a:lnTo>
+                  <a:lnTo>
+                    <a:pt x="2469151" y="443740"/>
+                  </a:lnTo>
+                  <a:lnTo>
+                    <a:pt x="2539698" y="438301"/>
+                  </a:lnTo>
+                  <a:lnTo>
+                    <a:pt x="2610245" y="432821"/>
+                  </a:lnTo>
+                  <a:lnTo>
+                    <a:pt x="2680792" y="427301"/>
+                  </a:lnTo>
+                  <a:lnTo>
+                    <a:pt x="2751339" y="421740"/>
+                  </a:lnTo>
+                  <a:lnTo>
+                    <a:pt x="2821886" y="416137"/>
+                  </a:lnTo>
+                  <a:lnTo>
+                    <a:pt x="2892434" y="410492"/>
+                  </a:lnTo>
+                  <a:lnTo>
+                    <a:pt x="2962981" y="404806"/>
+                  </a:lnTo>
+                  <a:lnTo>
+                    <a:pt x="3033528" y="399077"/>
+                  </a:lnTo>
+                  <a:lnTo>
+                    <a:pt x="3104075" y="393306"/>
+                  </a:lnTo>
+                  <a:lnTo>
+                    <a:pt x="3174622" y="387492"/>
+                  </a:lnTo>
+                  <a:lnTo>
+                    <a:pt x="3245169" y="381635"/>
+                  </a:lnTo>
+                  <a:lnTo>
+                    <a:pt x="3315717" y="375734"/>
+                  </a:lnTo>
+                  <a:lnTo>
+                    <a:pt x="3386264" y="369789"/>
+                  </a:lnTo>
+                  <a:lnTo>
+                    <a:pt x="3456811" y="363800"/>
+                  </a:lnTo>
+                  <a:lnTo>
+                    <a:pt x="3527358" y="357766"/>
+                  </a:lnTo>
+                  <a:lnTo>
+                    <a:pt x="3597905" y="351688"/>
+                  </a:lnTo>
+                  <a:lnTo>
+                    <a:pt x="3668452" y="345564"/>
+                  </a:lnTo>
+                  <a:lnTo>
+                    <a:pt x="3739000" y="339395"/>
+                  </a:lnTo>
+                  <a:lnTo>
+                    <a:pt x="3809547" y="333180"/>
+                  </a:lnTo>
+                  <a:lnTo>
+                    <a:pt x="3880094" y="326918"/>
+                  </a:lnTo>
+                  <a:lnTo>
+                    <a:pt x="3950641" y="320610"/>
+                  </a:lnTo>
+                  <a:lnTo>
+                    <a:pt x="4021188" y="314256"/>
+                  </a:lnTo>
+                  <a:lnTo>
+                    <a:pt x="4091736" y="307853"/>
+                  </a:lnTo>
+                  <a:lnTo>
+                    <a:pt x="4162283" y="301404"/>
+                  </a:lnTo>
+                  <a:lnTo>
+                    <a:pt x="4232830" y="294906"/>
+                  </a:lnTo>
+                  <a:lnTo>
+                    <a:pt x="4303377" y="288360"/>
+                  </a:lnTo>
+                  <a:lnTo>
+                    <a:pt x="4373924" y="281766"/>
+                  </a:lnTo>
+                  <a:lnTo>
+                    <a:pt x="4444471" y="275122"/>
+                  </a:lnTo>
+                  <a:lnTo>
+                    <a:pt x="4515019" y="268429"/>
+                  </a:lnTo>
+                  <a:lnTo>
+                    <a:pt x="4585566" y="261686"/>
+                  </a:lnTo>
+                  <a:lnTo>
+                    <a:pt x="4656113" y="254893"/>
+                  </a:lnTo>
+                  <a:lnTo>
+                    <a:pt x="4726660" y="248049"/>
+                  </a:lnTo>
+                  <a:lnTo>
+                    <a:pt x="4797207" y="241155"/>
+                  </a:lnTo>
+                  <a:lnTo>
+                    <a:pt x="4867754" y="234209"/>
+                  </a:lnTo>
+                  <a:lnTo>
+                    <a:pt x="4938302" y="227212"/>
+                  </a:lnTo>
+                  <a:lnTo>
+                    <a:pt x="5008849" y="220163"/>
+                  </a:lnTo>
+                  <a:lnTo>
+                    <a:pt x="5079396" y="213061"/>
+                  </a:lnTo>
+                  <a:lnTo>
+                    <a:pt x="5149943" y="205906"/>
+                  </a:lnTo>
+                  <a:lnTo>
+                    <a:pt x="5220490" y="198698"/>
+                  </a:lnTo>
+                  <a:lnTo>
+                    <a:pt x="5291037" y="191437"/>
+                  </a:lnTo>
+                  <a:lnTo>
+                    <a:pt x="5361585" y="184121"/>
+                  </a:lnTo>
+                  <a:lnTo>
+                    <a:pt x="5432132" y="176752"/>
+                  </a:lnTo>
+                  <a:lnTo>
+                    <a:pt x="5502679" y="169327"/>
+                  </a:lnTo>
+                  <a:lnTo>
+                    <a:pt x="5573226" y="161847"/>
+                  </a:lnTo>
+                  <a:lnTo>
+                    <a:pt x="5643773" y="154312"/>
+                  </a:lnTo>
+                  <a:lnTo>
+                    <a:pt x="5714320" y="146720"/>
+                  </a:lnTo>
+                  <a:lnTo>
+                    <a:pt x="5784868" y="139072"/>
+                  </a:lnTo>
+                  <a:lnTo>
+                    <a:pt x="5855415" y="131367"/>
+                  </a:lnTo>
+                  <a:lnTo>
+                    <a:pt x="5925962" y="123605"/>
+                  </a:lnTo>
+                  <a:lnTo>
+                    <a:pt x="5996509" y="115785"/>
+                  </a:lnTo>
+                  <a:lnTo>
+                    <a:pt x="6067056" y="107907"/>
+                  </a:lnTo>
+                  <a:lnTo>
+                    <a:pt x="6137604" y="99971"/>
+                  </a:lnTo>
+                  <a:lnTo>
+                    <a:pt x="6208151" y="91975"/>
+                  </a:lnTo>
+                  <a:lnTo>
+                    <a:pt x="6278698" y="83920"/>
+                  </a:lnTo>
+                  <a:lnTo>
+                    <a:pt x="6349245" y="75805"/>
+                  </a:lnTo>
+                  <a:lnTo>
+                    <a:pt x="6419792" y="67630"/>
+                  </a:lnTo>
+                  <a:lnTo>
+                    <a:pt x="6490339" y="59393"/>
+                  </a:lnTo>
+                  <a:lnTo>
+                    <a:pt x="6560887" y="51096"/>
+                  </a:lnTo>
+                  <a:lnTo>
+                    <a:pt x="6631434" y="42737"/>
+                  </a:lnTo>
+                  <a:lnTo>
+                    <a:pt x="6701981" y="34316"/>
+                  </a:lnTo>
+                  <a:lnTo>
+                    <a:pt x="6772528" y="25832"/>
+                  </a:lnTo>
+                  <a:lnTo>
+                    <a:pt x="6843075" y="17285"/>
+                  </a:lnTo>
+                  <a:lnTo>
+                    <a:pt x="6913622" y="8674"/>
+                  </a:lnTo>
+                  <a:lnTo>
+                    <a:pt x="6984170" y="0"/>
                   </a:lnTo>
                 </a:path>
               </a:pathLst>
@@ -4665,21 +4665,21 @@
           </p:nvSpPr>
           <p:spPr>
             <a:xfrm>
-              <a:off x="817517" y="4727786"/>
-              <a:ext cx="7799693" cy="0"/>
+              <a:off x="915645" y="4684908"/>
+              <a:ext cx="7682587" cy="0"/>
             </a:xfrm>
             <a:custGeom>
               <a:avLst/>
               <a:pathLst>
-                <a:path w="7799693" h="0">
+                <a:path w="7682587" h="0">
                   <a:moveTo>
                     <a:pt x="0" y="0"/>
                   </a:moveTo>
                   <a:lnTo>
-                    <a:pt x="7799693" y="0"/>
-                  </a:lnTo>
-                  <a:lnTo>
-                    <a:pt x="7799693" y="0"/>
+                    <a:pt x="7682587" y="0"/>
+                  </a:lnTo>
+                  <a:lnTo>
+                    <a:pt x="7682587" y="0"/>
                   </a:lnTo>
                 </a:path>
               </a:pathLst>
@@ -4708,15 +4708,15 @@
           </p:nvSpPr>
           <p:spPr>
             <a:xfrm>
-              <a:off x="4222163" y="2073503"/>
-              <a:ext cx="0" cy="3649639"/>
+              <a:off x="4269172" y="2209169"/>
+              <a:ext cx="0" cy="3404141"/>
             </a:xfrm>
             <a:custGeom>
               <a:avLst/>
               <a:pathLst>
-                <a:path w="0" h="3649639">
+                <a:path w="0" h="3404141">
                   <a:moveTo>
-                    <a:pt x="0" y="3649639"/>
+                    <a:pt x="0" y="3404141"/>
                   </a:moveTo>
                   <a:lnTo>
                     <a:pt x="0" y="0"/>
@@ -4751,8 +4751,8 @@
           </p:nvSpPr>
           <p:spPr>
             <a:xfrm>
-              <a:off x="692708" y="5517199"/>
-              <a:ext cx="62179" cy="80101"/>
+              <a:off x="756929" y="5407599"/>
+              <a:ext cx="79004" cy="101955"/>
             </a:xfrm>
             <a:prstGeom prst="rect">
               <a:avLst/>
@@ -4765,7 +4765,7 @@
             <a:p>
               <a:pPr algn="l" marL="0" marR="0" indent="0">
                 <a:lnSpc>
-                  <a:spcPts val="880"/>
+                  <a:spcPts val="1120"/>
                 </a:lnSpc>
                 <a:spcBef>
                   <a:spcPts val="0"/>
@@ -4775,7 +4775,7 @@
                 </a:spcAft>
               </a:pPr>
               <a:r>
-                <a:rPr sz="880">
+                <a:rPr sz="1120">
                   <a:solidFill>
                     <a:srgbClr val="4D4D4D">
                       <a:alpha val="100000"/>
@@ -4797,8 +4797,8 @@
           </p:nvSpPr>
           <p:spPr>
             <a:xfrm>
-              <a:off x="692708" y="4687735"/>
-              <a:ext cx="62179" cy="80101"/>
+              <a:off x="756929" y="4633931"/>
+              <a:ext cx="79004" cy="101955"/>
             </a:xfrm>
             <a:prstGeom prst="rect">
               <a:avLst/>
@@ -4811,7 +4811,7 @@
             <a:p>
               <a:pPr algn="l" marL="0" marR="0" indent="0">
                 <a:lnSpc>
-                  <a:spcPts val="880"/>
+                  <a:spcPts val="1120"/>
                 </a:lnSpc>
                 <a:spcBef>
                   <a:spcPts val="0"/>
@@ -4821,7 +4821,7 @@
                 </a:spcAft>
               </a:pPr>
               <a:r>
-                <a:rPr sz="880">
+                <a:rPr sz="1120">
                   <a:solidFill>
                     <a:srgbClr val="4D4D4D">
                       <a:alpha val="100000"/>
@@ -4843,8 +4843,8 @@
           </p:nvSpPr>
           <p:spPr>
             <a:xfrm>
-              <a:off x="692708" y="3858272"/>
-              <a:ext cx="62179" cy="80101"/>
+              <a:off x="756929" y="3860262"/>
+              <a:ext cx="79004" cy="101955"/>
             </a:xfrm>
             <a:prstGeom prst="rect">
               <a:avLst/>
@@ -4857,7 +4857,7 @@
             <a:p>
               <a:pPr algn="l" marL="0" marR="0" indent="0">
                 <a:lnSpc>
-                  <a:spcPts val="880"/>
+                  <a:spcPts val="1120"/>
                 </a:lnSpc>
                 <a:spcBef>
                   <a:spcPts val="0"/>
@@ -4867,7 +4867,7 @@
                 </a:spcAft>
               </a:pPr>
               <a:r>
-                <a:rPr sz="880">
+                <a:rPr sz="1120">
                   <a:solidFill>
                     <a:srgbClr val="4D4D4D">
                       <a:alpha val="100000"/>
@@ -4889,8 +4889,8 @@
           </p:nvSpPr>
           <p:spPr>
             <a:xfrm>
-              <a:off x="692708" y="3028808"/>
-              <a:ext cx="62179" cy="80101"/>
+              <a:off x="756929" y="3086593"/>
+              <a:ext cx="79004" cy="101955"/>
             </a:xfrm>
             <a:prstGeom prst="rect">
               <a:avLst/>
@@ -4903,7 +4903,7 @@
             <a:p>
               <a:pPr algn="l" marL="0" marR="0" indent="0">
                 <a:lnSpc>
-                  <a:spcPts val="880"/>
+                  <a:spcPts val="1120"/>
                 </a:lnSpc>
                 <a:spcBef>
                   <a:spcPts val="0"/>
@@ -4913,7 +4913,7 @@
                 </a:spcAft>
               </a:pPr>
               <a:r>
-                <a:rPr sz="880">
+                <a:rPr sz="1120">
                   <a:solidFill>
                     <a:srgbClr val="4D4D4D">
                       <a:alpha val="100000"/>
@@ -4935,8 +4935,8 @@
           </p:nvSpPr>
           <p:spPr>
             <a:xfrm>
-              <a:off x="692708" y="2199345"/>
-              <a:ext cx="62179" cy="80101"/>
+              <a:off x="756929" y="2312925"/>
+              <a:ext cx="79004" cy="101955"/>
             </a:xfrm>
             <a:prstGeom prst="rect">
               <a:avLst/>
@@ -4949,7 +4949,7 @@
             <a:p>
               <a:pPr algn="l" marL="0" marR="0" indent="0">
                 <a:lnSpc>
-                  <a:spcPts val="880"/>
+                  <a:spcPts val="1120"/>
                 </a:lnSpc>
                 <a:spcBef>
                   <a:spcPts val="0"/>
@@ -4959,7 +4959,7 @@
                 </a:spcAft>
               </a:pPr>
               <a:r>
-                <a:rPr sz="880">
+                <a:rPr sz="1120">
                   <a:solidFill>
                     <a:srgbClr val="4D4D4D">
                       <a:alpha val="100000"/>
@@ -4981,8 +4981,8 @@
           </p:nvSpPr>
           <p:spPr>
             <a:xfrm>
-              <a:off x="1328653" y="5785772"/>
-              <a:ext cx="223753" cy="80101"/>
+              <a:off x="1387159" y="5693022"/>
+              <a:ext cx="284286" cy="101955"/>
             </a:xfrm>
             <a:prstGeom prst="rect">
               <a:avLst/>
@@ -4995,7 +4995,7 @@
             <a:p>
               <a:pPr algn="l" marL="0" marR="0" indent="0">
                 <a:lnSpc>
-                  <a:spcPts val="880"/>
+                  <a:spcPts val="1120"/>
                 </a:lnSpc>
                 <a:spcBef>
                   <a:spcPts val="0"/>
@@ -5005,7 +5005,7 @@
                 </a:spcAft>
               </a:pPr>
               <a:r>
-                <a:rPr sz="880">
+                <a:rPr sz="1120">
                   <a:solidFill>
                     <a:srgbClr val="4D4D4D">
                       <a:alpha val="100000"/>
@@ -5027,8 +5027,8 @@
           </p:nvSpPr>
           <p:spPr>
             <a:xfrm>
-              <a:off x="2724172" y="5785772"/>
-              <a:ext cx="161574" cy="80101"/>
+              <a:off x="2770605" y="5693022"/>
+              <a:ext cx="205282" cy="101955"/>
             </a:xfrm>
             <a:prstGeom prst="rect">
               <a:avLst/>
@@ -5041,7 +5041,7 @@
             <a:p>
               <a:pPr algn="l" marL="0" marR="0" indent="0">
                 <a:lnSpc>
-                  <a:spcPts val="880"/>
+                  <a:spcPts val="1120"/>
                 </a:lnSpc>
                 <a:spcBef>
                   <a:spcPts val="0"/>
@@ -5051,7 +5051,7 @@
                 </a:spcAft>
               </a:pPr>
               <a:r>
-                <a:rPr sz="880">
+                <a:rPr sz="1120">
                   <a:solidFill>
                     <a:srgbClr val="4D4D4D">
                       <a:alpha val="100000"/>
@@ -5073,8 +5073,8 @@
           </p:nvSpPr>
           <p:spPr>
             <a:xfrm>
-              <a:off x="4138300" y="5785772"/>
-              <a:ext cx="62179" cy="80101"/>
+              <a:off x="4177689" y="5693022"/>
+              <a:ext cx="79004" cy="101955"/>
             </a:xfrm>
             <a:prstGeom prst="rect">
               <a:avLst/>
@@ -5087,7 +5087,7 @@
             <a:p>
               <a:pPr algn="l" marL="0" marR="0" indent="0">
                 <a:lnSpc>
-                  <a:spcPts val="880"/>
+                  <a:spcPts val="1120"/>
                 </a:lnSpc>
                 <a:spcBef>
                   <a:spcPts val="0"/>
@@ -5097,7 +5097,7 @@
                 </a:spcAft>
               </a:pPr>
               <a:r>
-                <a:rPr sz="880">
+                <a:rPr sz="1120">
                   <a:solidFill>
                     <a:srgbClr val="4D4D4D">
                       <a:alpha val="100000"/>
@@ -5119,8 +5119,8 @@
           </p:nvSpPr>
           <p:spPr>
             <a:xfrm>
-              <a:off x="5471640" y="5785772"/>
-              <a:ext cx="124358" cy="80101"/>
+              <a:off x="5482131" y="5693022"/>
+              <a:ext cx="158008" cy="101955"/>
             </a:xfrm>
             <a:prstGeom prst="rect">
               <a:avLst/>
@@ -5133,7 +5133,7 @@
             <a:p>
               <a:pPr algn="l" marL="0" marR="0" indent="0">
                 <a:lnSpc>
-                  <a:spcPts val="880"/>
+                  <a:spcPts val="1120"/>
                 </a:lnSpc>
                 <a:spcBef>
                   <a:spcPts val="0"/>
@@ -5143,7 +5143,7 @@
                 </a:spcAft>
               </a:pPr>
               <a:r>
-                <a:rPr sz="880">
+                <a:rPr sz="1120">
                   <a:solidFill>
                     <a:srgbClr val="4D4D4D">
                       <a:alpha val="100000"/>
@@ -5165,8 +5165,8 @@
           </p:nvSpPr>
           <p:spPr>
             <a:xfrm>
-              <a:off x="6804980" y="5785772"/>
-              <a:ext cx="186537" cy="80101"/>
+              <a:off x="6786573" y="5693022"/>
+              <a:ext cx="237012" cy="101955"/>
             </a:xfrm>
             <a:prstGeom prst="rect">
               <a:avLst/>
@@ -5179,7 +5179,7 @@
             <a:p>
               <a:pPr algn="l" marL="0" marR="0" indent="0">
                 <a:lnSpc>
-                  <a:spcPts val="880"/>
+                  <a:spcPts val="1120"/>
                 </a:lnSpc>
                 <a:spcBef>
                   <a:spcPts val="0"/>
@@ -5189,7 +5189,7 @@
                 </a:spcAft>
               </a:pPr>
               <a:r>
-                <a:rPr sz="880">
+                <a:rPr sz="1120">
                   <a:solidFill>
                     <a:srgbClr val="4D4D4D">
                       <a:alpha val="100000"/>
@@ -5211,8 +5211,8 @@
           </p:nvSpPr>
           <p:spPr>
             <a:xfrm>
-              <a:off x="8169410" y="5785772"/>
-              <a:ext cx="186537" cy="80101"/>
+              <a:off x="8130517" y="5693022"/>
+              <a:ext cx="237012" cy="101955"/>
             </a:xfrm>
             <a:prstGeom prst="rect">
               <a:avLst/>
@@ -5225,7 +5225,7 @@
             <a:p>
               <a:pPr algn="l" marL="0" marR="0" indent="0">
                 <a:lnSpc>
-                  <a:spcPts val="880"/>
+                  <a:spcPts val="1120"/>
                 </a:lnSpc>
                 <a:spcBef>
                   <a:spcPts val="0"/>
@@ -5235,7 +5235,7 @@
                 </a:spcAft>
               </a:pPr>
               <a:r>
-                <a:rPr sz="880">
+                <a:rPr sz="1120">
                   <a:solidFill>
                     <a:srgbClr val="4D4D4D">
                       <a:alpha val="100000"/>
@@ -5257,8 +5257,8 @@
           </p:nvSpPr>
           <p:spPr>
             <a:xfrm>
-              <a:off x="3987536" y="5925448"/>
-              <a:ext cx="1459656" cy="100218"/>
+              <a:off x="3828319" y="5870717"/>
+              <a:ext cx="1857237" cy="127558"/>
             </a:xfrm>
             <a:prstGeom prst="rect">
               <a:avLst/>
@@ -5271,7 +5271,7 @@
             <a:p>
               <a:pPr algn="l" marL="0" marR="0" indent="0">
                 <a:lnSpc>
-                  <a:spcPts val="1100"/>
+                  <a:spcPts val="1400"/>
                 </a:lnSpc>
                 <a:spcBef>
                   <a:spcPts val="0"/>
@@ -5281,7 +5281,7 @@
                 </a:spcAft>
               </a:pPr>
               <a:r>
-                <a:rPr sz="1100">
+                <a:rPr sz="1400">
                   <a:solidFill>
                     <a:srgbClr val="000000">
                       <a:alpha val="100000"/>
@@ -5303,8 +5303,8 @@
           </p:nvSpPr>
           <p:spPr>
             <a:xfrm rot="-5400000">
-              <a:off x="68446" y="3848213"/>
-              <a:ext cx="1016904" cy="100218"/>
+              <a:off x="-37527" y="3847460"/>
+              <a:ext cx="1294150" cy="127558"/>
             </a:xfrm>
             <a:prstGeom prst="rect">
               <a:avLst/>
@@ -5317,7 +5317,7 @@
             <a:p>
               <a:pPr algn="l" marL="0" marR="0" indent="0">
                 <a:lnSpc>
-                  <a:spcPts val="1100"/>
+                  <a:spcPts val="1400"/>
                 </a:lnSpc>
                 <a:spcBef>
                   <a:spcPts val="0"/>
@@ -5327,7 +5327,7 @@
                 </a:spcAft>
               </a:pPr>
               <a:r>
-                <a:rPr sz="1100">
+                <a:rPr sz="1400">
                   <a:solidFill>
                     <a:srgbClr val="000000">
                       <a:alpha val="100000"/>
@@ -5349,8 +5349,8 @@
           </p:nvSpPr>
           <p:spPr>
             <a:xfrm>
-              <a:off x="817517" y="1896563"/>
-              <a:ext cx="4433376" cy="82021"/>
+              <a:off x="915645" y="1977589"/>
+              <a:ext cx="5912784" cy="109362"/>
             </a:xfrm>
             <a:prstGeom prst="rect">
               <a:avLst/>
@@ -5363,7 +5363,7 @@
             <a:p>
               <a:pPr algn="l" marL="0" marR="0" indent="0">
                 <a:lnSpc>
-                  <a:spcPts val="900"/>
+                  <a:spcPts val="1200"/>
                 </a:lnSpc>
                 <a:spcBef>
                   <a:spcPts val="0"/>
@@ -5373,7 +5373,7 @@
                 </a:spcAft>
               </a:pPr>
               <a:r>
-                <a:rPr sz="900">
+                <a:rPr sz="1200">
                   <a:solidFill>
                     <a:srgbClr val="404040">
                       <a:alpha val="100000"/>
@@ -5395,8 +5395,8 @@
           </p:nvSpPr>
           <p:spPr>
             <a:xfrm>
-              <a:off x="817517" y="1669789"/>
-              <a:ext cx="2821289" cy="120152"/>
+              <a:off x="915645" y="1688767"/>
+              <a:ext cx="3591763" cy="153070"/>
             </a:xfrm>
             <a:prstGeom prst="rect">
               <a:avLst/>
@@ -5409,7 +5409,7 @@
             <a:p>
               <a:pPr algn="l" marL="0" marR="0" indent="0">
                 <a:lnSpc>
-                  <a:spcPts val="1320"/>
+                  <a:spcPts val="1680"/>
                 </a:lnSpc>
                 <a:spcBef>
                   <a:spcPts val="0"/>
@@ -5419,7 +5419,7 @@
                 </a:spcAft>
               </a:pPr>
               <a:r>
-                <a:rPr sz="1320">
+                <a:rPr sz="1680">
                   <a:solidFill>
                     <a:srgbClr val="000000">
                       <a:alpha val="100000"/>
